--- a/presentation/slides_main.pptx
+++ b/presentation/slides_main.pptx
@@ -5,7 +5,7 @@
     <p:sldMasterId id="2147483648" r:id="rId1"/>
   </p:sldMasterIdLst>
   <p:notesMasterIdLst>
-    <p:notesMasterId r:id="rId22"/>
+    <p:notesMasterId r:id="rId23"/>
   </p:notesMasterIdLst>
   <p:sldIdLst>
     <p:sldId id="300" r:id="rId2"/>
@@ -27,7 +27,8 @@
     <p:sldId id="316" r:id="rId18"/>
     <p:sldId id="317" r:id="rId19"/>
     <p:sldId id="318" r:id="rId20"/>
-    <p:sldId id="319" r:id="rId21"/>
+    <p:sldId id="320" r:id="rId21"/>
+    <p:sldId id="319" r:id="rId22"/>
   </p:sldIdLst>
   <p:sldSz cx="18288000" cy="10287000"/>
   <p:notesSz cx="10287000" cy="18288000"/>
@@ -605,7 +606,7 @@
           <a:blip r:embed="rId2">
             <a:extLst>
               <a:ext uri="{96DAC541-7B7A-43D3-8B79-37D633B846F1}">
-                <asvg:svgBlip xmlns="" xmlns:asvg="http://schemas.microsoft.com/office/drawing/2016/SVG/main" r:embed="rId4"/>
+                <asvg:svgBlip xmlns:asvg="http://schemas.microsoft.com/office/drawing/2016/SVG/main" xmlns="" r:embed="rId4"/>
               </a:ext>
             </a:extLst>
           </a:blip>
@@ -703,7 +704,7 @@
           <a:blip r:embed="rId8">
             <a:extLst>
               <a:ext uri="{96DAC541-7B7A-43D3-8B79-37D633B846F1}">
-                <asvg:svgBlip xmlns="" xmlns:asvg="http://schemas.microsoft.com/office/drawing/2016/SVG/main" r:embed="rId9"/>
+                <asvg:svgBlip xmlns:asvg="http://schemas.microsoft.com/office/drawing/2016/SVG/main" xmlns="" r:embed="rId9"/>
               </a:ext>
             </a:extLst>
           </a:blip>
@@ -2072,7 +2073,18 @@
                 <a:ea typeface="Montserrat SemiBold" pitchFamily="34" charset="-122"/>
                 <a:cs typeface="Montserrat SemiBold" pitchFamily="34" charset="-120"/>
               </a:rPr>
-              <a:t>  based on </a:t>
+              <a:t>  </a:t>
+            </a:r>
+            <a:r>
+              <a:rPr lang="en-US" sz="1900" b="1" dirty="0" smtClean="0">
+                <a:solidFill>
+                  <a:srgbClr val="FFFFFF"/>
+                </a:solidFill>
+                <a:latin typeface="Montserrat SemiBold" pitchFamily="34" charset="0"/>
+                <a:ea typeface="Montserrat SemiBold" pitchFamily="34" charset="-122"/>
+                <a:cs typeface="Montserrat SemiBold" pitchFamily="34" charset="-120"/>
+              </a:rPr>
+              <a:t>as modified </a:t>
             </a:r>
             <a:r>
               <a:rPr lang="en-US" sz="1900" b="1" dirty="0" err="1" smtClean="0">
@@ -3355,14 +3367,6 @@
               </a:rPr>
               <a:t> container. Virtualized using QEMU.</a:t>
             </a:r>
-            <a:endParaRPr lang="en-US" sz="1900" dirty="0">
-              <a:solidFill>
-                <a:srgbClr val="FFFFFF"/>
-              </a:solidFill>
-              <a:latin typeface="IBM Plex Sans Medium" pitchFamily="34" charset="0"/>
-              <a:ea typeface="IBM Plex Sans Medium" pitchFamily="34" charset="-122"/>
-              <a:cs typeface="IBM Plex Sans Medium" pitchFamily="34" charset="-120"/>
-            </a:endParaRPr>
           </a:p>
         </p:txBody>
       </p:sp>
@@ -4213,7 +4217,7 @@
               <a:buNone/>
             </a:pPr>
             <a:r>
-              <a:rPr lang="en-US" sz="1750" b="1" dirty="0">
+              <a:rPr lang="en-US" sz="1750" b="1" dirty="0" smtClean="0">
                 <a:solidFill>
                   <a:srgbClr val="2E8B16"/>
                 </a:solidFill>
@@ -4221,7 +4225,7 @@
                 <a:ea typeface="Montserrat SemiBold" pitchFamily="34" charset="-122"/>
                 <a:cs typeface="Montserrat SemiBold" pitchFamily="34" charset="-120"/>
               </a:rPr>
-              <a:t>Methodology: </a:t>
+              <a:t>Set up: </a:t>
             </a:r>
             <a:r>
               <a:rPr lang="en-US" sz="1750" dirty="0">
@@ -4831,14 +4835,10 @@
           <a:bodyPr wrap="square" lIns="0" tIns="0" rIns="0" bIns="0" rtlCol="0" anchor="t"/>
           <a:lstStyle/>
           <a:p>
-            <a:pPr marL="0" indent="0" algn="l">
+            <a:pPr>
               <a:lnSpc>
                 <a:spcPts val="1900"/>
               </a:lnSpc>
-              <a:spcAft>
-                <a:spcPts val="0"/>
-              </a:spcAft>
-              <a:buNone/>
             </a:pPr>
             <a:r>
               <a:rPr lang="en-US" sz="1500" dirty="0">
@@ -4849,18 +4849,7 @@
                 <a:ea typeface="IBM Plex Sans Regular" pitchFamily="34" charset="-122"/>
                 <a:cs typeface="IBM Plex Sans Regular" pitchFamily="34" charset="-120"/>
               </a:rPr>
-              <a:t>Results are not statistically </a:t>
-            </a:r>
-            <a:r>
-              <a:rPr lang="en-US" sz="1500" dirty="0" smtClean="0">
-                <a:solidFill>
-                  <a:srgbClr val="9AA3AB"/>
-                </a:solidFill>
-                <a:latin typeface="IBM Plex Sans Regular" pitchFamily="34" charset="0"/>
-                <a:ea typeface="IBM Plex Sans Regular" pitchFamily="34" charset="-122"/>
-                <a:cs typeface="IBM Plex Sans Regular" pitchFamily="34" charset="-120"/>
-              </a:rPr>
-              <a:t>confirmed.</a:t>
+              <a:t>Statistical validity has not been verified</a:t>
             </a:r>
             <a:endParaRPr lang="en-US" sz="1500" dirty="0">
               <a:solidFill>
@@ -5045,14 +5034,10 @@
           <a:bodyPr wrap="square" lIns="520000" tIns="364000" rIns="520000" bIns="364000" rtlCol="0" anchor="ctr"/>
           <a:lstStyle/>
           <a:p>
-            <a:pPr marL="0" indent="0" algn="l">
+            <a:pPr>
               <a:lnSpc>
                 <a:spcPts val="2700"/>
               </a:lnSpc>
-              <a:spcAft>
-                <a:spcPts val="0"/>
-              </a:spcAft>
-              <a:buNone/>
             </a:pPr>
             <a:r>
               <a:rPr lang="en-US" sz="2200" b="1" dirty="0">
@@ -5063,8 +5048,38 @@
                 <a:ea typeface="Montserrat SemiBold" pitchFamily="34" charset="-122"/>
                 <a:cs typeface="Montserrat SemiBold" pitchFamily="34" charset="-120"/>
               </a:rPr>
-              <a:t>4 of 5 requirements met</a:t>
-            </a:r>
+              <a:t>4 of 5 requirements </a:t>
+            </a:r>
+            <a:r>
+              <a:rPr lang="en-US" sz="2200" b="1" dirty="0" smtClean="0">
+                <a:solidFill>
+                  <a:srgbClr val="FFFFFF"/>
+                </a:solidFill>
+                <a:latin typeface="Montserrat SemiBold" pitchFamily="34" charset="0"/>
+                <a:ea typeface="Montserrat SemiBold" pitchFamily="34" charset="-122"/>
+                <a:cs typeface="Montserrat SemiBold" pitchFamily="34" charset="-120"/>
+              </a:rPr>
+              <a:t>met</a:t>
+            </a:r>
+            <a:r>
+              <a:rPr lang="en-US" sz="2200" b="1" dirty="0">
+                <a:solidFill>
+                  <a:srgbClr val="FFFFFF"/>
+                </a:solidFill>
+                <a:latin typeface="Montserrat SemiBold" pitchFamily="34" charset="0"/>
+                <a:ea typeface="Montserrat SemiBold" pitchFamily="34" charset="-122"/>
+                <a:cs typeface="Montserrat SemiBold" pitchFamily="34" charset="-120"/>
+              </a:rPr>
+              <a:t>; Consistent with the considered scenario </a:t>
+            </a:r>
+            <a:endParaRPr lang="en-US" sz="2200" b="1" dirty="0">
+              <a:solidFill>
+                <a:srgbClr val="FFFFFF"/>
+              </a:solidFill>
+              <a:latin typeface="Montserrat SemiBold" pitchFamily="34" charset="0"/>
+              <a:ea typeface="Montserrat SemiBold" pitchFamily="34" charset="-122"/>
+              <a:cs typeface="Montserrat SemiBold" pitchFamily="34" charset="-120"/>
+            </a:endParaRPr>
           </a:p>
         </p:txBody>
       </p:sp>
@@ -5483,6 +5498,35 @@
           <a:bodyPr wrap="square" lIns="600000" tIns="420000" rIns="600000" bIns="420000" rtlCol="0" anchor="ctr"/>
           <a:lstStyle/>
           <a:p>
+            <a:pPr algn="l">
+              <a:lnSpc>
+                <a:spcPts val="2600"/>
+              </a:lnSpc>
+              <a:spcAft>
+                <a:spcPts val="500"/>
+              </a:spcAft>
+            </a:pPr>
+            <a:r>
+              <a:rPr lang="en-US" sz="2000" dirty="0" smtClean="0">
+                <a:solidFill>
+                  <a:srgbClr val="1A1A1A"/>
+                </a:solidFill>
+                <a:latin typeface="IBM Plex Sans Medium" panose="020B0603050203000203" pitchFamily="34" charset="0"/>
+                <a:ea typeface="IBM Plex Sans Regular" pitchFamily="34" charset="-122"/>
+                <a:cs typeface="IBM Plex Sans Regular" pitchFamily="34" charset="-120"/>
+              </a:rPr>
+              <a:t>Orthogonal persistence:</a:t>
+            </a:r>
+            <a:endParaRPr lang="ru-RU" sz="2000" dirty="0" smtClean="0">
+              <a:solidFill>
+                <a:srgbClr val="1A1A1A"/>
+              </a:solidFill>
+              <a:latin typeface="IBM Plex Sans Medium" panose="020B0603050203000203" pitchFamily="34" charset="0"/>
+              <a:ea typeface="IBM Plex Sans Regular" pitchFamily="34" charset="-122"/>
+              <a:cs typeface="IBM Plex Sans Regular" pitchFamily="34" charset="-120"/>
+            </a:endParaRPr>
+          </a:p>
+          <a:p>
             <a:pPr marL="400000" indent="-400000" algn="l">
               <a:lnSpc>
                 <a:spcPts val="2600"/>
@@ -5494,6 +5538,39 @@
               <a:buChar char="•"/>
             </a:pPr>
             <a:r>
+              <a:rPr lang="en-US" sz="2000" dirty="0" smtClean="0">
+                <a:solidFill>
+                  <a:srgbClr val="1A1A1A"/>
+                </a:solidFill>
+                <a:latin typeface="IBM Plex Sans Regular" pitchFamily="34" charset="0"/>
+                <a:ea typeface="IBM Plex Sans Regular" pitchFamily="34" charset="-122"/>
+                <a:cs typeface="IBM Plex Sans Regular" pitchFamily="34" charset="-120"/>
+              </a:rPr>
+              <a:t>Develop</a:t>
+            </a:r>
+            <a:r>
+              <a:rPr lang="en-US" sz="2000" dirty="0" smtClean="0">
+                <a:solidFill>
+                  <a:srgbClr val="1A1A1A"/>
+                </a:solidFill>
+                <a:latin typeface="IBM Plex Sans Regular" pitchFamily="34" charset="0"/>
+                <a:ea typeface="IBM Plex Sans Regular" pitchFamily="34" charset="-122"/>
+                <a:cs typeface="IBM Plex Sans Regular" pitchFamily="34" charset="-120"/>
+              </a:rPr>
+              <a:t>ed in</a:t>
+            </a:r>
+            <a:r>
+              <a:rPr lang="en-US" sz="2000" dirty="0" smtClean="0">
+                <a:solidFill>
+                  <a:srgbClr val="1A1A1A"/>
+                </a:solidFill>
+                <a:latin typeface="IBM Plex Sans Regular" pitchFamily="34" charset="0"/>
+                <a:ea typeface="IBM Plex Sans Regular" pitchFamily="34" charset="-122"/>
+                <a:cs typeface="IBM Plex Sans Regular" pitchFamily="34" charset="-120"/>
+              </a:rPr>
+              <a:t> </a:t>
+            </a:r>
+            <a:r>
               <a:rPr lang="en-US" sz="2000" dirty="0">
                 <a:solidFill>
                   <a:srgbClr val="1A1A1A"/>
@@ -5502,8 +5579,49 @@
                 <a:ea typeface="IBM Plex Sans Regular" pitchFamily="34" charset="-122"/>
                 <a:cs typeface="IBM Plex Sans Regular" pitchFamily="34" charset="-120"/>
               </a:rPr>
-              <a:t>Orthogonal persistence has been developing since the 1980s</a:t>
-            </a:r>
+              <a:t>the </a:t>
+            </a:r>
+            <a:r>
+              <a:rPr lang="en-US" sz="2000" dirty="0" smtClean="0">
+                <a:solidFill>
+                  <a:srgbClr val="1A1A1A"/>
+                </a:solidFill>
+                <a:latin typeface="IBM Plex Sans Regular" pitchFamily="34" charset="0"/>
+                <a:ea typeface="IBM Plex Sans Regular" pitchFamily="34" charset="-122"/>
+                <a:cs typeface="IBM Plex Sans Regular" pitchFamily="34" charset="-120"/>
+              </a:rPr>
+              <a:t>19</a:t>
+            </a:r>
+            <a:r>
+              <a:rPr lang="ru-RU" sz="2000" dirty="0" smtClean="0">
+                <a:solidFill>
+                  <a:srgbClr val="1A1A1A"/>
+                </a:solidFill>
+                <a:latin typeface="IBM Plex Sans Regular" pitchFamily="34" charset="0"/>
+                <a:ea typeface="IBM Plex Sans Regular" pitchFamily="34" charset="-122"/>
+                <a:cs typeface="IBM Plex Sans Regular" pitchFamily="34" charset="-120"/>
+              </a:rPr>
+              <a:t>7</a:t>
+            </a:r>
+            <a:r>
+              <a:rPr lang="en-US" sz="2000" dirty="0" smtClean="0">
+                <a:solidFill>
+                  <a:srgbClr val="1A1A1A"/>
+                </a:solidFill>
+                <a:latin typeface="IBM Plex Sans Regular" pitchFamily="34" charset="0"/>
+                <a:ea typeface="IBM Plex Sans Regular" pitchFamily="34" charset="-122"/>
+                <a:cs typeface="IBM Plex Sans Regular" pitchFamily="34" charset="-120"/>
+              </a:rPr>
+              <a:t>0s</a:t>
+            </a:r>
+            <a:endParaRPr lang="ru-RU" sz="2000" dirty="0" smtClean="0">
+              <a:solidFill>
+                <a:srgbClr val="1A1A1A"/>
+              </a:solidFill>
+              <a:latin typeface="IBM Plex Sans Regular" pitchFamily="34" charset="0"/>
+              <a:ea typeface="IBM Plex Sans Regular" pitchFamily="34" charset="-122"/>
+              <a:cs typeface="IBM Plex Sans Regular" pitchFamily="34" charset="-120"/>
+            </a:endParaRPr>
           </a:p>
           <a:p>
             <a:pPr marL="400000" indent="-400000" algn="l">
@@ -5517,16 +5635,24 @@
               <a:buChar char="•"/>
             </a:pPr>
             <a:r>
-              <a:rPr lang="en-US" sz="2000" dirty="0">
-                <a:solidFill>
-                  <a:srgbClr val="1A1A1A"/>
-                </a:solidFill>
-                <a:latin typeface="IBM Plex Sans Regular" pitchFamily="34" charset="0"/>
-                <a:ea typeface="IBM Plex Sans Regular" pitchFamily="34" charset="-122"/>
-                <a:cs typeface="IBM Plex Sans Regular" pitchFamily="34" charset="-120"/>
-              </a:rPr>
-              <a:t>New equipment spurs new research</a:t>
-            </a:r>
+              <a:rPr lang="en-US" sz="2000" dirty="0" smtClean="0">
+                <a:solidFill>
+                  <a:srgbClr val="1A1A1A"/>
+                </a:solidFill>
+                <a:latin typeface="IBM Plex Sans Regular" pitchFamily="34" charset="0"/>
+                <a:ea typeface="IBM Plex Sans Regular" pitchFamily="34" charset="-122"/>
+                <a:cs typeface="IBM Plex Sans Regular" pitchFamily="34" charset="-120"/>
+              </a:rPr>
+              <a:t>Not well-studied</a:t>
+            </a:r>
+            <a:endParaRPr lang="en-US" sz="2000" dirty="0">
+              <a:solidFill>
+                <a:srgbClr val="1A1A1A"/>
+              </a:solidFill>
+              <a:latin typeface="IBM Plex Sans Regular" pitchFamily="34" charset="0"/>
+              <a:ea typeface="IBM Plex Sans Regular" pitchFamily="34" charset="-122"/>
+              <a:cs typeface="IBM Plex Sans Regular" pitchFamily="34" charset="-120"/>
+            </a:endParaRPr>
           </a:p>
           <a:p>
             <a:pPr marL="400000" indent="-400000" algn="l">
@@ -5534,12 +5660,96 @@
                 <a:spcPts val="2600"/>
               </a:lnSpc>
               <a:spcAft>
-                <a:spcPts val="0"/>
+                <a:spcPts val="500"/>
               </a:spcAft>
               <a:buFont typeface="Arial" pitchFamily="34" charset="0"/>
               <a:buChar char="•"/>
             </a:pPr>
             <a:r>
+              <a:rPr lang="en-US" sz="2000" dirty="0" smtClean="0">
+                <a:solidFill>
+                  <a:srgbClr val="1A1A1A"/>
+                </a:solidFill>
+                <a:latin typeface="IBM Plex Sans Regular" pitchFamily="34" charset="0"/>
+                <a:ea typeface="IBM Plex Sans Regular" pitchFamily="34" charset="-122"/>
+                <a:cs typeface="IBM Plex Sans Regular" pitchFamily="34" charset="-120"/>
+              </a:rPr>
+              <a:t>The hardware and network balances have changed</a:t>
+            </a:r>
+            <a:endParaRPr lang="ru-RU" sz="2000" dirty="0" smtClean="0">
+              <a:solidFill>
+                <a:srgbClr val="1A1A1A"/>
+              </a:solidFill>
+              <a:latin typeface="IBM Plex Sans Regular" pitchFamily="34" charset="0"/>
+              <a:ea typeface="IBM Plex Sans Regular" pitchFamily="34" charset="-122"/>
+              <a:cs typeface="IBM Plex Sans Regular" pitchFamily="34" charset="-120"/>
+            </a:endParaRPr>
+          </a:p>
+          <a:p>
+            <a:pPr marL="400000" indent="-400000" algn="l">
+              <a:lnSpc>
+                <a:spcPts val="2600"/>
+              </a:lnSpc>
+              <a:spcAft>
+                <a:spcPts val="500"/>
+              </a:spcAft>
+              <a:buFont typeface="Arial" pitchFamily="34" charset="0"/>
+              <a:buChar char="•"/>
+            </a:pPr>
+            <a:r>
+              <a:rPr lang="en-US" sz="2000" dirty="0" smtClean="0">
+                <a:solidFill>
+                  <a:srgbClr val="1A1A1A"/>
+                </a:solidFill>
+                <a:latin typeface="IBM Plex Sans Regular" pitchFamily="34" charset="0"/>
+                <a:ea typeface="IBM Plex Sans Regular" pitchFamily="34" charset="-122"/>
+                <a:cs typeface="IBM Plex Sans Regular" pitchFamily="34" charset="-120"/>
+              </a:rPr>
+              <a:t>Changes in requirements (e. </a:t>
+            </a:r>
+            <a:r>
+              <a:rPr lang="en-US" sz="2000" dirty="0" smtClean="0">
+                <a:solidFill>
+                  <a:srgbClr val="1A1A1A"/>
+                </a:solidFill>
+                <a:latin typeface="IBM Plex Sans Regular" pitchFamily="34" charset="0"/>
+                <a:ea typeface="IBM Plex Sans Regular" pitchFamily="34" charset="-122"/>
+                <a:cs typeface="IBM Plex Sans Regular" pitchFamily="34" charset="-120"/>
+              </a:rPr>
+              <a:t>g., power consumption)</a:t>
+            </a:r>
+            <a:endParaRPr lang="en-US" sz="2000" dirty="0" smtClean="0">
+              <a:solidFill>
+                <a:srgbClr val="1A1A1A"/>
+              </a:solidFill>
+              <a:latin typeface="IBM Plex Sans Regular" pitchFamily="34" charset="0"/>
+              <a:ea typeface="IBM Plex Sans Regular" pitchFamily="34" charset="-122"/>
+              <a:cs typeface="IBM Plex Sans Regular" pitchFamily="34" charset="-120"/>
+            </a:endParaRPr>
+          </a:p>
+          <a:p>
+            <a:pPr marL="400000" indent="-400000" algn="l">
+              <a:lnSpc>
+                <a:spcPts val="2600"/>
+              </a:lnSpc>
+              <a:spcAft>
+                <a:spcPts val="500"/>
+              </a:spcAft>
+              <a:buFont typeface="Arial" pitchFamily="34" charset="0"/>
+              <a:buChar char="•"/>
+            </a:pPr>
+            <a:r>
+              <a:rPr lang="en-US" sz="2000" dirty="0" smtClean="0">
+                <a:solidFill>
+                  <a:srgbClr val="1A1A1A"/>
+                </a:solidFill>
+                <a:latin typeface="IBM Plex Sans Regular" pitchFamily="34" charset="0"/>
+                <a:ea typeface="IBM Plex Sans Regular" pitchFamily="34" charset="-122"/>
+                <a:cs typeface="IBM Plex Sans Regular" pitchFamily="34" charset="-120"/>
+              </a:rPr>
+              <a:t>The </a:t>
+            </a:r>
+            <a:r>
               <a:rPr lang="en-US" sz="2000" dirty="0">
                 <a:solidFill>
                   <a:srgbClr val="1A1A1A"/>
@@ -5548,8 +5758,27 @@
                 <a:ea typeface="IBM Plex Sans Regular" pitchFamily="34" charset="-122"/>
                 <a:cs typeface="IBM Plex Sans Regular" pitchFamily="34" charset="-120"/>
               </a:rPr>
-              <a:t>The current situation requires research</a:t>
-            </a:r>
+              <a:t>current situation requires </a:t>
+            </a:r>
+            <a:r>
+              <a:rPr lang="en-US" sz="2000" dirty="0" smtClean="0">
+                <a:solidFill>
+                  <a:srgbClr val="1A1A1A"/>
+                </a:solidFill>
+                <a:latin typeface="IBM Plex Sans Regular" pitchFamily="34" charset="0"/>
+                <a:ea typeface="IBM Plex Sans Regular" pitchFamily="34" charset="-122"/>
+                <a:cs typeface="IBM Plex Sans Regular" pitchFamily="34" charset="-120"/>
+              </a:rPr>
+              <a:t>research</a:t>
+            </a:r>
+            <a:endParaRPr lang="en-US" sz="2000" dirty="0">
+              <a:solidFill>
+                <a:srgbClr val="1A1A1A"/>
+              </a:solidFill>
+              <a:latin typeface="IBM Plex Sans Regular" pitchFamily="34" charset="0"/>
+              <a:ea typeface="IBM Plex Sans Regular" pitchFamily="34" charset="-122"/>
+              <a:cs typeface="IBM Plex Sans Regular" pitchFamily="34" charset="-120"/>
+            </a:endParaRPr>
           </a:p>
         </p:txBody>
       </p:sp>
@@ -5602,17 +5831,13 @@
             </a:r>
           </a:p>
           <a:p>
-            <a:pPr marL="0" indent="0" algn="l">
+            <a:pPr>
               <a:lnSpc>
                 <a:spcPts val="2400"/>
               </a:lnSpc>
-              <a:spcAft>
-                <a:spcPts val="0"/>
-              </a:spcAft>
-              <a:buNone/>
-            </a:pPr>
-            <a:r>
-              <a:rPr lang="en-US" sz="1800" dirty="0">
+            </a:pPr>
+            <a:r>
+              <a:rPr lang="en-US" dirty="0">
                 <a:solidFill>
                   <a:srgbClr val="FFFFFF"/>
                 </a:solidFill>
@@ -5620,8 +5845,60 @@
                 <a:ea typeface="IBM Plex Sans Regular" pitchFamily="34" charset="-122"/>
                 <a:cs typeface="IBM Plex Sans Regular" pitchFamily="34" charset="-120"/>
               </a:rPr>
-              <a:t>Persistent memory and new hardware make the problem practical, not just theoretical.</a:t>
-            </a:r>
+              <a:t>It </a:t>
+            </a:r>
+            <a:r>
+              <a:rPr lang="en-US" dirty="0" smtClean="0">
+                <a:solidFill>
+                  <a:srgbClr val="FFFFFF"/>
+                </a:solidFill>
+                <a:latin typeface="IBM Plex Sans Regular" pitchFamily="34" charset="0"/>
+                <a:ea typeface="IBM Plex Sans Regular" pitchFamily="34" charset="-122"/>
+                <a:cs typeface="IBM Plex Sans Regular" pitchFamily="34" charset="-120"/>
+              </a:rPr>
+              <a:t>is necessary </a:t>
+            </a:r>
+            <a:r>
+              <a:rPr lang="en-US" dirty="0">
+                <a:solidFill>
+                  <a:srgbClr val="FFFFFF"/>
+                </a:solidFill>
+                <a:latin typeface="IBM Plex Sans Regular" pitchFamily="34" charset="0"/>
+                <a:ea typeface="IBM Plex Sans Regular" pitchFamily="34" charset="-122"/>
+                <a:cs typeface="IBM Plex Sans Regular" pitchFamily="34" charset="-120"/>
+              </a:rPr>
+              <a:t>to examine the relevance of </a:t>
+            </a:r>
+            <a:r>
+              <a:rPr lang="en-US" dirty="0" smtClean="0">
+                <a:solidFill>
+                  <a:srgbClr val="FFFFFF"/>
+                </a:solidFill>
+                <a:latin typeface="IBM Plex Sans Regular" pitchFamily="34" charset="0"/>
+                <a:ea typeface="IBM Plex Sans Regular" pitchFamily="34" charset="-122"/>
+                <a:cs typeface="IBM Plex Sans Regular" pitchFamily="34" charset="-120"/>
+              </a:rPr>
+              <a:t>persistence concepts </a:t>
+            </a:r>
+            <a:r>
+              <a:rPr lang="en-US" dirty="0">
+                <a:solidFill>
+                  <a:srgbClr val="FFFFFF"/>
+                </a:solidFill>
+                <a:latin typeface="IBM Plex Sans Regular" pitchFamily="34" charset="0"/>
+                <a:ea typeface="IBM Plex Sans Regular" pitchFamily="34" charset="-122"/>
+                <a:cs typeface="IBM Plex Sans Regular" pitchFamily="34" charset="-120"/>
+              </a:rPr>
+              <a:t>in the current environment</a:t>
+            </a:r>
+            <a:endParaRPr lang="en-US" sz="1800" dirty="0">
+              <a:solidFill>
+                <a:srgbClr val="FFFFFF"/>
+              </a:solidFill>
+              <a:latin typeface="IBM Plex Sans Regular" pitchFamily="34" charset="0"/>
+              <a:ea typeface="IBM Plex Sans Regular" pitchFamily="34" charset="-122"/>
+              <a:cs typeface="IBM Plex Sans Regular" pitchFamily="34" charset="-120"/>
+            </a:endParaRPr>
           </a:p>
         </p:txBody>
       </p:sp>
@@ -5702,6 +5979,550 @@
 </file>
 
 <file path=ppt/slides/slide20.xml><?xml version="1.0" encoding="utf-8"?>
+<p:sld xmlns:a="http://schemas.openxmlformats.org/drawingml/2006/main" xmlns:r="http://schemas.openxmlformats.org/officeDocument/2006/relationships" xmlns:p="http://schemas.openxmlformats.org/presentationml/2006/main">
+  <p:cSld>
+    <p:spTree>
+      <p:nvGrpSpPr>
+        <p:cNvPr id="1" name=""/>
+        <p:cNvGrpSpPr/>
+        <p:nvPr/>
+      </p:nvGrpSpPr>
+      <p:grpSpPr>
+        <a:xfrm>
+          <a:off x="0" y="0"/>
+          <a:ext cx="0" cy="0"/>
+          <a:chOff x="0" y="0"/>
+          <a:chExt cx="0" cy="0"/>
+        </a:xfrm>
+      </p:grpSpPr>
+      <p:sp>
+        <p:nvSpPr>
+          <p:cNvPr id="5" name="Title"/>
+          <p:cNvSpPr/>
+          <p:nvPr/>
+        </p:nvSpPr>
+        <p:spPr>
+          <a:xfrm>
+            <a:off x="1095375" y="900000"/>
+            <a:ext cx="13000000" cy="700000"/>
+          </a:xfrm>
+          <a:prstGeom prst="rect">
+            <a:avLst/>
+          </a:prstGeom>
+          <a:noFill/>
+          <a:ln/>
+        </p:spPr>
+        <p:txBody>
+          <a:bodyPr wrap="square" lIns="0" tIns="0" rIns="0" bIns="0" rtlCol="0" anchor="t"/>
+          <a:lstStyle/>
+          <a:p>
+            <a:pPr marL="0" indent="0" algn="l">
+              <a:lnSpc>
+                <a:spcPts val="3200"/>
+              </a:lnSpc>
+              <a:spcAft>
+                <a:spcPts val="0"/>
+              </a:spcAft>
+              <a:buNone/>
+            </a:pPr>
+            <a:r>
+              <a:rPr lang="en-US" sz="2800" b="1" dirty="0" smtClean="0">
+                <a:solidFill>
+                  <a:srgbClr val="1A1A1A"/>
+                </a:solidFill>
+                <a:latin typeface="Montserrat Bold" pitchFamily="34" charset="0"/>
+                <a:ea typeface="Montserrat Bold" pitchFamily="34" charset="-122"/>
+                <a:cs typeface="Montserrat Bold" pitchFamily="34" charset="-120"/>
+              </a:rPr>
+              <a:t>Conclusion</a:t>
+            </a:r>
+            <a:endParaRPr lang="en-US" sz="2800" b="1" dirty="0">
+              <a:solidFill>
+                <a:srgbClr val="1A1A1A"/>
+              </a:solidFill>
+              <a:latin typeface="Montserrat Bold" pitchFamily="34" charset="0"/>
+              <a:ea typeface="Montserrat Bold" pitchFamily="34" charset="-122"/>
+              <a:cs typeface="Montserrat Bold" pitchFamily="34" charset="-120"/>
+            </a:endParaRPr>
+          </a:p>
+        </p:txBody>
+      </p:sp>
+      <p:sp>
+        <p:nvSpPr>
+          <p:cNvPr id="10" name="lead"/>
+          <p:cNvSpPr/>
+          <p:nvPr/>
+        </p:nvSpPr>
+        <p:spPr>
+          <a:xfrm>
+            <a:off x="1095375" y="1900000"/>
+            <a:ext cx="7700000" cy="6150000"/>
+          </a:xfrm>
+          <a:prstGeom prst="roundRect">
+            <a:avLst>
+              <a:gd name="adj" fmla="val 6000"/>
+            </a:avLst>
+          </a:prstGeom>
+          <a:solidFill>
+            <a:srgbClr val="40BA21"/>
+          </a:solidFill>
+          <a:ln>
+            <a:noFill/>
+          </a:ln>
+        </p:spPr>
+        <p:txBody>
+          <a:bodyPr wrap="square" lIns="620000" tIns="434000" rIns="620000" bIns="434000" rtlCol="0" anchor="ctr"/>
+          <a:lstStyle/>
+          <a:p>
+            <a:pPr marL="342900" indent="-342900">
+              <a:lnSpc>
+                <a:spcPts val="2600"/>
+              </a:lnSpc>
+              <a:spcAft>
+                <a:spcPts val="900"/>
+              </a:spcAft>
+              <a:buFont typeface="Arial" panose="020B0604020202020204" pitchFamily="34" charset="0"/>
+              <a:buChar char="•"/>
+            </a:pPr>
+            <a:r>
+              <a:rPr lang="en-US" sz="2000" b="1" dirty="0">
+                <a:solidFill>
+                  <a:srgbClr val="FFFFFF"/>
+                </a:solidFill>
+                <a:latin typeface="Montserrat SemiBold" pitchFamily="34" charset="0"/>
+                <a:ea typeface="Montserrat SemiBold" pitchFamily="34" charset="-122"/>
+                <a:cs typeface="Montserrat SemiBold" pitchFamily="34" charset="-120"/>
+              </a:rPr>
+              <a:t>Usage scenarios were </a:t>
+            </a:r>
+            <a:r>
+              <a:rPr lang="en-US" sz="2000" b="1" dirty="0" smtClean="0">
+                <a:solidFill>
+                  <a:srgbClr val="FFFFFF"/>
+                </a:solidFill>
+                <a:latin typeface="Montserrat SemiBold" pitchFamily="34" charset="0"/>
+                <a:ea typeface="Montserrat SemiBold" pitchFamily="34" charset="-122"/>
+                <a:cs typeface="Montserrat SemiBold" pitchFamily="34" charset="-120"/>
+              </a:rPr>
+              <a:t>examined</a:t>
+            </a:r>
+          </a:p>
+          <a:p>
+            <a:pPr marL="342900" indent="-342900">
+              <a:lnSpc>
+                <a:spcPts val="2600"/>
+              </a:lnSpc>
+              <a:spcAft>
+                <a:spcPts val="900"/>
+              </a:spcAft>
+              <a:buFont typeface="Arial" panose="020B0604020202020204" pitchFamily="34" charset="0"/>
+              <a:buChar char="•"/>
+            </a:pPr>
+            <a:r>
+              <a:rPr lang="en-US" sz="2000" b="1" dirty="0" smtClean="0">
+                <a:solidFill>
+                  <a:srgbClr val="FFFFFF"/>
+                </a:solidFill>
+                <a:latin typeface="Montserrat SemiBold" pitchFamily="34" charset="0"/>
+                <a:ea typeface="Montserrat SemiBold" pitchFamily="34" charset="-122"/>
+                <a:cs typeface="Montserrat SemiBold" pitchFamily="34" charset="-120"/>
+              </a:rPr>
+              <a:t>A </a:t>
+            </a:r>
+            <a:r>
+              <a:rPr lang="en-US" sz="2000" b="1" dirty="0">
+                <a:solidFill>
+                  <a:srgbClr val="FFFFFF"/>
+                </a:solidFill>
+                <a:latin typeface="Montserrat SemiBold" pitchFamily="34" charset="0"/>
+                <a:ea typeface="Montserrat SemiBold" pitchFamily="34" charset="-122"/>
+                <a:cs typeface="Montserrat SemiBold" pitchFamily="34" charset="-120"/>
+              </a:rPr>
+              <a:t>security approach was </a:t>
+            </a:r>
+            <a:r>
+              <a:rPr lang="en-US" sz="2000" b="1" dirty="0" smtClean="0">
+                <a:solidFill>
+                  <a:srgbClr val="FFFFFF"/>
+                </a:solidFill>
+                <a:latin typeface="Montserrat SemiBold" pitchFamily="34" charset="0"/>
+                <a:ea typeface="Montserrat SemiBold" pitchFamily="34" charset="-122"/>
+                <a:cs typeface="Montserrat SemiBold" pitchFamily="34" charset="-120"/>
+              </a:rPr>
+              <a:t>selected</a:t>
+            </a:r>
+          </a:p>
+          <a:p>
+            <a:pPr marL="342900" indent="-342900">
+              <a:lnSpc>
+                <a:spcPts val="2600"/>
+              </a:lnSpc>
+              <a:spcAft>
+                <a:spcPts val="900"/>
+              </a:spcAft>
+              <a:buFont typeface="Arial" panose="020B0604020202020204" pitchFamily="34" charset="0"/>
+              <a:buChar char="•"/>
+            </a:pPr>
+            <a:r>
+              <a:rPr lang="en-US" sz="2000" b="1" dirty="0" smtClean="0">
+                <a:solidFill>
+                  <a:srgbClr val="FFFFFF"/>
+                </a:solidFill>
+                <a:latin typeface="Montserrat SemiBold" pitchFamily="34" charset="0"/>
+                <a:ea typeface="Montserrat SemiBold" pitchFamily="34" charset="-122"/>
+                <a:cs typeface="Montserrat SemiBold" pitchFamily="34" charset="-120"/>
+              </a:rPr>
+              <a:t>Developed </a:t>
+            </a:r>
+            <a:r>
+              <a:rPr lang="en-US" sz="2000" b="1" dirty="0" err="1">
+                <a:solidFill>
+                  <a:srgbClr val="FFFFFF"/>
+                </a:solidFill>
+                <a:latin typeface="Montserrat SemiBold" pitchFamily="34" charset="0"/>
+                <a:ea typeface="Montserrat SemiBold" pitchFamily="34" charset="-122"/>
+                <a:cs typeface="Montserrat SemiBold" pitchFamily="34" charset="-120"/>
+              </a:rPr>
+              <a:t>se_vault</a:t>
+            </a:r>
+            <a:r>
+              <a:rPr lang="en-US" sz="2000" b="1" dirty="0">
+                <a:solidFill>
+                  <a:srgbClr val="FFFFFF"/>
+                </a:solidFill>
+                <a:latin typeface="Montserrat SemiBold" pitchFamily="34" charset="0"/>
+                <a:ea typeface="Montserrat SemiBold" pitchFamily="34" charset="-122"/>
+                <a:cs typeface="Montserrat SemiBold" pitchFamily="34" charset="-120"/>
+              </a:rPr>
+              <a:t> based on </a:t>
+            </a:r>
+            <a:r>
+              <a:rPr lang="en-US" sz="2000" b="1" dirty="0" err="1">
+                <a:solidFill>
+                  <a:srgbClr val="FFFFFF"/>
+                </a:solidFill>
+                <a:latin typeface="Montserrat SemiBold" pitchFamily="34" charset="0"/>
+                <a:ea typeface="Montserrat SemiBold" pitchFamily="34" charset="-122"/>
+                <a:cs typeface="Montserrat SemiBold" pitchFamily="34" charset="-120"/>
+              </a:rPr>
+              <a:t>file_vault</a:t>
+            </a:r>
+            <a:endParaRPr lang="en-US" sz="2000" b="1" dirty="0">
+              <a:solidFill>
+                <a:srgbClr val="FFFFFF"/>
+              </a:solidFill>
+              <a:latin typeface="Montserrat SemiBold" pitchFamily="34" charset="0"/>
+              <a:ea typeface="Montserrat SemiBold" pitchFamily="34" charset="-122"/>
+              <a:cs typeface="Montserrat SemiBold" pitchFamily="34" charset="-120"/>
+            </a:endParaRPr>
+          </a:p>
+        </p:txBody>
+      </p:sp>
+      <p:sp>
+        <p:nvSpPr>
+          <p:cNvPr id="11" name="body"/>
+          <p:cNvSpPr/>
+          <p:nvPr/>
+        </p:nvSpPr>
+        <p:spPr>
+          <a:xfrm>
+            <a:off x="9100000" y="1900000"/>
+            <a:ext cx="8050000" cy="6150000"/>
+          </a:xfrm>
+          <a:prstGeom prst="roundRect">
+            <a:avLst>
+              <a:gd name="adj" fmla="val 6000"/>
+            </a:avLst>
+          </a:prstGeom>
+          <a:solidFill>
+            <a:srgbClr val="EEF1F4"/>
+          </a:solidFill>
+          <a:ln>
+            <a:noFill/>
+          </a:ln>
+        </p:spPr>
+        <p:txBody>
+          <a:bodyPr wrap="square" lIns="560000" tIns="392000" rIns="560000" bIns="392000" rtlCol="0" anchor="ctr"/>
+          <a:lstStyle/>
+          <a:p>
+            <a:pPr>
+              <a:lnSpc>
+                <a:spcPts val="2400"/>
+              </a:lnSpc>
+              <a:spcAft>
+                <a:spcPts val="400"/>
+              </a:spcAft>
+            </a:pPr>
+            <a:r>
+              <a:rPr lang="en-US" sz="2000" dirty="0">
+                <a:solidFill>
+                  <a:srgbClr val="2E8B16"/>
+                </a:solidFill>
+                <a:latin typeface="Montserrat Medium" pitchFamily="34" charset="0"/>
+                <a:ea typeface="Montserrat Medium" pitchFamily="34" charset="-122"/>
+                <a:cs typeface="Montserrat Medium" pitchFamily="34" charset="-120"/>
+              </a:rPr>
+              <a:t>Improvements</a:t>
+            </a:r>
+          </a:p>
+          <a:p>
+            <a:pPr marL="285750" indent="-285750">
+              <a:lnSpc>
+                <a:spcPts val="2300"/>
+              </a:lnSpc>
+              <a:spcAft>
+                <a:spcPts val="300"/>
+              </a:spcAft>
+              <a:buFont typeface="Arial" pitchFamily="34" charset="0"/>
+              <a:buChar char="•"/>
+            </a:pPr>
+            <a:r>
+              <a:rPr lang="en-US" sz="2000" dirty="0">
+                <a:latin typeface="IBM Plex Sans Regular" pitchFamily="34" charset="0"/>
+                <a:ea typeface="IBM Plex Sans Regular" pitchFamily="34" charset="-122"/>
+                <a:cs typeface="IBM Plex Sans Regular" pitchFamily="34" charset="-120"/>
+              </a:rPr>
+              <a:t>Security gain: snapshot encryption enabled</a:t>
+            </a:r>
+          </a:p>
+          <a:p>
+            <a:pPr marL="285750" indent="-285750">
+              <a:lnSpc>
+                <a:spcPts val="2300"/>
+              </a:lnSpc>
+              <a:spcAft>
+                <a:spcPts val="900"/>
+              </a:spcAft>
+              <a:buFont typeface="Arial" pitchFamily="34" charset="0"/>
+              <a:buChar char="•"/>
+            </a:pPr>
+            <a:r>
+              <a:rPr lang="en-US" sz="2000" dirty="0">
+                <a:latin typeface="IBM Plex Sans Regular" pitchFamily="34" charset="0"/>
+                <a:ea typeface="IBM Plex Sans Regular" pitchFamily="34" charset="-122"/>
+                <a:cs typeface="IBM Plex Sans Regular" pitchFamily="34" charset="-120"/>
+              </a:rPr>
+              <a:t>Integrity gain: SHA-256 at block level (</a:t>
+            </a:r>
+            <a:r>
+              <a:rPr lang="en-US" sz="2000" dirty="0" err="1">
+                <a:latin typeface="IBM Plex Sans Regular" pitchFamily="34" charset="0"/>
+                <a:ea typeface="IBM Plex Sans Regular" pitchFamily="34" charset="-122"/>
+                <a:cs typeface="IBM Plex Sans Regular" pitchFamily="34" charset="-120"/>
+              </a:rPr>
+              <a:t>Tresor</a:t>
+            </a:r>
+            <a:r>
+              <a:rPr lang="en-US" sz="2000" dirty="0">
+                <a:latin typeface="IBM Plex Sans Regular" pitchFamily="34" charset="0"/>
+                <a:ea typeface="IBM Plex Sans Regular" pitchFamily="34" charset="-122"/>
+                <a:cs typeface="IBM Plex Sans Regular" pitchFamily="34" charset="-120"/>
+              </a:rPr>
+              <a:t>) and hash at FS level (Snapper)</a:t>
+            </a:r>
+          </a:p>
+          <a:p>
+            <a:pPr>
+              <a:lnSpc>
+                <a:spcPts val="2400"/>
+              </a:lnSpc>
+              <a:spcAft>
+                <a:spcPts val="400"/>
+              </a:spcAft>
+            </a:pPr>
+            <a:r>
+              <a:rPr lang="en-US" sz="2000" dirty="0" smtClean="0">
+                <a:solidFill>
+                  <a:srgbClr val="2E8B16"/>
+                </a:solidFill>
+                <a:latin typeface="Montserrat Medium" pitchFamily="34" charset="0"/>
+                <a:ea typeface="Montserrat Medium" pitchFamily="34" charset="-122"/>
+                <a:cs typeface="Montserrat Medium" pitchFamily="34" charset="-120"/>
+              </a:rPr>
+              <a:t>Future </a:t>
+            </a:r>
+            <a:r>
+              <a:rPr lang="en-US" sz="2000" dirty="0">
+                <a:solidFill>
+                  <a:srgbClr val="2E8B16"/>
+                </a:solidFill>
+                <a:latin typeface="Montserrat Medium" pitchFamily="34" charset="0"/>
+                <a:ea typeface="Montserrat Medium" pitchFamily="34" charset="-122"/>
+                <a:cs typeface="Montserrat Medium" pitchFamily="34" charset="-120"/>
+              </a:rPr>
+              <a:t>work</a:t>
+            </a:r>
+          </a:p>
+          <a:p>
+            <a:pPr marL="285750" indent="-285750">
+              <a:lnSpc>
+                <a:spcPts val="2300"/>
+              </a:lnSpc>
+              <a:spcAft>
+                <a:spcPts val="300"/>
+              </a:spcAft>
+              <a:buFont typeface="Arial" pitchFamily="34" charset="0"/>
+              <a:buChar char="•"/>
+            </a:pPr>
+            <a:r>
+              <a:rPr lang="en-US" sz="2000" dirty="0">
+                <a:latin typeface="IBM Plex Sans Regular" pitchFamily="34" charset="0"/>
+                <a:ea typeface="IBM Plex Sans Regular" pitchFamily="34" charset="-122"/>
+                <a:cs typeface="IBM Plex Sans Regular" pitchFamily="34" charset="-120"/>
+              </a:rPr>
+              <a:t>Decrease performance overhead; encrypt the </a:t>
+            </a:r>
+            <a:r>
+              <a:rPr lang="en-US" sz="2000" dirty="0" err="1">
+                <a:latin typeface="IBM Plex Sans Regular" pitchFamily="34" charset="0"/>
+                <a:ea typeface="IBM Plex Sans Regular" pitchFamily="34" charset="-122"/>
+                <a:cs typeface="IBM Plex Sans Regular" pitchFamily="34" charset="-120"/>
+              </a:rPr>
+              <a:t>isomem</a:t>
+            </a:r>
+            <a:r>
+              <a:rPr lang="en-US" sz="2000" dirty="0">
+                <a:latin typeface="IBM Plex Sans Regular" pitchFamily="34" charset="0"/>
+                <a:ea typeface="IBM Plex Sans Regular" pitchFamily="34" charset="-122"/>
+                <a:cs typeface="IBM Plex Sans Regular" pitchFamily="34" charset="-120"/>
+              </a:rPr>
+              <a:t> block device</a:t>
+            </a:r>
+          </a:p>
+          <a:p>
+            <a:pPr marL="285750" indent="-285750">
+              <a:lnSpc>
+                <a:spcPts val="2300"/>
+              </a:lnSpc>
+              <a:buFont typeface="Arial" pitchFamily="34" charset="0"/>
+              <a:buChar char="•"/>
+            </a:pPr>
+            <a:r>
+              <a:rPr lang="en-US" sz="2000" dirty="0">
+                <a:latin typeface="IBM Plex Sans Regular" pitchFamily="34" charset="0"/>
+                <a:ea typeface="IBM Plex Sans Regular" pitchFamily="34" charset="-122"/>
+                <a:cs typeface="IBM Plex Sans Regular" pitchFamily="34" charset="-120"/>
+              </a:rPr>
+              <a:t>Merge Snapper and </a:t>
+            </a:r>
+            <a:r>
+              <a:rPr lang="en-US" sz="2000" dirty="0" err="1">
+                <a:latin typeface="IBM Plex Sans Regular" pitchFamily="34" charset="0"/>
+                <a:ea typeface="IBM Plex Sans Regular" pitchFamily="34" charset="-122"/>
+                <a:cs typeface="IBM Plex Sans Regular" pitchFamily="34" charset="-120"/>
+              </a:rPr>
+              <a:t>Tresor</a:t>
+            </a:r>
+            <a:r>
+              <a:rPr lang="en-US" sz="2000" dirty="0">
+                <a:latin typeface="IBM Plex Sans Regular" pitchFamily="34" charset="0"/>
+                <a:ea typeface="IBM Plex Sans Regular" pitchFamily="34" charset="-122"/>
+                <a:cs typeface="IBM Plex Sans Regular" pitchFamily="34" charset="-120"/>
+              </a:rPr>
+              <a:t> snapshot concepts; bring the </a:t>
+            </a:r>
+            <a:r>
+              <a:rPr lang="en-US" sz="2000" dirty="0" err="1">
+                <a:latin typeface="IBM Plex Sans Regular" pitchFamily="34" charset="0"/>
+                <a:ea typeface="IBM Plex Sans Regular" pitchFamily="34" charset="-122"/>
+                <a:cs typeface="IBM Plex Sans Regular" pitchFamily="34" charset="-120"/>
+              </a:rPr>
+              <a:t>PoC</a:t>
+            </a:r>
+            <a:r>
+              <a:rPr lang="en-US" sz="2000" dirty="0">
+                <a:latin typeface="IBM Plex Sans Regular" pitchFamily="34" charset="0"/>
+                <a:ea typeface="IBM Plex Sans Regular" pitchFamily="34" charset="-122"/>
+                <a:cs typeface="IBM Plex Sans Regular" pitchFamily="34" charset="-120"/>
+              </a:rPr>
+              <a:t> to industrial scale</a:t>
+            </a:r>
+            <a:endParaRPr lang="en-US" sz="2000" dirty="0"/>
+          </a:p>
+        </p:txBody>
+      </p:sp>
+      <p:pic>
+        <p:nvPicPr>
+          <p:cNvPr id="90" name="iU logo"/>
+          <p:cNvPicPr>
+            <a:picLocks noChangeAspect="1"/>
+          </p:cNvPicPr>
+          <p:nvPr/>
+        </p:nvPicPr>
+        <p:blipFill>
+          <a:blip r:embed="rId2"/>
+          <a:stretch>
+            <a:fillRect/>
+          </a:stretch>
+        </p:blipFill>
+        <p:spPr>
+          <a:xfrm>
+            <a:off x="14900000" y="780000"/>
+            <a:ext cx="2480000" cy="720500"/>
+          </a:xfrm>
+          <a:prstGeom prst="rect">
+            <a:avLst/>
+          </a:prstGeom>
+        </p:spPr>
+      </p:pic>
+      <p:sp>
+        <p:nvSpPr>
+          <p:cNvPr id="95" name="pagenum"/>
+          <p:cNvSpPr/>
+          <p:nvPr/>
+        </p:nvSpPr>
+        <p:spPr>
+          <a:xfrm>
+            <a:off x="16400000" y="9550000"/>
+            <a:ext cx="1500000" cy="450000"/>
+          </a:xfrm>
+          <a:prstGeom prst="rect">
+            <a:avLst/>
+          </a:prstGeom>
+          <a:noFill/>
+          <a:ln/>
+        </p:spPr>
+        <p:txBody>
+          <a:bodyPr wrap="square" lIns="0" tIns="0" rIns="0" bIns="0" anchor="b"/>
+          <a:lstStyle/>
+          <a:p>
+            <a:pPr algn="r">
+              <a:buNone/>
+            </a:pPr>
+            <a:r>
+              <a:rPr lang="en-US" sz="1300" dirty="0">
+                <a:solidFill>
+                  <a:srgbClr val="9AA3AB"/>
+                </a:solidFill>
+                <a:latin typeface="IBM Plex Mono" pitchFamily="34" charset="0"/>
+                <a:cs typeface="IBM Plex Mono" pitchFamily="34" charset="0"/>
+              </a:rPr>
+              <a:t>16/20</a:t>
+            </a:r>
+          </a:p>
+        </p:txBody>
+      </p:sp>
+    </p:spTree>
+    <p:extLst>
+      <p:ext uri="{BB962C8B-B14F-4D97-AF65-F5344CB8AC3E}">
+        <p14:creationId xmlns:p14="http://schemas.microsoft.com/office/powerpoint/2010/main" val="312732022"/>
+      </p:ext>
+    </p:extLst>
+  </p:cSld>
+  <p:clrMapOvr>
+    <a:masterClrMapping/>
+  </p:clrMapOvr>
+  <p:timing>
+    <p:tnLst>
+      <p:par>
+        <p:cTn id="1" dur="indefinite" restart="never" nodeType="tmRoot"/>
+      </p:par>
+    </p:tnLst>
+  </p:timing>
+</p:sld>
+</file>
+
+<file path=ppt/slides/slide21.xml><?xml version="1.0" encoding="utf-8"?>
 <p:sld xmlns:a="http://schemas.openxmlformats.org/drawingml/2006/main" xmlns:r="http://schemas.openxmlformats.org/officeDocument/2006/relationships" xmlns:p="http://schemas.openxmlformats.org/presentationml/2006/main">
   <p:cSld name="Slide 2">
     <p:bg>
@@ -5738,7 +6559,7 @@
           <a:blip r:embed="rId2">
             <a:extLst>
               <a:ext uri="{96DAC541-7B7A-43D3-8B79-37D633B846F1}">
-                <asvg:svgBlip xmlns="" xmlns:asvg="http://schemas.microsoft.com/office/drawing/2016/SVG/main" r:embed="rId4"/>
+                <asvg:svgBlip xmlns:asvg="http://schemas.microsoft.com/office/drawing/2016/SVG/main" xmlns="" r:embed="rId4"/>
               </a:ext>
             </a:extLst>
           </a:blip>
@@ -5836,7 +6657,7 @@
           <a:blip r:embed="rId8">
             <a:extLst>
               <a:ext uri="{96DAC541-7B7A-43D3-8B79-37D633B846F1}">
-                <asvg:svgBlip xmlns="" xmlns:asvg="http://schemas.microsoft.com/office/drawing/2016/SVG/main" r:embed="rId9"/>
+                <asvg:svgBlip xmlns:asvg="http://schemas.microsoft.com/office/drawing/2016/SVG/main" xmlns="" r:embed="rId9"/>
               </a:ext>
             </a:extLst>
           </a:blip>
@@ -5861,8 +6682,8 @@
         </p:nvSpPr>
         <p:spPr>
           <a:xfrm>
-            <a:off x="1057275" y="2050000"/>
-            <a:ext cx="9500000" cy="1100000"/>
+            <a:off x="5896040" y="4403000"/>
+            <a:ext cx="6495919" cy="1100000"/>
           </a:xfrm>
           <a:prstGeom prst="rect">
             <a:avLst/>
@@ -5884,7 +6705,7 @@
               <a:buNone/>
             </a:pPr>
             <a:r>
-              <a:rPr lang="en-US" sz="6000" b="1" dirty="0">
+              <a:rPr lang="en-US" sz="9600" b="1" dirty="0" smtClean="0">
                 <a:solidFill>
                   <a:srgbClr val="6FE34B"/>
                 </a:solidFill>
@@ -5892,15 +6713,8 @@
                 <a:ea typeface="Montserrat Bold" pitchFamily="34" charset="-122"/>
                 <a:cs typeface="Montserrat Bold" pitchFamily="34" charset="-120"/>
               </a:rPr>
-              <a:t>Conclusion</a:t>
-            </a:r>
-            <a:r>
-              <a:rPr dirty="0"/>
-              <a:t/>
-            </a:r>
-            <a:br>
-              <a:rPr dirty="0"/>
-            </a:br>
+              <a:t>Questions</a:t>
+            </a:r>
             <a:endParaRPr lang="en-US" sz="6750" dirty="0"/>
           </a:p>
         </p:txBody>
@@ -5926,184 +6740,14 @@
           <a:bodyPr wrap="square" lIns="0" tIns="0" rIns="0" bIns="0" rtlCol="0" anchor="t"/>
           <a:lstStyle/>
           <a:p>
-            <a:pPr marL="0" indent="0" algn="l">
+            <a:pPr>
               <a:lnSpc>
                 <a:spcPts val="2600"/>
               </a:lnSpc>
               <a:spcAft>
                 <a:spcPts val="900"/>
               </a:spcAft>
-              <a:buNone/>
-            </a:pPr>
-            <a:r>
-              <a:rPr lang="en-US" sz="2200" b="1" dirty="0">
-                <a:solidFill>
-                  <a:srgbClr val="FFFFFF"/>
-                </a:solidFill>
-                <a:latin typeface="Montserrat SemiBold" pitchFamily="34" charset="0"/>
-                <a:ea typeface="Montserrat SemiBold" pitchFamily="34" charset="-122"/>
-                <a:cs typeface="Montserrat SemiBold" pitchFamily="34" charset="-120"/>
-              </a:rPr>
-              <a:t>Developed se_vault based on file_vault</a:t>
-            </a:r>
-          </a:p>
-          <a:p>
-            <a:pPr marL="0" indent="0" algn="l">
-              <a:lnSpc>
-                <a:spcPts val="2400"/>
-              </a:lnSpc>
-              <a:spcAft>
-                <a:spcPts val="400"/>
-              </a:spcAft>
-              <a:buNone/>
-            </a:pPr>
-            <a:r>
-              <a:rPr lang="en-US" sz="1800" dirty="0">
-                <a:solidFill>
-                  <a:srgbClr val="6FE34B"/>
-                </a:solidFill>
-                <a:latin typeface="Montserrat Medium" pitchFamily="34" charset="0"/>
-                <a:ea typeface="Montserrat Medium" pitchFamily="34" charset="-122"/>
-                <a:cs typeface="Montserrat Medium" pitchFamily="34" charset="-120"/>
-              </a:rPr>
-              <a:t>Improvements</a:t>
-            </a:r>
-          </a:p>
-          <a:p>
-            <a:pPr marL="285750" indent="-285750" algn="l">
-              <a:lnSpc>
-                <a:spcPts val="2300"/>
-              </a:lnSpc>
-              <a:spcAft>
-                <a:spcPts val="300"/>
-              </a:spcAft>
-              <a:buFont typeface="Arial" pitchFamily="34" charset="0"/>
-              <a:buChar char="•"/>
-            </a:pPr>
-            <a:r>
-              <a:rPr lang="en-US" sz="1700" dirty="0">
-                <a:solidFill>
-                  <a:srgbClr val="FFFFFF"/>
-                </a:solidFill>
-                <a:latin typeface="IBM Plex Sans Regular" pitchFamily="34" charset="0"/>
-                <a:ea typeface="IBM Plex Sans Regular" pitchFamily="34" charset="-122"/>
-                <a:cs typeface="IBM Plex Sans Regular" pitchFamily="34" charset="-120"/>
-              </a:rPr>
-              <a:t>Security gain: snapshot encryption enabled</a:t>
-            </a:r>
-          </a:p>
-          <a:p>
-            <a:pPr marL="285750" indent="-285750" algn="l">
-              <a:lnSpc>
-                <a:spcPts val="2300"/>
-              </a:lnSpc>
-              <a:spcAft>
-                <a:spcPts val="900"/>
-              </a:spcAft>
-              <a:buFont typeface="Arial" pitchFamily="34" charset="0"/>
-              <a:buChar char="•"/>
-            </a:pPr>
-            <a:r>
-              <a:rPr lang="en-US" sz="1700" dirty="0">
-                <a:solidFill>
-                  <a:srgbClr val="FFFFFF"/>
-                </a:solidFill>
-                <a:latin typeface="IBM Plex Sans Regular" pitchFamily="34" charset="0"/>
-                <a:ea typeface="IBM Plex Sans Regular" pitchFamily="34" charset="-122"/>
-                <a:cs typeface="IBM Plex Sans Regular" pitchFamily="34" charset="-120"/>
-              </a:rPr>
-              <a:t>Integrity gain: SHA-256 at block level (Tresor) and hash at FS level (Snapper)</a:t>
-            </a:r>
-          </a:p>
-          <a:p>
-            <a:pPr marL="0" indent="0" algn="l">
-              <a:lnSpc>
-                <a:spcPts val="2400"/>
-              </a:lnSpc>
-              <a:spcAft>
-                <a:spcPts val="900"/>
-              </a:spcAft>
-              <a:buNone/>
-            </a:pPr>
-            <a:r>
-              <a:rPr lang="en-US" sz="1800" b="1" dirty="0">
-                <a:solidFill>
-                  <a:srgbClr val="6FE34B"/>
-                </a:solidFill>
-                <a:latin typeface="Montserrat SemiBold" pitchFamily="34" charset="0"/>
-                <a:ea typeface="Montserrat SemiBold" pitchFamily="34" charset="-122"/>
-                <a:cs typeface="Montserrat SemiBold" pitchFamily="34" charset="-120"/>
-              </a:rPr>
-              <a:t>First security research specifically for PhantomOS</a:t>
-            </a:r>
-          </a:p>
-          <a:p>
-            <a:pPr marL="0" indent="0" algn="l">
-              <a:lnSpc>
-                <a:spcPts val="2400"/>
-              </a:lnSpc>
-              <a:spcAft>
-                <a:spcPts val="400"/>
-              </a:spcAft>
-              <a:buNone/>
-            </a:pPr>
-            <a:r>
-              <a:rPr lang="en-US" sz="1800" dirty="0">
-                <a:solidFill>
-                  <a:srgbClr val="6FE34B"/>
-                </a:solidFill>
-                <a:latin typeface="Montserrat Medium" pitchFamily="34" charset="0"/>
-                <a:ea typeface="Montserrat Medium" pitchFamily="34" charset="-122"/>
-                <a:cs typeface="Montserrat Medium" pitchFamily="34" charset="-120"/>
-              </a:rPr>
-              <a:t>Future work</a:t>
-            </a:r>
-          </a:p>
-          <a:p>
-            <a:pPr marL="285750" indent="-285750" algn="l">
-              <a:lnSpc>
-                <a:spcPts val="2300"/>
-              </a:lnSpc>
-              <a:spcAft>
-                <a:spcPts val="300"/>
-              </a:spcAft>
-              <a:buFont typeface="Arial" pitchFamily="34" charset="0"/>
-              <a:buChar char="•"/>
-            </a:pPr>
-            <a:r>
-              <a:rPr lang="en-US" sz="1700" dirty="0">
-                <a:solidFill>
-                  <a:srgbClr val="FFFFFF"/>
-                </a:solidFill>
-                <a:latin typeface="IBM Plex Sans Regular" pitchFamily="34" charset="0"/>
-                <a:ea typeface="IBM Plex Sans Regular" pitchFamily="34" charset="-122"/>
-                <a:cs typeface="IBM Plex Sans Regular" pitchFamily="34" charset="-120"/>
-              </a:rPr>
-              <a:t>Decrease performance overhead; encrypt the isomem block device</a:t>
-            </a:r>
-          </a:p>
-          <a:p>
-            <a:pPr marL="285750" indent="-285750" algn="l">
-              <a:lnSpc>
-                <a:spcPts val="2300"/>
-              </a:lnSpc>
-              <a:spcAft>
-                <a:spcPts val="0"/>
-              </a:spcAft>
-              <a:buFont typeface="Arial" pitchFamily="34" charset="0"/>
-              <a:buChar char="•"/>
-            </a:pPr>
-            <a:r>
-              <a:rPr lang="en-US" sz="1700" dirty="0">
-                <a:solidFill>
-                  <a:srgbClr val="FFFFFF"/>
-                </a:solidFill>
-                <a:latin typeface="IBM Plex Sans Regular" pitchFamily="34" charset="0"/>
-                <a:ea typeface="IBM Plex Sans Regular" pitchFamily="34" charset="-122"/>
-                <a:cs typeface="IBM Plex Sans Regular" pitchFamily="34" charset="-120"/>
-              </a:rPr>
-              <a:t>Merge Snapper and Tresor snapshot concepts; bring the PoC to industrial scale</a:t>
-            </a:r>
+            </a:pPr>
             <a:endParaRPr lang="en-US" sz="1700" dirty="0"/>
           </a:p>
         </p:txBody>
@@ -6249,38 +6893,25 @@
           <a:bodyPr wrap="square" lIns="600000" tIns="420000" rIns="600000" bIns="420000" rtlCol="0" anchor="ctr"/>
           <a:lstStyle/>
           <a:p>
-            <a:pPr marL="0" indent="0" algn="l">
-              <a:lnSpc>
-                <a:spcPts val="2600"/>
-              </a:lnSpc>
-              <a:spcAft>
-                <a:spcPts val="350"/>
-              </a:spcAft>
-              <a:buNone/>
-            </a:pPr>
-            <a:r>
-              <a:rPr lang="en-US" sz="2000" b="1" dirty="0">
-                <a:solidFill>
-                  <a:srgbClr val="2E8B16"/>
-                </a:solidFill>
-                <a:latin typeface="Montserrat SemiBold" pitchFamily="34" charset="0"/>
-                <a:ea typeface="Montserrat SemiBold" pitchFamily="34" charset="-122"/>
-                <a:cs typeface="Montserrat SemiBold" pitchFamily="34" charset="-120"/>
-              </a:rPr>
-              <a:t>Current implementation</a:t>
-            </a:r>
-          </a:p>
-          <a:p>
-            <a:pPr marL="400000" indent="-400000" algn="l">
+            <a:pPr>
               <a:lnSpc>
                 <a:spcPts val="2400"/>
               </a:lnSpc>
               <a:spcAft>
                 <a:spcPts val="250"/>
               </a:spcAft>
-              <a:buFont typeface="Arial" pitchFamily="34" charset="0"/>
-              <a:buChar char="•"/>
-            </a:pPr>
+            </a:pPr>
+            <a:r>
+              <a:rPr lang="en-US" sz="1900" dirty="0" smtClean="0">
+                <a:solidFill>
+                  <a:srgbClr val="1A1A1A"/>
+                </a:solidFill>
+                <a:latin typeface="IBM Plex Sans Regular" pitchFamily="34" charset="0"/>
+                <a:ea typeface="IBM Plex Sans Regular" pitchFamily="34" charset="-122"/>
+                <a:cs typeface="IBM Plex Sans Regular" pitchFamily="34" charset="-120"/>
+              </a:rPr>
+              <a:t>Different </a:t>
+            </a:r>
             <a:r>
               <a:rPr lang="en-US" sz="1900" dirty="0">
                 <a:solidFill>
@@ -6290,20 +6921,48 @@
                 <a:ea typeface="IBM Plex Sans Regular" pitchFamily="34" charset="-122"/>
                 <a:cs typeface="IBM Plex Sans Regular" pitchFamily="34" charset="-120"/>
               </a:rPr>
-              <a:t>Test systems exist</a:t>
-            </a:r>
-          </a:p>
-          <a:p>
-            <a:pPr marL="400000" indent="-400000" algn="l">
+              <a:t>projects are implementing the </a:t>
+            </a:r>
+            <a:r>
+              <a:rPr lang="en-US" sz="1900" dirty="0" smtClean="0">
+                <a:solidFill>
+                  <a:srgbClr val="1A1A1A"/>
+                </a:solidFill>
+                <a:latin typeface="IBM Plex Sans Regular" pitchFamily="34" charset="0"/>
+                <a:ea typeface="IBM Plex Sans Regular" pitchFamily="34" charset="-122"/>
+                <a:cs typeface="IBM Plex Sans Regular" pitchFamily="34" charset="-120"/>
+              </a:rPr>
+              <a:t>concept</a:t>
+            </a:r>
+            <a:endParaRPr lang="ru-RU" sz="1900" dirty="0" smtClean="0">
+              <a:solidFill>
+                <a:srgbClr val="1A1A1A"/>
+              </a:solidFill>
+              <a:latin typeface="IBM Plex Sans Regular" pitchFamily="34" charset="0"/>
+              <a:ea typeface="IBM Plex Sans Regular" pitchFamily="34" charset="-122"/>
+              <a:cs typeface="IBM Plex Sans Regular" pitchFamily="34" charset="-120"/>
+            </a:endParaRPr>
+          </a:p>
+          <a:p>
+            <a:pPr>
               <a:lnSpc>
                 <a:spcPts val="2400"/>
               </a:lnSpc>
               <a:spcAft>
                 <a:spcPts val="250"/>
               </a:spcAft>
-              <a:buFont typeface="Arial" pitchFamily="34" charset="0"/>
-              <a:buChar char="•"/>
-            </a:pPr>
+            </a:pPr>
+            <a:r>
+              <a:rPr lang="en-US" sz="1900" dirty="0" err="1">
+                <a:solidFill>
+                  <a:srgbClr val="1A1A1A"/>
+                </a:solidFill>
+                <a:latin typeface="IBM Plex Sans Regular" pitchFamily="34" charset="0"/>
+                <a:ea typeface="IBM Plex Sans Regular" pitchFamily="34" charset="-122"/>
+                <a:cs typeface="IBM Plex Sans Regular" pitchFamily="34" charset="-120"/>
+              </a:rPr>
+              <a:t>PhantomOS</a:t>
+            </a:r>
             <a:r>
               <a:rPr lang="en-US" sz="1900" dirty="0">
                 <a:solidFill>
@@ -6313,31 +6972,34 @@
                 <a:ea typeface="IBM Plex Sans Regular" pitchFamily="34" charset="-122"/>
                 <a:cs typeface="IBM Plex Sans Regular" pitchFamily="34" charset="-120"/>
               </a:rPr>
-              <a:t>Embedded systems</a:t>
-            </a:r>
-          </a:p>
-          <a:p>
-            <a:pPr marL="400000" indent="-400000" algn="l">
+              <a:t> is our choice</a:t>
+            </a:r>
+            <a:endParaRPr lang="ru-RU" sz="1900" dirty="0" smtClean="0">
+              <a:solidFill>
+                <a:srgbClr val="1A1A1A"/>
+              </a:solidFill>
+              <a:latin typeface="IBM Plex Sans Regular" pitchFamily="34" charset="0"/>
+              <a:ea typeface="IBM Plex Sans Regular" pitchFamily="34" charset="-122"/>
+              <a:cs typeface="IBM Plex Sans Regular" pitchFamily="34" charset="-120"/>
+            </a:endParaRPr>
+          </a:p>
+          <a:p>
+            <a:pPr>
               <a:lnSpc>
                 <a:spcPts val="2400"/>
               </a:lnSpc>
               <a:spcAft>
-                <a:spcPts val="0"/>
-              </a:spcAft>
-              <a:buFont typeface="Arial" pitchFamily="34" charset="0"/>
-              <a:buChar char="•"/>
-            </a:pPr>
-            <a:r>
-              <a:rPr lang="en-US" sz="1900" dirty="0">
-                <a:solidFill>
-                  <a:srgbClr val="1A1A1A"/>
-                </a:solidFill>
-                <a:latin typeface="IBM Plex Sans Regular" pitchFamily="34" charset="0"/>
-                <a:ea typeface="IBM Plex Sans Regular" pitchFamily="34" charset="-122"/>
-                <a:cs typeface="IBM Plex Sans Regular" pitchFamily="34" charset="-120"/>
-              </a:rPr>
-              <a:t>No permanent physical access is required</a:t>
-            </a:r>
+                <a:spcPts val="250"/>
+              </a:spcAft>
+            </a:pPr>
+            <a:endParaRPr lang="ru-RU" sz="1900" dirty="0" smtClean="0">
+              <a:solidFill>
+                <a:srgbClr val="1A1A1A"/>
+              </a:solidFill>
+              <a:latin typeface="IBM Plex Sans Regular" pitchFamily="34" charset="0"/>
+              <a:ea typeface="IBM Plex Sans Regular" pitchFamily="34" charset="-122"/>
+              <a:cs typeface="IBM Plex Sans Regular" pitchFamily="34" charset="-120"/>
+            </a:endParaRPr>
           </a:p>
         </p:txBody>
       </p:sp>
@@ -7707,7 +8369,7 @@
             </a:r>
           </a:p>
           <a:p>
-            <a:pPr marL="400000" indent="-400000" algn="l">
+            <a:pPr marL="400000" indent="-400000">
               <a:lnSpc>
                 <a:spcPts val="2350"/>
               </a:lnSpc>
@@ -7737,7 +8399,7 @@
                 <a:ea typeface="IBM Plex Sans Regular" pitchFamily="34" charset="-122"/>
                 <a:cs typeface="IBM Plex Sans Regular" pitchFamily="34" charset="-120"/>
               </a:rPr>
-              <a:t>(via </a:t>
+              <a:t>via </a:t>
             </a:r>
             <a:r>
               <a:rPr lang="en-US" sz="1850" b="1" dirty="0" smtClean="0">
@@ -7751,7 +8413,51 @@
               <a:t>Copy-on-Write</a:t>
             </a:r>
             <a:r>
+              <a:rPr lang="ru-RU" sz="1850" dirty="0">
+                <a:solidFill>
+                  <a:srgbClr val="1A1A1A"/>
+                </a:solidFill>
+                <a:latin typeface="IBM Plex Sans Regular" pitchFamily="34" charset="0"/>
+                <a:ea typeface="IBM Plex Sans Regular" pitchFamily="34" charset="-122"/>
+                <a:cs typeface="IBM Plex Sans Regular" pitchFamily="34" charset="-120"/>
+              </a:rPr>
+              <a:t> </a:t>
+            </a:r>
+            <a:r>
+              <a:rPr lang="ru-RU" sz="1850" dirty="0" smtClean="0">
+                <a:solidFill>
+                  <a:srgbClr val="1A1A1A"/>
+                </a:solidFill>
+                <a:latin typeface="IBM Plex Sans Regular" pitchFamily="34" charset="0"/>
+                <a:ea typeface="IBM Plex Sans Regular" pitchFamily="34" charset="-122"/>
+                <a:cs typeface="IBM Plex Sans Regular" pitchFamily="34" charset="-120"/>
+              </a:rPr>
+              <a:t>(</a:t>
+            </a:r>
+            <a:r>
+              <a:rPr lang="en-US" sz="1850" dirty="0">
+                <a:solidFill>
+                  <a:srgbClr val="1A1A1A"/>
+                </a:solidFill>
+                <a:latin typeface="IBM Plex Sans Regular" pitchFamily="34" charset="0"/>
+                <a:ea typeface="IBM Plex Sans Regular" pitchFamily="34" charset="-122"/>
+                <a:cs typeface="IBM Plex Sans Regular" pitchFamily="34" charset="-120"/>
+              </a:rPr>
+              <a:t>implementation of </a:t>
+            </a:r>
+            <a:r>
               <a:rPr lang="en-US" sz="1850" dirty="0" smtClean="0">
+                <a:solidFill>
+                  <a:srgbClr val="1A1A1A"/>
+                </a:solidFill>
+                <a:latin typeface="IBM Plex Sans Regular" pitchFamily="34" charset="0"/>
+                <a:ea typeface="IBM Plex Sans Regular" pitchFamily="34" charset="-122"/>
+                <a:cs typeface="IBM Plex Sans Regular" pitchFamily="34" charset="-120"/>
+              </a:rPr>
+              <a:t>persistence</a:t>
+            </a:r>
+            <a:r>
+              <a:rPr lang="ru-RU" sz="1850" dirty="0" smtClean="0">
                 <a:solidFill>
                   <a:srgbClr val="1A1A1A"/>
                 </a:solidFill>
@@ -9172,7 +9878,7 @@
               <a:buNone/>
             </a:pPr>
             <a:r>
-              <a:rPr lang="en-US" sz="1900" b="1" dirty="0">
+              <a:rPr lang="en-US" sz="1900" b="1" dirty="0" smtClean="0">
                 <a:solidFill>
                   <a:srgbClr val="1A1A1A"/>
                 </a:solidFill>
@@ -9180,8 +9886,16 @@
                 <a:ea typeface="Montserrat SemiBold" pitchFamily="34" charset="-122"/>
                 <a:cs typeface="Montserrat SemiBold" pitchFamily="34" charset="-120"/>
               </a:rPr>
-              <a:t>Consequences</a:t>
-            </a:r>
+              <a:t>Consequence</a:t>
+            </a:r>
+            <a:endParaRPr lang="en-US" sz="1900" b="1" dirty="0">
+              <a:solidFill>
+                <a:srgbClr val="1A1A1A"/>
+              </a:solidFill>
+              <a:latin typeface="Montserrat SemiBold" pitchFamily="34" charset="0"/>
+              <a:ea typeface="Montserrat SemiBold" pitchFamily="34" charset="-122"/>
+              <a:cs typeface="Montserrat SemiBold" pitchFamily="34" charset="-120"/>
+            </a:endParaRPr>
           </a:p>
           <a:p>
             <a:pPr marL="380000" indent="-380000" algn="l">
@@ -9195,40 +9909,56 @@
               <a:buChar char="•"/>
             </a:pPr>
             <a:r>
-              <a:rPr lang="en-US" sz="1750" dirty="0">
-                <a:solidFill>
-                  <a:srgbClr val="1A1A1A"/>
-                </a:solidFill>
-                <a:latin typeface="IBM Plex Sans Regular" pitchFamily="34" charset="0"/>
-                <a:ea typeface="IBM Plex Sans Regular" pitchFamily="34" charset="-122"/>
-                <a:cs typeface="IBM Plex Sans Regular" pitchFamily="34" charset="-120"/>
-              </a:rPr>
-              <a:t>Data can be </a:t>
-            </a:r>
-            <a:r>
-              <a:rPr lang="en-US" sz="1750" b="1" dirty="0">
-                <a:solidFill>
-                  <a:srgbClr val="1A1A1A"/>
-                </a:solidFill>
-                <a:latin typeface="IBM Plex Sans Regular" pitchFamily="34" charset="0"/>
-                <a:ea typeface="IBM Plex Sans Regular" pitchFamily="34" charset="-122"/>
-                <a:cs typeface="IBM Plex Sans Regular" pitchFamily="34" charset="-120"/>
-              </a:rPr>
-              <a:t>read directly</a:t>
-            </a:r>
-          </a:p>
-          <a:p>
-            <a:pPr marL="380000" indent="-380000" algn="l">
+              <a:rPr lang="en-US" sz="1750" dirty="0" smtClean="0">
+                <a:solidFill>
+                  <a:srgbClr val="1A1A1A"/>
+                </a:solidFill>
+                <a:latin typeface="IBM Plex Sans Regular" pitchFamily="34" charset="0"/>
+                <a:ea typeface="IBM Plex Sans Regular" pitchFamily="34" charset="-122"/>
+                <a:cs typeface="IBM Plex Sans Regular" pitchFamily="34" charset="-120"/>
+              </a:rPr>
+              <a:t>Physical access attacks</a:t>
+            </a:r>
+            <a:endParaRPr lang="en-US" sz="1750" b="1" dirty="0">
+              <a:solidFill>
+                <a:srgbClr val="1A1A1A"/>
+              </a:solidFill>
+              <a:latin typeface="IBM Plex Sans Regular" pitchFamily="34" charset="0"/>
+              <a:ea typeface="IBM Plex Sans Regular" pitchFamily="34" charset="-122"/>
+              <a:cs typeface="IBM Plex Sans Regular" pitchFamily="34" charset="-120"/>
+            </a:endParaRPr>
+          </a:p>
+          <a:p>
+            <a:pPr marL="837200" lvl="1" indent="-380000">
               <a:lnSpc>
                 <a:spcPts val="2200"/>
               </a:lnSpc>
-              <a:spcAft>
-                <a:spcPts val="0"/>
-              </a:spcAft>
               <a:buFont typeface="Arial" pitchFamily="34" charset="0"/>
               <a:buChar char="•"/>
             </a:pPr>
             <a:r>
+              <a:rPr lang="en-US" sz="1750" dirty="0" smtClean="0">
+                <a:solidFill>
+                  <a:srgbClr val="1A1A1A"/>
+                </a:solidFill>
+                <a:latin typeface="IBM Plex Sans Regular" pitchFamily="34" charset="0"/>
+                <a:ea typeface="IBM Plex Sans Regular" pitchFamily="34" charset="-122"/>
+                <a:cs typeface="IBM Plex Sans Regular" pitchFamily="34" charset="-120"/>
+              </a:rPr>
+              <a:t>Reproduce</a:t>
+            </a:r>
+            <a:r>
+              <a:rPr lang="en-US" sz="1750" dirty="0" smtClean="0">
+                <a:solidFill>
+                  <a:srgbClr val="1A1A1A"/>
+                </a:solidFill>
+                <a:latin typeface="IBM Plex Sans Regular" pitchFamily="34" charset="0"/>
+                <a:ea typeface="IBM Plex Sans Regular" pitchFamily="34" charset="-122"/>
+                <a:cs typeface="IBM Plex Sans Regular" pitchFamily="34" charset="-120"/>
+              </a:rPr>
+              <a:t> the machine </a:t>
+            </a:r>
+            <a:r>
               <a:rPr lang="en-US" sz="1750" dirty="0">
                 <a:solidFill>
                   <a:srgbClr val="1A1A1A"/>
@@ -9237,18 +9967,7 @@
                 <a:ea typeface="IBM Plex Sans Regular" pitchFamily="34" charset="-122"/>
                 <a:cs typeface="IBM Plex Sans Regular" pitchFamily="34" charset="-120"/>
               </a:rPr>
-              <a:t>Ability to </a:t>
-            </a:r>
-            <a:r>
-              <a:rPr lang="en-US" sz="1750" b="1" dirty="0">
-                <a:solidFill>
-                  <a:srgbClr val="1A1A1A"/>
-                </a:solidFill>
-                <a:latin typeface="IBM Plex Sans Regular" pitchFamily="34" charset="0"/>
-                <a:ea typeface="IBM Plex Sans Regular" pitchFamily="34" charset="-122"/>
-                <a:cs typeface="IBM Plex Sans Regular" pitchFamily="34" charset="-120"/>
-              </a:rPr>
-              <a:t>restore the complete state</a:t>
+              <a:t>state</a:t>
             </a:r>
           </a:p>
         </p:txBody>

--- a/presentation/slides_main.pptx
+++ b/presentation/slides_main.pptx
@@ -21,49 +21,50 @@
     <p:sldId id="266" r:id="rId16"/>
     <p:sldId id="267" r:id="rId17"/>
     <p:sldId id="268" r:id="rId18"/>
+    <p:sldId id="269" r:id="rId19"/>
   </p:sldIdLst>
   <p:sldSz cy="10287000" cx="18288000"/>
   <p:notesSz cx="10287000" cy="18288000"/>
   <p:embeddedFontLst>
     <p:embeddedFont>
       <p:font typeface="IBM Plex Sans"/>
-      <p:regular r:id="rId19"/>
-      <p:bold r:id="rId20"/>
-      <p:italic r:id="rId21"/>
-      <p:boldItalic r:id="rId22"/>
+      <p:regular r:id="rId20"/>
+      <p:bold r:id="rId21"/>
+      <p:italic r:id="rId22"/>
+      <p:boldItalic r:id="rId23"/>
     </p:embeddedFont>
     <p:embeddedFont>
       <p:font typeface="Montserrat SemiBold"/>
-      <p:regular r:id="rId23"/>
-      <p:bold r:id="rId24"/>
-      <p:italic r:id="rId25"/>
-      <p:boldItalic r:id="rId26"/>
+      <p:regular r:id="rId24"/>
+      <p:bold r:id="rId25"/>
+      <p:italic r:id="rId26"/>
+      <p:boldItalic r:id="rId27"/>
     </p:embeddedFont>
     <p:embeddedFont>
       <p:font typeface="Montserrat"/>
-      <p:bold r:id="rId27"/>
-      <p:boldItalic r:id="rId28"/>
+      <p:bold r:id="rId28"/>
+      <p:boldItalic r:id="rId29"/>
     </p:embeddedFont>
     <p:embeddedFont>
       <p:font typeface="Montserrat Medium"/>
-      <p:regular r:id="rId29"/>
-      <p:bold r:id="rId30"/>
-      <p:italic r:id="rId31"/>
-      <p:boldItalic r:id="rId32"/>
+      <p:regular r:id="rId30"/>
+      <p:bold r:id="rId31"/>
+      <p:italic r:id="rId32"/>
+      <p:boldItalic r:id="rId33"/>
     </p:embeddedFont>
     <p:embeddedFont>
       <p:font typeface="IBM Plex Sans Medium"/>
-      <p:regular r:id="rId33"/>
-      <p:bold r:id="rId34"/>
-      <p:italic r:id="rId35"/>
-      <p:boldItalic r:id="rId36"/>
+      <p:regular r:id="rId34"/>
+      <p:bold r:id="rId35"/>
+      <p:italic r:id="rId36"/>
+      <p:boldItalic r:id="rId37"/>
     </p:embeddedFont>
     <p:embeddedFont>
       <p:font typeface="IBM Plex Mono"/>
-      <p:regular r:id="rId37"/>
-      <p:bold r:id="rId38"/>
-      <p:italic r:id="rId39"/>
-      <p:boldItalic r:id="rId40"/>
+      <p:regular r:id="rId38"/>
+      <p:bold r:id="rId39"/>
+      <p:italic r:id="rId40"/>
+      <p:boldItalic r:id="rId41"/>
     </p:embeddedFont>
   </p:embeddedFontLst>
   <p:defaultTextStyle>
@@ -835,7 +836,7 @@
   <p:cSld>
     <p:spTree>
       <p:nvGrpSpPr>
-        <p:cNvPr id="106" name="Shape 106"/>
+        <p:cNvPr id="102" name="Shape 102"/>
         <p:cNvGrpSpPr/>
         <p:nvPr/>
       </p:nvGrpSpPr>
@@ -849,7 +850,7 @@
       </p:grpSpPr>
       <p:sp>
         <p:nvSpPr>
-          <p:cNvPr id="107" name="Google Shape;107;p15:notes"/>
+          <p:cNvPr id="103" name="Google Shape;103;p13:notes"/>
           <p:cNvSpPr txBox="1"/>
           <p:nvPr>
             <p:ph idx="1" type="body"/>
@@ -888,7 +889,7 @@
       </p:sp>
       <p:sp>
         <p:nvSpPr>
-          <p:cNvPr id="108" name="Google Shape;108;p15:notes"/>
+          <p:cNvPr id="104" name="Google Shape;104;p13:notes"/>
           <p:cNvSpPr/>
           <p:nvPr>
             <p:ph idx="2" type="sldImg"/>
@@ -948,7 +949,7 @@
       </p:grpSpPr>
       <p:sp>
         <p:nvSpPr>
-          <p:cNvPr id="115" name="Google Shape;115;p16:notes"/>
+          <p:cNvPr id="115" name="Google Shape;115;p15:notes"/>
           <p:cNvSpPr txBox="1"/>
           <p:nvPr>
             <p:ph idx="1" type="body"/>
@@ -987,7 +988,7 @@
       </p:sp>
       <p:sp>
         <p:nvSpPr>
-          <p:cNvPr id="116" name="Google Shape;116;p16:notes"/>
+          <p:cNvPr id="116" name="Google Shape;116;p15:notes"/>
           <p:cNvSpPr/>
           <p:nvPr>
             <p:ph idx="2" type="sldImg"/>
@@ -1033,7 +1034,7 @@
   <p:cSld>
     <p:spTree>
       <p:nvGrpSpPr>
-        <p:cNvPr id="126" name="Shape 126"/>
+        <p:cNvPr id="122" name="Shape 122"/>
         <p:cNvGrpSpPr/>
         <p:nvPr/>
       </p:nvGrpSpPr>
@@ -1047,7 +1048,7 @@
       </p:grpSpPr>
       <p:sp>
         <p:nvSpPr>
-          <p:cNvPr id="127" name="Google Shape;127;p20:notes"/>
+          <p:cNvPr id="123" name="Google Shape;123;p16:notes"/>
           <p:cNvSpPr txBox="1"/>
           <p:nvPr>
             <p:ph idx="1" type="body"/>
@@ -1086,7 +1087,7 @@
       </p:sp>
       <p:sp>
         <p:nvSpPr>
-          <p:cNvPr id="128" name="Google Shape;128;p20:notes"/>
+          <p:cNvPr id="124" name="Google Shape;124;p16:notes"/>
           <p:cNvSpPr/>
           <p:nvPr>
             <p:ph idx="2" type="sldImg"/>
@@ -1132,7 +1133,7 @@
   <p:cSld>
     <p:spTree>
       <p:nvGrpSpPr>
-        <p:cNvPr id="138" name="Shape 138"/>
+        <p:cNvPr id="134" name="Shape 134"/>
         <p:cNvGrpSpPr/>
         <p:nvPr/>
       </p:nvGrpSpPr>
@@ -1146,7 +1147,7 @@
       </p:grpSpPr>
       <p:sp>
         <p:nvSpPr>
-          <p:cNvPr id="139" name="Google Shape;139;p21:notes"/>
+          <p:cNvPr id="135" name="Google Shape;135;p20:notes"/>
           <p:cNvSpPr txBox="1"/>
           <p:nvPr>
             <p:ph idx="1" type="body"/>
@@ -1185,7 +1186,106 @@
       </p:sp>
       <p:sp>
         <p:nvSpPr>
-          <p:cNvPr id="140" name="Google Shape;140;p21:notes"/>
+          <p:cNvPr id="136" name="Google Shape;136;p20:notes"/>
+          <p:cNvSpPr/>
+          <p:nvPr>
+            <p:ph idx="2" type="sldImg"/>
+          </p:nvPr>
+        </p:nvSpPr>
+        <p:spPr>
+          <a:xfrm>
+            <a:off x="1714825" y="1371600"/>
+            <a:ext cx="6858325" cy="6858000"/>
+          </a:xfrm>
+          <a:custGeom>
+            <a:rect b="b" l="l" r="r" t="t"/>
+            <a:pathLst>
+              <a:path extrusionOk="0" h="120000" w="120000">
+                <a:moveTo>
+                  <a:pt x="0" y="0"/>
+                </a:moveTo>
+                <a:lnTo>
+                  <a:pt x="120000" y="0"/>
+                </a:lnTo>
+                <a:lnTo>
+                  <a:pt x="120000" y="120000"/>
+                </a:lnTo>
+                <a:lnTo>
+                  <a:pt x="0" y="120000"/>
+                </a:lnTo>
+                <a:close/>
+              </a:path>
+            </a:pathLst>
+          </a:custGeom>
+        </p:spPr>
+      </p:sp>
+    </p:spTree>
+  </p:cSld>
+  <p:clrMapOvr>
+    <a:masterClrMapping/>
+  </p:clrMapOvr>
+</p:notes>
+</file>
+
+<file path=ppt/notesSlides/notesSlide14.xml><?xml version="1.0" encoding="utf-8"?>
+<p:notes xmlns:a="http://schemas.openxmlformats.org/drawingml/2006/main" xmlns:r="http://schemas.openxmlformats.org/officeDocument/2006/relationships" xmlns:mc="http://schemas.openxmlformats.org/markup-compatibility/2006" xmlns:mv="urn:schemas-microsoft-com:mac:vml" xmlns:p="http://schemas.openxmlformats.org/presentationml/2006/main" xmlns:c="http://schemas.openxmlformats.org/drawingml/2006/chart" xmlns:dgm="http://schemas.openxmlformats.org/drawingml/2006/diagram" xmlns:o="urn:schemas-microsoft-com:office:office" xmlns:v="urn:schemas-microsoft-com:vml" xmlns:pvml="urn:schemas-microsoft-com:office:powerpoint" xmlns:com="http://schemas.openxmlformats.org/drawingml/2006/compatibility" xmlns:p14="http://schemas.microsoft.com/office/powerpoint/2010/main" xmlns:p15="http://schemas.microsoft.com/office/powerpoint/2012/main" xmlns:ahyp="http://schemas.microsoft.com/office/drawing/2018/hyperlinkcolor" showMasterPhAnim="0" showMasterSp="0">
+  <p:cSld>
+    <p:spTree>
+      <p:nvGrpSpPr>
+        <p:cNvPr id="146" name="Shape 146"/>
+        <p:cNvGrpSpPr/>
+        <p:nvPr/>
+      </p:nvGrpSpPr>
+      <p:grpSpPr>
+        <a:xfrm>
+          <a:off x="0" y="0"/>
+          <a:ext cx="0" cy="0"/>
+          <a:chOff x="0" y="0"/>
+          <a:chExt cx="0" cy="0"/>
+        </a:xfrm>
+      </p:grpSpPr>
+      <p:sp>
+        <p:nvSpPr>
+          <p:cNvPr id="147" name="Google Shape;147;p21:notes"/>
+          <p:cNvSpPr txBox="1"/>
+          <p:nvPr>
+            <p:ph idx="1" type="body"/>
+          </p:nvPr>
+        </p:nvSpPr>
+        <p:spPr>
+          <a:xfrm>
+            <a:off x="1028700" y="8686800"/>
+            <a:ext cx="8229600" cy="8229600"/>
+          </a:xfrm>
+          <a:prstGeom prst="rect">
+            <a:avLst/>
+          </a:prstGeom>
+        </p:spPr>
+        <p:txBody>
+          <a:bodyPr anchorCtr="0" anchor="t" bIns="91425" lIns="91425" spcFirstLastPara="1" rIns="91425" wrap="square" tIns="91425">
+            <a:noAutofit/>
+          </a:bodyPr>
+          <a:lstStyle/>
+          <a:p>
+            <a:pPr indent="0" lvl="0" marL="0" rtl="0" algn="l">
+              <a:spcBef>
+                <a:spcPts val="0"/>
+              </a:spcBef>
+              <a:spcAft>
+                <a:spcPts val="0"/>
+              </a:spcAft>
+              <a:buNone/>
+            </a:pPr>
+            <a:r>
+              <a:t/>
+            </a:r>
+            <a:endParaRPr/>
+          </a:p>
+        </p:txBody>
+      </p:sp>
+      <p:sp>
+        <p:nvSpPr>
+          <p:cNvPr id="148" name="Google Shape;148;p21:notes"/>
           <p:cNvSpPr/>
           <p:nvPr>
             <p:ph idx="2" type="sldImg"/>
@@ -1839,7 +1939,7 @@
       </p:grpSpPr>
       <p:sp>
         <p:nvSpPr>
-          <p:cNvPr id="85" name="Google Shape;85;p10:notes"/>
+          <p:cNvPr id="85" name="Google Shape;85;g3ec59441aad_1_25:notes"/>
           <p:cNvSpPr txBox="1"/>
           <p:nvPr>
             <p:ph idx="1" type="body"/>
@@ -1878,7 +1978,7 @@
       </p:sp>
       <p:sp>
         <p:nvSpPr>
-          <p:cNvPr id="86" name="Google Shape;86;p10:notes"/>
+          <p:cNvPr id="86" name="Google Shape;86;g3ec59441aad_1_25:notes"/>
           <p:cNvSpPr/>
           <p:nvPr>
             <p:ph idx="2" type="sldImg"/>
@@ -1887,7 +1987,7 @@
         <p:spPr>
           <a:xfrm>
             <a:off x="1714825" y="1371600"/>
-            <a:ext cx="6858325" cy="6858000"/>
+            <a:ext cx="6858300" cy="6858000"/>
           </a:xfrm>
           <a:custGeom>
             <a:rect b="b" l="l" r="r" t="t"/>
@@ -1924,7 +2024,7 @@
   <p:cSld>
     <p:spTree>
       <p:nvGrpSpPr>
-        <p:cNvPr id="94" name="Shape 94"/>
+        <p:cNvPr id="92" name="Shape 92"/>
         <p:cNvGrpSpPr/>
         <p:nvPr/>
       </p:nvGrpSpPr>
@@ -1938,7 +2038,7 @@
       </p:grpSpPr>
       <p:sp>
         <p:nvSpPr>
-          <p:cNvPr id="95" name="Google Shape;95;p13:notes"/>
+          <p:cNvPr id="93" name="Google Shape;93;p10:notes"/>
           <p:cNvSpPr txBox="1"/>
           <p:nvPr>
             <p:ph idx="1" type="body"/>
@@ -1977,7 +2077,7 @@
       </p:sp>
       <p:sp>
         <p:nvSpPr>
-          <p:cNvPr id="96" name="Google Shape;96;p13:notes"/>
+          <p:cNvPr id="94" name="Google Shape;94;p10:notes"/>
           <p:cNvSpPr/>
           <p:nvPr>
             <p:ph idx="2" type="sldImg"/>
@@ -3226,7 +3326,7 @@
     </p:bg>
     <p:spTree>
       <p:nvGrpSpPr>
-        <p:cNvPr id="109" name="Shape 109"/>
+        <p:cNvPr id="105" name="Shape 105"/>
         <p:cNvGrpSpPr/>
         <p:nvPr/>
       </p:nvGrpSpPr>
@@ -3240,7 +3340,7 @@
       </p:grpSpPr>
       <p:sp>
         <p:nvSpPr>
-          <p:cNvPr id="110" name="Google Shape;110;p12"/>
+          <p:cNvPr id="106" name="Google Shape;106;p12"/>
           <p:cNvSpPr/>
           <p:nvPr/>
         </p:nvSpPr>
@@ -3290,29 +3390,598 @@
                 <a:cs typeface="Montserrat"/>
                 <a:sym typeface="Montserrat"/>
               </a:rPr>
-              <a:t>System Architecture</a:t>
+              <a:t>Implementation</a:t>
             </a:r>
             <a:endParaRPr/>
           </a:p>
         </p:txBody>
       </p:sp>
-      <p:pic>
-        <p:nvPicPr>
-          <p:cNvPr id="111" name="Google Shape;111;p12"/>
-          <p:cNvPicPr preferRelativeResize="0"/>
+      <p:sp>
+        <p:nvSpPr>
+          <p:cNvPr id="107" name="Google Shape;107;p12"/>
+          <p:cNvSpPr/>
           <p:nvPr/>
-        </p:nvPicPr>
-        <p:blipFill rotWithShape="1">
-          <a:blip r:embed="rId3">
-            <a:alphaModFix/>
-          </a:blip>
-          <a:srcRect b="0" l="0" r="0" t="0"/>
-          <a:stretch/>
-        </p:blipFill>
+        </p:nvSpPr>
         <p:spPr>
           <a:xfrm>
-            <a:off x="4343897" y="1600000"/>
-            <a:ext cx="9751478" cy="8295300"/>
+            <a:off x="1095375" y="1900000"/>
+            <a:ext cx="7700100" cy="3725700"/>
+          </a:xfrm>
+          <a:prstGeom prst="roundRect">
+            <a:avLst>
+              <a:gd fmla="val 6000" name="adj"/>
+            </a:avLst>
+          </a:prstGeom>
+          <a:solidFill>
+            <a:srgbClr val="EEF1F4"/>
+          </a:solidFill>
+          <a:ln>
+            <a:noFill/>
+          </a:ln>
+        </p:spPr>
+        <p:txBody>
+          <a:bodyPr anchorCtr="0" anchor="t" bIns="364000" lIns="520000" spcFirstLastPara="1" rIns="520000" wrap="square" tIns="364000">
+            <a:noAutofit/>
+          </a:bodyPr>
+          <a:lstStyle/>
+          <a:p>
+            <a:pPr indent="0" lvl="0" marL="0" marR="0" rtl="0" algn="l">
+              <a:lnSpc>
+                <a:spcPct val="126315"/>
+              </a:lnSpc>
+              <a:spcBef>
+                <a:spcPts val="0"/>
+              </a:spcBef>
+              <a:spcAft>
+                <a:spcPts val="0"/>
+              </a:spcAft>
+              <a:buClr>
+                <a:srgbClr val="1A1A1A"/>
+              </a:buClr>
+              <a:buSzPts val="1900"/>
+              <a:buFont typeface="Montserrat SemiBold"/>
+              <a:buNone/>
+            </a:pPr>
+            <a:r>
+              <a:rPr b="1" i="0" lang="en-US" sz="1900" u="none" cap="none" strike="noStrike">
+                <a:solidFill>
+                  <a:srgbClr val="1A1A1A"/>
+                </a:solidFill>
+                <a:latin typeface="Montserrat SemiBold"/>
+                <a:ea typeface="Montserrat SemiBold"/>
+                <a:cs typeface="Montserrat SemiBold"/>
+                <a:sym typeface="Montserrat SemiBold"/>
+              </a:rPr>
+              <a:t>Built on file_vault</a:t>
+            </a:r>
+            <a:r>
+              <a:rPr b="1" baseline="30000" i="0" lang="en-US" sz="1900" u="none" cap="none" strike="noStrike">
+                <a:solidFill>
+                  <a:srgbClr val="1A1A1A"/>
+                </a:solidFill>
+                <a:latin typeface="Montserrat SemiBold"/>
+                <a:ea typeface="Montserrat SemiBold"/>
+                <a:cs typeface="Montserrat SemiBold"/>
+                <a:sym typeface="Montserrat SemiBold"/>
+              </a:rPr>
+              <a:t>2</a:t>
+            </a:r>
+            <a:r>
+              <a:rPr b="1" i="0" lang="en-US" sz="1900" u="none" cap="none" strike="noStrike">
+                <a:solidFill>
+                  <a:srgbClr val="1A1A1A"/>
+                </a:solidFill>
+                <a:latin typeface="Montserrat SemiBold"/>
+                <a:ea typeface="Montserrat SemiBold"/>
+                <a:cs typeface="Montserrat SemiBold"/>
+                <a:sym typeface="Montserrat SemiBold"/>
+              </a:rPr>
+              <a:t> (based on Tresor)</a:t>
+            </a:r>
+            <a:r>
+              <a:rPr b="1" lang="en-US" sz="1900">
+                <a:solidFill>
+                  <a:srgbClr val="1A1A1A"/>
+                </a:solidFill>
+                <a:latin typeface="Montserrat SemiBold"/>
+                <a:ea typeface="Montserrat SemiBold"/>
+                <a:cs typeface="Montserrat SemiBold"/>
+                <a:sym typeface="Montserrat SemiBold"/>
+              </a:rPr>
+              <a:t>:</a:t>
+            </a:r>
+            <a:endParaRPr b="1" i="0" sz="1900" u="none" cap="none" strike="noStrike">
+              <a:solidFill>
+                <a:srgbClr val="1A1A1A"/>
+              </a:solidFill>
+              <a:latin typeface="Montserrat SemiBold"/>
+              <a:ea typeface="Montserrat SemiBold"/>
+              <a:cs typeface="Montserrat SemiBold"/>
+              <a:sym typeface="Montserrat SemiBold"/>
+            </a:endParaRPr>
+          </a:p>
+          <a:p>
+            <a:pPr indent="-380000" lvl="0" marL="380000" marR="0" rtl="0" algn="l">
+              <a:lnSpc>
+                <a:spcPct val="126470"/>
+              </a:lnSpc>
+              <a:spcBef>
+                <a:spcPts val="300"/>
+              </a:spcBef>
+              <a:spcAft>
+                <a:spcPts val="0"/>
+              </a:spcAft>
+              <a:buClr>
+                <a:srgbClr val="1A1A1A"/>
+              </a:buClr>
+              <a:buSzPts val="1700"/>
+              <a:buFont typeface="Arial"/>
+              <a:buChar char="•"/>
+            </a:pPr>
+            <a:r>
+              <a:rPr b="0" i="0" lang="en-US" sz="1700" u="none" cap="none" strike="noStrike">
+                <a:solidFill>
+                  <a:srgbClr val="1A1A1A"/>
+                </a:solidFill>
+                <a:latin typeface="IBM Plex Sans"/>
+                <a:ea typeface="IBM Plex Sans"/>
+                <a:cs typeface="IBM Plex Sans"/>
+                <a:sym typeface="IBM Plex Sans"/>
+              </a:rPr>
+              <a:t>Tresor: AES on 4K blocks, SHA-256 integrity, CoW atomicity</a:t>
+            </a:r>
+            <a:endParaRPr/>
+          </a:p>
+          <a:p>
+            <a:pPr indent="-380000" lvl="0" marL="380000" marR="0" rtl="0" algn="l">
+              <a:lnSpc>
+                <a:spcPct val="126470"/>
+              </a:lnSpc>
+              <a:spcBef>
+                <a:spcPts val="200"/>
+              </a:spcBef>
+              <a:spcAft>
+                <a:spcPts val="0"/>
+              </a:spcAft>
+              <a:buClr>
+                <a:srgbClr val="1A1A1A"/>
+              </a:buClr>
+              <a:buSzPts val="1700"/>
+              <a:buFont typeface="Arial"/>
+              <a:buChar char="•"/>
+            </a:pPr>
+            <a:r>
+              <a:rPr b="0" i="0" lang="en-US" sz="1700" u="none" cap="none" strike="noStrike">
+                <a:solidFill>
+                  <a:srgbClr val="1A1A1A"/>
+                </a:solidFill>
+                <a:latin typeface="IBM Plex Sans"/>
+                <a:ea typeface="IBM Plex Sans"/>
+                <a:cs typeface="IBM Plex Sans"/>
+                <a:sym typeface="IBM Plex Sans"/>
+              </a:rPr>
+              <a:t>file_vault: state orchestrator providing a secure FS session</a:t>
+            </a:r>
+            <a:endParaRPr/>
+          </a:p>
+        </p:txBody>
+      </p:sp>
+      <p:sp>
+        <p:nvSpPr>
+          <p:cNvPr id="108" name="Google Shape;108;p12"/>
+          <p:cNvSpPr/>
+          <p:nvPr/>
+        </p:nvSpPr>
+        <p:spPr>
+          <a:xfrm>
+            <a:off x="9395375" y="1900000"/>
+            <a:ext cx="7754700" cy="3725700"/>
+          </a:xfrm>
+          <a:prstGeom prst="roundRect">
+            <a:avLst>
+              <a:gd fmla="val 6000" name="adj"/>
+            </a:avLst>
+          </a:prstGeom>
+          <a:solidFill>
+            <a:srgbClr val="40BA21"/>
+          </a:solidFill>
+          <a:ln>
+            <a:noFill/>
+          </a:ln>
+        </p:spPr>
+        <p:txBody>
+          <a:bodyPr anchorCtr="0" anchor="t" bIns="364000" lIns="520000" spcFirstLastPara="1" rIns="520000" wrap="square" tIns="364000">
+            <a:noAutofit/>
+          </a:bodyPr>
+          <a:lstStyle/>
+          <a:p>
+            <a:pPr indent="0" lvl="0" marL="0" marR="0" rtl="0" algn="l">
+              <a:lnSpc>
+                <a:spcPct val="126315"/>
+              </a:lnSpc>
+              <a:spcBef>
+                <a:spcPts val="0"/>
+              </a:spcBef>
+              <a:spcAft>
+                <a:spcPts val="0"/>
+              </a:spcAft>
+              <a:buClr>
+                <a:srgbClr val="FFFFFF"/>
+              </a:buClr>
+              <a:buSzPts val="1900"/>
+              <a:buFont typeface="Montserrat SemiBold"/>
+              <a:buNone/>
+            </a:pPr>
+            <a:r>
+              <a:rPr b="1" i="0" lang="en-US" sz="1900" u="none" cap="none" strike="noStrike">
+                <a:solidFill>
+                  <a:srgbClr val="FFFFFF"/>
+                </a:solidFill>
+                <a:latin typeface="Montserrat SemiBold"/>
+                <a:ea typeface="Montserrat SemiBold"/>
+                <a:cs typeface="Montserrat SemiBold"/>
+                <a:sym typeface="Montserrat SemiBold"/>
+              </a:rPr>
+              <a:t>Implemented se_vault</a:t>
+            </a:r>
+            <a:r>
+              <a:rPr b="1" baseline="30000" i="0" lang="en-US" sz="1900" u="none" cap="none" strike="noStrike">
+                <a:solidFill>
+                  <a:srgbClr val="FFFFFF"/>
+                </a:solidFill>
+                <a:latin typeface="Montserrat SemiBold"/>
+                <a:ea typeface="Montserrat SemiBold"/>
+                <a:cs typeface="Montserrat SemiBold"/>
+                <a:sym typeface="Montserrat SemiBold"/>
+              </a:rPr>
+              <a:t>1</a:t>
+            </a:r>
+            <a:r>
+              <a:rPr b="1" i="0" lang="en-US" sz="1900" u="none" cap="none" strike="noStrike">
+                <a:solidFill>
+                  <a:srgbClr val="FFFFFF"/>
+                </a:solidFill>
+                <a:latin typeface="Montserrat SemiBold"/>
+                <a:ea typeface="Montserrat SemiBold"/>
+                <a:cs typeface="Montserrat SemiBold"/>
+                <a:sym typeface="Montserrat SemiBold"/>
+              </a:rPr>
+              <a:t>  as modified file_vault</a:t>
+            </a:r>
+            <a:endParaRPr b="1" i="0" sz="1900" u="none" cap="none" strike="noStrike">
+              <a:solidFill>
+                <a:srgbClr val="FFFFFF"/>
+              </a:solidFill>
+              <a:latin typeface="Montserrat SemiBold"/>
+              <a:ea typeface="Montserrat SemiBold"/>
+              <a:cs typeface="Montserrat SemiBold"/>
+              <a:sym typeface="Montserrat SemiBold"/>
+            </a:endParaRPr>
+          </a:p>
+          <a:p>
+            <a:pPr indent="0" lvl="0" marL="0" marR="0" rtl="0" algn="l">
+              <a:lnSpc>
+                <a:spcPct val="126315"/>
+              </a:lnSpc>
+              <a:spcBef>
+                <a:spcPts val="300"/>
+              </a:spcBef>
+              <a:spcAft>
+                <a:spcPts val="0"/>
+              </a:spcAft>
+              <a:buClr>
+                <a:srgbClr val="FFFFFF"/>
+              </a:buClr>
+              <a:buSzPts val="1900"/>
+              <a:buFont typeface="Montserrat SemiBold"/>
+              <a:buNone/>
+            </a:pPr>
+            <a:r>
+              <a:rPr b="1" i="0" lang="en-US" sz="1900" u="none" cap="none" strike="noStrike">
+                <a:solidFill>
+                  <a:srgbClr val="FFFFFF"/>
+                </a:solidFill>
+                <a:latin typeface="Montserrat SemiBold"/>
+                <a:ea typeface="Montserrat SemiBold"/>
+                <a:cs typeface="Montserrat SemiBold"/>
+                <a:sym typeface="Montserrat SemiBold"/>
+              </a:rPr>
+              <a:t>Changes:</a:t>
+            </a:r>
+            <a:endParaRPr b="1" i="0" sz="1900" u="none" cap="none" strike="noStrike">
+              <a:solidFill>
+                <a:srgbClr val="FFFFFF"/>
+              </a:solidFill>
+              <a:latin typeface="Montserrat SemiBold"/>
+              <a:ea typeface="Montserrat SemiBold"/>
+              <a:cs typeface="Montserrat SemiBold"/>
+              <a:sym typeface="Montserrat SemiBold"/>
+            </a:endParaRPr>
+          </a:p>
+          <a:p>
+            <a:pPr indent="-366350" lvl="0" marL="360000" marR="0" rtl="0" algn="l">
+              <a:lnSpc>
+                <a:spcPct val="128125"/>
+              </a:lnSpc>
+              <a:spcBef>
+                <a:spcPts val="300"/>
+              </a:spcBef>
+              <a:spcAft>
+                <a:spcPts val="0"/>
+              </a:spcAft>
+              <a:buClr>
+                <a:srgbClr val="FFFFFF"/>
+              </a:buClr>
+              <a:buSzPts val="1700"/>
+              <a:buFont typeface="Arial"/>
+              <a:buChar char="•"/>
+            </a:pPr>
+            <a:r>
+              <a:rPr b="0" i="0" lang="en-US" sz="1700" u="none" cap="none" strike="noStrike">
+                <a:solidFill>
+                  <a:srgbClr val="FFFFFF"/>
+                </a:solidFill>
+                <a:latin typeface="IBM Plex Sans"/>
+                <a:ea typeface="IBM Plex Sans"/>
+                <a:cs typeface="IBM Plex Sans"/>
+                <a:sym typeface="IBM Plex Sans"/>
+              </a:rPr>
+              <a:t>Headless operation</a:t>
+            </a:r>
+            <a:endParaRPr sz="1700"/>
+          </a:p>
+          <a:p>
+            <a:pPr indent="-366350" lvl="0" marL="360000" marR="0" rtl="0" algn="l">
+              <a:lnSpc>
+                <a:spcPct val="128125"/>
+              </a:lnSpc>
+              <a:spcBef>
+                <a:spcPts val="150"/>
+              </a:spcBef>
+              <a:spcAft>
+                <a:spcPts val="0"/>
+              </a:spcAft>
+              <a:buClr>
+                <a:srgbClr val="FFFFFF"/>
+              </a:buClr>
+              <a:buSzPts val="1700"/>
+              <a:buFont typeface="Arial"/>
+              <a:buChar char="•"/>
+            </a:pPr>
+            <a:r>
+              <a:rPr b="0" i="0" lang="en-US" sz="1700" u="none" cap="none" strike="noStrike">
+                <a:solidFill>
+                  <a:srgbClr val="FFFFFF"/>
+                </a:solidFill>
+                <a:latin typeface="IBM Plex Sans"/>
+                <a:ea typeface="IBM Plex Sans"/>
+                <a:cs typeface="IBM Plex Sans"/>
+                <a:sym typeface="IBM Plex Sans"/>
+              </a:rPr>
+              <a:t>Passphrase replaced </a:t>
+            </a:r>
+            <a:r>
+              <a:rPr b="1" i="0" lang="en-US" sz="1700" u="none" cap="none" strike="noStrike">
+                <a:solidFill>
+                  <a:srgbClr val="FFFFFF"/>
+                </a:solidFill>
+                <a:latin typeface="IBM Plex Sans"/>
+                <a:ea typeface="IBM Plex Sans"/>
+                <a:cs typeface="IBM Plex Sans"/>
+                <a:sym typeface="IBM Plex Sans"/>
+              </a:rPr>
+              <a:t>by USB key file</a:t>
+            </a:r>
+            <a:endParaRPr sz="1700"/>
+          </a:p>
+          <a:p>
+            <a:pPr indent="-366350" lvl="0" marL="360000" marR="0" rtl="0" algn="l">
+              <a:lnSpc>
+                <a:spcPct val="128125"/>
+              </a:lnSpc>
+              <a:spcBef>
+                <a:spcPts val="150"/>
+              </a:spcBef>
+              <a:spcAft>
+                <a:spcPts val="0"/>
+              </a:spcAft>
+              <a:buClr>
+                <a:srgbClr val="FFFFFF"/>
+              </a:buClr>
+              <a:buSzPts val="1700"/>
+              <a:buFont typeface="Arial"/>
+              <a:buChar char="•"/>
+            </a:pPr>
+            <a:r>
+              <a:rPr b="0" i="0" lang="en-US" sz="1700" u="none" cap="none" strike="noStrike">
+                <a:solidFill>
+                  <a:srgbClr val="FFFFFF"/>
+                </a:solidFill>
+                <a:latin typeface="IBM Plex Sans"/>
+                <a:ea typeface="IBM Plex Sans"/>
+                <a:cs typeface="IBM Plex Sans"/>
+                <a:sym typeface="IBM Plex Sans"/>
+              </a:rPr>
+              <a:t>rump_fs/ext2 replaced by </a:t>
+            </a:r>
+            <a:r>
+              <a:rPr b="1" i="0" lang="en-US" sz="1700" u="none" cap="none" strike="noStrike">
+                <a:solidFill>
+                  <a:srgbClr val="FFFFFF"/>
+                </a:solidFill>
+                <a:latin typeface="IBM Plex Sans"/>
+                <a:ea typeface="IBM Plex Sans"/>
+                <a:cs typeface="IBM Plex Sans"/>
+                <a:sym typeface="IBM Plex Sans"/>
+              </a:rPr>
+              <a:t>lwext4/ext4</a:t>
+            </a:r>
+            <a:endParaRPr sz="1700"/>
+          </a:p>
+          <a:p>
+            <a:pPr indent="-366350" lvl="0" marL="360000" marR="0" rtl="0" algn="l">
+              <a:lnSpc>
+                <a:spcPct val="128125"/>
+              </a:lnSpc>
+              <a:spcBef>
+                <a:spcPts val="150"/>
+              </a:spcBef>
+              <a:spcAft>
+                <a:spcPts val="0"/>
+              </a:spcAft>
+              <a:buClr>
+                <a:srgbClr val="FFFFFF"/>
+              </a:buClr>
+              <a:buSzPts val="1700"/>
+              <a:buFont typeface="Arial"/>
+              <a:buChar char="•"/>
+            </a:pPr>
+            <a:r>
+              <a:rPr b="0" i="0" lang="en-US" sz="1700" u="none" cap="none" strike="noStrike">
+                <a:solidFill>
+                  <a:srgbClr val="FFFFFF"/>
+                </a:solidFill>
+                <a:latin typeface="IBM Plex Sans"/>
+                <a:ea typeface="IBM Plex Sans"/>
+                <a:cs typeface="IBM Plex Sans"/>
+                <a:sym typeface="IBM Plex Sans"/>
+              </a:rPr>
+              <a:t>Added </a:t>
+            </a:r>
+            <a:r>
+              <a:rPr b="1" i="0" lang="en-US" sz="1700" u="none" cap="none" strike="noStrike">
+                <a:solidFill>
+                  <a:srgbClr val="FFFFFF"/>
+                </a:solidFill>
+                <a:latin typeface="IBM Plex Sans"/>
+                <a:ea typeface="IBM Plex Sans"/>
+                <a:cs typeface="IBM Plex Sans"/>
+                <a:sym typeface="IBM Plex Sans"/>
+              </a:rPr>
+              <a:t>fsck</a:t>
+            </a:r>
+            <a:r>
+              <a:rPr b="0" i="0" lang="en-US" sz="1700" u="none" cap="none" strike="noStrike">
+                <a:solidFill>
+                  <a:srgbClr val="FFFFFF"/>
+                </a:solidFill>
+                <a:latin typeface="IBM Plex Sans"/>
+                <a:ea typeface="IBM Plex Sans"/>
+                <a:cs typeface="IBM Plex Sans"/>
+                <a:sym typeface="IBM Plex Sans"/>
+              </a:rPr>
+              <a:t> crash-recovery support</a:t>
+            </a:r>
+            <a:endParaRPr sz="1700"/>
+          </a:p>
+          <a:p>
+            <a:pPr indent="-366350" lvl="0" marL="360000" marR="0" rtl="0" algn="l">
+              <a:lnSpc>
+                <a:spcPct val="128125"/>
+              </a:lnSpc>
+              <a:spcBef>
+                <a:spcPts val="150"/>
+              </a:spcBef>
+              <a:spcAft>
+                <a:spcPts val="0"/>
+              </a:spcAft>
+              <a:buClr>
+                <a:srgbClr val="FFFFFF"/>
+              </a:buClr>
+              <a:buSzPts val="1700"/>
+              <a:buFont typeface="Arial"/>
+              <a:buChar char="•"/>
+            </a:pPr>
+            <a:r>
+              <a:rPr b="0" i="0" lang="en-US" sz="1700" u="none" cap="none" strike="noStrike">
+                <a:solidFill>
+                  <a:srgbClr val="FFFFFF"/>
+                </a:solidFill>
+                <a:latin typeface="IBM Plex Sans"/>
+                <a:ea typeface="IBM Plex Sans"/>
+                <a:cs typeface="IBM Plex Sans"/>
+                <a:sym typeface="IBM Plex Sans"/>
+              </a:rPr>
+              <a:t>Direct block session (skip image file)</a:t>
+            </a:r>
+            <a:endParaRPr sz="1700"/>
+          </a:p>
+          <a:p>
+            <a:pPr indent="-366350" lvl="0" marL="360000" marR="0" rtl="0" algn="l">
+              <a:lnSpc>
+                <a:spcPct val="128125"/>
+              </a:lnSpc>
+              <a:spcBef>
+                <a:spcPts val="150"/>
+              </a:spcBef>
+              <a:spcAft>
+                <a:spcPts val="0"/>
+              </a:spcAft>
+              <a:buClr>
+                <a:srgbClr val="FFFFFF"/>
+              </a:buClr>
+              <a:buSzPts val="1700"/>
+              <a:buFont typeface="Arial"/>
+              <a:buChar char="•"/>
+            </a:pPr>
+            <a:r>
+              <a:rPr b="0" i="0" lang="en-US" sz="1700" u="none" cap="none" strike="noStrike">
+                <a:solidFill>
+                  <a:srgbClr val="FFFFFF"/>
+                </a:solidFill>
+                <a:latin typeface="IBM Plex Sans"/>
+                <a:ea typeface="IBM Plex Sans"/>
+                <a:cs typeface="IBM Plex Sans"/>
+                <a:sym typeface="IBM Plex Sans"/>
+              </a:rPr>
+              <a:t>All block sizes standardized to 4K</a:t>
+            </a:r>
+            <a:endParaRPr sz="1700"/>
+          </a:p>
+          <a:p>
+            <a:pPr indent="-366350" lvl="0" marL="360000" marR="0" rtl="0" algn="l">
+              <a:lnSpc>
+                <a:spcPct val="128125"/>
+              </a:lnSpc>
+              <a:spcBef>
+                <a:spcPts val="150"/>
+              </a:spcBef>
+              <a:spcAft>
+                <a:spcPts val="0"/>
+              </a:spcAft>
+              <a:buClr>
+                <a:srgbClr val="FFFFFF"/>
+              </a:buClr>
+              <a:buSzPts val="1700"/>
+              <a:buFont typeface="Arial"/>
+              <a:buChar char="•"/>
+            </a:pPr>
+            <a:r>
+              <a:rPr b="0" i="0" lang="en-US" sz="1700" u="none" cap="none" strike="noStrike">
+                <a:solidFill>
+                  <a:srgbClr val="FFFFFF"/>
+                </a:solidFill>
+                <a:latin typeface="IBM Plex Sans"/>
+                <a:ea typeface="IBM Plex Sans"/>
+                <a:cs typeface="IBM Plex Sans"/>
+                <a:sym typeface="IBM Plex Sans"/>
+              </a:rPr>
+              <a:t>Graceful shutdown sequence added</a:t>
+            </a:r>
+            <a:endParaRPr sz="1700"/>
+          </a:p>
+        </p:txBody>
+      </p:sp>
+      <p:sp>
+        <p:nvSpPr>
+          <p:cNvPr id="109" name="Google Shape;109;p12"/>
+          <p:cNvSpPr/>
+          <p:nvPr/>
+        </p:nvSpPr>
+        <p:spPr>
+          <a:xfrm>
+            <a:off x="1095375" y="8499225"/>
+            <a:ext cx="13500000" cy="1450800"/>
           </a:xfrm>
           <a:prstGeom prst="rect">
             <a:avLst/>
@@ -3322,15 +3991,332 @@
             <a:noFill/>
           </a:ln>
         </p:spPr>
-      </p:pic>
+        <p:txBody>
+          <a:bodyPr anchorCtr="0" anchor="b" bIns="0" lIns="0" spcFirstLastPara="1" rIns="0" wrap="square" tIns="0">
+            <a:noAutofit/>
+          </a:bodyPr>
+          <a:lstStyle/>
+          <a:p>
+            <a:pPr indent="0" lvl="0" marL="0" marR="0" rtl="0" algn="l">
+              <a:lnSpc>
+                <a:spcPct val="93750"/>
+              </a:lnSpc>
+              <a:spcBef>
+                <a:spcPts val="0"/>
+              </a:spcBef>
+              <a:spcAft>
+                <a:spcPts val="0"/>
+              </a:spcAft>
+              <a:buNone/>
+            </a:pPr>
+            <a:r>
+              <a:rPr b="1" baseline="30000" i="0" lang="en-US" sz="1600" u="none" cap="none" strike="noStrike">
+                <a:solidFill>
+                  <a:srgbClr val="9AA3AB"/>
+                </a:solidFill>
+                <a:latin typeface="IBM Plex Sans Medium"/>
+                <a:ea typeface="IBM Plex Sans Medium"/>
+                <a:cs typeface="IBM Plex Sans Medium"/>
+                <a:sym typeface="IBM Plex Sans Medium"/>
+              </a:rPr>
+              <a:t>1</a:t>
+            </a:r>
+            <a:r>
+              <a:rPr b="0" i="0" lang="en-US" sz="1600" u="none" cap="none" strike="noStrike">
+                <a:solidFill>
+                  <a:srgbClr val="9AA3AB"/>
+                </a:solidFill>
+                <a:latin typeface="IBM Plex Sans"/>
+                <a:ea typeface="IBM Plex Sans"/>
+                <a:cs typeface="IBM Plex Sans"/>
+                <a:sym typeface="IBM Plex Sans"/>
+              </a:rPr>
+              <a:t>https://github.com/genodelabs/genode/tree/sculpt-25.04/repos/gems/src/app/file_vault</a:t>
+            </a:r>
+            <a:endParaRPr/>
+          </a:p>
+          <a:p>
+            <a:pPr indent="0" lvl="0" marL="0" marR="0" rtl="0" algn="l">
+              <a:lnSpc>
+                <a:spcPct val="93750"/>
+              </a:lnSpc>
+              <a:spcBef>
+                <a:spcPts val="60"/>
+              </a:spcBef>
+              <a:spcAft>
+                <a:spcPts val="0"/>
+              </a:spcAft>
+              <a:buClr>
+                <a:srgbClr val="9AA3AB"/>
+              </a:buClr>
+              <a:buSzPts val="1600"/>
+              <a:buFont typeface="IBM Plex Sans Medium"/>
+              <a:buNone/>
+            </a:pPr>
+            <a:r>
+              <a:rPr b="1" baseline="30000" i="0" lang="en-US" sz="1600" u="none" cap="none" strike="noStrike">
+                <a:solidFill>
+                  <a:srgbClr val="9AA3AB"/>
+                </a:solidFill>
+                <a:latin typeface="IBM Plex Sans Medium"/>
+                <a:ea typeface="IBM Plex Sans Medium"/>
+                <a:cs typeface="IBM Plex Sans Medium"/>
+                <a:sym typeface="IBM Plex Sans Medium"/>
+              </a:rPr>
+              <a:t>2</a:t>
+            </a:r>
+            <a:r>
+              <a:rPr b="0" i="0" lang="en-US" sz="1600" u="none" cap="none" strike="noStrike">
+                <a:solidFill>
+                  <a:srgbClr val="9AA3AB"/>
+                </a:solidFill>
+                <a:latin typeface="IBM Plex Sans"/>
+                <a:ea typeface="IBM Plex Sans"/>
+                <a:cs typeface="IBM Plex Sans"/>
+                <a:sym typeface="IBM Plex Sans"/>
+              </a:rPr>
+              <a:t>https://github.com/VoronM1522/genode/tree/se/repos/gems/src/app/se_vault</a:t>
+            </a:r>
+            <a:endParaRPr b="0" i="0" sz="1600" u="none" cap="none" strike="noStrike">
+              <a:solidFill>
+                <a:srgbClr val="9AA3AB"/>
+              </a:solidFill>
+              <a:latin typeface="IBM Plex Sans"/>
+              <a:ea typeface="IBM Plex Sans"/>
+              <a:cs typeface="IBM Plex Sans"/>
+              <a:sym typeface="IBM Plex Sans"/>
+            </a:endParaRPr>
+          </a:p>
+          <a:p>
+            <a:pPr indent="0" lvl="0" marL="0" rtl="0" algn="l">
+              <a:lnSpc>
+                <a:spcPct val="93750"/>
+              </a:lnSpc>
+              <a:spcBef>
+                <a:spcPts val="60"/>
+              </a:spcBef>
+              <a:spcAft>
+                <a:spcPts val="0"/>
+              </a:spcAft>
+              <a:buClr>
+                <a:srgbClr val="9AA3AB"/>
+              </a:buClr>
+              <a:buSzPts val="1600"/>
+              <a:buFont typeface="IBM Plex Sans Medium"/>
+              <a:buNone/>
+            </a:pPr>
+            <a:r>
+              <a:rPr b="1" baseline="30000" lang="en-US" sz="1600">
+                <a:solidFill>
+                  <a:srgbClr val="9AA3AB"/>
+                </a:solidFill>
+                <a:latin typeface="IBM Plex Sans Medium"/>
+                <a:ea typeface="IBM Plex Sans Medium"/>
+                <a:cs typeface="IBM Plex Sans Medium"/>
+                <a:sym typeface="IBM Plex Sans Medium"/>
+              </a:rPr>
+              <a:t>3</a:t>
+            </a:r>
+            <a:r>
+              <a:rPr b="1" baseline="30000" lang="en-US" sz="1600">
+                <a:solidFill>
+                  <a:srgbClr val="9AA3AB"/>
+                </a:solidFill>
+                <a:latin typeface="IBM Plex Sans Medium"/>
+                <a:ea typeface="IBM Plex Sans Medium"/>
+                <a:cs typeface="IBM Plex Sans Medium"/>
+                <a:sym typeface="IBM Plex Sans Medium"/>
+              </a:rPr>
+              <a:t> </a:t>
+            </a:r>
+            <a:r>
+              <a:rPr lang="en-US" sz="1600">
+                <a:solidFill>
+                  <a:srgbClr val="9AA3AB"/>
+                </a:solidFill>
+                <a:latin typeface="IBM Plex Sans"/>
+                <a:ea typeface="IBM Plex Sans"/>
+                <a:cs typeface="IBM Plex Sans"/>
+                <a:sym typeface="IBM Plex Sans"/>
+              </a:rPr>
+              <a:t>https://github.com/VoronM1522/genode-wundertuete</a:t>
+            </a:r>
+            <a:endParaRPr sz="1600">
+              <a:solidFill>
+                <a:srgbClr val="9AA3AB"/>
+              </a:solidFill>
+              <a:latin typeface="IBM Plex Sans"/>
+              <a:ea typeface="IBM Plex Sans"/>
+              <a:cs typeface="IBM Plex Sans"/>
+              <a:sym typeface="IBM Plex Sans"/>
+            </a:endParaRPr>
+          </a:p>
+          <a:p>
+            <a:pPr indent="0" lvl="0" marL="0" rtl="0" algn="l">
+              <a:lnSpc>
+                <a:spcPct val="93750"/>
+              </a:lnSpc>
+              <a:spcBef>
+                <a:spcPts val="60"/>
+              </a:spcBef>
+              <a:spcAft>
+                <a:spcPts val="0"/>
+              </a:spcAft>
+              <a:buClr>
+                <a:srgbClr val="9AA3AB"/>
+              </a:buClr>
+              <a:buSzPts val="1600"/>
+              <a:buFont typeface="IBM Plex Sans Medium"/>
+              <a:buNone/>
+            </a:pPr>
+            <a:r>
+              <a:rPr b="1" baseline="30000" lang="en-US" sz="1600">
+                <a:solidFill>
+                  <a:srgbClr val="9AA3AB"/>
+                </a:solidFill>
+                <a:latin typeface="IBM Plex Sans Medium"/>
+                <a:ea typeface="IBM Plex Sans Medium"/>
+                <a:cs typeface="IBM Plex Sans Medium"/>
+                <a:sym typeface="IBM Plex Sans Medium"/>
+              </a:rPr>
+              <a:t>4</a:t>
+            </a:r>
+            <a:r>
+              <a:rPr lang="en-US" sz="1600">
+                <a:solidFill>
+                  <a:srgbClr val="9AA3AB"/>
+                </a:solidFill>
+                <a:latin typeface="IBM Plex Sans"/>
+                <a:ea typeface="IBM Plex Sans"/>
+                <a:cs typeface="IBM Plex Sans"/>
+                <a:sym typeface="IBM Plex Sans"/>
+              </a:rPr>
+              <a:t>https://github.com/VoronM1522/phantomuserland-snapper</a:t>
+            </a:r>
+            <a:endParaRPr sz="1600">
+              <a:solidFill>
+                <a:srgbClr val="9AA3AB"/>
+              </a:solidFill>
+              <a:latin typeface="IBM Plex Sans"/>
+              <a:ea typeface="IBM Plex Sans"/>
+              <a:cs typeface="IBM Plex Sans"/>
+              <a:sym typeface="IBM Plex Sans"/>
+            </a:endParaRPr>
+          </a:p>
+          <a:p>
+            <a:pPr indent="0" lvl="0" marL="0" rtl="0" algn="l">
+              <a:lnSpc>
+                <a:spcPct val="93750"/>
+              </a:lnSpc>
+              <a:spcBef>
+                <a:spcPts val="60"/>
+              </a:spcBef>
+              <a:spcAft>
+                <a:spcPts val="0"/>
+              </a:spcAft>
+              <a:buClr>
+                <a:srgbClr val="9AA3AB"/>
+              </a:buClr>
+              <a:buSzPts val="1600"/>
+              <a:buFont typeface="IBM Plex Sans Medium"/>
+              <a:buNone/>
+            </a:pPr>
+            <a:r>
+              <a:rPr b="1" baseline="30000" lang="en-US" sz="1600">
+                <a:solidFill>
+                  <a:srgbClr val="9AA3AB"/>
+                </a:solidFill>
+                <a:latin typeface="IBM Plex Sans Medium"/>
+                <a:ea typeface="IBM Plex Sans Medium"/>
+                <a:cs typeface="IBM Plex Sans Medium"/>
+                <a:sym typeface="IBM Plex Sans Medium"/>
+              </a:rPr>
+              <a:t>5 </a:t>
+            </a:r>
+            <a:r>
+              <a:rPr lang="en-US" sz="1600">
+                <a:solidFill>
+                  <a:srgbClr val="9AA3AB"/>
+                </a:solidFill>
+                <a:latin typeface="IBM Plex Sans"/>
+                <a:ea typeface="IBM Plex Sans"/>
+                <a:cs typeface="IBM Plex Sans"/>
+                <a:sym typeface="IBM Plex Sans"/>
+              </a:rPr>
+              <a:t>https://github.com/VoronM1522/snapper</a:t>
+            </a:r>
+            <a:endParaRPr sz="1600">
+              <a:solidFill>
+                <a:srgbClr val="9AA3AB"/>
+              </a:solidFill>
+              <a:latin typeface="IBM Plex Sans"/>
+              <a:ea typeface="IBM Plex Sans"/>
+              <a:cs typeface="IBM Plex Sans"/>
+              <a:sym typeface="IBM Plex Sans"/>
+            </a:endParaRPr>
+          </a:p>
+          <a:p>
+            <a:pPr indent="0" lvl="0" marL="0" rtl="0" algn="l">
+              <a:lnSpc>
+                <a:spcPct val="93750"/>
+              </a:lnSpc>
+              <a:spcBef>
+                <a:spcPts val="60"/>
+              </a:spcBef>
+              <a:spcAft>
+                <a:spcPts val="0"/>
+              </a:spcAft>
+              <a:buClr>
+                <a:srgbClr val="9AA3AB"/>
+              </a:buClr>
+              <a:buSzPts val="1600"/>
+              <a:buFont typeface="IBM Plex Sans Medium"/>
+              <a:buNone/>
+            </a:pPr>
+            <a:r>
+              <a:rPr b="1" baseline="30000" lang="en-US" sz="1600">
+                <a:solidFill>
+                  <a:srgbClr val="9AA3AB"/>
+                </a:solidFill>
+                <a:latin typeface="IBM Plex Sans Medium"/>
+                <a:ea typeface="IBM Plex Sans Medium"/>
+                <a:cs typeface="IBM Plex Sans Medium"/>
+                <a:sym typeface="IBM Plex Sans Medium"/>
+              </a:rPr>
+              <a:t>6</a:t>
+            </a:r>
+            <a:r>
+              <a:rPr lang="en-US" sz="1600">
+                <a:solidFill>
+                  <a:srgbClr val="9AA3AB"/>
+                </a:solidFill>
+                <a:latin typeface="IBM Plex Sans"/>
+                <a:ea typeface="IBM Plex Sans"/>
+                <a:cs typeface="IBM Plex Sans"/>
+                <a:sym typeface="IBM Plex Sans"/>
+              </a:rPr>
+              <a:t>https://github.com/VoronM1522/genode/tree/se/repos/os</a:t>
+            </a:r>
+            <a:endParaRPr sz="1600">
+              <a:solidFill>
+                <a:srgbClr val="9AA3AB"/>
+              </a:solidFill>
+              <a:latin typeface="IBM Plex Sans"/>
+              <a:ea typeface="IBM Plex Sans"/>
+              <a:cs typeface="IBM Plex Sans"/>
+              <a:sym typeface="IBM Plex Sans"/>
+            </a:endParaRPr>
+          </a:p>
+        </p:txBody>
+      </p:sp>
       <p:pic>
         <p:nvPicPr>
-          <p:cNvPr id="112" name="Google Shape;112;p12"/>
+          <p:cNvPr id="110" name="Google Shape;110;p12"/>
           <p:cNvPicPr preferRelativeResize="0"/>
           <p:nvPr/>
         </p:nvPicPr>
         <p:blipFill rotWithShape="1">
-          <a:blip r:embed="rId4">
+          <a:blip r:embed="rId3">
             <a:alphaModFix/>
           </a:blip>
           <a:srcRect b="0" l="0" r="0" t="0"/>
@@ -3352,7 +4338,7 @@
       </p:pic>
       <p:sp>
         <p:nvSpPr>
-          <p:cNvPr id="113" name="Google Shape;113;p12"/>
+          <p:cNvPr id="111" name="Google Shape;111;p12"/>
           <p:cNvSpPr/>
           <p:nvPr/>
         </p:nvSpPr>
@@ -3390,7 +4376,7 @@
               <a:buNone/>
             </a:pPr>
             <a:r>
-              <a:rPr b="0" i="0" lang="en-US" sz="1300" u="none" cap="none" strike="noStrike">
+              <a:rPr lang="en-US" sz="1300">
                 <a:solidFill>
                   <a:srgbClr val="9AA3AB"/>
                 </a:solidFill>
@@ -3399,10 +4385,10 @@
                 <a:cs typeface="IBM Plex Mono"/>
                 <a:sym typeface="IBM Plex Mono"/>
               </a:rPr>
-              <a:t>1</a:t>
-            </a:r>
-            <a:r>
-              <a:rPr lang="en-US" sz="1300">
+              <a:t>9</a:t>
+            </a:r>
+            <a:r>
+              <a:rPr b="0" i="0" lang="en-US" sz="1300" u="none" cap="none" strike="noStrike">
                 <a:solidFill>
                   <a:srgbClr val="9AA3AB"/>
                 </a:solidFill>
@@ -3411,10 +4397,10 @@
                 <a:cs typeface="IBM Plex Mono"/>
                 <a:sym typeface="IBM Plex Mono"/>
               </a:rPr>
-              <a:t>0</a:t>
-            </a:r>
-            <a:r>
-              <a:rPr b="0" i="0" lang="en-US" sz="1300" u="none" cap="none" strike="noStrike">
+              <a:t>/</a:t>
+            </a:r>
+            <a:r>
+              <a:rPr lang="en-US" sz="1300">
                 <a:solidFill>
                   <a:srgbClr val="9AA3AB"/>
                 </a:solidFill>
@@ -3423,21 +4409,501 @@
                 <a:cs typeface="IBM Plex Mono"/>
                 <a:sym typeface="IBM Plex Mono"/>
               </a:rPr>
-              <a:t>/</a:t>
-            </a:r>
-            <a:r>
-              <a:rPr lang="en-US" sz="1300">
-                <a:solidFill>
-                  <a:srgbClr val="9AA3AB"/>
-                </a:solidFill>
-                <a:latin typeface="IBM Plex Mono"/>
-                <a:ea typeface="IBM Plex Mono"/>
-                <a:cs typeface="IBM Plex Mono"/>
-                <a:sym typeface="IBM Plex Mono"/>
-              </a:rPr>
               <a:t>13</a:t>
             </a:r>
             <a:endParaRPr/>
+          </a:p>
+        </p:txBody>
+      </p:sp>
+      <p:sp>
+        <p:nvSpPr>
+          <p:cNvPr id="112" name="Google Shape;112;p12"/>
+          <p:cNvSpPr/>
+          <p:nvPr/>
+        </p:nvSpPr>
+        <p:spPr>
+          <a:xfrm>
+            <a:off x="1095375" y="5925700"/>
+            <a:ext cx="7700100" cy="2393700"/>
+          </a:xfrm>
+          <a:prstGeom prst="roundRect">
+            <a:avLst>
+              <a:gd fmla="val 6000" name="adj"/>
+            </a:avLst>
+          </a:prstGeom>
+          <a:solidFill>
+            <a:srgbClr val="EEF1F4"/>
+          </a:solidFill>
+          <a:ln>
+            <a:noFill/>
+          </a:ln>
+        </p:spPr>
+        <p:txBody>
+          <a:bodyPr anchorCtr="0" anchor="t" bIns="364000" lIns="520000" spcFirstLastPara="1" rIns="520000" wrap="square" tIns="364000">
+            <a:noAutofit/>
+          </a:bodyPr>
+          <a:lstStyle/>
+          <a:p>
+            <a:pPr indent="0" lvl="0" marL="0" marR="0" rtl="0" algn="l">
+              <a:lnSpc>
+                <a:spcPct val="126315"/>
+              </a:lnSpc>
+              <a:spcBef>
+                <a:spcPts val="0"/>
+              </a:spcBef>
+              <a:spcAft>
+                <a:spcPts val="0"/>
+              </a:spcAft>
+              <a:buClr>
+                <a:srgbClr val="1A1A1A"/>
+              </a:buClr>
+              <a:buSzPts val="1900"/>
+              <a:buFont typeface="Montserrat SemiBold"/>
+              <a:buNone/>
+            </a:pPr>
+            <a:r>
+              <a:rPr b="1" lang="en-US" sz="1900">
+                <a:solidFill>
+                  <a:srgbClr val="1A1A1A"/>
+                </a:solidFill>
+                <a:latin typeface="Montserrat SemiBold"/>
+                <a:ea typeface="Montserrat SemiBold"/>
+                <a:cs typeface="Montserrat SemiBold"/>
+                <a:sym typeface="Montserrat SemiBold"/>
+              </a:rPr>
+              <a:t>Related fixes &amp; Adaptations:</a:t>
+            </a:r>
+            <a:endParaRPr b="1" i="0" sz="1900" u="none" cap="none" strike="noStrike">
+              <a:solidFill>
+                <a:srgbClr val="1A1A1A"/>
+              </a:solidFill>
+              <a:latin typeface="Montserrat SemiBold"/>
+              <a:ea typeface="Montserrat SemiBold"/>
+              <a:cs typeface="Montserrat SemiBold"/>
+              <a:sym typeface="Montserrat SemiBold"/>
+            </a:endParaRPr>
+          </a:p>
+          <a:p>
+            <a:pPr indent="-380001" lvl="0" marL="380001" marR="0" rtl="0" algn="l">
+              <a:lnSpc>
+                <a:spcPct val="126470"/>
+              </a:lnSpc>
+              <a:spcBef>
+                <a:spcPts val="300"/>
+              </a:spcBef>
+              <a:spcAft>
+                <a:spcPts val="0"/>
+              </a:spcAft>
+              <a:buClr>
+                <a:srgbClr val="1A1A1A"/>
+              </a:buClr>
+              <a:buSzPts val="1700"/>
+              <a:buFont typeface="Arial"/>
+              <a:buChar char="•"/>
+            </a:pPr>
+            <a:r>
+              <a:rPr lang="en-US" sz="1700">
+                <a:solidFill>
+                  <a:srgbClr val="1A1A1A"/>
+                </a:solidFill>
+                <a:latin typeface="IBM Plex Sans"/>
+                <a:ea typeface="IBM Plex Sans"/>
+                <a:cs typeface="IBM Plex Sans"/>
+                <a:sym typeface="IBM Plex Sans"/>
+              </a:rPr>
+              <a:t>lwext4</a:t>
+            </a:r>
+            <a:r>
+              <a:rPr baseline="30000" lang="en-US" sz="1700">
+                <a:solidFill>
+                  <a:srgbClr val="1A1A1A"/>
+                </a:solidFill>
+                <a:latin typeface="IBM Plex Sans"/>
+                <a:ea typeface="IBM Plex Sans"/>
+                <a:cs typeface="IBM Plex Sans"/>
+                <a:sym typeface="IBM Plex Sans"/>
+              </a:rPr>
+              <a:t>3</a:t>
+            </a:r>
+            <a:r>
+              <a:rPr lang="en-US" sz="1700">
+                <a:solidFill>
+                  <a:srgbClr val="1A1A1A"/>
+                </a:solidFill>
+                <a:latin typeface="IBM Plex Sans"/>
+                <a:ea typeface="IBM Plex Sans"/>
+                <a:cs typeface="IBM Plex Sans"/>
+                <a:sym typeface="IBM Plex Sans"/>
+              </a:rPr>
+              <a:t> (</a:t>
+            </a:r>
+            <a:r>
+              <a:rPr lang="en-US" sz="1700">
+                <a:solidFill>
+                  <a:srgbClr val="1A1A1A"/>
+                </a:solidFill>
+                <a:latin typeface="IBM Plex Sans"/>
+                <a:ea typeface="IBM Plex Sans"/>
+                <a:cs typeface="IBM Plex Sans"/>
+                <a:sym typeface="IBM Plex Sans"/>
+              </a:rPr>
+              <a:t>ftruncate and sync</a:t>
+            </a:r>
+            <a:r>
+              <a:rPr lang="en-US">
+                <a:solidFill>
+                  <a:schemeClr val="dk1"/>
+                </a:solidFill>
+              </a:rPr>
+              <a:t>)</a:t>
+            </a:r>
+            <a:endParaRPr>
+              <a:solidFill>
+                <a:schemeClr val="dk1"/>
+              </a:solidFill>
+            </a:endParaRPr>
+          </a:p>
+          <a:p>
+            <a:pPr indent="-380001" lvl="0" marL="380001" marR="0" rtl="0" algn="l">
+              <a:lnSpc>
+                <a:spcPct val="126470"/>
+              </a:lnSpc>
+              <a:spcBef>
+                <a:spcPts val="300"/>
+              </a:spcBef>
+              <a:spcAft>
+                <a:spcPts val="0"/>
+              </a:spcAft>
+              <a:buClr>
+                <a:schemeClr val="dk1"/>
+              </a:buClr>
+              <a:buSzPts val="1700"/>
+              <a:buChar char="•"/>
+            </a:pPr>
+            <a:r>
+              <a:rPr lang="en-US" sz="1700">
+                <a:solidFill>
+                  <a:schemeClr val="dk1"/>
+                </a:solidFill>
+                <a:latin typeface="IBM Plex Sans"/>
+                <a:ea typeface="IBM Plex Sans"/>
+                <a:cs typeface="IBM Plex Sans"/>
+                <a:sym typeface="IBM Plex Sans"/>
+              </a:rPr>
+              <a:t>isomem</a:t>
+            </a:r>
+            <a:r>
+              <a:rPr baseline="30000" lang="en-US" sz="1700">
+                <a:solidFill>
+                  <a:schemeClr val="dk1"/>
+                </a:solidFill>
+                <a:latin typeface="IBM Plex Sans"/>
+                <a:ea typeface="IBM Plex Sans"/>
+                <a:cs typeface="IBM Plex Sans"/>
+                <a:sym typeface="IBM Plex Sans"/>
+              </a:rPr>
+              <a:t>4</a:t>
+            </a:r>
+            <a:r>
+              <a:rPr lang="en-US" sz="1700">
+                <a:solidFill>
+                  <a:schemeClr val="dk1"/>
+                </a:solidFill>
+                <a:latin typeface="IBM Plex Sans"/>
+                <a:ea typeface="IBM Plex Sans"/>
+                <a:cs typeface="IBM Plex Sans"/>
+                <a:sym typeface="IBM Plex Sans"/>
+              </a:rPr>
+              <a:t> (</a:t>
+            </a:r>
+            <a:r>
+              <a:rPr lang="en-US" sz="1700">
+                <a:solidFill>
+                  <a:srgbClr val="1A1A1A"/>
+                </a:solidFill>
+                <a:latin typeface="IBM Plex Sans"/>
+                <a:ea typeface="IBM Plex Sans"/>
+                <a:cs typeface="IBM Plex Sans"/>
+                <a:sym typeface="IBM Plex Sans"/>
+              </a:rPr>
+              <a:t>power-off button callback and graceful shutdown</a:t>
+            </a:r>
+            <a:r>
+              <a:rPr lang="en-US" sz="1700">
+                <a:solidFill>
+                  <a:schemeClr val="dk1"/>
+                </a:solidFill>
+                <a:latin typeface="IBM Plex Sans"/>
+                <a:ea typeface="IBM Plex Sans"/>
+                <a:cs typeface="IBM Plex Sans"/>
+                <a:sym typeface="IBM Plex Sans"/>
+              </a:rPr>
+              <a:t>)</a:t>
+            </a:r>
+            <a:endParaRPr sz="1700">
+              <a:solidFill>
+                <a:schemeClr val="dk1"/>
+              </a:solidFill>
+              <a:latin typeface="IBM Plex Sans"/>
+              <a:ea typeface="IBM Plex Sans"/>
+              <a:cs typeface="IBM Plex Sans"/>
+              <a:sym typeface="IBM Plex Sans"/>
+            </a:endParaRPr>
+          </a:p>
+          <a:p>
+            <a:pPr indent="-380001" lvl="0" marL="380001" marR="0" rtl="0" algn="l">
+              <a:lnSpc>
+                <a:spcPct val="126470"/>
+              </a:lnSpc>
+              <a:spcBef>
+                <a:spcPts val="300"/>
+              </a:spcBef>
+              <a:spcAft>
+                <a:spcPts val="0"/>
+              </a:spcAft>
+              <a:buClr>
+                <a:schemeClr val="dk1"/>
+              </a:buClr>
+              <a:buSzPts val="1700"/>
+              <a:buChar char="•"/>
+            </a:pPr>
+            <a:r>
+              <a:rPr lang="en-US" sz="1700">
+                <a:solidFill>
+                  <a:srgbClr val="1A1A1A"/>
+                </a:solidFill>
+                <a:latin typeface="IBM Plex Sans"/>
+                <a:ea typeface="IBM Plex Sans"/>
+                <a:cs typeface="IBM Plex Sans"/>
+                <a:sym typeface="IBM Plex Sans"/>
+              </a:rPr>
+              <a:t>snapper</a:t>
+            </a:r>
+            <a:r>
+              <a:rPr baseline="30000" lang="en-US" sz="1700">
+                <a:solidFill>
+                  <a:srgbClr val="1A1A1A"/>
+                </a:solidFill>
+                <a:latin typeface="IBM Plex Sans"/>
+                <a:ea typeface="IBM Plex Sans"/>
+                <a:cs typeface="IBM Plex Sans"/>
+                <a:sym typeface="IBM Plex Sans"/>
+              </a:rPr>
+              <a:t>5</a:t>
+            </a:r>
+            <a:r>
+              <a:rPr lang="en-US" sz="1700">
+                <a:solidFill>
+                  <a:srgbClr val="1A1A1A"/>
+                </a:solidFill>
+                <a:latin typeface="IBM Plex Sans"/>
+                <a:ea typeface="IBM Plex Sans"/>
+                <a:cs typeface="IBM Plex Sans"/>
+                <a:sym typeface="IBM Plex Sans"/>
+              </a:rPr>
+              <a:t> (client counter and graceful shutdown)</a:t>
+            </a:r>
+            <a:endParaRPr sz="1700">
+              <a:solidFill>
+                <a:srgbClr val="1A1A1A"/>
+              </a:solidFill>
+              <a:latin typeface="IBM Plex Sans"/>
+              <a:ea typeface="IBM Plex Sans"/>
+              <a:cs typeface="IBM Plex Sans"/>
+              <a:sym typeface="IBM Plex Sans"/>
+            </a:endParaRPr>
+          </a:p>
+          <a:p>
+            <a:pPr indent="-380001" lvl="0" marL="380001" marR="0" rtl="0" algn="l">
+              <a:lnSpc>
+                <a:spcPct val="126470"/>
+              </a:lnSpc>
+              <a:spcBef>
+                <a:spcPts val="300"/>
+              </a:spcBef>
+              <a:spcAft>
+                <a:spcPts val="0"/>
+              </a:spcAft>
+              <a:buClr>
+                <a:schemeClr val="dk1"/>
+              </a:buClr>
+              <a:buSzPts val="1700"/>
+              <a:buChar char="•"/>
+            </a:pPr>
+            <a:r>
+              <a:rPr lang="en-US" sz="1700">
+                <a:solidFill>
+                  <a:schemeClr val="dk1"/>
+                </a:solidFill>
+                <a:latin typeface="IBM Plex Sans"/>
+                <a:ea typeface="IBM Plex Sans"/>
+                <a:cs typeface="IBM Plex Sans"/>
+                <a:sym typeface="IBM Plex Sans"/>
+              </a:rPr>
+              <a:t>vfs</a:t>
+            </a:r>
+            <a:r>
+              <a:rPr baseline="30000" lang="en-US" sz="1700">
+                <a:solidFill>
+                  <a:schemeClr val="dk1"/>
+                </a:solidFill>
+                <a:latin typeface="IBM Plex Sans"/>
+                <a:ea typeface="IBM Plex Sans"/>
+                <a:cs typeface="IBM Plex Sans"/>
+                <a:sym typeface="IBM Plex Sans"/>
+              </a:rPr>
+              <a:t>6</a:t>
+            </a:r>
+            <a:r>
+              <a:rPr lang="en-US" sz="1700">
+                <a:solidFill>
+                  <a:schemeClr val="dk1"/>
+                </a:solidFill>
+                <a:latin typeface="IBM Plex Sans"/>
+                <a:ea typeface="IBM Plex Sans"/>
+                <a:cs typeface="IBM Plex Sans"/>
+                <a:sym typeface="IBM Plex Sans"/>
+              </a:rPr>
+              <a:t> (</a:t>
+            </a:r>
+            <a:r>
+              <a:rPr lang="en-US" sz="1700">
+                <a:solidFill>
+                  <a:srgbClr val="1A1A1A"/>
+                </a:solidFill>
+                <a:latin typeface="IBM Plex Sans"/>
+                <a:ea typeface="IBM Plex Sans"/>
+                <a:cs typeface="IBM Plex Sans"/>
+                <a:sym typeface="IBM Plex Sans"/>
+              </a:rPr>
+              <a:t>client counter, graceful shutdown and clean unmount</a:t>
+            </a:r>
+            <a:r>
+              <a:rPr lang="en-US" sz="1700">
+                <a:solidFill>
+                  <a:schemeClr val="dk1"/>
+                </a:solidFill>
+                <a:latin typeface="IBM Plex Sans"/>
+                <a:ea typeface="IBM Plex Sans"/>
+                <a:cs typeface="IBM Plex Sans"/>
+                <a:sym typeface="IBM Plex Sans"/>
+              </a:rPr>
+              <a:t>)</a:t>
+            </a:r>
+            <a:endParaRPr/>
+          </a:p>
+        </p:txBody>
+      </p:sp>
+      <p:sp>
+        <p:nvSpPr>
+          <p:cNvPr id="113" name="Google Shape;113;p12"/>
+          <p:cNvSpPr/>
+          <p:nvPr/>
+        </p:nvSpPr>
+        <p:spPr>
+          <a:xfrm>
+            <a:off x="9395375" y="5925700"/>
+            <a:ext cx="7754700" cy="2393700"/>
+          </a:xfrm>
+          <a:prstGeom prst="roundRect">
+            <a:avLst>
+              <a:gd fmla="val 6000" name="adj"/>
+            </a:avLst>
+          </a:prstGeom>
+          <a:solidFill>
+            <a:srgbClr val="40BA21"/>
+          </a:solidFill>
+          <a:ln>
+            <a:noFill/>
+          </a:ln>
+        </p:spPr>
+        <p:txBody>
+          <a:bodyPr anchorCtr="0" anchor="t" bIns="364000" lIns="520000" spcFirstLastPara="1" rIns="520000" wrap="square" tIns="364000">
+            <a:noAutofit/>
+          </a:bodyPr>
+          <a:lstStyle/>
+          <a:p>
+            <a:pPr indent="0" lvl="0" marL="0" marR="0" rtl="0" algn="l">
+              <a:lnSpc>
+                <a:spcPct val="126315"/>
+              </a:lnSpc>
+              <a:spcBef>
+                <a:spcPts val="300"/>
+              </a:spcBef>
+              <a:spcAft>
+                <a:spcPts val="0"/>
+              </a:spcAft>
+              <a:buClr>
+                <a:srgbClr val="FFFFFF"/>
+              </a:buClr>
+              <a:buSzPts val="1900"/>
+              <a:buFont typeface="Montserrat SemiBold"/>
+              <a:buNone/>
+            </a:pPr>
+            <a:r>
+              <a:rPr b="1" lang="en-US" sz="1900">
+                <a:solidFill>
+                  <a:srgbClr val="FFFFFF"/>
+                </a:solidFill>
+                <a:latin typeface="Montserrat SemiBold"/>
+                <a:ea typeface="Montserrat SemiBold"/>
+                <a:cs typeface="Montserrat SemiBold"/>
+                <a:sym typeface="Montserrat SemiBold"/>
+              </a:rPr>
+              <a:t>Optimization:</a:t>
+            </a:r>
+            <a:endParaRPr b="1" i="0" sz="1900" u="none" cap="none" strike="noStrike">
+              <a:solidFill>
+                <a:srgbClr val="FFFFFF"/>
+              </a:solidFill>
+              <a:latin typeface="Montserrat SemiBold"/>
+              <a:ea typeface="Montserrat SemiBold"/>
+              <a:cs typeface="Montserrat SemiBold"/>
+              <a:sym typeface="Montserrat SemiBold"/>
+            </a:endParaRPr>
+          </a:p>
+          <a:p>
+            <a:pPr indent="0" lvl="0" marL="0" rtl="0" algn="l">
+              <a:lnSpc>
+                <a:spcPct val="126315"/>
+              </a:lnSpc>
+              <a:spcBef>
+                <a:spcPts val="0"/>
+              </a:spcBef>
+              <a:spcAft>
+                <a:spcPts val="0"/>
+              </a:spcAft>
+              <a:buClr>
+                <a:schemeClr val="dk1"/>
+              </a:buClr>
+              <a:buFont typeface="Arial"/>
+              <a:buNone/>
+            </a:pPr>
+            <a:r>
+              <a:rPr lang="en-US" sz="1700">
+                <a:solidFill>
+                  <a:schemeClr val="lt1"/>
+                </a:solidFill>
+                <a:latin typeface="IBM Plex Sans"/>
+                <a:ea typeface="IBM Plex Sans"/>
+                <a:cs typeface="IBM Plex Sans"/>
+                <a:sym typeface="IBM Plex Sans"/>
+              </a:rPr>
+              <a:t>U</a:t>
+            </a:r>
+            <a:r>
+              <a:rPr lang="en-US" sz="1700">
+                <a:solidFill>
+                  <a:schemeClr val="lt1"/>
+                </a:solidFill>
+                <a:latin typeface="IBM Plex Sans"/>
+                <a:ea typeface="IBM Plex Sans"/>
+                <a:cs typeface="IBM Plex Sans"/>
+                <a:sym typeface="IBM Plex Sans"/>
+              </a:rPr>
+              <a:t>sing a “Block” session directly — initialization time reduced from ≈20 min to ≈1 min</a:t>
+            </a:r>
+            <a:endParaRPr sz="1700"/>
           </a:p>
         </p:txBody>
       </p:sp>
@@ -3498,7 +4964,7 @@
           </a:bodyPr>
           <a:lstStyle/>
           <a:p>
-            <a:pPr indent="0" lvl="0" marL="0" rtl="0" algn="l">
+            <a:pPr indent="0" lvl="0" marL="0" marR="0" rtl="0" algn="l">
               <a:lnSpc>
                 <a:spcPct val="114285"/>
               </a:lnSpc>
@@ -3516,7 +4982,7 @@
               <a:buNone/>
             </a:pPr>
             <a:r>
-              <a:rPr b="1" lang="en-US" sz="2800">
+              <a:rPr b="1" i="0" lang="en-US" sz="2800" u="none" cap="none" strike="noStrike">
                 <a:solidFill>
                   <a:srgbClr val="1A1A1A"/>
                 </a:solidFill>
@@ -3525,6 +4991,241 @@
                 <a:cs typeface="Montserrat"/>
                 <a:sym typeface="Montserrat"/>
               </a:rPr>
+              <a:t>System Architecture</a:t>
+            </a:r>
+            <a:endParaRPr/>
+          </a:p>
+        </p:txBody>
+      </p:sp>
+      <p:pic>
+        <p:nvPicPr>
+          <p:cNvPr id="119" name="Google Shape;119;p13"/>
+          <p:cNvPicPr preferRelativeResize="0"/>
+          <p:nvPr/>
+        </p:nvPicPr>
+        <p:blipFill rotWithShape="1">
+          <a:blip r:embed="rId3">
+            <a:alphaModFix/>
+          </a:blip>
+          <a:srcRect b="0" l="0" r="0" t="0"/>
+          <a:stretch/>
+        </p:blipFill>
+        <p:spPr>
+          <a:xfrm>
+            <a:off x="4343897" y="1600000"/>
+            <a:ext cx="9751478" cy="8295300"/>
+          </a:xfrm>
+          <a:prstGeom prst="rect">
+            <a:avLst/>
+          </a:prstGeom>
+          <a:noFill/>
+          <a:ln>
+            <a:noFill/>
+          </a:ln>
+        </p:spPr>
+      </p:pic>
+      <p:pic>
+        <p:nvPicPr>
+          <p:cNvPr id="120" name="Google Shape;120;p13"/>
+          <p:cNvPicPr preferRelativeResize="0"/>
+          <p:nvPr/>
+        </p:nvPicPr>
+        <p:blipFill rotWithShape="1">
+          <a:blip r:embed="rId4">
+            <a:alphaModFix/>
+          </a:blip>
+          <a:srcRect b="0" l="0" r="0" t="0"/>
+          <a:stretch/>
+        </p:blipFill>
+        <p:spPr>
+          <a:xfrm>
+            <a:off x="14900000" y="780000"/>
+            <a:ext cx="2480000" cy="720500"/>
+          </a:xfrm>
+          <a:prstGeom prst="rect">
+            <a:avLst/>
+          </a:prstGeom>
+          <a:noFill/>
+          <a:ln>
+            <a:noFill/>
+          </a:ln>
+        </p:spPr>
+      </p:pic>
+      <p:sp>
+        <p:nvSpPr>
+          <p:cNvPr id="121" name="Google Shape;121;p13"/>
+          <p:cNvSpPr/>
+          <p:nvPr/>
+        </p:nvSpPr>
+        <p:spPr>
+          <a:xfrm>
+            <a:off x="16400000" y="9550000"/>
+            <a:ext cx="1500000" cy="450000"/>
+          </a:xfrm>
+          <a:prstGeom prst="rect">
+            <a:avLst/>
+          </a:prstGeom>
+          <a:noFill/>
+          <a:ln>
+            <a:noFill/>
+          </a:ln>
+        </p:spPr>
+        <p:txBody>
+          <a:bodyPr anchorCtr="0" anchor="b" bIns="0" lIns="0" spcFirstLastPara="1" rIns="0" wrap="square" tIns="0">
+            <a:noAutofit/>
+          </a:bodyPr>
+          <a:lstStyle/>
+          <a:p>
+            <a:pPr indent="0" lvl="0" marL="0" marR="0" rtl="0" algn="r">
+              <a:spcBef>
+                <a:spcPts val="0"/>
+              </a:spcBef>
+              <a:spcAft>
+                <a:spcPts val="0"/>
+              </a:spcAft>
+              <a:buClr>
+                <a:srgbClr val="9AA3AB"/>
+              </a:buClr>
+              <a:buSzPts val="1300"/>
+              <a:buFont typeface="IBM Plex Mono"/>
+              <a:buNone/>
+            </a:pPr>
+            <a:r>
+              <a:rPr b="0" i="0" lang="en-US" sz="1300" u="none" cap="none" strike="noStrike">
+                <a:solidFill>
+                  <a:srgbClr val="9AA3AB"/>
+                </a:solidFill>
+                <a:latin typeface="IBM Plex Mono"/>
+                <a:ea typeface="IBM Plex Mono"/>
+                <a:cs typeface="IBM Plex Mono"/>
+                <a:sym typeface="IBM Plex Mono"/>
+              </a:rPr>
+              <a:t>1</a:t>
+            </a:r>
+            <a:r>
+              <a:rPr lang="en-US" sz="1300">
+                <a:solidFill>
+                  <a:srgbClr val="9AA3AB"/>
+                </a:solidFill>
+                <a:latin typeface="IBM Plex Mono"/>
+                <a:ea typeface="IBM Plex Mono"/>
+                <a:cs typeface="IBM Plex Mono"/>
+                <a:sym typeface="IBM Plex Mono"/>
+              </a:rPr>
+              <a:t>0</a:t>
+            </a:r>
+            <a:r>
+              <a:rPr b="0" i="0" lang="en-US" sz="1300" u="none" cap="none" strike="noStrike">
+                <a:solidFill>
+                  <a:srgbClr val="9AA3AB"/>
+                </a:solidFill>
+                <a:latin typeface="IBM Plex Mono"/>
+                <a:ea typeface="IBM Plex Mono"/>
+                <a:cs typeface="IBM Plex Mono"/>
+                <a:sym typeface="IBM Plex Mono"/>
+              </a:rPr>
+              <a:t>/</a:t>
+            </a:r>
+            <a:r>
+              <a:rPr lang="en-US" sz="1300">
+                <a:solidFill>
+                  <a:srgbClr val="9AA3AB"/>
+                </a:solidFill>
+                <a:latin typeface="IBM Plex Mono"/>
+                <a:ea typeface="IBM Plex Mono"/>
+                <a:cs typeface="IBM Plex Mono"/>
+                <a:sym typeface="IBM Plex Mono"/>
+              </a:rPr>
+              <a:t>13</a:t>
+            </a:r>
+            <a:endParaRPr/>
+          </a:p>
+        </p:txBody>
+      </p:sp>
+    </p:spTree>
+  </p:cSld>
+  <p:clrMapOvr>
+    <a:masterClrMapping/>
+  </p:clrMapOvr>
+</p:sld>
+</file>
+
+<file path=ppt/slides/slide12.xml><?xml version="1.0" encoding="utf-8"?>
+<p:sld xmlns:a="http://schemas.openxmlformats.org/drawingml/2006/main" xmlns:r="http://schemas.openxmlformats.org/officeDocument/2006/relationships" xmlns:mc="http://schemas.openxmlformats.org/markup-compatibility/2006" xmlns:mv="urn:schemas-microsoft-com:mac:vml" xmlns:p="http://schemas.openxmlformats.org/presentationml/2006/main" xmlns:c="http://schemas.openxmlformats.org/drawingml/2006/chart" xmlns:dgm="http://schemas.openxmlformats.org/drawingml/2006/diagram" xmlns:o="urn:schemas-microsoft-com:office:office" xmlns:v="urn:schemas-microsoft-com:vml" xmlns:pvml="urn:schemas-microsoft-com:office:powerpoint" xmlns:com="http://schemas.openxmlformats.org/drawingml/2006/compatibility" xmlns:p14="http://schemas.microsoft.com/office/powerpoint/2010/main" xmlns:p15="http://schemas.microsoft.com/office/powerpoint/2012/main" xmlns:ahyp="http://schemas.microsoft.com/office/drawing/2018/hyperlinkcolor">
+  <p:cSld>
+    <p:bg>
+      <p:bgPr>
+        <a:solidFill>
+          <a:srgbClr val="FFFFFF"/>
+        </a:solidFill>
+      </p:bgPr>
+    </p:bg>
+    <p:spTree>
+      <p:nvGrpSpPr>
+        <p:cNvPr id="125" name="Shape 125"/>
+        <p:cNvGrpSpPr/>
+        <p:nvPr/>
+      </p:nvGrpSpPr>
+      <p:grpSpPr>
+        <a:xfrm>
+          <a:off x="0" y="0"/>
+          <a:ext cx="0" cy="0"/>
+          <a:chOff x="0" y="0"/>
+          <a:chExt cx="0" cy="0"/>
+        </a:xfrm>
+      </p:grpSpPr>
+      <p:sp>
+        <p:nvSpPr>
+          <p:cNvPr id="126" name="Google Shape;126;p14"/>
+          <p:cNvSpPr/>
+          <p:nvPr/>
+        </p:nvSpPr>
+        <p:spPr>
+          <a:xfrm>
+            <a:off x="1095375" y="900000"/>
+            <a:ext cx="13000000" cy="700000"/>
+          </a:xfrm>
+          <a:prstGeom prst="rect">
+            <a:avLst/>
+          </a:prstGeom>
+          <a:noFill/>
+          <a:ln>
+            <a:noFill/>
+          </a:ln>
+        </p:spPr>
+        <p:txBody>
+          <a:bodyPr anchorCtr="0" anchor="t" bIns="0" lIns="0" spcFirstLastPara="1" rIns="0" wrap="square" tIns="0">
+            <a:noAutofit/>
+          </a:bodyPr>
+          <a:lstStyle/>
+          <a:p>
+            <a:pPr indent="0" lvl="0" marL="0" rtl="0" algn="l">
+              <a:lnSpc>
+                <a:spcPct val="114285"/>
+              </a:lnSpc>
+              <a:spcBef>
+                <a:spcPts val="0"/>
+              </a:spcBef>
+              <a:spcAft>
+                <a:spcPts val="0"/>
+              </a:spcAft>
+              <a:buClr>
+                <a:srgbClr val="1A1A1A"/>
+              </a:buClr>
+              <a:buSzPts val="2800"/>
+              <a:buFont typeface="Montserrat"/>
+              <a:buNone/>
+            </a:pPr>
+            <a:r>
+              <a:rPr b="1" lang="en-US" sz="2800">
+                <a:solidFill>
+                  <a:srgbClr val="1A1A1A"/>
+                </a:solidFill>
+                <a:latin typeface="Montserrat"/>
+                <a:ea typeface="Montserrat"/>
+                <a:cs typeface="Montserrat"/>
+                <a:sym typeface="Montserrat"/>
+              </a:rPr>
               <a:t>Implementation results</a:t>
             </a:r>
             <a:endParaRPr/>
@@ -3533,7 +5234,7 @@
       </p:sp>
       <p:sp>
         <p:nvSpPr>
-          <p:cNvPr id="119" name="Google Shape;119;p13"/>
+          <p:cNvPr id="127" name="Google Shape;127;p14"/>
           <p:cNvSpPr/>
           <p:nvPr/>
         </p:nvSpPr>
@@ -3602,14 +5303,14 @@
       </p:sp>
       <p:sp>
         <p:nvSpPr>
-          <p:cNvPr id="120" name="Google Shape;120;p13"/>
+          <p:cNvPr id="128" name="Google Shape;128;p14"/>
           <p:cNvSpPr/>
           <p:nvPr/>
         </p:nvSpPr>
         <p:spPr>
           <a:xfrm>
-            <a:off x="1095363" y="3566900"/>
-            <a:ext cx="7119900" cy="2237400"/>
+            <a:off x="1095375" y="3566900"/>
+            <a:ext cx="7119900" cy="2470500"/>
           </a:xfrm>
           <a:prstGeom prst="roundRect">
             <a:avLst>
@@ -3828,7 +5529,7 @@
       </p:sp>
       <p:pic>
         <p:nvPicPr>
-          <p:cNvPr id="121" name="Google Shape;121;p13"/>
+          <p:cNvPr id="129" name="Google Shape;129;p14"/>
           <p:cNvPicPr preferRelativeResize="0"/>
           <p:nvPr/>
         </p:nvPicPr>
@@ -3855,7 +5556,7 @@
       </p:pic>
       <p:sp>
         <p:nvSpPr>
-          <p:cNvPr id="122" name="Google Shape;122;p13"/>
+          <p:cNvPr id="130" name="Google Shape;130;p14"/>
           <p:cNvSpPr/>
           <p:nvPr/>
         </p:nvSpPr>
@@ -3946,12 +5647,12 @@
       </p:sp>
       <p:graphicFrame>
         <p:nvGraphicFramePr>
-          <p:cNvPr id="123" name="Google Shape;123;p13"/>
+          <p:cNvPr id="131" name="Google Shape;131;p14"/>
           <p:cNvGraphicFramePr/>
           <p:nvPr/>
         </p:nvGraphicFramePr>
         <p:xfrm>
-          <a:off x="1095375" y="6201025"/>
+          <a:off x="1095375" y="6434135"/>
           <a:ext cx="3000000" cy="3000000"/>
         </p:xfrm>
         <a:graphic>
@@ -3959,7 +5660,7 @@
             <a:tbl>
               <a:tblPr>
                 <a:noFill/>
-                <a:tableStyleId>{E1DB251A-98A4-41E1-A828-40190C7FFB22}</a:tableStyleId>
+                <a:tableStyleId>{9DCD8CC6-605B-463A-97F4-F1FC5EB6F047}</a:tableStyleId>
               </a:tblPr>
               <a:tblGrid>
                 <a:gridCol w="2152050"/>
@@ -3967,7 +5668,7 @@
                 <a:gridCol w="1499500"/>
                 <a:gridCol w="1514475"/>
               </a:tblGrid>
-              <a:tr h="745800">
+              <a:tr h="937000">
                 <a:tc>
                   <a:txBody>
                     <a:bodyPr/>
@@ -4109,7 +5810,7 @@
                   </a:tcPr>
                 </a:tc>
               </a:tr>
-              <a:tr h="745800">
+              <a:tr h="937000">
                 <a:tc>
                   <a:txBody>
                     <a:bodyPr/>
@@ -4251,7 +5952,7 @@
                   </a:tcPr>
                 </a:tc>
               </a:tr>
-              <a:tr h="745800">
+              <a:tr h="937000">
                 <a:tc>
                   <a:txBody>
                     <a:bodyPr/>
@@ -4399,14 +6100,14 @@
       </p:graphicFrame>
       <p:sp>
         <p:nvSpPr>
-          <p:cNvPr id="124" name="Google Shape;124;p13"/>
+          <p:cNvPr id="132" name="Google Shape;132;p14"/>
           <p:cNvSpPr/>
           <p:nvPr/>
         </p:nvSpPr>
         <p:spPr>
           <a:xfrm>
             <a:off x="10019175" y="3566900"/>
-            <a:ext cx="7119900" cy="2237400"/>
+            <a:ext cx="7119900" cy="2470500"/>
           </a:xfrm>
           <a:prstGeom prst="roundRect">
             <a:avLst>
@@ -4472,7 +6173,7 @@
                 <a:cs typeface="Montserrat SemiBold"/>
                 <a:sym typeface="Montserrat SemiBold"/>
               </a:rPr>
-              <a:t> set up</a:t>
+              <a:t> setup</a:t>
             </a:r>
             <a:endParaRPr/>
           </a:p>
@@ -4544,14 +6245,14 @@
       </p:sp>
       <p:sp>
         <p:nvSpPr>
-          <p:cNvPr id="125" name="Google Shape;125;p13"/>
+          <p:cNvPr id="133" name="Google Shape;133;p14"/>
           <p:cNvSpPr/>
           <p:nvPr/>
         </p:nvSpPr>
         <p:spPr>
           <a:xfrm>
-            <a:off x="10019175" y="6201025"/>
-            <a:ext cx="7119900" cy="2237400"/>
+            <a:off x="10019175" y="6420833"/>
+            <a:ext cx="7119900" cy="2811000"/>
           </a:xfrm>
           <a:prstGeom prst="roundRect">
             <a:avLst>
@@ -4598,7 +6299,7 @@
                 <a:cs typeface="IBM Plex Sans Medium"/>
                 <a:sym typeface="IBM Plex Sans Medium"/>
               </a:rPr>
-              <a:t>The reason requires additional investigation</a:t>
+              <a:t>Performance target  was not met. The reason requires additional investigation</a:t>
             </a:r>
             <a:endParaRPr sz="2000">
               <a:solidFill>
@@ -4780,12 +6481,12 @@
 </p:sld>
 </file>
 
-<file path=ppt/slides/slide12.xml><?xml version="1.0" encoding="utf-8"?>
+<file path=ppt/slides/slide13.xml><?xml version="1.0" encoding="utf-8"?>
 <p:sld xmlns:a="http://schemas.openxmlformats.org/drawingml/2006/main" xmlns:r="http://schemas.openxmlformats.org/officeDocument/2006/relationships" xmlns:mc="http://schemas.openxmlformats.org/markup-compatibility/2006" xmlns:mv="urn:schemas-microsoft-com:mac:vml" xmlns:p="http://schemas.openxmlformats.org/presentationml/2006/main" xmlns:c="http://schemas.openxmlformats.org/drawingml/2006/chart" xmlns:dgm="http://schemas.openxmlformats.org/drawingml/2006/diagram" xmlns:o="urn:schemas-microsoft-com:office:office" xmlns:v="urn:schemas-microsoft-com:vml" xmlns:pvml="urn:schemas-microsoft-com:office:powerpoint" xmlns:com="http://schemas.openxmlformats.org/drawingml/2006/compatibility" xmlns:p14="http://schemas.microsoft.com/office/powerpoint/2010/main" xmlns:p15="http://schemas.microsoft.com/office/powerpoint/2012/main" xmlns:ahyp="http://schemas.microsoft.com/office/drawing/2018/hyperlinkcolor">
   <p:cSld>
     <p:spTree>
       <p:nvGrpSpPr>
-        <p:cNvPr id="129" name="Shape 129"/>
+        <p:cNvPr id="137" name="Shape 137"/>
         <p:cNvGrpSpPr/>
         <p:nvPr/>
       </p:nvGrpSpPr>
@@ -4799,7 +6500,7 @@
       </p:grpSpPr>
       <p:sp>
         <p:nvSpPr>
-          <p:cNvPr id="130" name="Google Shape;130;p14"/>
+          <p:cNvPr id="138" name="Google Shape;138;p15"/>
           <p:cNvSpPr/>
           <p:nvPr/>
         </p:nvSpPr>
@@ -4877,7 +6578,7 @@
       </p:sp>
       <p:sp>
         <p:nvSpPr>
-          <p:cNvPr id="131" name="Google Shape;131;p14"/>
+          <p:cNvPr id="139" name="Google Shape;139;p15"/>
           <p:cNvSpPr/>
           <p:nvPr/>
         </p:nvSpPr>
@@ -5047,7 +6748,7 @@
       </p:sp>
       <p:sp>
         <p:nvSpPr>
-          <p:cNvPr id="132" name="Google Shape;132;p14"/>
+          <p:cNvPr id="140" name="Google Shape;140;p15"/>
           <p:cNvSpPr/>
           <p:nvPr/>
         </p:nvSpPr>
@@ -5291,7 +6992,7 @@
       </p:sp>
       <p:pic>
         <p:nvPicPr>
-          <p:cNvPr id="133" name="Google Shape;133;p14"/>
+          <p:cNvPr id="141" name="Google Shape;141;p15"/>
           <p:cNvPicPr preferRelativeResize="0"/>
           <p:nvPr/>
         </p:nvPicPr>
@@ -5318,7 +7019,7 @@
       </p:pic>
       <p:sp>
         <p:nvSpPr>
-          <p:cNvPr id="134" name="Google Shape;134;p14"/>
+          <p:cNvPr id="142" name="Google Shape;142;p15"/>
           <p:cNvSpPr/>
           <p:nvPr/>
         </p:nvSpPr>
@@ -5409,7 +7110,7 @@
       </p:sp>
       <p:sp>
         <p:nvSpPr>
-          <p:cNvPr id="135" name="Google Shape;135;p14"/>
+          <p:cNvPr id="143" name="Google Shape;143;p15"/>
           <p:cNvSpPr/>
           <p:nvPr/>
         </p:nvSpPr>
@@ -5659,7 +7360,7 @@
       </p:sp>
       <p:sp>
         <p:nvSpPr>
-          <p:cNvPr id="136" name="Google Shape;136;p14"/>
+          <p:cNvPr id="144" name="Google Shape;144;p15"/>
           <p:cNvSpPr/>
           <p:nvPr/>
         </p:nvSpPr>
@@ -5713,7 +7414,59 @@
                 <a:cs typeface="IBM Plex Sans Medium"/>
                 <a:sym typeface="IBM Plex Sans Medium"/>
               </a:rPr>
-              <a:t>The current overheads may be acceptable in certain scenarios.</a:t>
+              <a:t>The prototype demonstrates feasibility and functional protection, but is not production-ready.</a:t>
+            </a:r>
+            <a:endParaRPr sz="2000">
+              <a:solidFill>
+                <a:srgbClr val="FFFFFF"/>
+              </a:solidFill>
+              <a:latin typeface="IBM Plex Sans Medium"/>
+              <a:ea typeface="IBM Plex Sans Medium"/>
+              <a:cs typeface="IBM Plex Sans Medium"/>
+              <a:sym typeface="IBM Plex Sans Medium"/>
+            </a:endParaRPr>
+          </a:p>
+          <a:p>
+            <a:pPr indent="0" lvl="0" marL="0" marR="0" rtl="0" algn="l">
+              <a:lnSpc>
+                <a:spcPct val="131707"/>
+              </a:lnSpc>
+              <a:spcBef>
+                <a:spcPts val="0"/>
+              </a:spcBef>
+              <a:spcAft>
+                <a:spcPts val="0"/>
+              </a:spcAft>
+              <a:buClr>
+                <a:srgbClr val="FFFFFF"/>
+              </a:buClr>
+              <a:buSzPts val="2050"/>
+              <a:buFont typeface="IBM Plex Sans Medium"/>
+              <a:buNone/>
+            </a:pPr>
+            <a:r>
+              <a:rPr lang="en-US" sz="2000">
+                <a:solidFill>
+                  <a:srgbClr val="FFFFFF"/>
+                </a:solidFill>
+                <a:latin typeface="IBM Plex Sans Medium"/>
+                <a:ea typeface="IBM Plex Sans Medium"/>
+                <a:cs typeface="IBM Plex Sans Medium"/>
+                <a:sym typeface="IBM Plex Sans Medium"/>
+              </a:rPr>
+              <a:t>T</a:t>
+            </a:r>
+            <a:r>
+              <a:rPr b="0" i="0" lang="en-US" sz="2000" u="none" cap="none" strike="noStrike">
+                <a:solidFill>
+                  <a:srgbClr val="FFFFFF"/>
+                </a:solidFill>
+                <a:latin typeface="IBM Plex Sans Medium"/>
+                <a:ea typeface="IBM Plex Sans Medium"/>
+                <a:cs typeface="IBM Plex Sans Medium"/>
+                <a:sym typeface="IBM Plex Sans Medium"/>
+              </a:rPr>
+              <a:t>he current overheads may be acceptable in certain scenarios.</a:t>
             </a:r>
             <a:endParaRPr sz="2000"/>
           </a:p>
@@ -5721,7 +7474,7 @@
       </p:sp>
       <p:sp>
         <p:nvSpPr>
-          <p:cNvPr id="137" name="Google Shape;137;p14"/>
+          <p:cNvPr id="145" name="Google Shape;145;p15"/>
           <p:cNvSpPr/>
           <p:nvPr/>
         </p:nvSpPr>
@@ -5792,7 +7545,7 @@
 </p:sld>
 </file>
 
-<file path=ppt/slides/slide13.xml><?xml version="1.0" encoding="utf-8"?>
+<file path=ppt/slides/slide14.xml><?xml version="1.0" encoding="utf-8"?>
 <p:sld xmlns:a="http://schemas.openxmlformats.org/drawingml/2006/main" xmlns:r="http://schemas.openxmlformats.org/officeDocument/2006/relationships" xmlns:mc="http://schemas.openxmlformats.org/markup-compatibility/2006" xmlns:mv="urn:schemas-microsoft-com:mac:vml" xmlns:p="http://schemas.openxmlformats.org/presentationml/2006/main" xmlns:c="http://schemas.openxmlformats.org/drawingml/2006/chart" xmlns:dgm="http://schemas.openxmlformats.org/drawingml/2006/diagram" xmlns:o="urn:schemas-microsoft-com:office:office" xmlns:v="urn:schemas-microsoft-com:vml" xmlns:pvml="urn:schemas-microsoft-com:office:powerpoint" xmlns:com="http://schemas.openxmlformats.org/drawingml/2006/compatibility" xmlns:p14="http://schemas.microsoft.com/office/powerpoint/2010/main" xmlns:p15="http://schemas.microsoft.com/office/powerpoint/2012/main" xmlns:ahyp="http://schemas.microsoft.com/office/drawing/2018/hyperlinkcolor">
   <p:cSld>
     <p:bg>
@@ -5804,7 +7557,7 @@
     </p:bg>
     <p:spTree>
       <p:nvGrpSpPr>
-        <p:cNvPr id="141" name="Shape 141"/>
+        <p:cNvPr id="149" name="Shape 149"/>
         <p:cNvGrpSpPr/>
         <p:nvPr/>
       </p:nvGrpSpPr>
@@ -5818,7 +7571,7 @@
       </p:grpSpPr>
       <p:pic>
         <p:nvPicPr>
-          <p:cNvPr descr="preencoded.png" id="142" name="Google Shape;142;p15"/>
+          <p:cNvPr descr="preencoded.png" id="150" name="Google Shape;150;p16"/>
           <p:cNvPicPr preferRelativeResize="0"/>
           <p:nvPr/>
         </p:nvPicPr>
@@ -5845,7 +7598,7 @@
       </p:pic>
       <p:pic>
         <p:nvPicPr>
-          <p:cNvPr descr="preencoded.png" id="143" name="Google Shape;143;p15"/>
+          <p:cNvPr descr="preencoded.png" id="151" name="Google Shape;151;p16"/>
           <p:cNvPicPr preferRelativeResize="0"/>
           <p:nvPr/>
         </p:nvPicPr>
@@ -5872,7 +7625,7 @@
       </p:pic>
       <p:pic>
         <p:nvPicPr>
-          <p:cNvPr descr="preencoded.png" id="144" name="Google Shape;144;p15"/>
+          <p:cNvPr descr="preencoded.png" id="152" name="Google Shape;152;p16"/>
           <p:cNvPicPr preferRelativeResize="0"/>
           <p:nvPr/>
         </p:nvPicPr>
@@ -5899,7 +7652,7 @@
       </p:pic>
       <p:pic>
         <p:nvPicPr>
-          <p:cNvPr descr="preencoded.png" id="145" name="Google Shape;145;p15"/>
+          <p:cNvPr descr="preencoded.png" id="153" name="Google Shape;153;p16"/>
           <p:cNvPicPr preferRelativeResize="0"/>
           <p:nvPr/>
         </p:nvPicPr>
@@ -5926,7 +7679,7 @@
       </p:pic>
       <p:pic>
         <p:nvPicPr>
-          <p:cNvPr descr="preencoded.png" id="146" name="Google Shape;146;p15"/>
+          <p:cNvPr descr="preencoded.png" id="154" name="Google Shape;154;p16"/>
           <p:cNvPicPr preferRelativeResize="0"/>
           <p:nvPr/>
         </p:nvPicPr>
@@ -5953,7 +7706,7 @@
       </p:pic>
       <p:sp>
         <p:nvSpPr>
-          <p:cNvPr id="147" name="Google Shape;147;p15"/>
+          <p:cNvPr id="155" name="Google Shape;155;p16"/>
           <p:cNvSpPr/>
           <p:nvPr/>
         </p:nvSpPr>
@@ -6017,61 +7770,9 @@
           </a:p>
         </p:txBody>
       </p:sp>
-      <p:sp>
-        <p:nvSpPr>
-          <p:cNvPr id="148" name="Google Shape;148;p15"/>
-          <p:cNvSpPr/>
-          <p:nvPr/>
-        </p:nvSpPr>
-        <p:spPr>
-          <a:xfrm>
-            <a:off x="1123950" y="3450000"/>
-            <a:ext cx="13000000" cy="6000000"/>
-          </a:xfrm>
-          <a:prstGeom prst="rect">
-            <a:avLst/>
-          </a:prstGeom>
-          <a:noFill/>
-          <a:ln>
-            <a:noFill/>
-          </a:ln>
-        </p:spPr>
-        <p:txBody>
-          <a:bodyPr anchorCtr="0" anchor="t" bIns="0" lIns="0" spcFirstLastPara="1" rIns="0" wrap="square" tIns="0">
-            <a:noAutofit/>
-          </a:bodyPr>
-          <a:lstStyle/>
-          <a:p>
-            <a:pPr indent="0" lvl="0" marL="0" marR="0" rtl="0" algn="l">
-              <a:lnSpc>
-                <a:spcPct val="152941"/>
-              </a:lnSpc>
-              <a:spcBef>
-                <a:spcPts val="0"/>
-              </a:spcBef>
-              <a:spcAft>
-                <a:spcPts val="0"/>
-              </a:spcAft>
-              <a:buNone/>
-            </a:pPr>
-            <a:r>
-              <a:t/>
-            </a:r>
-            <a:endParaRPr b="0" i="0" sz="1700" u="none" cap="none" strike="noStrike">
-              <a:solidFill>
-                <a:schemeClr val="dk1"/>
-              </a:solidFill>
-              <a:latin typeface="Calibri"/>
-              <a:ea typeface="Calibri"/>
-              <a:cs typeface="Calibri"/>
-              <a:sym typeface="Calibri"/>
-            </a:endParaRPr>
-          </a:p>
-        </p:txBody>
-      </p:sp>
       <p:pic>
         <p:nvPicPr>
-          <p:cNvPr id="149" name="Google Shape;149;p15"/>
+          <p:cNvPr id="156" name="Google Shape;156;p16"/>
           <p:cNvPicPr preferRelativeResize="0"/>
           <p:nvPr/>
         </p:nvPicPr>
@@ -6240,7 +7941,7 @@
               <a:buNone/>
             </a:pPr>
             <a:r>
-              <a:rPr b="0" i="0" lang="en-US" sz="2000" u="none" cap="none" strike="noStrike">
+              <a:rPr lang="en-US" sz="2000">
                 <a:solidFill>
                   <a:srgbClr val="1A1A1A"/>
                 </a:solidFill>
@@ -6249,31 +7950,7 @@
                 <a:cs typeface="IBM Plex Sans Medium"/>
                 <a:sym typeface="IBM Plex Sans Medium"/>
               </a:rPr>
-              <a:t>Orthogonal </a:t>
-            </a:r>
-            <a:r>
-              <a:rPr i="0" lang="en-US" sz="2000" u="none" cap="none" strike="noStrike">
-                <a:solidFill>
-                  <a:srgbClr val="1A1A1A"/>
-                </a:solidFill>
-                <a:latin typeface="IBM Plex Sans Medium"/>
-                <a:ea typeface="IBM Plex Sans Medium"/>
-                <a:cs typeface="IBM Plex Sans Medium"/>
-                <a:sym typeface="IBM Plex Sans Medium"/>
-              </a:rPr>
-              <a:t>persistence</a:t>
-            </a:r>
-            <a:r>
-              <a:rPr b="0" i="0" lang="en-US" sz="2000" u="none" cap="none" strike="noStrike">
-                <a:solidFill>
-                  <a:srgbClr val="1A1A1A"/>
-                </a:solidFill>
-                <a:latin typeface="IBM Plex Sans Medium"/>
-                <a:ea typeface="IBM Plex Sans Medium"/>
-                <a:cs typeface="IBM Plex Sans Medium"/>
-                <a:sym typeface="IBM Plex Sans Medium"/>
-              </a:rPr>
-              <a:t>:</a:t>
+              <a:t>Why it matters</a:t>
             </a:r>
             <a:endParaRPr b="0" i="0" sz="2000" u="none" cap="none" strike="noStrike">
               <a:solidFill>
@@ -6304,7 +7981,7 @@
               <a:buChar char="•"/>
             </a:pPr>
             <a:r>
-              <a:rPr b="0" i="0" lang="en-US" sz="2000" u="none" cap="none" strike="noStrike">
+              <a:rPr lang="en-US" sz="2000">
                 <a:solidFill>
                   <a:srgbClr val="1A1A1A"/>
                 </a:solidFill>
@@ -6313,7 +7990,19 @@
                 <a:cs typeface="IBM Plex Sans"/>
                 <a:sym typeface="IBM Plex Sans"/>
               </a:rPr>
-              <a:t>Developed in the 1970s</a:t>
+              <a:t>Conception d</a:t>
+            </a:r>
+            <a:r>
+              <a:rPr b="0" i="0" lang="en-US" sz="2000" u="none" cap="none" strike="noStrike">
+                <a:solidFill>
+                  <a:srgbClr val="1A1A1A"/>
+                </a:solidFill>
+                <a:latin typeface="IBM Plex Sans"/>
+                <a:ea typeface="IBM Plex Sans"/>
+                <a:cs typeface="IBM Plex Sans"/>
+                <a:sym typeface="IBM Plex Sans"/>
+              </a:rPr>
+              <a:t>eveloped in the 1970s</a:t>
             </a:r>
             <a:endParaRPr b="0" i="0" sz="2000" u="none" cap="none" strike="noStrike">
               <a:solidFill>
@@ -6353,7 +8042,7 @@
                 <a:cs typeface="IBM Plex Sans"/>
                 <a:sym typeface="IBM Plex Sans"/>
               </a:rPr>
-              <a:t>Not well-studied</a:t>
+              <a:t>The hardware and network balances have changed</a:t>
             </a:r>
             <a:endParaRPr b="0" i="0" sz="2000" u="none" cap="none" strike="noStrike">
               <a:solidFill>
@@ -6384,7 +8073,7 @@
               <a:buChar char="•"/>
             </a:pPr>
             <a:r>
-              <a:rPr b="0" i="0" lang="en-US" sz="2000" u="none" cap="none" strike="noStrike">
+              <a:rPr lang="en-US" sz="2000">
                 <a:solidFill>
                   <a:srgbClr val="1A1A1A"/>
                 </a:solidFill>
@@ -6393,9 +8082,9 @@
                 <a:cs typeface="IBM Plex Sans"/>
                 <a:sym typeface="IBM Plex Sans"/>
               </a:rPr>
-              <a:t>The hardware and network balances have changed</a:t>
-            </a:r>
-            <a:endParaRPr b="0" i="0" sz="2000" u="none" cap="none" strike="noStrike">
+              <a:t>Persistent data storage must be protected</a:t>
+            </a:r>
+            <a:endParaRPr sz="2000">
               <a:solidFill>
                 <a:srgbClr val="1A1A1A"/>
               </a:solidFill>
@@ -6420,11 +8109,11 @@
                 <a:srgbClr val="1A1A1A"/>
               </a:buClr>
               <a:buSzPts val="2000"/>
-              <a:buFont typeface="Arial"/>
+              <a:buFont typeface="IBM Plex Sans"/>
               <a:buChar char="•"/>
             </a:pPr>
             <a:r>
-              <a:rPr b="0" i="0" lang="en-US" sz="2000" u="none" cap="none" strike="noStrike">
+              <a:rPr lang="en-US" sz="2000">
                 <a:solidFill>
                   <a:srgbClr val="1A1A1A"/>
                 </a:solidFill>
@@ -6433,9 +8122,9 @@
                 <a:cs typeface="IBM Plex Sans"/>
                 <a:sym typeface="IBM Plex Sans"/>
               </a:rPr>
-              <a:t>Changes in requirements (e. g., power consumption)</a:t>
-            </a:r>
-            <a:endParaRPr b="0" i="0" sz="2000" u="none" cap="none" strike="noStrike">
+              <a:t>Snapshot security in Phantom was not considered </a:t>
+            </a:r>
+            <a:endParaRPr sz="2000">
               <a:solidFill>
                 <a:srgbClr val="1A1A1A"/>
               </a:solidFill>
@@ -6810,7 +8499,7 @@
                 <a:cs typeface="IBM Plex Sans"/>
                 <a:sym typeface="IBM Plex Sans"/>
               </a:rPr>
-              <a:t>Verify protection correctness</a:t>
+              <a:t>Experimentally check protection correctness</a:t>
             </a:r>
             <a:endParaRPr b="0" i="0" sz="1900" u="none" cap="none" strike="noStrike">
               <a:solidFill>
@@ -6951,7 +8640,7 @@
                 <a:cs typeface="IBM Plex Sans"/>
                 <a:sym typeface="IBM Plex Sans"/>
               </a:rPr>
-              <a:t>PhantomOS is our choice</a:t>
+              <a:t>PhantomOS is our choice. The issue we solve is that snapshots are stored in plaintext</a:t>
             </a:r>
             <a:endParaRPr sz="1800">
               <a:solidFill>
@@ -10009,7 +11698,7 @@
             <a:endParaRPr sz="1850"/>
           </a:p>
           <a:p>
-            <a:pPr indent="-376826" lvl="0" marL="380001" marR="0" rtl="0" algn="l">
+            <a:pPr indent="0" lvl="0" marL="0" marR="0" rtl="0" algn="l">
               <a:lnSpc>
                 <a:spcPct val="125714"/>
               </a:lnSpc>
@@ -10019,12 +11708,7 @@
               <a:spcAft>
                 <a:spcPts val="0"/>
               </a:spcAft>
-              <a:buClr>
-                <a:srgbClr val="1A1A1A"/>
-              </a:buClr>
-              <a:buSzPts val="1700"/>
-              <a:buFont typeface="Arial"/>
-              <a:buChar char="•"/>
+              <a:buNone/>
             </a:pPr>
             <a:r>
               <a:rPr b="0" i="0" lang="en-US" sz="1700" u="none" cap="none" strike="noStrike">
@@ -10050,28 +11734,8 @@
               </a:rPr>
               <a:t>sensitive data</a:t>
             </a:r>
-            <a:endParaRPr sz="1700"/>
-          </a:p>
-          <a:p>
-            <a:pPr indent="-376826" lvl="0" marL="380001" marR="0" rtl="0" algn="l">
-              <a:lnSpc>
-                <a:spcPct val="125714"/>
-              </a:lnSpc>
-              <a:spcBef>
-                <a:spcPts val="200"/>
-              </a:spcBef>
-              <a:spcAft>
-                <a:spcPts val="0"/>
-              </a:spcAft>
-              <a:buClr>
-                <a:srgbClr val="1A1A1A"/>
-              </a:buClr>
-              <a:buSzPts val="1700"/>
-              <a:buFont typeface="Arial"/>
-              <a:buChar char="•"/>
-            </a:pPr>
-            <a:r>
-              <a:rPr b="1" i="0" lang="en-US" sz="1700" u="none" cap="none" strike="noStrike">
+            <a:r>
+              <a:rPr lang="en-US" sz="1700">
                 <a:solidFill>
                   <a:srgbClr val="1A1A1A"/>
                 </a:solidFill>
@@ -10080,10 +11744,10 @@
                 <a:cs typeface="IBM Plex Sans"/>
                 <a:sym typeface="IBM Plex Sans"/>
               </a:rPr>
-              <a:t>Plaintext</a:t>
-            </a:r>
-            <a:r>
-              <a:rPr b="0" i="0" lang="en-US" sz="1700" u="none" cap="none" strike="noStrike">
+              <a:t> which is </a:t>
+            </a:r>
+            <a:r>
+              <a:rPr b="1" lang="en-US" sz="1700">
                 <a:solidFill>
                   <a:srgbClr val="1A1A1A"/>
                 </a:solidFill>
@@ -10092,9 +11756,38 @@
                 <a:cs typeface="IBM Plex Sans"/>
                 <a:sym typeface="IBM Plex Sans"/>
               </a:rPr>
-              <a:t> snapshots are stored on the drive</a:t>
-            </a:r>
-            <a:endParaRPr sz="1700"/>
+              <a:t>stored</a:t>
+            </a:r>
+            <a:r>
+              <a:rPr lang="en-US" sz="1700">
+                <a:solidFill>
+                  <a:srgbClr val="1A1A1A"/>
+                </a:solidFill>
+                <a:latin typeface="IBM Plex Sans"/>
+                <a:ea typeface="IBM Plex Sans"/>
+                <a:cs typeface="IBM Plex Sans"/>
+                <a:sym typeface="IBM Plex Sans"/>
+              </a:rPr>
+              <a:t> on the disk in </a:t>
+            </a:r>
+            <a:r>
+              <a:rPr b="1" lang="en-US" sz="1700">
+                <a:solidFill>
+                  <a:srgbClr val="1A1A1A"/>
+                </a:solidFill>
+                <a:latin typeface="IBM Plex Sans"/>
+                <a:ea typeface="IBM Plex Sans"/>
+                <a:cs typeface="IBM Plex Sans"/>
+                <a:sym typeface="IBM Plex Sans"/>
+              </a:rPr>
+              <a:t>plaintext</a:t>
+            </a:r>
+            <a:endParaRPr b="1" sz="1700">
+              <a:latin typeface="IBM Plex Sans"/>
+              <a:ea typeface="IBM Plex Sans"/>
+              <a:cs typeface="IBM Plex Sans"/>
+              <a:sym typeface="IBM Plex Sans"/>
+            </a:endParaRPr>
           </a:p>
           <a:p>
             <a:pPr indent="0" lvl="0" marL="0" marR="0" rtl="0" algn="l">
@@ -10137,7 +11830,7 @@
             </a:endParaRPr>
           </a:p>
           <a:p>
-            <a:pPr indent="-376826" lvl="0" marL="380001" marR="0" rtl="0" algn="l">
+            <a:pPr indent="0" lvl="0" marL="0" marR="0" rtl="0" algn="l">
               <a:lnSpc>
                 <a:spcPct val="125714"/>
               </a:lnSpc>
@@ -10147,12 +11840,7 @@
               <a:spcAft>
                 <a:spcPts val="0"/>
               </a:spcAft>
-              <a:buClr>
-                <a:srgbClr val="1A1A1A"/>
-              </a:buClr>
-              <a:buSzPts val="1700"/>
-              <a:buFont typeface="Arial"/>
-              <a:buChar char="•"/>
+              <a:buNone/>
             </a:pPr>
             <a:r>
               <a:rPr b="0" i="0" lang="en-US" sz="1700" u="none" cap="none" strike="noStrike">
@@ -10166,36 +11854,8 @@
               </a:rPr>
               <a:t>Physical access attacks</a:t>
             </a:r>
-            <a:endParaRPr b="1" i="0" sz="1700" u="none" cap="none" strike="noStrike">
-              <a:solidFill>
-                <a:srgbClr val="1A1A1A"/>
-              </a:solidFill>
-              <a:latin typeface="IBM Plex Sans"/>
-              <a:ea typeface="IBM Plex Sans"/>
-              <a:cs typeface="IBM Plex Sans"/>
-              <a:sym typeface="IBM Plex Sans"/>
-            </a:endParaRPr>
-          </a:p>
-          <a:p>
-            <a:pPr indent="-376826" lvl="1" marL="837201" marR="0" rtl="0" algn="l">
-              <a:lnSpc>
-                <a:spcPct val="125714"/>
-              </a:lnSpc>
-              <a:spcBef>
-                <a:spcPts val="200"/>
-              </a:spcBef>
-              <a:spcAft>
-                <a:spcPts val="0"/>
-              </a:spcAft>
-              <a:buClr>
-                <a:srgbClr val="1A1A1A"/>
-              </a:buClr>
-              <a:buSzPts val="1700"/>
-              <a:buFont typeface="Arial"/>
-              <a:buChar char="•"/>
-            </a:pPr>
-            <a:r>
-              <a:rPr b="0" i="0" lang="en-US" sz="1700" u="none" cap="none" strike="noStrike">
+            <a:r>
+              <a:rPr b="1" lang="en-US" sz="1700">
                 <a:solidFill>
                   <a:srgbClr val="1A1A1A"/>
                 </a:solidFill>
@@ -10204,7 +11864,31 @@
                 <a:cs typeface="IBM Plex Sans"/>
                 <a:sym typeface="IBM Plex Sans"/>
               </a:rPr>
-              <a:t>Reproduce the machine state</a:t>
+              <a:t> </a:t>
+            </a:r>
+            <a:r>
+              <a:rPr lang="en-US" sz="1700">
+                <a:solidFill>
+                  <a:srgbClr val="1A1A1A"/>
+                </a:solidFill>
+                <a:latin typeface="IBM Plex Sans"/>
+                <a:ea typeface="IBM Plex Sans"/>
+                <a:cs typeface="IBM Plex Sans"/>
+                <a:sym typeface="IBM Plex Sans"/>
+              </a:rPr>
+              <a:t>(</a:t>
+            </a:r>
+            <a:r>
+              <a:rPr b="0" i="0" lang="en-US" sz="1700" u="none" cap="none" strike="noStrike">
+                <a:solidFill>
+                  <a:srgbClr val="1A1A1A"/>
+                </a:solidFill>
+                <a:latin typeface="IBM Plex Sans"/>
+                <a:ea typeface="IBM Plex Sans"/>
+                <a:cs typeface="IBM Plex Sans"/>
+                <a:sym typeface="IBM Plex Sans"/>
+              </a:rPr>
+              <a:t>Reproduce the machine state)</a:t>
             </a:r>
             <a:endParaRPr sz="1700"/>
           </a:p>
@@ -10671,8 +12355,8 @@
         </p:blipFill>
         <p:spPr>
           <a:xfrm>
-            <a:off x="3890230" y="1500500"/>
-            <a:ext cx="10507549" cy="8053372"/>
+            <a:off x="3411962" y="1500500"/>
+            <a:ext cx="11464087" cy="8786500"/>
           </a:xfrm>
           <a:prstGeom prst="rect">
             <a:avLst/>
@@ -10907,8 +12591,8 @@
         </p:blipFill>
         <p:spPr>
           <a:xfrm>
-            <a:off x="3726540" y="2115350"/>
-            <a:ext cx="10860924" cy="7434651"/>
+            <a:off x="3321275" y="1778925"/>
+            <a:ext cx="11645451" cy="7971674"/>
           </a:xfrm>
           <a:prstGeom prst="rect">
             <a:avLst/>
@@ -10960,7 +12644,7 @@
         <p:spPr>
           <a:xfrm>
             <a:off x="1095375" y="900000"/>
-            <a:ext cx="13000000" cy="700000"/>
+            <a:ext cx="12999900" cy="699900"/>
           </a:xfrm>
           <a:prstGeom prst="rect">
             <a:avLst/>
@@ -10976,7 +12660,7 @@
           </a:bodyPr>
           <a:lstStyle/>
           <a:p>
-            <a:pPr indent="0" lvl="0" marL="0" marR="0" rtl="0" algn="l">
+            <a:pPr indent="0" lvl="0" marL="0" rtl="0" algn="l">
               <a:lnSpc>
                 <a:spcPct val="114285"/>
               </a:lnSpc>
@@ -10994,7 +12678,7 @@
               <a:buNone/>
             </a:pPr>
             <a:r>
-              <a:rPr b="1" i="0" lang="en-US" sz="2800" u="none" cap="none" strike="noStrike">
+              <a:rPr b="1" lang="en-US" sz="2800">
                 <a:solidFill>
                   <a:srgbClr val="1A1A1A"/>
                 </a:solidFill>
@@ -11003,477 +12687,50 @@
                 <a:cs typeface="Montserrat"/>
                 <a:sym typeface="Montserrat"/>
               </a:rPr>
-              <a:t>Environment &amp; Requirements</a:t>
-            </a:r>
-            <a:endParaRPr/>
-          </a:p>
-        </p:txBody>
-      </p:sp>
-      <p:sp>
-        <p:nvSpPr>
-          <p:cNvPr id="89" name="Google Shape;89;p10"/>
-          <p:cNvSpPr/>
-          <p:nvPr/>
-        </p:nvSpPr>
-        <p:spPr>
-          <a:xfrm>
-            <a:off x="1095375" y="1850000"/>
-            <a:ext cx="16050000" cy="950000"/>
-          </a:xfrm>
-          <a:prstGeom prst="roundRect">
-            <a:avLst>
-              <a:gd fmla="val 6000" name="adj"/>
-            </a:avLst>
-          </a:prstGeom>
-          <a:solidFill>
-            <a:srgbClr val="40BA21"/>
-          </a:solidFill>
-          <a:ln>
-            <a:noFill/>
-          </a:ln>
-        </p:spPr>
-        <p:txBody>
-          <a:bodyPr anchorCtr="0" anchor="ctr" bIns="364000" lIns="520000" spcFirstLastPara="1" rIns="520000" wrap="square" tIns="364000">
-            <a:noAutofit/>
-          </a:bodyPr>
-          <a:lstStyle/>
+              <a:t>Environment description: Usage scenarios</a:t>
+            </a:r>
+            <a:endParaRPr>
+              <a:solidFill>
+                <a:schemeClr val="dk1"/>
+              </a:solidFill>
+            </a:endParaRPr>
+          </a:p>
           <a:p>
             <a:pPr indent="0" lvl="0" marL="0" marR="0" rtl="0" algn="l">
               <a:lnSpc>
-                <a:spcPct val="123809"/>
-              </a:lnSpc>
-              <a:spcBef>
-                <a:spcPts val="0"/>
-              </a:spcBef>
-              <a:spcAft>
-                <a:spcPts val="0"/>
-              </a:spcAft>
-              <a:buClr>
-                <a:srgbClr val="FFFFFF"/>
-              </a:buClr>
-              <a:buSzPts val="2100"/>
-              <a:buFont typeface="Montserrat SemiBold"/>
+                <a:spcPct val="114285"/>
+              </a:lnSpc>
+              <a:spcBef>
+                <a:spcPts val="0"/>
+              </a:spcBef>
+              <a:spcAft>
+                <a:spcPts val="0"/>
+              </a:spcAft>
+              <a:buClr>
+                <a:srgbClr val="1A1A1A"/>
+              </a:buClr>
+              <a:buSzPts val="2800"/>
+              <a:buFont typeface="Montserrat"/>
               <a:buNone/>
             </a:pPr>
             <a:r>
-              <a:rPr b="1" i="0" lang="en-US" sz="2100" u="none" cap="none" strike="noStrike">
-                <a:solidFill>
-                  <a:srgbClr val="FFFFFF"/>
-                </a:solidFill>
-                <a:latin typeface="Montserrat SemiBold"/>
-                <a:ea typeface="Montserrat SemiBold"/>
-                <a:cs typeface="Montserrat SemiBold"/>
-                <a:sym typeface="Montserrat SemiBold"/>
-              </a:rPr>
-              <a:t>No unauthorized access to data</a:t>
-            </a:r>
-            <a:endParaRPr/>
-          </a:p>
-        </p:txBody>
-      </p:sp>
-      <p:sp>
-        <p:nvSpPr>
-          <p:cNvPr id="90" name="Google Shape;90;p10"/>
-          <p:cNvSpPr/>
-          <p:nvPr/>
-        </p:nvSpPr>
-        <p:spPr>
-          <a:xfrm>
-            <a:off x="1095375" y="3050000"/>
-            <a:ext cx="9300000" cy="4950000"/>
-          </a:xfrm>
-          <a:prstGeom prst="roundRect">
-            <a:avLst>
-              <a:gd fmla="val 6000" name="adj"/>
-            </a:avLst>
-          </a:prstGeom>
-          <a:solidFill>
-            <a:srgbClr val="EEF1F4"/>
-          </a:solidFill>
-          <a:ln>
-            <a:noFill/>
-          </a:ln>
-        </p:spPr>
-        <p:txBody>
-          <a:bodyPr anchorCtr="0" anchor="ctr" bIns="392000" lIns="560000" spcFirstLastPara="1" rIns="560000" wrap="square" tIns="392000">
-            <a:noAutofit/>
-          </a:bodyPr>
-          <a:lstStyle/>
-          <a:p>
-            <a:pPr indent="0" lvl="0" marL="0" marR="0" rtl="0" algn="l">
-              <a:lnSpc>
-                <a:spcPct val="128205"/>
-              </a:lnSpc>
-              <a:spcBef>
-                <a:spcPts val="0"/>
-              </a:spcBef>
-              <a:spcAft>
-                <a:spcPts val="0"/>
-              </a:spcAft>
-              <a:buClr>
-                <a:srgbClr val="2E8B16"/>
-              </a:buClr>
-              <a:buSzPts val="1950"/>
-              <a:buFont typeface="Montserrat SemiBold"/>
-              <a:buNone/>
-            </a:pPr>
-            <a:r>
-              <a:rPr b="1" i="0" lang="en-US" sz="1950" u="none" cap="none" strike="noStrike">
-                <a:solidFill>
-                  <a:srgbClr val="2E8B16"/>
-                </a:solidFill>
-                <a:latin typeface="Montserrat SemiBold"/>
-                <a:ea typeface="Montserrat SemiBold"/>
-                <a:cs typeface="Montserrat SemiBold"/>
-                <a:sym typeface="Montserrat SemiBold"/>
-              </a:rPr>
-              <a:t>Requirements</a:t>
-            </a:r>
-            <a:endParaRPr/>
-          </a:p>
-          <a:p>
-            <a:pPr indent="0" lvl="0" marL="0" marR="0" rtl="0" algn="l">
-              <a:lnSpc>
-                <a:spcPct val="127027"/>
-              </a:lnSpc>
-              <a:spcBef>
-                <a:spcPts val="320"/>
-              </a:spcBef>
-              <a:spcAft>
-                <a:spcPts val="0"/>
-              </a:spcAft>
-              <a:buClr>
-                <a:srgbClr val="2E8B16"/>
-              </a:buClr>
-              <a:buSzPts val="1850"/>
-              <a:buFont typeface="Montserrat SemiBold"/>
-              <a:buNone/>
-            </a:pPr>
-            <a:r>
-              <a:rPr b="1" i="0" lang="en-US" sz="1850" u="none" cap="none" strike="noStrike">
-                <a:solidFill>
-                  <a:srgbClr val="2E8B16"/>
-                </a:solidFill>
-                <a:latin typeface="Montserrat SemiBold"/>
-                <a:ea typeface="Montserrat SemiBold"/>
-                <a:cs typeface="Montserrat SemiBold"/>
-                <a:sym typeface="Montserrat SemiBold"/>
-              </a:rPr>
-              <a:t>1.  </a:t>
-            </a:r>
-            <a:r>
-              <a:rPr lang="en-US" sz="1850">
-                <a:solidFill>
-                  <a:srgbClr val="1A1A1A"/>
-                </a:solidFill>
-                <a:latin typeface="IBM Plex Sans"/>
-                <a:ea typeface="IBM Plex Sans"/>
-                <a:cs typeface="IBM Plex Sans"/>
-                <a:sym typeface="IBM Plex Sans"/>
-              </a:rPr>
-              <a:t>Access control</a:t>
-            </a:r>
-            <a:endParaRPr/>
-          </a:p>
-          <a:p>
-            <a:pPr indent="0" lvl="0" marL="0" marR="0" rtl="0" algn="l">
-              <a:lnSpc>
-                <a:spcPct val="127027"/>
-              </a:lnSpc>
-              <a:spcBef>
-                <a:spcPts val="230"/>
-              </a:spcBef>
-              <a:spcAft>
-                <a:spcPts val="0"/>
-              </a:spcAft>
-              <a:buClr>
-                <a:srgbClr val="2E8B16"/>
-              </a:buClr>
-              <a:buSzPts val="1850"/>
-              <a:buFont typeface="Montserrat SemiBold"/>
-              <a:buNone/>
-            </a:pPr>
-            <a:r>
-              <a:rPr b="1" i="0" lang="en-US" sz="1850" u="none" cap="none" strike="noStrike">
-                <a:solidFill>
-                  <a:srgbClr val="2E8B16"/>
-                </a:solidFill>
-                <a:latin typeface="Montserrat SemiBold"/>
-                <a:ea typeface="Montserrat SemiBold"/>
-                <a:cs typeface="Montserrat SemiBold"/>
-                <a:sym typeface="Montserrat SemiBold"/>
-              </a:rPr>
-              <a:t>2.  </a:t>
-            </a:r>
-            <a:r>
-              <a:rPr b="0" i="0" lang="en-US" sz="1850" u="none" cap="none" strike="noStrike">
-                <a:solidFill>
-                  <a:srgbClr val="1A1A1A"/>
-                </a:solidFill>
-                <a:latin typeface="IBM Plex Sans"/>
-                <a:ea typeface="IBM Plex Sans"/>
-                <a:cs typeface="IBM Plex Sans"/>
-                <a:sym typeface="IBM Plex Sans"/>
-              </a:rPr>
-              <a:t>Key stored on an external USB drive</a:t>
-            </a:r>
-            <a:endParaRPr/>
-          </a:p>
-          <a:p>
-            <a:pPr indent="0" lvl="0" marL="0" marR="0" rtl="0" algn="l">
-              <a:lnSpc>
-                <a:spcPct val="127027"/>
-              </a:lnSpc>
-              <a:spcBef>
-                <a:spcPts val="230"/>
-              </a:spcBef>
-              <a:spcAft>
-                <a:spcPts val="0"/>
-              </a:spcAft>
-              <a:buClr>
-                <a:srgbClr val="2E8B16"/>
-              </a:buClr>
-              <a:buSzPts val="1850"/>
-              <a:buFont typeface="Montserrat SemiBold"/>
-              <a:buNone/>
-            </a:pPr>
-            <a:r>
-              <a:rPr b="1" i="0" lang="en-US" sz="1850" u="none" cap="none" strike="noStrike">
-                <a:solidFill>
-                  <a:srgbClr val="2E8B16"/>
-                </a:solidFill>
-                <a:latin typeface="Montserrat SemiBold"/>
-                <a:ea typeface="Montserrat SemiBold"/>
-                <a:cs typeface="Montserrat SemiBold"/>
-                <a:sym typeface="Montserrat SemiBold"/>
-              </a:rPr>
-              <a:t>3.  </a:t>
-            </a:r>
-            <a:r>
-              <a:rPr b="0" i="0" lang="en-US" sz="1850" u="none" cap="none" strike="noStrike">
-                <a:solidFill>
-                  <a:srgbClr val="1A1A1A"/>
-                </a:solidFill>
-                <a:latin typeface="IBM Plex Sans"/>
-                <a:ea typeface="IBM Plex Sans"/>
-                <a:cs typeface="IBM Plex Sans"/>
-                <a:sym typeface="IBM Plex Sans"/>
-              </a:rPr>
-              <a:t>Encryption of snapshots (</a:t>
-            </a:r>
-            <a:r>
-              <a:rPr b="0" i="0" lang="en-US" sz="1850" u="none" cap="none" strike="noStrike">
-                <a:solidFill>
-                  <a:srgbClr val="1A1A1A"/>
-                </a:solidFill>
-                <a:latin typeface="IBM Plex Sans"/>
-                <a:ea typeface="IBM Plex Sans"/>
-                <a:cs typeface="IBM Plex Sans"/>
-                <a:sym typeface="IBM Plex Sans"/>
-              </a:rPr>
-              <a:t>AES, </a:t>
-            </a:r>
-            <a:r>
-              <a:rPr b="0" i="0" lang="en-US" sz="1850" u="none" cap="none" strike="noStrike">
-                <a:solidFill>
-                  <a:srgbClr val="1A1A1A"/>
-                </a:solidFill>
-                <a:latin typeface="IBM Plex Sans"/>
-                <a:ea typeface="IBM Plex Sans"/>
-                <a:cs typeface="IBM Plex Sans"/>
-                <a:sym typeface="IBM Plex Sans"/>
-              </a:rPr>
-              <a:t>block-level)</a:t>
-            </a:r>
-            <a:endParaRPr/>
-          </a:p>
-          <a:p>
-            <a:pPr indent="0" lvl="0" marL="0" marR="0" rtl="0" algn="l">
-              <a:lnSpc>
-                <a:spcPct val="127027"/>
-              </a:lnSpc>
-              <a:spcBef>
-                <a:spcPts val="230"/>
-              </a:spcBef>
-              <a:spcAft>
-                <a:spcPts val="0"/>
-              </a:spcAft>
-              <a:buClr>
-                <a:srgbClr val="2E8B16"/>
-              </a:buClr>
-              <a:buSzPts val="1850"/>
-              <a:buFont typeface="Montserrat SemiBold"/>
-              <a:buNone/>
-            </a:pPr>
-            <a:r>
-              <a:rPr b="1" i="0" lang="en-US" sz="1850" u="none" cap="none" strike="noStrike">
-                <a:solidFill>
-                  <a:srgbClr val="2E8B16"/>
-                </a:solidFill>
-                <a:latin typeface="Montserrat SemiBold"/>
-                <a:ea typeface="Montserrat SemiBold"/>
-                <a:cs typeface="Montserrat SemiBold"/>
-                <a:sym typeface="Montserrat SemiBold"/>
-              </a:rPr>
-              <a:t>4.  </a:t>
-            </a:r>
-            <a:r>
-              <a:rPr b="0" i="0" lang="en-US" sz="1850" u="none" cap="none" strike="noStrike">
-                <a:solidFill>
-                  <a:srgbClr val="1A1A1A"/>
-                </a:solidFill>
-                <a:latin typeface="IBM Plex Sans"/>
-                <a:ea typeface="IBM Plex Sans"/>
-                <a:cs typeface="IBM Plex Sans"/>
-                <a:sym typeface="IBM Plex Sans"/>
-              </a:rPr>
-              <a:t>Only encrypted data written to disk</a:t>
-            </a:r>
-            <a:endParaRPr/>
-          </a:p>
-          <a:p>
-            <a:pPr indent="0" lvl="0" marL="0" marR="0" rtl="0" algn="l">
-              <a:lnSpc>
-                <a:spcPct val="127027"/>
-              </a:lnSpc>
-              <a:spcBef>
-                <a:spcPts val="230"/>
-              </a:spcBef>
-              <a:spcAft>
-                <a:spcPts val="0"/>
-              </a:spcAft>
-              <a:buClr>
-                <a:srgbClr val="2E8B16"/>
-              </a:buClr>
-              <a:buSzPts val="1850"/>
-              <a:buFont typeface="Montserrat SemiBold"/>
-              <a:buNone/>
-            </a:pPr>
-            <a:r>
-              <a:rPr b="1" i="0" lang="en-US" sz="1850" u="none" cap="none" strike="noStrike">
-                <a:solidFill>
-                  <a:srgbClr val="2E8B16"/>
-                </a:solidFill>
-                <a:latin typeface="Montserrat SemiBold"/>
-                <a:ea typeface="Montserrat SemiBold"/>
-                <a:cs typeface="Montserrat SemiBold"/>
-                <a:sym typeface="Montserrat SemiBold"/>
-              </a:rPr>
-              <a:t>5.  </a:t>
-            </a:r>
-            <a:r>
-              <a:rPr b="0" i="0" lang="en-US" sz="1850" u="none" cap="none" strike="noStrike">
-                <a:solidFill>
-                  <a:srgbClr val="1A1A1A"/>
-                </a:solidFill>
-                <a:latin typeface="IBM Plex Sans"/>
-                <a:ea typeface="IBM Plex Sans"/>
-                <a:cs typeface="IBM Plex Sans"/>
-                <a:sym typeface="IBM Plex Sans"/>
-              </a:rPr>
-              <a:t>Acceptable performance overhead (≤ 2×)</a:t>
-            </a:r>
-            <a:endParaRPr/>
-          </a:p>
-        </p:txBody>
-      </p:sp>
-      <p:sp>
-        <p:nvSpPr>
-          <p:cNvPr id="91" name="Google Shape;91;p10"/>
-          <p:cNvSpPr/>
-          <p:nvPr/>
-        </p:nvSpPr>
-        <p:spPr>
-          <a:xfrm>
-            <a:off x="10800000" y="3050000"/>
-            <a:ext cx="6350000" cy="4950000"/>
-          </a:xfrm>
-          <a:prstGeom prst="roundRect">
-            <a:avLst>
-              <a:gd fmla="val 6000" name="adj"/>
-            </a:avLst>
-          </a:prstGeom>
-          <a:solidFill>
-            <a:srgbClr val="40BA21"/>
-          </a:solidFill>
-          <a:ln>
-            <a:noFill/>
-          </a:ln>
-        </p:spPr>
-        <p:txBody>
-          <a:bodyPr anchorCtr="0" anchor="ctr" bIns="434000" lIns="620000" spcFirstLastPara="1" rIns="620000" wrap="square" tIns="434000">
-            <a:noAutofit/>
-          </a:bodyPr>
-          <a:lstStyle/>
-          <a:p>
-            <a:pPr indent="0" lvl="0" marL="0" marR="0" rtl="0" algn="l">
-              <a:lnSpc>
-                <a:spcPct val="126829"/>
-              </a:lnSpc>
-              <a:spcBef>
-                <a:spcPts val="0"/>
-              </a:spcBef>
-              <a:spcAft>
-                <a:spcPts val="0"/>
-              </a:spcAft>
-              <a:buClr>
-                <a:srgbClr val="FFFFFF"/>
-              </a:buClr>
-              <a:buSzPts val="2050"/>
-              <a:buFont typeface="Montserrat SemiBold"/>
-              <a:buNone/>
-            </a:pPr>
-            <a:r>
-              <a:rPr b="1" i="0" lang="en-US" sz="2050" u="none" cap="none" strike="noStrike">
-                <a:solidFill>
-                  <a:srgbClr val="FFFFFF"/>
-                </a:solidFill>
-                <a:latin typeface="Montserrat SemiBold"/>
-                <a:ea typeface="Montserrat SemiBold"/>
-                <a:cs typeface="Montserrat SemiBold"/>
-                <a:sym typeface="Montserrat SemiBold"/>
-              </a:rPr>
-              <a:t>USB drive = key + auth factor</a:t>
-            </a:r>
-            <a:endParaRPr/>
-          </a:p>
-          <a:p>
-            <a:pPr indent="0" lvl="0" marL="0" marR="0" rtl="0" algn="l">
-              <a:lnSpc>
-                <a:spcPct val="129729"/>
-              </a:lnSpc>
-              <a:spcBef>
-                <a:spcPts val="400"/>
-              </a:spcBef>
-              <a:spcAft>
-                <a:spcPts val="0"/>
-              </a:spcAft>
-              <a:buClr>
-                <a:srgbClr val="FFFFFF"/>
-              </a:buClr>
-              <a:buSzPts val="1850"/>
-              <a:buFont typeface="IBM Plex Sans"/>
-              <a:buNone/>
-            </a:pPr>
-            <a:r>
-              <a:rPr b="0" i="0" lang="en-US" sz="1850" u="none" cap="none" strike="noStrike">
-                <a:solidFill>
-                  <a:srgbClr val="FFFFFF"/>
-                </a:solidFill>
-                <a:latin typeface="IBM Plex Sans"/>
-                <a:ea typeface="IBM Plex Sans"/>
-                <a:cs typeface="IBM Plex Sans"/>
-                <a:sym typeface="IBM Plex Sans"/>
-              </a:rPr>
-              <a:t>Requirements 1 and 2 combined: the USB drive both contains the key and serves as the authentication factor.</a:t>
-            </a:r>
-            <a:endParaRPr/>
+              <a:t/>
+            </a:r>
+            <a:endParaRPr b="1" sz="2800">
+              <a:solidFill>
+                <a:srgbClr val="1A1A1A"/>
+              </a:solidFill>
+              <a:latin typeface="Montserrat"/>
+              <a:ea typeface="Montserrat"/>
+              <a:cs typeface="Montserrat"/>
+              <a:sym typeface="Montserrat"/>
+            </a:endParaRPr>
           </a:p>
         </p:txBody>
       </p:sp>
       <p:pic>
         <p:nvPicPr>
-          <p:cNvPr id="92" name="Google Shape;92;p10"/>
+          <p:cNvPr id="89" name="Google Shape;89;p10"/>
           <p:cNvPicPr preferRelativeResize="0"/>
           <p:nvPr/>
         </p:nvPicPr>
@@ -11500,7 +12757,7 @@
       </p:pic>
       <p:sp>
         <p:nvSpPr>
-          <p:cNvPr id="93" name="Google Shape;93;p10"/>
+          <p:cNvPr id="90" name="Google Shape;90;p10"/>
           <p:cNvSpPr/>
           <p:nvPr/>
         </p:nvSpPr>
@@ -11547,7 +12804,7 @@
                 <a:cs typeface="IBM Plex Mono"/>
                 <a:sym typeface="IBM Plex Mono"/>
               </a:rPr>
-              <a:t>8</a:t>
+              <a:t>6</a:t>
             </a:r>
             <a:r>
               <a:rPr b="0" i="0" lang="en-US" sz="1300" u="none" cap="none" strike="noStrike">
@@ -11577,6 +12834,34 @@
           </a:p>
         </p:txBody>
       </p:sp>
+      <p:pic>
+        <p:nvPicPr>
+          <p:cNvPr id="91" name="Google Shape;91;p10"/>
+          <p:cNvPicPr preferRelativeResize="0"/>
+          <p:nvPr/>
+        </p:nvPicPr>
+        <p:blipFill>
+          <a:blip r:embed="rId4">
+            <a:alphaModFix/>
+          </a:blip>
+          <a:stretch>
+            <a:fillRect/>
+          </a:stretch>
+        </p:blipFill>
+        <p:spPr>
+          <a:xfrm>
+            <a:off x="4617977" y="1599900"/>
+            <a:ext cx="9052026" cy="8258751"/>
+          </a:xfrm>
+          <a:prstGeom prst="rect">
+            <a:avLst/>
+          </a:prstGeom>
+          <a:noFill/>
+          <a:ln>
+            <a:noFill/>
+          </a:ln>
+        </p:spPr>
+      </p:pic>
     </p:spTree>
   </p:cSld>
   <p:clrMapOvr>
@@ -11597,7 +12882,7 @@
     </p:bg>
     <p:spTree>
       <p:nvGrpSpPr>
-        <p:cNvPr id="97" name="Shape 97"/>
+        <p:cNvPr id="95" name="Shape 95"/>
         <p:cNvGrpSpPr/>
         <p:nvPr/>
       </p:nvGrpSpPr>
@@ -11611,7 +12896,7 @@
       </p:grpSpPr>
       <p:sp>
         <p:nvSpPr>
-          <p:cNvPr id="98" name="Google Shape;98;p11"/>
+          <p:cNvPr id="96" name="Google Shape;96;p11"/>
           <p:cNvSpPr/>
           <p:nvPr/>
         </p:nvSpPr>
@@ -11661,7 +12946,7 @@
                 <a:cs typeface="Montserrat"/>
                 <a:sym typeface="Montserrat"/>
               </a:rPr>
-              <a:t>Implementation</a:t>
+              <a:t>Environment &amp; Requirements</a:t>
             </a:r>
             <a:endParaRPr/>
           </a:p>
@@ -11669,14 +12954,76 @@
       </p:sp>
       <p:sp>
         <p:nvSpPr>
-          <p:cNvPr id="99" name="Google Shape;99;p11"/>
+          <p:cNvPr id="97" name="Google Shape;97;p11"/>
           <p:cNvSpPr/>
           <p:nvPr/>
         </p:nvSpPr>
         <p:spPr>
           <a:xfrm>
-            <a:off x="1095375" y="1900000"/>
-            <a:ext cx="7700100" cy="3725700"/>
+            <a:off x="1095375" y="1850000"/>
+            <a:ext cx="16050000" cy="950000"/>
+          </a:xfrm>
+          <a:prstGeom prst="roundRect">
+            <a:avLst>
+              <a:gd fmla="val 6000" name="adj"/>
+            </a:avLst>
+          </a:prstGeom>
+          <a:solidFill>
+            <a:srgbClr val="40BA21"/>
+          </a:solidFill>
+          <a:ln>
+            <a:noFill/>
+          </a:ln>
+        </p:spPr>
+        <p:txBody>
+          <a:bodyPr anchorCtr="0" anchor="ctr" bIns="364000" lIns="520000" spcFirstLastPara="1" rIns="520000" wrap="square" tIns="364000">
+            <a:noAutofit/>
+          </a:bodyPr>
+          <a:lstStyle/>
+          <a:p>
+            <a:pPr indent="0" lvl="0" marL="0" marR="0" rtl="0" algn="l">
+              <a:lnSpc>
+                <a:spcPct val="123809"/>
+              </a:lnSpc>
+              <a:spcBef>
+                <a:spcPts val="0"/>
+              </a:spcBef>
+              <a:spcAft>
+                <a:spcPts val="0"/>
+              </a:spcAft>
+              <a:buClr>
+                <a:srgbClr val="FFFFFF"/>
+              </a:buClr>
+              <a:buSzPts val="2100"/>
+              <a:buFont typeface="Montserrat SemiBold"/>
+              <a:buNone/>
+            </a:pPr>
+            <a:r>
+              <a:rPr b="1" i="0" lang="en-US" sz="2100" u="none" cap="none" strike="noStrike">
+                <a:solidFill>
+                  <a:srgbClr val="FFFFFF"/>
+                </a:solidFill>
+                <a:latin typeface="Montserrat SemiBold"/>
+                <a:ea typeface="Montserrat SemiBold"/>
+                <a:cs typeface="Montserrat SemiBold"/>
+                <a:sym typeface="Montserrat SemiBold"/>
+              </a:rPr>
+              <a:t>No unauthorized access to data</a:t>
+            </a:r>
+            <a:endParaRPr/>
+          </a:p>
+        </p:txBody>
+      </p:sp>
+      <p:sp>
+        <p:nvSpPr>
+          <p:cNvPr id="98" name="Google Shape;98;p11"/>
+          <p:cNvSpPr/>
+          <p:nvPr/>
+        </p:nvSpPr>
+        <p:spPr>
+          <a:xfrm>
+            <a:off x="1095375" y="3050000"/>
+            <a:ext cx="9300000" cy="4950000"/>
           </a:xfrm>
           <a:prstGeom prst="roundRect">
             <a:avLst>
@@ -11691,106 +13038,130 @@
           </a:ln>
         </p:spPr>
         <p:txBody>
-          <a:bodyPr anchorCtr="0" anchor="t" bIns="364000" lIns="520000" spcFirstLastPara="1" rIns="520000" wrap="square" tIns="364000">
+          <a:bodyPr anchorCtr="0" anchor="ctr" bIns="392000" lIns="560000" spcFirstLastPara="1" rIns="560000" wrap="square" tIns="392000">
             <a:noAutofit/>
           </a:bodyPr>
           <a:lstStyle/>
           <a:p>
             <a:pPr indent="0" lvl="0" marL="0" marR="0" rtl="0" algn="l">
               <a:lnSpc>
-                <a:spcPct val="126315"/>
-              </a:lnSpc>
-              <a:spcBef>
-                <a:spcPts val="0"/>
-              </a:spcBef>
-              <a:spcAft>
-                <a:spcPts val="0"/>
-              </a:spcAft>
-              <a:buClr>
-                <a:srgbClr val="1A1A1A"/>
-              </a:buClr>
-              <a:buSzPts val="1900"/>
+                <a:spcPct val="128205"/>
+              </a:lnSpc>
+              <a:spcBef>
+                <a:spcPts val="0"/>
+              </a:spcBef>
+              <a:spcAft>
+                <a:spcPts val="0"/>
+              </a:spcAft>
+              <a:buClr>
+                <a:srgbClr val="2E8B16"/>
+              </a:buClr>
+              <a:buSzPts val="1950"/>
               <a:buFont typeface="Montserrat SemiBold"/>
               <a:buNone/>
             </a:pPr>
             <a:r>
-              <a:rPr b="1" i="0" lang="en-US" sz="1900" u="none" cap="none" strike="noStrike">
-                <a:solidFill>
-                  <a:srgbClr val="1A1A1A"/>
+              <a:rPr b="1" lang="en-US" sz="1950">
+                <a:solidFill>
+                  <a:srgbClr val="2E8B16"/>
                 </a:solidFill>
                 <a:latin typeface="Montserrat SemiBold"/>
                 <a:ea typeface="Montserrat SemiBold"/>
                 <a:cs typeface="Montserrat SemiBold"/>
                 <a:sym typeface="Montserrat SemiBold"/>
               </a:rPr>
-              <a:t>Built on file_vault</a:t>
-            </a:r>
-            <a:r>
-              <a:rPr b="1" baseline="30000" i="0" lang="en-US" sz="1900" u="none" cap="none" strike="noStrike">
-                <a:solidFill>
-                  <a:srgbClr val="1A1A1A"/>
+              <a:t>Target r</a:t>
+            </a:r>
+            <a:r>
+              <a:rPr b="1" i="0" lang="en-US" sz="1950" u="none" cap="none" strike="noStrike">
+                <a:solidFill>
+                  <a:srgbClr val="2E8B16"/>
                 </a:solidFill>
                 <a:latin typeface="Montserrat SemiBold"/>
                 <a:ea typeface="Montserrat SemiBold"/>
                 <a:cs typeface="Montserrat SemiBold"/>
                 <a:sym typeface="Montserrat SemiBold"/>
               </a:rPr>
-              <a:t>2</a:t>
-            </a:r>
-            <a:r>
-              <a:rPr b="1" i="0" lang="en-US" sz="1900" u="none" cap="none" strike="noStrike">
-                <a:solidFill>
-                  <a:srgbClr val="1A1A1A"/>
+              <a:t>equirements</a:t>
+            </a:r>
+            <a:endParaRPr/>
+          </a:p>
+          <a:p>
+            <a:pPr indent="0" lvl="0" marL="0" marR="0" rtl="0" algn="l">
+              <a:lnSpc>
+                <a:spcPct val="127027"/>
+              </a:lnSpc>
+              <a:spcBef>
+                <a:spcPts val="320"/>
+              </a:spcBef>
+              <a:spcAft>
+                <a:spcPts val="0"/>
+              </a:spcAft>
+              <a:buClr>
+                <a:srgbClr val="2E8B16"/>
+              </a:buClr>
+              <a:buSzPts val="1850"/>
+              <a:buFont typeface="Montserrat SemiBold"/>
+              <a:buNone/>
+            </a:pPr>
+            <a:r>
+              <a:rPr b="1" i="0" lang="en-US" sz="1850" u="none" cap="none" strike="noStrike">
+                <a:solidFill>
+                  <a:srgbClr val="2E8B16"/>
                 </a:solidFill>
                 <a:latin typeface="Montserrat SemiBold"/>
                 <a:ea typeface="Montserrat SemiBold"/>
                 <a:cs typeface="Montserrat SemiBold"/>
                 <a:sym typeface="Montserrat SemiBold"/>
               </a:rPr>
-              <a:t> (based on Tresor)</a:t>
-            </a:r>
-            <a:r>
-              <a:rPr b="1" lang="en-US" sz="1900">
+              <a:t>1.  </a:t>
+            </a:r>
+            <a:r>
+              <a:rPr lang="en-US" sz="1850">
                 <a:solidFill>
                   <a:srgbClr val="1A1A1A"/>
+                </a:solidFill>
+                <a:latin typeface="IBM Plex Sans"/>
+                <a:ea typeface="IBM Plex Sans"/>
+                <a:cs typeface="IBM Plex Sans"/>
+                <a:sym typeface="IBM Plex Sans"/>
+              </a:rPr>
+              <a:t>Access control</a:t>
+            </a:r>
+            <a:endParaRPr/>
+          </a:p>
+          <a:p>
+            <a:pPr indent="0" lvl="0" marL="0" marR="0" rtl="0" algn="l">
+              <a:lnSpc>
+                <a:spcPct val="127027"/>
+              </a:lnSpc>
+              <a:spcBef>
+                <a:spcPts val="230"/>
+              </a:spcBef>
+              <a:spcAft>
+                <a:spcPts val="0"/>
+              </a:spcAft>
+              <a:buClr>
+                <a:srgbClr val="2E8B16"/>
+              </a:buClr>
+              <a:buSzPts val="1850"/>
+              <a:buFont typeface="Montserrat SemiBold"/>
+              <a:buNone/>
+            </a:pPr>
+            <a:r>
+              <a:rPr b="1" i="0" lang="en-US" sz="1850" u="none" cap="none" strike="noStrike">
+                <a:solidFill>
+                  <a:srgbClr val="2E8B16"/>
                 </a:solidFill>
                 <a:latin typeface="Montserrat SemiBold"/>
                 <a:ea typeface="Montserrat SemiBold"/>
                 <a:cs typeface="Montserrat SemiBold"/>
                 <a:sym typeface="Montserrat SemiBold"/>
               </a:rPr>
-              <a:t>:</a:t>
-            </a:r>
-            <a:endParaRPr b="1" i="0" sz="1900" u="none" cap="none" strike="noStrike">
-              <a:solidFill>
-                <a:srgbClr val="1A1A1A"/>
-              </a:solidFill>
-              <a:latin typeface="Montserrat SemiBold"/>
-              <a:ea typeface="Montserrat SemiBold"/>
-              <a:cs typeface="Montserrat SemiBold"/>
-              <a:sym typeface="Montserrat SemiBold"/>
-            </a:endParaRPr>
-          </a:p>
-          <a:p>
-            <a:pPr indent="-380000" lvl="0" marL="380000" marR="0" rtl="0" algn="l">
-              <a:lnSpc>
-                <a:spcPct val="126470"/>
-              </a:lnSpc>
-              <a:spcBef>
-                <a:spcPts val="300"/>
-              </a:spcBef>
-              <a:spcAft>
-                <a:spcPts val="0"/>
-              </a:spcAft>
-              <a:buClr>
-                <a:srgbClr val="1A1A1A"/>
-              </a:buClr>
-              <a:buSzPts val="1700"/>
-              <a:buFont typeface="Arial"/>
-              <a:buChar char="•"/>
-            </a:pPr>
-            <a:r>
-              <a:rPr b="0" i="0" lang="en-US" sz="1700" u="none" cap="none" strike="noStrike">
+              <a:t>2.  </a:t>
+            </a:r>
+            <a:r>
+              <a:rPr b="0" i="0" lang="en-US" sz="1850" u="none" cap="none" strike="noStrike">
                 <a:solidFill>
                   <a:srgbClr val="1A1A1A"/>
                 </a:solidFill>
@@ -11799,30 +13170,42 @@
                 <a:cs typeface="IBM Plex Sans"/>
                 <a:sym typeface="IBM Plex Sans"/>
               </a:rPr>
-              <a:t>Tresor: AES on 4K blocks, SHA-256 integrity, CoW atomicity</a:t>
+              <a:t>Key stored on an external USB drive</a:t>
             </a:r>
             <a:endParaRPr/>
           </a:p>
           <a:p>
-            <a:pPr indent="-380000" lvl="0" marL="380000" marR="0" rtl="0" algn="l">
-              <a:lnSpc>
-                <a:spcPct val="126470"/>
-              </a:lnSpc>
-              <a:spcBef>
-                <a:spcPts val="200"/>
-              </a:spcBef>
-              <a:spcAft>
-                <a:spcPts val="0"/>
-              </a:spcAft>
-              <a:buClr>
-                <a:srgbClr val="1A1A1A"/>
-              </a:buClr>
-              <a:buSzPts val="1700"/>
-              <a:buFont typeface="Arial"/>
-              <a:buChar char="•"/>
-            </a:pPr>
-            <a:r>
-              <a:rPr b="0" i="0" lang="en-US" sz="1700" u="none" cap="none" strike="noStrike">
+            <a:pPr indent="0" lvl="0" marL="0" marR="0" rtl="0" algn="l">
+              <a:lnSpc>
+                <a:spcPct val="127027"/>
+              </a:lnSpc>
+              <a:spcBef>
+                <a:spcPts val="230"/>
+              </a:spcBef>
+              <a:spcAft>
+                <a:spcPts val="0"/>
+              </a:spcAft>
+              <a:buClr>
+                <a:srgbClr val="2E8B16"/>
+              </a:buClr>
+              <a:buSzPts val="1850"/>
+              <a:buFont typeface="Montserrat SemiBold"/>
+              <a:buNone/>
+            </a:pPr>
+            <a:r>
+              <a:rPr b="1" i="0" lang="en-US" sz="1850" u="none" cap="none" strike="noStrike">
+                <a:solidFill>
+                  <a:srgbClr val="2E8B16"/>
+                </a:solidFill>
+                <a:latin typeface="Montserrat SemiBold"/>
+                <a:ea typeface="Montserrat SemiBold"/>
+                <a:cs typeface="Montserrat SemiBold"/>
+                <a:sym typeface="Montserrat SemiBold"/>
+              </a:rPr>
+              <a:t>3.  </a:t>
+            </a:r>
+            <a:r>
+              <a:rPr b="0" i="0" lang="en-US" sz="1850" u="none" cap="none" strike="noStrike">
                 <a:solidFill>
                   <a:srgbClr val="1A1A1A"/>
                 </a:solidFill>
@@ -11831,7 +13214,95 @@
                 <a:cs typeface="IBM Plex Sans"/>
                 <a:sym typeface="IBM Plex Sans"/>
               </a:rPr>
-              <a:t>file_vault: state orchestrator providing a secure FS session</a:t>
+              <a:t>Encryption of snapshots (block-level)</a:t>
+            </a:r>
+            <a:endParaRPr/>
+          </a:p>
+          <a:p>
+            <a:pPr indent="0" lvl="0" marL="0" marR="0" rtl="0" algn="l">
+              <a:lnSpc>
+                <a:spcPct val="127027"/>
+              </a:lnSpc>
+              <a:spcBef>
+                <a:spcPts val="230"/>
+              </a:spcBef>
+              <a:spcAft>
+                <a:spcPts val="0"/>
+              </a:spcAft>
+              <a:buClr>
+                <a:srgbClr val="2E8B16"/>
+              </a:buClr>
+              <a:buSzPts val="1850"/>
+              <a:buFont typeface="Montserrat SemiBold"/>
+              <a:buNone/>
+            </a:pPr>
+            <a:r>
+              <a:rPr b="1" i="0" lang="en-US" sz="1850" u="none" cap="none" strike="noStrike">
+                <a:solidFill>
+                  <a:srgbClr val="2E8B16"/>
+                </a:solidFill>
+                <a:latin typeface="Montserrat SemiBold"/>
+                <a:ea typeface="Montserrat SemiBold"/>
+                <a:cs typeface="Montserrat SemiBold"/>
+                <a:sym typeface="Montserrat SemiBold"/>
+              </a:rPr>
+              <a:t>4.  </a:t>
+            </a:r>
+            <a:r>
+              <a:rPr b="0" i="0" lang="en-US" sz="1850" u="none" cap="none" strike="noStrike">
+                <a:solidFill>
+                  <a:srgbClr val="1A1A1A"/>
+                </a:solidFill>
+                <a:latin typeface="IBM Plex Sans"/>
+                <a:ea typeface="IBM Plex Sans"/>
+                <a:cs typeface="IBM Plex Sans"/>
+                <a:sym typeface="IBM Plex Sans"/>
+              </a:rPr>
+              <a:t>Only encrypted data written to disk</a:t>
+            </a:r>
+            <a:endParaRPr/>
+          </a:p>
+          <a:p>
+            <a:pPr indent="0" lvl="0" marL="0" marR="0" rtl="0" algn="l">
+              <a:lnSpc>
+                <a:spcPct val="127027"/>
+              </a:lnSpc>
+              <a:spcBef>
+                <a:spcPts val="230"/>
+              </a:spcBef>
+              <a:spcAft>
+                <a:spcPts val="0"/>
+              </a:spcAft>
+              <a:buClr>
+                <a:srgbClr val="2E8B16"/>
+              </a:buClr>
+              <a:buSzPts val="1850"/>
+              <a:buFont typeface="Montserrat SemiBold"/>
+              <a:buNone/>
+            </a:pPr>
+            <a:r>
+              <a:rPr b="1" i="0" lang="en-US" sz="1850" u="none" cap="none" strike="noStrike">
+                <a:solidFill>
+                  <a:srgbClr val="2E8B16"/>
+                </a:solidFill>
+                <a:latin typeface="Montserrat SemiBold"/>
+                <a:ea typeface="Montserrat SemiBold"/>
+                <a:cs typeface="Montserrat SemiBold"/>
+                <a:sym typeface="Montserrat SemiBold"/>
+              </a:rPr>
+              <a:t>5.  </a:t>
+            </a:r>
+            <a:r>
+              <a:rPr b="0" i="0" lang="en-US" sz="1850" u="none" cap="none" strike="noStrike">
+                <a:solidFill>
+                  <a:srgbClr val="1A1A1A"/>
+                </a:solidFill>
+                <a:latin typeface="IBM Plex Sans"/>
+                <a:ea typeface="IBM Plex Sans"/>
+                <a:cs typeface="IBM Plex Sans"/>
+                <a:sym typeface="IBM Plex Sans"/>
+              </a:rPr>
+              <a:t>Acceptable performance overhead (≤ 2×)</a:t>
             </a:r>
             <a:endParaRPr/>
           </a:p>
@@ -11839,14 +13310,14 @@
       </p:sp>
       <p:sp>
         <p:nvSpPr>
-          <p:cNvPr id="100" name="Google Shape;100;p11"/>
+          <p:cNvPr id="99" name="Google Shape;99;p11"/>
           <p:cNvSpPr/>
           <p:nvPr/>
         </p:nvSpPr>
         <p:spPr>
           <a:xfrm>
-            <a:off x="9395375" y="1900000"/>
-            <a:ext cx="7754700" cy="3725700"/>
+            <a:off x="10800000" y="3050000"/>
+            <a:ext cx="6350000" cy="4950000"/>
           </a:xfrm>
           <a:prstGeom prst="roundRect">
             <a:avLst>
@@ -11861,14 +13332,14 @@
           </a:ln>
         </p:spPr>
         <p:txBody>
-          <a:bodyPr anchorCtr="0" anchor="t" bIns="364000" lIns="520000" spcFirstLastPara="1" rIns="520000" wrap="square" tIns="364000">
+          <a:bodyPr anchorCtr="0" anchor="ctr" bIns="434000" lIns="620000" spcFirstLastPara="1" rIns="620000" wrap="square" tIns="434000">
             <a:noAutofit/>
           </a:bodyPr>
           <a:lstStyle/>
           <a:p>
             <a:pPr indent="0" lvl="0" marL="0" marR="0" rtl="0" algn="l">
               <a:lnSpc>
-                <a:spcPct val="126315"/>
+                <a:spcPct val="126829"/>
               </a:lnSpc>
               <a:spcBef>
                 <a:spcPts val="0"/>
@@ -11879,12 +13350,12 @@
               <a:buClr>
                 <a:srgbClr val="FFFFFF"/>
               </a:buClr>
-              <a:buSzPts val="1900"/>
+              <a:buSzPts val="2050"/>
               <a:buFont typeface="Montserrat SemiBold"/>
               <a:buNone/>
             </a:pPr>
             <a:r>
-              <a:rPr b="1" i="0" lang="en-US" sz="1900" u="none" cap="none" strike="noStrike">
+              <a:rPr b="1" i="0" lang="en-US" sz="2050" u="none" cap="none" strike="noStrike">
                 <a:solidFill>
                   <a:srgbClr val="FFFFFF"/>
                 </a:solidFill>
@@ -11893,102 +13364,30 @@
                 <a:cs typeface="Montserrat SemiBold"/>
                 <a:sym typeface="Montserrat SemiBold"/>
               </a:rPr>
-              <a:t>Implemented se_vault</a:t>
-            </a:r>
-            <a:r>
-              <a:rPr b="1" baseline="30000" i="0" lang="en-US" sz="1900" u="none" cap="none" strike="noStrike">
-                <a:solidFill>
-                  <a:srgbClr val="FFFFFF"/>
-                </a:solidFill>
-                <a:latin typeface="Montserrat SemiBold"/>
-                <a:ea typeface="Montserrat SemiBold"/>
-                <a:cs typeface="Montserrat SemiBold"/>
-                <a:sym typeface="Montserrat SemiBold"/>
-              </a:rPr>
-              <a:t>1</a:t>
-            </a:r>
-            <a:r>
-              <a:rPr b="1" i="0" lang="en-US" sz="1900" u="none" cap="none" strike="noStrike">
-                <a:solidFill>
-                  <a:srgbClr val="FFFFFF"/>
-                </a:solidFill>
-                <a:latin typeface="Montserrat SemiBold"/>
-                <a:ea typeface="Montserrat SemiBold"/>
-                <a:cs typeface="Montserrat SemiBold"/>
-                <a:sym typeface="Montserrat SemiBold"/>
-              </a:rPr>
-              <a:t>  as modified file_vault</a:t>
-            </a:r>
-            <a:endParaRPr b="1" i="0" sz="1900" u="none" cap="none" strike="noStrike">
-              <a:solidFill>
+              <a:t>USB drive = key + auth factor</a:t>
+            </a:r>
+            <a:endParaRPr/>
+          </a:p>
+          <a:p>
+            <a:pPr indent="0" lvl="0" marL="0" marR="0" rtl="0" algn="l">
+              <a:lnSpc>
+                <a:spcPct val="129729"/>
+              </a:lnSpc>
+              <a:spcBef>
+                <a:spcPts val="400"/>
+              </a:spcBef>
+              <a:spcAft>
+                <a:spcPts val="0"/>
+              </a:spcAft>
+              <a:buClr>
                 <a:srgbClr val="FFFFFF"/>
-              </a:solidFill>
-              <a:latin typeface="Montserrat SemiBold"/>
-              <a:ea typeface="Montserrat SemiBold"/>
-              <a:cs typeface="Montserrat SemiBold"/>
-              <a:sym typeface="Montserrat SemiBold"/>
-            </a:endParaRPr>
-          </a:p>
-          <a:p>
-            <a:pPr indent="0" lvl="0" marL="0" marR="0" rtl="0" algn="l">
-              <a:lnSpc>
-                <a:spcPct val="126315"/>
-              </a:lnSpc>
-              <a:spcBef>
-                <a:spcPts val="300"/>
-              </a:spcBef>
-              <a:spcAft>
-                <a:spcPts val="0"/>
-              </a:spcAft>
-              <a:buClr>
-                <a:srgbClr val="FFFFFF"/>
-              </a:buClr>
-              <a:buSzPts val="1900"/>
-              <a:buFont typeface="Montserrat SemiBold"/>
+              </a:buClr>
+              <a:buSzPts val="1850"/>
+              <a:buFont typeface="IBM Plex Sans"/>
               <a:buNone/>
             </a:pPr>
             <a:r>
-              <a:rPr b="1" i="0" lang="en-US" sz="1900" u="none" cap="none" strike="noStrike">
-                <a:solidFill>
-                  <a:srgbClr val="FFFFFF"/>
-                </a:solidFill>
-                <a:latin typeface="Montserrat SemiBold"/>
-                <a:ea typeface="Montserrat SemiBold"/>
-                <a:cs typeface="Montserrat SemiBold"/>
-                <a:sym typeface="Montserrat SemiBold"/>
-              </a:rPr>
-              <a:t>Changes:</a:t>
-            </a:r>
-            <a:endParaRPr b="1" i="0" sz="1900" u="none" cap="none" strike="noStrike">
-              <a:solidFill>
-                <a:srgbClr val="FFFFFF"/>
-              </a:solidFill>
-              <a:latin typeface="Montserrat SemiBold"/>
-              <a:ea typeface="Montserrat SemiBold"/>
-              <a:cs typeface="Montserrat SemiBold"/>
-              <a:sym typeface="Montserrat SemiBold"/>
-            </a:endParaRPr>
-          </a:p>
-          <a:p>
-            <a:pPr indent="-366350" lvl="0" marL="360000" marR="0" rtl="0" algn="l">
-              <a:lnSpc>
-                <a:spcPct val="128125"/>
-              </a:lnSpc>
-              <a:spcBef>
-                <a:spcPts val="300"/>
-              </a:spcBef>
-              <a:spcAft>
-                <a:spcPts val="0"/>
-              </a:spcAft>
-              <a:buClr>
-                <a:srgbClr val="FFFFFF"/>
-              </a:buClr>
-              <a:buSzPts val="1700"/>
-              <a:buFont typeface="Arial"/>
-              <a:buChar char="•"/>
-            </a:pPr>
-            <a:r>
-              <a:rPr b="0" i="0" lang="en-US" sz="1700" u="none" cap="none" strike="noStrike">
+              <a:rPr b="0" i="0" lang="en-US" sz="1850" u="none" cap="none" strike="noStrike">
                 <a:solidFill>
                   <a:srgbClr val="FFFFFF"/>
                 </a:solidFill>
@@ -11997,592 +13396,15 @@
                 <a:cs typeface="IBM Plex Sans"/>
                 <a:sym typeface="IBM Plex Sans"/>
               </a:rPr>
-              <a:t>Headless operation</a:t>
-            </a:r>
-            <a:endParaRPr sz="1700"/>
-          </a:p>
-          <a:p>
-            <a:pPr indent="-366350" lvl="0" marL="360000" marR="0" rtl="0" algn="l">
-              <a:lnSpc>
-                <a:spcPct val="128125"/>
-              </a:lnSpc>
-              <a:spcBef>
-                <a:spcPts val="150"/>
-              </a:spcBef>
-              <a:spcAft>
-                <a:spcPts val="0"/>
-              </a:spcAft>
-              <a:buClr>
-                <a:srgbClr val="FFFFFF"/>
-              </a:buClr>
-              <a:buSzPts val="1700"/>
-              <a:buFont typeface="Arial"/>
-              <a:buChar char="•"/>
-            </a:pPr>
-            <a:r>
-              <a:rPr b="0" i="0" lang="en-US" sz="1700" u="none" cap="none" strike="noStrike">
-                <a:solidFill>
-                  <a:srgbClr val="FFFFFF"/>
-                </a:solidFill>
-                <a:latin typeface="IBM Plex Sans"/>
-                <a:ea typeface="IBM Plex Sans"/>
-                <a:cs typeface="IBM Plex Sans"/>
-                <a:sym typeface="IBM Plex Sans"/>
-              </a:rPr>
-              <a:t>Passphrase replaced </a:t>
-            </a:r>
-            <a:r>
-              <a:rPr b="1" i="0" lang="en-US" sz="1700" u="none" cap="none" strike="noStrike">
-                <a:solidFill>
-                  <a:srgbClr val="FFFFFF"/>
-                </a:solidFill>
-                <a:latin typeface="IBM Plex Sans"/>
-                <a:ea typeface="IBM Plex Sans"/>
-                <a:cs typeface="IBM Plex Sans"/>
-                <a:sym typeface="IBM Plex Sans"/>
-              </a:rPr>
-              <a:t>by USB key file</a:t>
-            </a:r>
-            <a:endParaRPr sz="1700"/>
-          </a:p>
-          <a:p>
-            <a:pPr indent="-366350" lvl="0" marL="360000" marR="0" rtl="0" algn="l">
-              <a:lnSpc>
-                <a:spcPct val="128125"/>
-              </a:lnSpc>
-              <a:spcBef>
-                <a:spcPts val="150"/>
-              </a:spcBef>
-              <a:spcAft>
-                <a:spcPts val="0"/>
-              </a:spcAft>
-              <a:buClr>
-                <a:srgbClr val="FFFFFF"/>
-              </a:buClr>
-              <a:buSzPts val="1700"/>
-              <a:buFont typeface="Arial"/>
-              <a:buChar char="•"/>
-            </a:pPr>
-            <a:r>
-              <a:rPr b="0" i="0" lang="en-US" sz="1700" u="none" cap="none" strike="noStrike">
-                <a:solidFill>
-                  <a:srgbClr val="FFFFFF"/>
-                </a:solidFill>
-                <a:latin typeface="IBM Plex Sans"/>
-                <a:ea typeface="IBM Plex Sans"/>
-                <a:cs typeface="IBM Plex Sans"/>
-                <a:sym typeface="IBM Plex Sans"/>
-              </a:rPr>
-              <a:t>rump_fs/ext2 replaced by </a:t>
-            </a:r>
-            <a:r>
-              <a:rPr b="1" i="0" lang="en-US" sz="1700" u="none" cap="none" strike="noStrike">
-                <a:solidFill>
-                  <a:srgbClr val="FFFFFF"/>
-                </a:solidFill>
-                <a:latin typeface="IBM Plex Sans"/>
-                <a:ea typeface="IBM Plex Sans"/>
-                <a:cs typeface="IBM Plex Sans"/>
-                <a:sym typeface="IBM Plex Sans"/>
-              </a:rPr>
-              <a:t>lwext4/ext4</a:t>
-            </a:r>
-            <a:endParaRPr sz="1700"/>
-          </a:p>
-          <a:p>
-            <a:pPr indent="-366350" lvl="0" marL="360000" marR="0" rtl="0" algn="l">
-              <a:lnSpc>
-                <a:spcPct val="128125"/>
-              </a:lnSpc>
-              <a:spcBef>
-                <a:spcPts val="150"/>
-              </a:spcBef>
-              <a:spcAft>
-                <a:spcPts val="0"/>
-              </a:spcAft>
-              <a:buClr>
-                <a:srgbClr val="FFFFFF"/>
-              </a:buClr>
-              <a:buSzPts val="1700"/>
-              <a:buFont typeface="Arial"/>
-              <a:buChar char="•"/>
-            </a:pPr>
-            <a:r>
-              <a:rPr b="0" i="0" lang="en-US" sz="1700" u="none" cap="none" strike="noStrike">
-                <a:solidFill>
-                  <a:srgbClr val="FFFFFF"/>
-                </a:solidFill>
-                <a:latin typeface="IBM Plex Sans"/>
-                <a:ea typeface="IBM Plex Sans"/>
-                <a:cs typeface="IBM Plex Sans"/>
-                <a:sym typeface="IBM Plex Sans"/>
-              </a:rPr>
-              <a:t>Added </a:t>
-            </a:r>
-            <a:r>
-              <a:rPr b="1" i="0" lang="en-US" sz="1700" u="none" cap="none" strike="noStrike">
-                <a:solidFill>
-                  <a:srgbClr val="FFFFFF"/>
-                </a:solidFill>
-                <a:latin typeface="IBM Plex Sans"/>
-                <a:ea typeface="IBM Plex Sans"/>
-                <a:cs typeface="IBM Plex Sans"/>
-                <a:sym typeface="IBM Plex Sans"/>
-              </a:rPr>
-              <a:t>fsck</a:t>
-            </a:r>
-            <a:r>
-              <a:rPr b="0" i="0" lang="en-US" sz="1700" u="none" cap="none" strike="noStrike">
-                <a:solidFill>
-                  <a:srgbClr val="FFFFFF"/>
-                </a:solidFill>
-                <a:latin typeface="IBM Plex Sans"/>
-                <a:ea typeface="IBM Plex Sans"/>
-                <a:cs typeface="IBM Plex Sans"/>
-                <a:sym typeface="IBM Plex Sans"/>
-              </a:rPr>
-              <a:t> crash-recovery support</a:t>
-            </a:r>
-            <a:endParaRPr sz="1700"/>
-          </a:p>
-          <a:p>
-            <a:pPr indent="-366350" lvl="0" marL="360000" marR="0" rtl="0" algn="l">
-              <a:lnSpc>
-                <a:spcPct val="128125"/>
-              </a:lnSpc>
-              <a:spcBef>
-                <a:spcPts val="150"/>
-              </a:spcBef>
-              <a:spcAft>
-                <a:spcPts val="0"/>
-              </a:spcAft>
-              <a:buClr>
-                <a:srgbClr val="FFFFFF"/>
-              </a:buClr>
-              <a:buSzPts val="1700"/>
-              <a:buFont typeface="Arial"/>
-              <a:buChar char="•"/>
-            </a:pPr>
-            <a:r>
-              <a:rPr b="0" i="0" lang="en-US" sz="1700" u="none" cap="none" strike="noStrike">
-                <a:solidFill>
-                  <a:srgbClr val="FFFFFF"/>
-                </a:solidFill>
-                <a:latin typeface="IBM Plex Sans"/>
-                <a:ea typeface="IBM Plex Sans"/>
-                <a:cs typeface="IBM Plex Sans"/>
-                <a:sym typeface="IBM Plex Sans"/>
-              </a:rPr>
-              <a:t>Direct block session (skip image file)</a:t>
-            </a:r>
-            <a:endParaRPr sz="1700"/>
-          </a:p>
-          <a:p>
-            <a:pPr indent="-366350" lvl="0" marL="360000" marR="0" rtl="0" algn="l">
-              <a:lnSpc>
-                <a:spcPct val="128125"/>
-              </a:lnSpc>
-              <a:spcBef>
-                <a:spcPts val="150"/>
-              </a:spcBef>
-              <a:spcAft>
-                <a:spcPts val="0"/>
-              </a:spcAft>
-              <a:buClr>
-                <a:srgbClr val="FFFFFF"/>
-              </a:buClr>
-              <a:buSzPts val="1700"/>
-              <a:buFont typeface="Arial"/>
-              <a:buChar char="•"/>
-            </a:pPr>
-            <a:r>
-              <a:rPr b="0" i="0" lang="en-US" sz="1700" u="none" cap="none" strike="noStrike">
-                <a:solidFill>
-                  <a:srgbClr val="FFFFFF"/>
-                </a:solidFill>
-                <a:latin typeface="IBM Plex Sans"/>
-                <a:ea typeface="IBM Plex Sans"/>
-                <a:cs typeface="IBM Plex Sans"/>
-                <a:sym typeface="IBM Plex Sans"/>
-              </a:rPr>
-              <a:t>All block sizes standardized to 4K</a:t>
-            </a:r>
-            <a:endParaRPr sz="1700"/>
-          </a:p>
-          <a:p>
-            <a:pPr indent="-366350" lvl="0" marL="360000" marR="0" rtl="0" algn="l">
-              <a:lnSpc>
-                <a:spcPct val="128125"/>
-              </a:lnSpc>
-              <a:spcBef>
-                <a:spcPts val="150"/>
-              </a:spcBef>
-              <a:spcAft>
-                <a:spcPts val="0"/>
-              </a:spcAft>
-              <a:buClr>
-                <a:srgbClr val="FFFFFF"/>
-              </a:buClr>
-              <a:buSzPts val="1700"/>
-              <a:buFont typeface="Arial"/>
-              <a:buChar char="•"/>
-            </a:pPr>
-            <a:r>
-              <a:rPr b="0" i="0" lang="en-US" sz="1700" u="none" cap="none" strike="noStrike">
-                <a:solidFill>
-                  <a:srgbClr val="FFFFFF"/>
-                </a:solidFill>
-                <a:latin typeface="IBM Plex Sans"/>
-                <a:ea typeface="IBM Plex Sans"/>
-                <a:cs typeface="IBM Plex Sans"/>
-                <a:sym typeface="IBM Plex Sans"/>
-              </a:rPr>
-              <a:t>Graceful shutdown sequence added</a:t>
-            </a:r>
-            <a:endParaRPr sz="1700"/>
-          </a:p>
-        </p:txBody>
-      </p:sp>
-      <p:sp>
-        <p:nvSpPr>
-          <p:cNvPr id="101" name="Google Shape;101;p11"/>
-          <p:cNvSpPr/>
-          <p:nvPr/>
-        </p:nvSpPr>
-        <p:spPr>
-          <a:xfrm>
-            <a:off x="1095375" y="9110000"/>
-            <a:ext cx="13500000" cy="840000"/>
-          </a:xfrm>
-          <a:prstGeom prst="rect">
-            <a:avLst/>
-          </a:prstGeom>
-          <a:noFill/>
-          <a:ln>
-            <a:noFill/>
-          </a:ln>
-        </p:spPr>
-        <p:txBody>
-          <a:bodyPr anchorCtr="0" anchor="b" bIns="0" lIns="0" spcFirstLastPara="1" rIns="0" wrap="square" tIns="0">
-            <a:noAutofit/>
-          </a:bodyPr>
-          <a:lstStyle/>
-          <a:p>
-            <a:pPr indent="0" lvl="0" marL="0" marR="0" rtl="0" algn="l">
-              <a:lnSpc>
-                <a:spcPct val="93750"/>
-              </a:lnSpc>
-              <a:spcBef>
-                <a:spcPts val="0"/>
-              </a:spcBef>
-              <a:spcAft>
-                <a:spcPts val="0"/>
-              </a:spcAft>
-              <a:buNone/>
-            </a:pPr>
-            <a:r>
-              <a:rPr b="1" baseline="30000" i="0" lang="en-US" sz="1600" u="none" cap="none" strike="noStrike">
-                <a:solidFill>
-                  <a:srgbClr val="9AA3AB"/>
-                </a:solidFill>
-                <a:latin typeface="IBM Plex Sans Medium"/>
-                <a:ea typeface="IBM Plex Sans Medium"/>
-                <a:cs typeface="IBM Plex Sans Medium"/>
-                <a:sym typeface="IBM Plex Sans Medium"/>
-              </a:rPr>
-              <a:t>1</a:t>
-            </a:r>
-            <a:r>
-              <a:rPr b="0" i="0" lang="en-US" sz="1600" u="none" cap="none" strike="noStrike">
-                <a:solidFill>
-                  <a:srgbClr val="9AA3AB"/>
-                </a:solidFill>
-                <a:latin typeface="IBM Plex Sans"/>
-                <a:ea typeface="IBM Plex Sans"/>
-                <a:cs typeface="IBM Plex Sans"/>
-                <a:sym typeface="IBM Plex Sans"/>
-              </a:rPr>
-              <a:t>https://github.com/genodelabs/genode/tree/sculpt-25.04/repos/gems/src/app/file_vault</a:t>
+              <a:t>Requirements 1 and 2 combined: the USB drive both contains the key and serves as the authentication factor.</a:t>
             </a:r>
             <a:endParaRPr/>
-          </a:p>
-          <a:p>
-            <a:pPr indent="0" lvl="0" marL="0" marR="0" rtl="0" algn="l">
-              <a:lnSpc>
-                <a:spcPct val="93750"/>
-              </a:lnSpc>
-              <a:spcBef>
-                <a:spcPts val="60"/>
-              </a:spcBef>
-              <a:spcAft>
-                <a:spcPts val="0"/>
-              </a:spcAft>
-              <a:buClr>
-                <a:srgbClr val="9AA3AB"/>
-              </a:buClr>
-              <a:buSzPts val="1600"/>
-              <a:buFont typeface="IBM Plex Sans Medium"/>
-              <a:buNone/>
-            </a:pPr>
-            <a:r>
-              <a:rPr b="1" baseline="30000" i="0" lang="en-US" sz="1600" u="none" cap="none" strike="noStrike">
-                <a:solidFill>
-                  <a:srgbClr val="9AA3AB"/>
-                </a:solidFill>
-                <a:latin typeface="IBM Plex Sans Medium"/>
-                <a:ea typeface="IBM Plex Sans Medium"/>
-                <a:cs typeface="IBM Plex Sans Medium"/>
-                <a:sym typeface="IBM Plex Sans Medium"/>
-              </a:rPr>
-              <a:t>2</a:t>
-            </a:r>
-            <a:r>
-              <a:rPr b="0" i="0" lang="en-US" sz="1600" u="none" cap="none" strike="noStrike">
-                <a:solidFill>
-                  <a:srgbClr val="9AA3AB"/>
-                </a:solidFill>
-                <a:latin typeface="IBM Plex Sans"/>
-                <a:ea typeface="IBM Plex Sans"/>
-                <a:cs typeface="IBM Plex Sans"/>
-                <a:sym typeface="IBM Plex Sans"/>
-              </a:rPr>
-              <a:t>https://github.com/VoronM1522/genode/tree/se/repos/gems/src/app/se_vault</a:t>
-            </a:r>
-            <a:endParaRPr b="0" i="0" sz="1600" u="none" cap="none" strike="noStrike">
-              <a:solidFill>
-                <a:srgbClr val="9AA3AB"/>
-              </a:solidFill>
-              <a:latin typeface="IBM Plex Sans"/>
-              <a:ea typeface="IBM Plex Sans"/>
-              <a:cs typeface="IBM Plex Sans"/>
-              <a:sym typeface="IBM Plex Sans"/>
-            </a:endParaRPr>
-          </a:p>
-          <a:p>
-            <a:pPr indent="0" lvl="0" marL="0" rtl="0" algn="l">
-              <a:lnSpc>
-                <a:spcPct val="93750"/>
-              </a:lnSpc>
-              <a:spcBef>
-                <a:spcPts val="60"/>
-              </a:spcBef>
-              <a:spcAft>
-                <a:spcPts val="0"/>
-              </a:spcAft>
-              <a:buClr>
-                <a:srgbClr val="9AA3AB"/>
-              </a:buClr>
-              <a:buSzPts val="1600"/>
-              <a:buFont typeface="IBM Plex Sans Medium"/>
-              <a:buNone/>
-            </a:pPr>
-            <a:r>
-              <a:rPr b="1" baseline="30000" lang="en-US" sz="1600">
-                <a:solidFill>
-                  <a:srgbClr val="9AA3AB"/>
-                </a:solidFill>
-                <a:latin typeface="IBM Plex Sans Medium"/>
-                <a:ea typeface="IBM Plex Sans Medium"/>
-                <a:cs typeface="IBM Plex Sans Medium"/>
-                <a:sym typeface="IBM Plex Sans Medium"/>
-              </a:rPr>
-              <a:t>3</a:t>
-            </a:r>
-            <a:r>
-              <a:rPr b="1" baseline="30000" lang="en-US" sz="1600">
-                <a:solidFill>
-                  <a:srgbClr val="9AA3AB"/>
-                </a:solidFill>
-                <a:latin typeface="IBM Plex Sans Medium"/>
-                <a:ea typeface="IBM Plex Sans Medium"/>
-                <a:cs typeface="IBM Plex Sans Medium"/>
-                <a:sym typeface="IBM Plex Sans Medium"/>
-              </a:rPr>
-              <a:t> </a:t>
-            </a:r>
-            <a:r>
-              <a:rPr lang="en-US" sz="1600">
-                <a:solidFill>
-                  <a:srgbClr val="9AA3AB"/>
-                </a:solidFill>
-                <a:latin typeface="IBM Plex Sans"/>
-                <a:ea typeface="IBM Plex Sans"/>
-                <a:cs typeface="IBM Plex Sans"/>
-                <a:sym typeface="IBM Plex Sans"/>
-              </a:rPr>
-              <a:t>https://github.com/VoronM1522/genode-wundertuete</a:t>
-            </a:r>
-            <a:endParaRPr sz="1600">
-              <a:solidFill>
-                <a:srgbClr val="9AA3AB"/>
-              </a:solidFill>
-              <a:latin typeface="IBM Plex Sans"/>
-              <a:ea typeface="IBM Plex Sans"/>
-              <a:cs typeface="IBM Plex Sans"/>
-              <a:sym typeface="IBM Plex Sans"/>
-            </a:endParaRPr>
-          </a:p>
-          <a:p>
-            <a:pPr indent="0" lvl="0" marL="0" rtl="0" algn="l">
-              <a:lnSpc>
-                <a:spcPct val="93750"/>
-              </a:lnSpc>
-              <a:spcBef>
-                <a:spcPts val="60"/>
-              </a:spcBef>
-              <a:spcAft>
-                <a:spcPts val="0"/>
-              </a:spcAft>
-              <a:buClr>
-                <a:srgbClr val="9AA3AB"/>
-              </a:buClr>
-              <a:buSzPts val="1600"/>
-              <a:buFont typeface="IBM Plex Sans Medium"/>
-              <a:buNone/>
-            </a:pPr>
-            <a:r>
-              <a:rPr b="1" baseline="30000" lang="en-US" sz="1600">
-                <a:solidFill>
-                  <a:srgbClr val="9AA3AB"/>
-                </a:solidFill>
-                <a:latin typeface="IBM Plex Sans Medium"/>
-                <a:ea typeface="IBM Plex Sans Medium"/>
-                <a:cs typeface="IBM Plex Sans Medium"/>
-                <a:sym typeface="IBM Plex Sans Medium"/>
-              </a:rPr>
-              <a:t>4</a:t>
-            </a:r>
-            <a:r>
-              <a:rPr lang="en-US" sz="1600">
-                <a:solidFill>
-                  <a:srgbClr val="9AA3AB"/>
-                </a:solidFill>
-                <a:latin typeface="IBM Plex Sans"/>
-                <a:ea typeface="IBM Plex Sans"/>
-                <a:cs typeface="IBM Plex Sans"/>
-                <a:sym typeface="IBM Plex Sans"/>
-              </a:rPr>
-              <a:t>https://github.com/VoronM1522/phantomuserland-snapper</a:t>
-            </a:r>
-            <a:endParaRPr sz="1600">
-              <a:solidFill>
-                <a:srgbClr val="9AA3AB"/>
-              </a:solidFill>
-              <a:latin typeface="IBM Plex Sans"/>
-              <a:ea typeface="IBM Plex Sans"/>
-              <a:cs typeface="IBM Plex Sans"/>
-              <a:sym typeface="IBM Plex Sans"/>
-            </a:endParaRPr>
-          </a:p>
-          <a:p>
-            <a:pPr indent="0" lvl="0" marL="0" rtl="0" algn="l">
-              <a:lnSpc>
-                <a:spcPct val="93750"/>
-              </a:lnSpc>
-              <a:spcBef>
-                <a:spcPts val="60"/>
-              </a:spcBef>
-              <a:spcAft>
-                <a:spcPts val="0"/>
-              </a:spcAft>
-              <a:buClr>
-                <a:srgbClr val="9AA3AB"/>
-              </a:buClr>
-              <a:buSzPts val="1600"/>
-              <a:buFont typeface="IBM Plex Sans Medium"/>
-              <a:buNone/>
-            </a:pPr>
-            <a:r>
-              <a:rPr b="1" baseline="30000" lang="en-US" sz="1600">
-                <a:solidFill>
-                  <a:srgbClr val="9AA3AB"/>
-                </a:solidFill>
-                <a:latin typeface="IBM Plex Sans Medium"/>
-                <a:ea typeface="IBM Plex Sans Medium"/>
-                <a:cs typeface="IBM Plex Sans Medium"/>
-                <a:sym typeface="IBM Plex Sans Medium"/>
-              </a:rPr>
-              <a:t>5 </a:t>
-            </a:r>
-            <a:r>
-              <a:rPr lang="en-US" sz="1600">
-                <a:solidFill>
-                  <a:srgbClr val="9AA3AB"/>
-                </a:solidFill>
-                <a:latin typeface="IBM Plex Sans"/>
-                <a:ea typeface="IBM Plex Sans"/>
-                <a:cs typeface="IBM Plex Sans"/>
-                <a:sym typeface="IBM Plex Sans"/>
-              </a:rPr>
-              <a:t>https://github.com/VoronM1522/snapper</a:t>
-            </a:r>
-            <a:endParaRPr sz="1600">
-              <a:solidFill>
-                <a:srgbClr val="9AA3AB"/>
-              </a:solidFill>
-              <a:latin typeface="IBM Plex Sans"/>
-              <a:ea typeface="IBM Plex Sans"/>
-              <a:cs typeface="IBM Plex Sans"/>
-              <a:sym typeface="IBM Plex Sans"/>
-            </a:endParaRPr>
-          </a:p>
-          <a:p>
-            <a:pPr indent="0" lvl="0" marL="0" rtl="0" algn="l">
-              <a:lnSpc>
-                <a:spcPct val="93750"/>
-              </a:lnSpc>
-              <a:spcBef>
-                <a:spcPts val="60"/>
-              </a:spcBef>
-              <a:spcAft>
-                <a:spcPts val="0"/>
-              </a:spcAft>
-              <a:buClr>
-                <a:srgbClr val="9AA3AB"/>
-              </a:buClr>
-              <a:buSzPts val="1600"/>
-              <a:buFont typeface="IBM Plex Sans Medium"/>
-              <a:buNone/>
-            </a:pPr>
-            <a:r>
-              <a:rPr b="1" baseline="30000" lang="en-US" sz="1600">
-                <a:solidFill>
-                  <a:srgbClr val="9AA3AB"/>
-                </a:solidFill>
-                <a:latin typeface="IBM Plex Sans Medium"/>
-                <a:ea typeface="IBM Plex Sans Medium"/>
-                <a:cs typeface="IBM Plex Sans Medium"/>
-                <a:sym typeface="IBM Plex Sans Medium"/>
-              </a:rPr>
-              <a:t>6</a:t>
-            </a:r>
-            <a:r>
-              <a:rPr lang="en-US" sz="1600">
-                <a:solidFill>
-                  <a:srgbClr val="9AA3AB"/>
-                </a:solidFill>
-                <a:latin typeface="IBM Plex Sans"/>
-                <a:ea typeface="IBM Plex Sans"/>
-                <a:cs typeface="IBM Plex Sans"/>
-                <a:sym typeface="IBM Plex Sans"/>
-              </a:rPr>
-              <a:t>https://github.com/VoronM1522/genode/tree/se/repos/os</a:t>
-            </a:r>
-            <a:endParaRPr sz="1600">
-              <a:solidFill>
-                <a:srgbClr val="9AA3AB"/>
-              </a:solidFill>
-              <a:latin typeface="IBM Plex Sans"/>
-              <a:ea typeface="IBM Plex Sans"/>
-              <a:cs typeface="IBM Plex Sans"/>
-              <a:sym typeface="IBM Plex Sans"/>
-            </a:endParaRPr>
           </a:p>
         </p:txBody>
       </p:sp>
       <p:pic>
         <p:nvPicPr>
-          <p:cNvPr id="102" name="Google Shape;102;p11"/>
+          <p:cNvPr id="100" name="Google Shape;100;p11"/>
           <p:cNvPicPr preferRelativeResize="0"/>
           <p:nvPr/>
         </p:nvPicPr>
@@ -12609,7 +13431,7 @@
       </p:pic>
       <p:sp>
         <p:nvSpPr>
-          <p:cNvPr id="103" name="Google Shape;103;p11"/>
+          <p:cNvPr id="101" name="Google Shape;101;p11"/>
           <p:cNvSpPr/>
           <p:nvPr/>
         </p:nvSpPr>
@@ -12656,7 +13478,7 @@
                 <a:cs typeface="IBM Plex Mono"/>
                 <a:sym typeface="IBM Plex Mono"/>
               </a:rPr>
-              <a:t>9</a:t>
+              <a:t>8</a:t>
             </a:r>
             <a:r>
               <a:rPr b="0" i="0" lang="en-US" sz="1300" u="none" cap="none" strike="noStrike">
@@ -12683,498 +13505,6 @@
               <a:t>13</a:t>
             </a:r>
             <a:endParaRPr/>
-          </a:p>
-        </p:txBody>
-      </p:sp>
-      <p:sp>
-        <p:nvSpPr>
-          <p:cNvPr id="104" name="Google Shape;104;p11"/>
-          <p:cNvSpPr/>
-          <p:nvPr/>
-        </p:nvSpPr>
-        <p:spPr>
-          <a:xfrm>
-            <a:off x="1095375" y="5925700"/>
-            <a:ext cx="7700100" cy="2393700"/>
-          </a:xfrm>
-          <a:prstGeom prst="roundRect">
-            <a:avLst>
-              <a:gd fmla="val 6000" name="adj"/>
-            </a:avLst>
-          </a:prstGeom>
-          <a:solidFill>
-            <a:srgbClr val="EEF1F4"/>
-          </a:solidFill>
-          <a:ln>
-            <a:noFill/>
-          </a:ln>
-        </p:spPr>
-        <p:txBody>
-          <a:bodyPr anchorCtr="0" anchor="t" bIns="364000" lIns="520000" spcFirstLastPara="1" rIns="520000" wrap="square" tIns="364000">
-            <a:noAutofit/>
-          </a:bodyPr>
-          <a:lstStyle/>
-          <a:p>
-            <a:pPr indent="0" lvl="0" marL="0" marR="0" rtl="0" algn="l">
-              <a:lnSpc>
-                <a:spcPct val="126315"/>
-              </a:lnSpc>
-              <a:spcBef>
-                <a:spcPts val="0"/>
-              </a:spcBef>
-              <a:spcAft>
-                <a:spcPts val="0"/>
-              </a:spcAft>
-              <a:buClr>
-                <a:srgbClr val="1A1A1A"/>
-              </a:buClr>
-              <a:buSzPts val="1900"/>
-              <a:buFont typeface="Montserrat SemiBold"/>
-              <a:buNone/>
-            </a:pPr>
-            <a:r>
-              <a:rPr b="1" lang="en-US" sz="1900">
-                <a:solidFill>
-                  <a:srgbClr val="1A1A1A"/>
-                </a:solidFill>
-                <a:latin typeface="Montserrat SemiBold"/>
-                <a:ea typeface="Montserrat SemiBold"/>
-                <a:cs typeface="Montserrat SemiBold"/>
-                <a:sym typeface="Montserrat SemiBold"/>
-              </a:rPr>
-              <a:t>Related fixes &amp; Adaptations:</a:t>
-            </a:r>
-            <a:endParaRPr b="1" i="0" sz="1900" u="none" cap="none" strike="noStrike">
-              <a:solidFill>
-                <a:srgbClr val="1A1A1A"/>
-              </a:solidFill>
-              <a:latin typeface="Montserrat SemiBold"/>
-              <a:ea typeface="Montserrat SemiBold"/>
-              <a:cs typeface="Montserrat SemiBold"/>
-              <a:sym typeface="Montserrat SemiBold"/>
-            </a:endParaRPr>
-          </a:p>
-          <a:p>
-            <a:pPr indent="-380001" lvl="0" marL="380001" marR="0" rtl="0" algn="l">
-              <a:lnSpc>
-                <a:spcPct val="126470"/>
-              </a:lnSpc>
-              <a:spcBef>
-                <a:spcPts val="300"/>
-              </a:spcBef>
-              <a:spcAft>
-                <a:spcPts val="0"/>
-              </a:spcAft>
-              <a:buClr>
-                <a:srgbClr val="1A1A1A"/>
-              </a:buClr>
-              <a:buSzPts val="1700"/>
-              <a:buFont typeface="Arial"/>
-              <a:buChar char="•"/>
-            </a:pPr>
-            <a:r>
-              <a:rPr lang="en-US" sz="1700">
-                <a:solidFill>
-                  <a:srgbClr val="1A1A1A"/>
-                </a:solidFill>
-                <a:latin typeface="IBM Plex Sans"/>
-                <a:ea typeface="IBM Plex Sans"/>
-                <a:cs typeface="IBM Plex Sans"/>
-                <a:sym typeface="IBM Plex Sans"/>
-              </a:rPr>
-              <a:t>lwext4</a:t>
-            </a:r>
-            <a:r>
-              <a:rPr baseline="30000" lang="en-US" sz="1700">
-                <a:solidFill>
-                  <a:srgbClr val="1A1A1A"/>
-                </a:solidFill>
-                <a:latin typeface="IBM Plex Sans"/>
-                <a:ea typeface="IBM Plex Sans"/>
-                <a:cs typeface="IBM Plex Sans"/>
-                <a:sym typeface="IBM Plex Sans"/>
-              </a:rPr>
-              <a:t>3</a:t>
-            </a:r>
-            <a:r>
-              <a:rPr lang="en-US" sz="1700">
-                <a:solidFill>
-                  <a:srgbClr val="1A1A1A"/>
-                </a:solidFill>
-                <a:latin typeface="IBM Plex Sans"/>
-                <a:ea typeface="IBM Plex Sans"/>
-                <a:cs typeface="IBM Plex Sans"/>
-                <a:sym typeface="IBM Plex Sans"/>
-              </a:rPr>
-              <a:t> (</a:t>
-            </a:r>
-            <a:r>
-              <a:rPr lang="en-US" sz="1700">
-                <a:solidFill>
-                  <a:srgbClr val="1A1A1A"/>
-                </a:solidFill>
-                <a:latin typeface="IBM Plex Sans"/>
-                <a:ea typeface="IBM Plex Sans"/>
-                <a:cs typeface="IBM Plex Sans"/>
-                <a:sym typeface="IBM Plex Sans"/>
-              </a:rPr>
-              <a:t>ftruncate and sync</a:t>
-            </a:r>
-            <a:r>
-              <a:rPr lang="en-US">
-                <a:solidFill>
-                  <a:schemeClr val="dk1"/>
-                </a:solidFill>
-              </a:rPr>
-              <a:t>)</a:t>
-            </a:r>
-            <a:endParaRPr>
-              <a:solidFill>
-                <a:schemeClr val="dk1"/>
-              </a:solidFill>
-            </a:endParaRPr>
-          </a:p>
-          <a:p>
-            <a:pPr indent="-380001" lvl="0" marL="380001" marR="0" rtl="0" algn="l">
-              <a:lnSpc>
-                <a:spcPct val="126470"/>
-              </a:lnSpc>
-              <a:spcBef>
-                <a:spcPts val="300"/>
-              </a:spcBef>
-              <a:spcAft>
-                <a:spcPts val="0"/>
-              </a:spcAft>
-              <a:buClr>
-                <a:schemeClr val="dk1"/>
-              </a:buClr>
-              <a:buSzPts val="1700"/>
-              <a:buChar char="•"/>
-            </a:pPr>
-            <a:r>
-              <a:rPr lang="en-US" sz="1700">
-                <a:solidFill>
-                  <a:schemeClr val="dk1"/>
-                </a:solidFill>
-                <a:latin typeface="IBM Plex Sans"/>
-                <a:ea typeface="IBM Plex Sans"/>
-                <a:cs typeface="IBM Plex Sans"/>
-                <a:sym typeface="IBM Plex Sans"/>
-              </a:rPr>
-              <a:t>isomem</a:t>
-            </a:r>
-            <a:r>
-              <a:rPr baseline="30000" lang="en-US" sz="1700">
-                <a:solidFill>
-                  <a:schemeClr val="dk1"/>
-                </a:solidFill>
-                <a:latin typeface="IBM Plex Sans"/>
-                <a:ea typeface="IBM Plex Sans"/>
-                <a:cs typeface="IBM Plex Sans"/>
-                <a:sym typeface="IBM Plex Sans"/>
-              </a:rPr>
-              <a:t>4</a:t>
-            </a:r>
-            <a:r>
-              <a:rPr lang="en-US" sz="1700">
-                <a:solidFill>
-                  <a:schemeClr val="dk1"/>
-                </a:solidFill>
-                <a:latin typeface="IBM Plex Sans"/>
-                <a:ea typeface="IBM Plex Sans"/>
-                <a:cs typeface="IBM Plex Sans"/>
-                <a:sym typeface="IBM Plex Sans"/>
-              </a:rPr>
-              <a:t> (</a:t>
-            </a:r>
-            <a:r>
-              <a:rPr lang="en-US" sz="1700">
-                <a:solidFill>
-                  <a:srgbClr val="1A1A1A"/>
-                </a:solidFill>
-                <a:latin typeface="IBM Plex Sans"/>
-                <a:ea typeface="IBM Plex Sans"/>
-                <a:cs typeface="IBM Plex Sans"/>
-                <a:sym typeface="IBM Plex Sans"/>
-              </a:rPr>
-              <a:t>power-off button callback and graceful shutdown</a:t>
-            </a:r>
-            <a:r>
-              <a:rPr lang="en-US" sz="1700">
-                <a:solidFill>
-                  <a:schemeClr val="dk1"/>
-                </a:solidFill>
-                <a:latin typeface="IBM Plex Sans"/>
-                <a:ea typeface="IBM Plex Sans"/>
-                <a:cs typeface="IBM Plex Sans"/>
-                <a:sym typeface="IBM Plex Sans"/>
-              </a:rPr>
-              <a:t>)</a:t>
-            </a:r>
-            <a:endParaRPr sz="1700">
-              <a:solidFill>
-                <a:schemeClr val="dk1"/>
-              </a:solidFill>
-              <a:latin typeface="IBM Plex Sans"/>
-              <a:ea typeface="IBM Plex Sans"/>
-              <a:cs typeface="IBM Plex Sans"/>
-              <a:sym typeface="IBM Plex Sans"/>
-            </a:endParaRPr>
-          </a:p>
-          <a:p>
-            <a:pPr indent="-380001" lvl="0" marL="380001" marR="0" rtl="0" algn="l">
-              <a:lnSpc>
-                <a:spcPct val="126470"/>
-              </a:lnSpc>
-              <a:spcBef>
-                <a:spcPts val="300"/>
-              </a:spcBef>
-              <a:spcAft>
-                <a:spcPts val="0"/>
-              </a:spcAft>
-              <a:buClr>
-                <a:schemeClr val="dk1"/>
-              </a:buClr>
-              <a:buSzPts val="1700"/>
-              <a:buChar char="•"/>
-            </a:pPr>
-            <a:r>
-              <a:rPr lang="en-US" sz="1700">
-                <a:solidFill>
-                  <a:srgbClr val="1A1A1A"/>
-                </a:solidFill>
-                <a:latin typeface="IBM Plex Sans"/>
-                <a:ea typeface="IBM Plex Sans"/>
-                <a:cs typeface="IBM Plex Sans"/>
-                <a:sym typeface="IBM Plex Sans"/>
-              </a:rPr>
-              <a:t>snapper</a:t>
-            </a:r>
-            <a:r>
-              <a:rPr baseline="30000" lang="en-US" sz="1700">
-                <a:solidFill>
-                  <a:srgbClr val="1A1A1A"/>
-                </a:solidFill>
-                <a:latin typeface="IBM Plex Sans"/>
-                <a:ea typeface="IBM Plex Sans"/>
-                <a:cs typeface="IBM Plex Sans"/>
-                <a:sym typeface="IBM Plex Sans"/>
-              </a:rPr>
-              <a:t>5</a:t>
-            </a:r>
-            <a:r>
-              <a:rPr lang="en-US" sz="1700">
-                <a:solidFill>
-                  <a:srgbClr val="1A1A1A"/>
-                </a:solidFill>
-                <a:latin typeface="IBM Plex Sans"/>
-                <a:ea typeface="IBM Plex Sans"/>
-                <a:cs typeface="IBM Plex Sans"/>
-                <a:sym typeface="IBM Plex Sans"/>
-              </a:rPr>
-              <a:t> (client counter and graceful shutdown)</a:t>
-            </a:r>
-            <a:endParaRPr sz="1700">
-              <a:solidFill>
-                <a:srgbClr val="1A1A1A"/>
-              </a:solidFill>
-              <a:latin typeface="IBM Plex Sans"/>
-              <a:ea typeface="IBM Plex Sans"/>
-              <a:cs typeface="IBM Plex Sans"/>
-              <a:sym typeface="IBM Plex Sans"/>
-            </a:endParaRPr>
-          </a:p>
-          <a:p>
-            <a:pPr indent="-380001" lvl="0" marL="380001" marR="0" rtl="0" algn="l">
-              <a:lnSpc>
-                <a:spcPct val="126470"/>
-              </a:lnSpc>
-              <a:spcBef>
-                <a:spcPts val="300"/>
-              </a:spcBef>
-              <a:spcAft>
-                <a:spcPts val="0"/>
-              </a:spcAft>
-              <a:buClr>
-                <a:schemeClr val="dk1"/>
-              </a:buClr>
-              <a:buSzPts val="1700"/>
-              <a:buChar char="•"/>
-            </a:pPr>
-            <a:r>
-              <a:rPr lang="en-US" sz="1700">
-                <a:solidFill>
-                  <a:schemeClr val="dk1"/>
-                </a:solidFill>
-                <a:latin typeface="IBM Plex Sans"/>
-                <a:ea typeface="IBM Plex Sans"/>
-                <a:cs typeface="IBM Plex Sans"/>
-                <a:sym typeface="IBM Plex Sans"/>
-              </a:rPr>
-              <a:t>vfs</a:t>
-            </a:r>
-            <a:r>
-              <a:rPr baseline="30000" lang="en-US" sz="1700">
-                <a:solidFill>
-                  <a:schemeClr val="dk1"/>
-                </a:solidFill>
-                <a:latin typeface="IBM Plex Sans"/>
-                <a:ea typeface="IBM Plex Sans"/>
-                <a:cs typeface="IBM Plex Sans"/>
-                <a:sym typeface="IBM Plex Sans"/>
-              </a:rPr>
-              <a:t>6</a:t>
-            </a:r>
-            <a:r>
-              <a:rPr lang="en-US" sz="1700">
-                <a:solidFill>
-                  <a:schemeClr val="dk1"/>
-                </a:solidFill>
-                <a:latin typeface="IBM Plex Sans"/>
-                <a:ea typeface="IBM Plex Sans"/>
-                <a:cs typeface="IBM Plex Sans"/>
-                <a:sym typeface="IBM Plex Sans"/>
-              </a:rPr>
-              <a:t> (</a:t>
-            </a:r>
-            <a:r>
-              <a:rPr lang="en-US" sz="1700">
-                <a:solidFill>
-                  <a:srgbClr val="1A1A1A"/>
-                </a:solidFill>
-                <a:latin typeface="IBM Plex Sans"/>
-                <a:ea typeface="IBM Plex Sans"/>
-                <a:cs typeface="IBM Plex Sans"/>
-                <a:sym typeface="IBM Plex Sans"/>
-              </a:rPr>
-              <a:t>client counter, graceful shutdown and clean unmount</a:t>
-            </a:r>
-            <a:r>
-              <a:rPr lang="en-US" sz="1700">
-                <a:solidFill>
-                  <a:schemeClr val="dk1"/>
-                </a:solidFill>
-                <a:latin typeface="IBM Plex Sans"/>
-                <a:ea typeface="IBM Plex Sans"/>
-                <a:cs typeface="IBM Plex Sans"/>
-                <a:sym typeface="IBM Plex Sans"/>
-              </a:rPr>
-              <a:t>)</a:t>
-            </a:r>
-            <a:endParaRPr/>
-          </a:p>
-        </p:txBody>
-      </p:sp>
-      <p:sp>
-        <p:nvSpPr>
-          <p:cNvPr id="105" name="Google Shape;105;p11"/>
-          <p:cNvSpPr/>
-          <p:nvPr/>
-        </p:nvSpPr>
-        <p:spPr>
-          <a:xfrm>
-            <a:off x="9395375" y="5925700"/>
-            <a:ext cx="7754700" cy="2393700"/>
-          </a:xfrm>
-          <a:prstGeom prst="roundRect">
-            <a:avLst>
-              <a:gd fmla="val 6000" name="adj"/>
-            </a:avLst>
-          </a:prstGeom>
-          <a:solidFill>
-            <a:srgbClr val="40BA21"/>
-          </a:solidFill>
-          <a:ln>
-            <a:noFill/>
-          </a:ln>
-        </p:spPr>
-        <p:txBody>
-          <a:bodyPr anchorCtr="0" anchor="t" bIns="364000" lIns="520000" spcFirstLastPara="1" rIns="520000" wrap="square" tIns="364000">
-            <a:noAutofit/>
-          </a:bodyPr>
-          <a:lstStyle/>
-          <a:p>
-            <a:pPr indent="0" lvl="0" marL="0" marR="0" rtl="0" algn="l">
-              <a:lnSpc>
-                <a:spcPct val="126315"/>
-              </a:lnSpc>
-              <a:spcBef>
-                <a:spcPts val="300"/>
-              </a:spcBef>
-              <a:spcAft>
-                <a:spcPts val="0"/>
-              </a:spcAft>
-              <a:buClr>
-                <a:srgbClr val="FFFFFF"/>
-              </a:buClr>
-              <a:buSzPts val="1900"/>
-              <a:buFont typeface="Montserrat SemiBold"/>
-              <a:buNone/>
-            </a:pPr>
-            <a:r>
-              <a:rPr b="1" lang="en-US" sz="1900">
-                <a:solidFill>
-                  <a:srgbClr val="FFFFFF"/>
-                </a:solidFill>
-                <a:latin typeface="Montserrat SemiBold"/>
-                <a:ea typeface="Montserrat SemiBold"/>
-                <a:cs typeface="Montserrat SemiBold"/>
-                <a:sym typeface="Montserrat SemiBold"/>
-              </a:rPr>
-              <a:t>Optimization:</a:t>
-            </a:r>
-            <a:endParaRPr b="1" i="0" sz="1900" u="none" cap="none" strike="noStrike">
-              <a:solidFill>
-                <a:srgbClr val="FFFFFF"/>
-              </a:solidFill>
-              <a:latin typeface="Montserrat SemiBold"/>
-              <a:ea typeface="Montserrat SemiBold"/>
-              <a:cs typeface="Montserrat SemiBold"/>
-              <a:sym typeface="Montserrat SemiBold"/>
-            </a:endParaRPr>
-          </a:p>
-          <a:p>
-            <a:pPr indent="0" lvl="0" marL="0" rtl="0" algn="l">
-              <a:lnSpc>
-                <a:spcPct val="126315"/>
-              </a:lnSpc>
-              <a:spcBef>
-                <a:spcPts val="0"/>
-              </a:spcBef>
-              <a:spcAft>
-                <a:spcPts val="0"/>
-              </a:spcAft>
-              <a:buClr>
-                <a:schemeClr val="dk1"/>
-              </a:buClr>
-              <a:buFont typeface="Arial"/>
-              <a:buNone/>
-            </a:pPr>
-            <a:r>
-              <a:rPr lang="en-US" sz="1700">
-                <a:solidFill>
-                  <a:schemeClr val="lt1"/>
-                </a:solidFill>
-                <a:latin typeface="IBM Plex Sans"/>
-                <a:ea typeface="IBM Plex Sans"/>
-                <a:cs typeface="IBM Plex Sans"/>
-                <a:sym typeface="IBM Plex Sans"/>
-              </a:rPr>
-              <a:t>U</a:t>
-            </a:r>
-            <a:r>
-              <a:rPr lang="en-US" sz="1700">
-                <a:solidFill>
-                  <a:schemeClr val="lt1"/>
-                </a:solidFill>
-                <a:latin typeface="IBM Plex Sans"/>
-                <a:ea typeface="IBM Plex Sans"/>
-                <a:cs typeface="IBM Plex Sans"/>
-                <a:sym typeface="IBM Plex Sans"/>
-              </a:rPr>
-              <a:t>sing a “Block” session directly — initialization time reduced from ≈20 min to ≈1 min</a:t>
-            </a:r>
-            <a:endParaRPr sz="1700"/>
           </a:p>
         </p:txBody>
       </p:sp>
@@ -13187,6 +13517,285 @@
 </file>
 
 <file path=ppt/theme/theme1.xml><?xml version="1.0" encoding="utf-8"?>
+<a:theme xmlns:a="http://schemas.openxmlformats.org/drawingml/2006/main" xmlns:r="http://schemas.openxmlformats.org/officeDocument/2006/relationships" name="Тема Office">
+  <a:themeElements>
+    <a:clrScheme name="Стандартная">
+      <a:dk1>
+        <a:srgbClr val="000000"/>
+      </a:dk1>
+      <a:lt1>
+        <a:srgbClr val="FFFFFF"/>
+      </a:lt1>
+      <a:dk2>
+        <a:srgbClr val="44546A"/>
+      </a:dk2>
+      <a:lt2>
+        <a:srgbClr val="E7E6E6"/>
+      </a:lt2>
+      <a:accent1>
+        <a:srgbClr val="4472C4"/>
+      </a:accent1>
+      <a:accent2>
+        <a:srgbClr val="ED7D31"/>
+      </a:accent2>
+      <a:accent3>
+        <a:srgbClr val="A5A5A5"/>
+      </a:accent3>
+      <a:accent4>
+        <a:srgbClr val="FFC000"/>
+      </a:accent4>
+      <a:accent5>
+        <a:srgbClr val="5B9BD5"/>
+      </a:accent5>
+      <a:accent6>
+        <a:srgbClr val="70AD47"/>
+      </a:accent6>
+      <a:hlink>
+        <a:srgbClr val="0563C1"/>
+      </a:hlink>
+      <a:folHlink>
+        <a:srgbClr val="954F72"/>
+      </a:folHlink>
+    </a:clrScheme>
+    <a:fontScheme name="Office">
+      <a:majorFont>
+        <a:latin typeface="Arial"/>
+        <a:ea typeface=""/>
+        <a:cs typeface=""/>
+        <a:font script="Jpan" typeface="ＭＳ Ｐゴシック"/>
+        <a:font script="Hang" typeface="맑은 고딕"/>
+        <a:font script="Hans" typeface="宋体"/>
+        <a:font script="Hant" typeface="新細明體"/>
+        <a:font script="Arab" typeface="Times New Roman"/>
+        <a:font script="Hebr" typeface="Times New Roman"/>
+        <a:font script="Thai" typeface="Angsana New"/>
+        <a:font script="Ethi" typeface="Nyala"/>
+        <a:font script="Beng" typeface="Vrinda"/>
+        <a:font script="Gujr" typeface="Shruti"/>
+        <a:font script="Khmr" typeface="MoolBoran"/>
+        <a:font script="Knda" typeface="Tunga"/>
+        <a:font script="Guru" typeface="Raavi"/>
+        <a:font script="Cans" typeface="Euphemia"/>
+        <a:font script="Cher" typeface="Plantagenet Cherokee"/>
+        <a:font script="Yiii" typeface="Microsoft Yi Baiti"/>
+        <a:font script="Tibt" typeface="Microsoft Himalaya"/>
+        <a:font script="Thaa" typeface="MV Boli"/>
+        <a:font script="Deva" typeface="Mangal"/>
+        <a:font script="Telu" typeface="Gautami"/>
+        <a:font script="Taml" typeface="Latha"/>
+        <a:font script="Syrc" typeface="Estrangelo Edessa"/>
+        <a:font script="Orya" typeface="Kalinga"/>
+        <a:font script="Mlym" typeface="Kartika"/>
+        <a:font script="Laoo" typeface="DokChampa"/>
+        <a:font script="Sinh" typeface="Iskoola Pota"/>
+        <a:font script="Mong" typeface="Mongolian Baiti"/>
+        <a:font script="Viet" typeface="Times New Roman"/>
+        <a:font script="Uigh" typeface="Microsoft Uighur"/>
+        <a:font script="Geor" typeface="Sylfaen"/>
+      </a:majorFont>
+      <a:minorFont>
+        <a:latin typeface="Arial"/>
+        <a:ea typeface=""/>
+        <a:cs typeface=""/>
+        <a:font script="Jpan" typeface="ＭＳ Ｐゴシック"/>
+        <a:font script="Hang" typeface="맑은 고딕"/>
+        <a:font script="Hans" typeface="宋体"/>
+        <a:font script="Hant" typeface="新細明體"/>
+        <a:font script="Arab" typeface="Arial"/>
+        <a:font script="Hebr" typeface="Arial"/>
+        <a:font script="Thai" typeface="Cordia New"/>
+        <a:font script="Ethi" typeface="Nyala"/>
+        <a:font script="Beng" typeface="Vrinda"/>
+        <a:font script="Gujr" typeface="Shruti"/>
+        <a:font script="Khmr" typeface="DaunPenh"/>
+        <a:font script="Knda" typeface="Tunga"/>
+        <a:font script="Guru" typeface="Raavi"/>
+        <a:font script="Cans" typeface="Euphemia"/>
+        <a:font script="Cher" typeface="Plantagenet Cherokee"/>
+        <a:font script="Yiii" typeface="Microsoft Yi Baiti"/>
+        <a:font script="Tibt" typeface="Microsoft Himalaya"/>
+        <a:font script="Thaa" typeface="MV Boli"/>
+        <a:font script="Deva" typeface="Mangal"/>
+        <a:font script="Telu" typeface="Gautami"/>
+        <a:font script="Taml" typeface="Latha"/>
+        <a:font script="Syrc" typeface="Estrangelo Edessa"/>
+        <a:font script="Orya" typeface="Kalinga"/>
+        <a:font script="Mlym" typeface="Kartika"/>
+        <a:font script="Laoo" typeface="DokChampa"/>
+        <a:font script="Sinh" typeface="Iskoola Pota"/>
+        <a:font script="Mong" typeface="Mongolian Baiti"/>
+        <a:font script="Viet" typeface="Arial"/>
+        <a:font script="Uigh" typeface="Microsoft Uighur"/>
+        <a:font script="Geor" typeface="Sylfaen"/>
+      </a:minorFont>
+    </a:fontScheme>
+    <a:fmtScheme name="Office">
+      <a:fillStyleLst>
+        <a:solidFill>
+          <a:schemeClr val="phClr"/>
+        </a:solidFill>
+        <a:gradFill rotWithShape="1">
+          <a:gsLst>
+            <a:gs pos="0">
+              <a:schemeClr val="phClr">
+                <a:tint val="50000"/>
+                <a:satMod val="300000"/>
+              </a:schemeClr>
+            </a:gs>
+            <a:gs pos="35000">
+              <a:schemeClr val="phClr">
+                <a:tint val="37000"/>
+                <a:satMod val="300000"/>
+              </a:schemeClr>
+            </a:gs>
+            <a:gs pos="100000">
+              <a:schemeClr val="phClr">
+                <a:tint val="15000"/>
+                <a:satMod val="350000"/>
+              </a:schemeClr>
+            </a:gs>
+          </a:gsLst>
+          <a:lin ang="16200000" scaled="1"/>
+        </a:gradFill>
+        <a:gradFill rotWithShape="1">
+          <a:gsLst>
+            <a:gs pos="0">
+              <a:schemeClr val="phClr">
+                <a:tint val="100000"/>
+                <a:shade val="100000"/>
+                <a:satMod val="130000"/>
+              </a:schemeClr>
+            </a:gs>
+            <a:gs pos="100000">
+              <a:schemeClr val="phClr">
+                <a:tint val="50000"/>
+                <a:shade val="100000"/>
+                <a:satMod val="350000"/>
+              </a:schemeClr>
+            </a:gs>
+          </a:gsLst>
+          <a:lin ang="16200000" scaled="0"/>
+        </a:gradFill>
+      </a:fillStyleLst>
+      <a:lnStyleLst>
+        <a:ln w="9525" cap="flat" cmpd="sng" algn="ctr">
+          <a:solidFill>
+            <a:schemeClr val="phClr">
+              <a:shade val="95000"/>
+              <a:satMod val="105000"/>
+            </a:schemeClr>
+          </a:solidFill>
+          <a:prstDash val="solid"/>
+        </a:ln>
+        <a:ln w="25400" cap="flat" cmpd="sng" algn="ctr">
+          <a:solidFill>
+            <a:schemeClr val="phClr"/>
+          </a:solidFill>
+          <a:prstDash val="solid"/>
+        </a:ln>
+        <a:ln w="38100" cap="flat" cmpd="sng" algn="ctr">
+          <a:solidFill>
+            <a:schemeClr val="phClr"/>
+          </a:solidFill>
+          <a:prstDash val="solid"/>
+        </a:ln>
+      </a:lnStyleLst>
+      <a:effectStyleLst>
+        <a:effectStyle>
+          <a:effectLst>
+            <a:outerShdw blurRad="40000" dist="20000" dir="5400000" rotWithShape="0">
+              <a:srgbClr val="000000">
+                <a:alpha val="38000"/>
+              </a:srgbClr>
+            </a:outerShdw>
+          </a:effectLst>
+        </a:effectStyle>
+        <a:effectStyle>
+          <a:effectLst>
+            <a:outerShdw blurRad="40000" dist="23000" dir="5400000" rotWithShape="0">
+              <a:srgbClr val="000000">
+                <a:alpha val="35000"/>
+              </a:srgbClr>
+            </a:outerShdw>
+          </a:effectLst>
+        </a:effectStyle>
+        <a:effectStyle>
+          <a:effectLst>
+            <a:outerShdw blurRad="40000" dist="23000" dir="5400000" rotWithShape="0">
+              <a:srgbClr val="000000">
+                <a:alpha val="35000"/>
+              </a:srgbClr>
+            </a:outerShdw>
+          </a:effectLst>
+          <a:scene3d>
+            <a:camera prst="orthographicFront">
+              <a:rot lat="0" lon="0" rev="0"/>
+            </a:camera>
+            <a:lightRig rig="threePt" dir="t">
+              <a:rot lat="0" lon="0" rev="1200000"/>
+            </a:lightRig>
+          </a:scene3d>
+          <a:sp3d>
+            <a:bevelT w="63500" h="25400"/>
+          </a:sp3d>
+        </a:effectStyle>
+      </a:effectStyleLst>
+      <a:bgFillStyleLst>
+        <a:solidFill>
+          <a:schemeClr val="phClr"/>
+        </a:solidFill>
+        <a:gradFill rotWithShape="1">
+          <a:gsLst>
+            <a:gs pos="0">
+              <a:schemeClr val="phClr">
+                <a:tint val="40000"/>
+                <a:satMod val="350000"/>
+              </a:schemeClr>
+            </a:gs>
+            <a:gs pos="40000">
+              <a:schemeClr val="phClr">
+                <a:tint val="45000"/>
+                <a:shade val="99000"/>
+                <a:satMod val="350000"/>
+              </a:schemeClr>
+            </a:gs>
+            <a:gs pos="100000">
+              <a:schemeClr val="phClr">
+                <a:shade val="20000"/>
+                <a:satMod val="255000"/>
+              </a:schemeClr>
+            </a:gs>
+          </a:gsLst>
+          <a:path path="circle">
+            <a:fillToRect l="50000" t="-80000" r="50000" b="180000"/>
+          </a:path>
+        </a:gradFill>
+        <a:gradFill rotWithShape="1">
+          <a:gsLst>
+            <a:gs pos="0">
+              <a:schemeClr val="phClr">
+                <a:tint val="80000"/>
+                <a:satMod val="300000"/>
+              </a:schemeClr>
+            </a:gs>
+            <a:gs pos="100000">
+              <a:schemeClr val="phClr">
+                <a:shade val="30000"/>
+                <a:satMod val="200000"/>
+              </a:schemeClr>
+            </a:gs>
+          </a:gsLst>
+          <a:path path="circle">
+            <a:fillToRect l="50000" t="50000" r="50000" b="50000"/>
+          </a:path>
+        </a:gradFill>
+      </a:bgFillStyleLst>
+    </a:fmtScheme>
+  </a:themeElements>
+</a:theme>
+</file>
+
+<file path=ppt/theme/theme2.xml><?xml version="1.0" encoding="utf-8"?>
 <a:theme xmlns:a="http://schemas.openxmlformats.org/drawingml/2006/main" xmlns:r="http://schemas.openxmlformats.org/officeDocument/2006/relationships" name="Office Theme">
   <a:themeElements>
     <a:clrScheme name="Office">
@@ -13463,283 +14072,4 @@
     </a:fmtScheme>
   </a:themeElements>
 </a:theme>
-</file>
-
-<file path=ppt/theme/theme2.xml><?xml version="1.0" encoding="utf-8"?>
-<a:theme xmlns:a="http://schemas.openxmlformats.org/drawingml/2006/main" xmlns:r="http://schemas.openxmlformats.org/officeDocument/2006/relationships" name="Тема Office">
-  <a:themeElements>
-    <a:clrScheme name="Стандартная">
-      <a:dk1>
-        <a:srgbClr val="000000"/>
-      </a:dk1>
-      <a:lt1>
-        <a:srgbClr val="FFFFFF"/>
-      </a:lt1>
-      <a:dk2>
-        <a:srgbClr val="44546A"/>
-      </a:dk2>
-      <a:lt2>
-        <a:srgbClr val="E7E6E6"/>
-      </a:lt2>
-      <a:accent1>
-        <a:srgbClr val="4472C4"/>
-      </a:accent1>
-      <a:accent2>
-        <a:srgbClr val="ED7D31"/>
-      </a:accent2>
-      <a:accent3>
-        <a:srgbClr val="A5A5A5"/>
-      </a:accent3>
-      <a:accent4>
-        <a:srgbClr val="FFC000"/>
-      </a:accent4>
-      <a:accent5>
-        <a:srgbClr val="5B9BD5"/>
-      </a:accent5>
-      <a:accent6>
-        <a:srgbClr val="70AD47"/>
-      </a:accent6>
-      <a:hlink>
-        <a:srgbClr val="0563C1"/>
-      </a:hlink>
-      <a:folHlink>
-        <a:srgbClr val="954F72"/>
-      </a:folHlink>
-    </a:clrScheme>
-    <a:fontScheme name="Office">
-      <a:majorFont>
-        <a:latin typeface="Arial"/>
-        <a:ea typeface=""/>
-        <a:cs typeface=""/>
-        <a:font script="Jpan" typeface="ＭＳ Ｐゴシック"/>
-        <a:font script="Hang" typeface="맑은 고딕"/>
-        <a:font script="Hans" typeface="宋体"/>
-        <a:font script="Hant" typeface="新細明體"/>
-        <a:font script="Arab" typeface="Times New Roman"/>
-        <a:font script="Hebr" typeface="Times New Roman"/>
-        <a:font script="Thai" typeface="Angsana New"/>
-        <a:font script="Ethi" typeface="Nyala"/>
-        <a:font script="Beng" typeface="Vrinda"/>
-        <a:font script="Gujr" typeface="Shruti"/>
-        <a:font script="Khmr" typeface="MoolBoran"/>
-        <a:font script="Knda" typeface="Tunga"/>
-        <a:font script="Guru" typeface="Raavi"/>
-        <a:font script="Cans" typeface="Euphemia"/>
-        <a:font script="Cher" typeface="Plantagenet Cherokee"/>
-        <a:font script="Yiii" typeface="Microsoft Yi Baiti"/>
-        <a:font script="Tibt" typeface="Microsoft Himalaya"/>
-        <a:font script="Thaa" typeface="MV Boli"/>
-        <a:font script="Deva" typeface="Mangal"/>
-        <a:font script="Telu" typeface="Gautami"/>
-        <a:font script="Taml" typeface="Latha"/>
-        <a:font script="Syrc" typeface="Estrangelo Edessa"/>
-        <a:font script="Orya" typeface="Kalinga"/>
-        <a:font script="Mlym" typeface="Kartika"/>
-        <a:font script="Laoo" typeface="DokChampa"/>
-        <a:font script="Sinh" typeface="Iskoola Pota"/>
-        <a:font script="Mong" typeface="Mongolian Baiti"/>
-        <a:font script="Viet" typeface="Times New Roman"/>
-        <a:font script="Uigh" typeface="Microsoft Uighur"/>
-        <a:font script="Geor" typeface="Sylfaen"/>
-      </a:majorFont>
-      <a:minorFont>
-        <a:latin typeface="Arial"/>
-        <a:ea typeface=""/>
-        <a:cs typeface=""/>
-        <a:font script="Jpan" typeface="ＭＳ Ｐゴシック"/>
-        <a:font script="Hang" typeface="맑은 고딕"/>
-        <a:font script="Hans" typeface="宋体"/>
-        <a:font script="Hant" typeface="新細明體"/>
-        <a:font script="Arab" typeface="Arial"/>
-        <a:font script="Hebr" typeface="Arial"/>
-        <a:font script="Thai" typeface="Cordia New"/>
-        <a:font script="Ethi" typeface="Nyala"/>
-        <a:font script="Beng" typeface="Vrinda"/>
-        <a:font script="Gujr" typeface="Shruti"/>
-        <a:font script="Khmr" typeface="DaunPenh"/>
-        <a:font script="Knda" typeface="Tunga"/>
-        <a:font script="Guru" typeface="Raavi"/>
-        <a:font script="Cans" typeface="Euphemia"/>
-        <a:font script="Cher" typeface="Plantagenet Cherokee"/>
-        <a:font script="Yiii" typeface="Microsoft Yi Baiti"/>
-        <a:font script="Tibt" typeface="Microsoft Himalaya"/>
-        <a:font script="Thaa" typeface="MV Boli"/>
-        <a:font script="Deva" typeface="Mangal"/>
-        <a:font script="Telu" typeface="Gautami"/>
-        <a:font script="Taml" typeface="Latha"/>
-        <a:font script="Syrc" typeface="Estrangelo Edessa"/>
-        <a:font script="Orya" typeface="Kalinga"/>
-        <a:font script="Mlym" typeface="Kartika"/>
-        <a:font script="Laoo" typeface="DokChampa"/>
-        <a:font script="Sinh" typeface="Iskoola Pota"/>
-        <a:font script="Mong" typeface="Mongolian Baiti"/>
-        <a:font script="Viet" typeface="Arial"/>
-        <a:font script="Uigh" typeface="Microsoft Uighur"/>
-        <a:font script="Geor" typeface="Sylfaen"/>
-      </a:minorFont>
-    </a:fontScheme>
-    <a:fmtScheme name="Office">
-      <a:fillStyleLst>
-        <a:solidFill>
-          <a:schemeClr val="phClr"/>
-        </a:solidFill>
-        <a:gradFill rotWithShape="1">
-          <a:gsLst>
-            <a:gs pos="0">
-              <a:schemeClr val="phClr">
-                <a:tint val="50000"/>
-                <a:satMod val="300000"/>
-              </a:schemeClr>
-            </a:gs>
-            <a:gs pos="35000">
-              <a:schemeClr val="phClr">
-                <a:tint val="37000"/>
-                <a:satMod val="300000"/>
-              </a:schemeClr>
-            </a:gs>
-            <a:gs pos="100000">
-              <a:schemeClr val="phClr">
-                <a:tint val="15000"/>
-                <a:satMod val="350000"/>
-              </a:schemeClr>
-            </a:gs>
-          </a:gsLst>
-          <a:lin ang="16200000" scaled="1"/>
-        </a:gradFill>
-        <a:gradFill rotWithShape="1">
-          <a:gsLst>
-            <a:gs pos="0">
-              <a:schemeClr val="phClr">
-                <a:tint val="100000"/>
-                <a:shade val="100000"/>
-                <a:satMod val="130000"/>
-              </a:schemeClr>
-            </a:gs>
-            <a:gs pos="100000">
-              <a:schemeClr val="phClr">
-                <a:tint val="50000"/>
-                <a:shade val="100000"/>
-                <a:satMod val="350000"/>
-              </a:schemeClr>
-            </a:gs>
-          </a:gsLst>
-          <a:lin ang="16200000" scaled="0"/>
-        </a:gradFill>
-      </a:fillStyleLst>
-      <a:lnStyleLst>
-        <a:ln w="9525" cap="flat" cmpd="sng" algn="ctr">
-          <a:solidFill>
-            <a:schemeClr val="phClr">
-              <a:shade val="95000"/>
-              <a:satMod val="105000"/>
-            </a:schemeClr>
-          </a:solidFill>
-          <a:prstDash val="solid"/>
-        </a:ln>
-        <a:ln w="25400" cap="flat" cmpd="sng" algn="ctr">
-          <a:solidFill>
-            <a:schemeClr val="phClr"/>
-          </a:solidFill>
-          <a:prstDash val="solid"/>
-        </a:ln>
-        <a:ln w="38100" cap="flat" cmpd="sng" algn="ctr">
-          <a:solidFill>
-            <a:schemeClr val="phClr"/>
-          </a:solidFill>
-          <a:prstDash val="solid"/>
-        </a:ln>
-      </a:lnStyleLst>
-      <a:effectStyleLst>
-        <a:effectStyle>
-          <a:effectLst>
-            <a:outerShdw blurRad="40000" dist="20000" dir="5400000" rotWithShape="0">
-              <a:srgbClr val="000000">
-                <a:alpha val="38000"/>
-              </a:srgbClr>
-            </a:outerShdw>
-          </a:effectLst>
-        </a:effectStyle>
-        <a:effectStyle>
-          <a:effectLst>
-            <a:outerShdw blurRad="40000" dist="23000" dir="5400000" rotWithShape="0">
-              <a:srgbClr val="000000">
-                <a:alpha val="35000"/>
-              </a:srgbClr>
-            </a:outerShdw>
-          </a:effectLst>
-        </a:effectStyle>
-        <a:effectStyle>
-          <a:effectLst>
-            <a:outerShdw blurRad="40000" dist="23000" dir="5400000" rotWithShape="0">
-              <a:srgbClr val="000000">
-                <a:alpha val="35000"/>
-              </a:srgbClr>
-            </a:outerShdw>
-          </a:effectLst>
-          <a:scene3d>
-            <a:camera prst="orthographicFront">
-              <a:rot lat="0" lon="0" rev="0"/>
-            </a:camera>
-            <a:lightRig rig="threePt" dir="t">
-              <a:rot lat="0" lon="0" rev="1200000"/>
-            </a:lightRig>
-          </a:scene3d>
-          <a:sp3d>
-            <a:bevelT w="63500" h="25400"/>
-          </a:sp3d>
-        </a:effectStyle>
-      </a:effectStyleLst>
-      <a:bgFillStyleLst>
-        <a:solidFill>
-          <a:schemeClr val="phClr"/>
-        </a:solidFill>
-        <a:gradFill rotWithShape="1">
-          <a:gsLst>
-            <a:gs pos="0">
-              <a:schemeClr val="phClr">
-                <a:tint val="40000"/>
-                <a:satMod val="350000"/>
-              </a:schemeClr>
-            </a:gs>
-            <a:gs pos="40000">
-              <a:schemeClr val="phClr">
-                <a:tint val="45000"/>
-                <a:shade val="99000"/>
-                <a:satMod val="350000"/>
-              </a:schemeClr>
-            </a:gs>
-            <a:gs pos="100000">
-              <a:schemeClr val="phClr">
-                <a:shade val="20000"/>
-                <a:satMod val="255000"/>
-              </a:schemeClr>
-            </a:gs>
-          </a:gsLst>
-          <a:path path="circle">
-            <a:fillToRect l="50000" t="-80000" r="50000" b="180000"/>
-          </a:path>
-        </a:gradFill>
-        <a:gradFill rotWithShape="1">
-          <a:gsLst>
-            <a:gs pos="0">
-              <a:schemeClr val="phClr">
-                <a:tint val="80000"/>
-                <a:satMod val="300000"/>
-              </a:schemeClr>
-            </a:gs>
-            <a:gs pos="100000">
-              <a:schemeClr val="phClr">
-                <a:shade val="30000"/>
-                <a:satMod val="200000"/>
-              </a:schemeClr>
-            </a:gs>
-          </a:gsLst>
-          <a:path path="circle">
-            <a:fillToRect l="50000" t="50000" r="50000" b="50000"/>
-          </a:path>
-        </a:gradFill>
-      </a:bgFillStyleLst>
-    </a:fmtScheme>
-  </a:themeElements>
-</a:theme>
 </file>
--- a/presentation/slides_main.pptx
+++ b/presentation/slides_main.pptx
@@ -21,50 +21,49 @@
     <p:sldId id="266" r:id="rId16"/>
     <p:sldId id="267" r:id="rId17"/>
     <p:sldId id="268" r:id="rId18"/>
-    <p:sldId id="269" r:id="rId19"/>
   </p:sldIdLst>
   <p:sldSz cy="10287000" cx="18288000"/>
   <p:notesSz cx="10287000" cy="18288000"/>
   <p:embeddedFontLst>
     <p:embeddedFont>
       <p:font typeface="IBM Plex Sans"/>
-      <p:regular r:id="rId20"/>
-      <p:bold r:id="rId21"/>
-      <p:italic r:id="rId22"/>
-      <p:boldItalic r:id="rId23"/>
+      <p:regular r:id="rId19"/>
+      <p:bold r:id="rId20"/>
+      <p:italic r:id="rId21"/>
+      <p:boldItalic r:id="rId22"/>
     </p:embeddedFont>
     <p:embeddedFont>
       <p:font typeface="Montserrat SemiBold"/>
-      <p:regular r:id="rId24"/>
-      <p:bold r:id="rId25"/>
-      <p:italic r:id="rId26"/>
-      <p:boldItalic r:id="rId27"/>
+      <p:regular r:id="rId23"/>
+      <p:bold r:id="rId24"/>
+      <p:italic r:id="rId25"/>
+      <p:boldItalic r:id="rId26"/>
     </p:embeddedFont>
     <p:embeddedFont>
       <p:font typeface="Montserrat"/>
-      <p:bold r:id="rId28"/>
-      <p:boldItalic r:id="rId29"/>
+      <p:bold r:id="rId27"/>
+      <p:boldItalic r:id="rId28"/>
     </p:embeddedFont>
     <p:embeddedFont>
       <p:font typeface="Montserrat Medium"/>
-      <p:regular r:id="rId30"/>
-      <p:bold r:id="rId31"/>
-      <p:italic r:id="rId32"/>
-      <p:boldItalic r:id="rId33"/>
+      <p:regular r:id="rId29"/>
+      <p:bold r:id="rId30"/>
+      <p:italic r:id="rId31"/>
+      <p:boldItalic r:id="rId32"/>
     </p:embeddedFont>
     <p:embeddedFont>
       <p:font typeface="IBM Plex Sans Medium"/>
-      <p:regular r:id="rId34"/>
-      <p:bold r:id="rId35"/>
-      <p:italic r:id="rId36"/>
-      <p:boldItalic r:id="rId37"/>
+      <p:regular r:id="rId33"/>
+      <p:bold r:id="rId34"/>
+      <p:italic r:id="rId35"/>
+      <p:boldItalic r:id="rId36"/>
     </p:embeddedFont>
     <p:embeddedFont>
       <p:font typeface="IBM Plex Mono"/>
-      <p:regular r:id="rId38"/>
-      <p:bold r:id="rId39"/>
-      <p:italic r:id="rId40"/>
-      <p:boldItalic r:id="rId41"/>
+      <p:regular r:id="rId37"/>
+      <p:bold r:id="rId38"/>
+      <p:italic r:id="rId39"/>
+      <p:boldItalic r:id="rId40"/>
     </p:embeddedFont>
   </p:embeddedFontLst>
   <p:defaultTextStyle>
@@ -836,7 +835,7 @@
   <p:cSld>
     <p:spTree>
       <p:nvGrpSpPr>
-        <p:cNvPr id="102" name="Shape 102"/>
+        <p:cNvPr id="112" name="Shape 112"/>
         <p:cNvGrpSpPr/>
         <p:nvPr/>
       </p:nvGrpSpPr>
@@ -850,7 +849,7 @@
       </p:grpSpPr>
       <p:sp>
         <p:nvSpPr>
-          <p:cNvPr id="103" name="Google Shape;103;p13:notes"/>
+          <p:cNvPr id="113" name="Google Shape;113;p15:notes"/>
           <p:cNvSpPr txBox="1"/>
           <p:nvPr>
             <p:ph idx="1" type="body"/>
@@ -889,7 +888,7 @@
       </p:sp>
       <p:sp>
         <p:nvSpPr>
-          <p:cNvPr id="104" name="Google Shape;104;p13:notes"/>
+          <p:cNvPr id="114" name="Google Shape;114;p15:notes"/>
           <p:cNvSpPr/>
           <p:nvPr>
             <p:ph idx="2" type="sldImg"/>
@@ -935,7 +934,7 @@
   <p:cSld>
     <p:spTree>
       <p:nvGrpSpPr>
-        <p:cNvPr id="114" name="Shape 114"/>
+        <p:cNvPr id="120" name="Shape 120"/>
         <p:cNvGrpSpPr/>
         <p:nvPr/>
       </p:nvGrpSpPr>
@@ -949,7 +948,7 @@
       </p:grpSpPr>
       <p:sp>
         <p:nvSpPr>
-          <p:cNvPr id="115" name="Google Shape;115;p15:notes"/>
+          <p:cNvPr id="121" name="Google Shape;121;p16:notes"/>
           <p:cNvSpPr txBox="1"/>
           <p:nvPr>
             <p:ph idx="1" type="body"/>
@@ -988,7 +987,7 @@
       </p:sp>
       <p:sp>
         <p:nvSpPr>
-          <p:cNvPr id="116" name="Google Shape;116;p15:notes"/>
+          <p:cNvPr id="122" name="Google Shape;122;p16:notes"/>
           <p:cNvSpPr/>
           <p:nvPr>
             <p:ph idx="2" type="sldImg"/>
@@ -1034,7 +1033,7 @@
   <p:cSld>
     <p:spTree>
       <p:nvGrpSpPr>
-        <p:cNvPr id="122" name="Shape 122"/>
+        <p:cNvPr id="132" name="Shape 132"/>
         <p:cNvGrpSpPr/>
         <p:nvPr/>
       </p:nvGrpSpPr>
@@ -1048,7 +1047,7 @@
       </p:grpSpPr>
       <p:sp>
         <p:nvSpPr>
-          <p:cNvPr id="123" name="Google Shape;123;p16:notes"/>
+          <p:cNvPr id="133" name="Google Shape;133;p20:notes"/>
           <p:cNvSpPr txBox="1"/>
           <p:nvPr>
             <p:ph idx="1" type="body"/>
@@ -1070,8 +1069,11 @@
           <a:lstStyle/>
           <a:p>
             <a:pPr indent="0" lvl="0" marL="0" rtl="0" algn="l">
-              <a:spcBef>
-                <a:spcPts val="0"/>
+              <a:lnSpc>
+                <a:spcPct val="130000"/>
+              </a:lnSpc>
+              <a:spcBef>
+                <a:spcPts val="500"/>
               </a:spcBef>
               <a:spcAft>
                 <a:spcPts val="0"/>
@@ -1081,13 +1083,21 @@
             <a:r>
               <a:t/>
             </a:r>
-            <a:endParaRPr/>
+            <a:endParaRPr sz="1200">
+              <a:solidFill>
+                <a:srgbClr val="1A1A1A"/>
+              </a:solidFill>
+              <a:latin typeface="IBM Plex Sans"/>
+              <a:ea typeface="IBM Plex Sans"/>
+              <a:cs typeface="IBM Plex Sans"/>
+              <a:sym typeface="IBM Plex Sans"/>
+            </a:endParaRPr>
           </a:p>
         </p:txBody>
       </p:sp>
       <p:sp>
         <p:nvSpPr>
-          <p:cNvPr id="124" name="Google Shape;124;p16:notes"/>
+          <p:cNvPr id="134" name="Google Shape;134;p20:notes"/>
           <p:cNvSpPr/>
           <p:nvPr>
             <p:ph idx="2" type="sldImg"/>
@@ -1133,7 +1143,7 @@
   <p:cSld>
     <p:spTree>
       <p:nvGrpSpPr>
-        <p:cNvPr id="134" name="Shape 134"/>
+        <p:cNvPr id="144" name="Shape 144"/>
         <p:cNvGrpSpPr/>
         <p:nvPr/>
       </p:nvGrpSpPr>
@@ -1147,7 +1157,7 @@
       </p:grpSpPr>
       <p:sp>
         <p:nvSpPr>
-          <p:cNvPr id="135" name="Google Shape;135;p20:notes"/>
+          <p:cNvPr id="145" name="Google Shape;145;p21:notes"/>
           <p:cNvSpPr txBox="1"/>
           <p:nvPr>
             <p:ph idx="1" type="body"/>
@@ -1186,106 +1196,7 @@
       </p:sp>
       <p:sp>
         <p:nvSpPr>
-          <p:cNvPr id="136" name="Google Shape;136;p20:notes"/>
-          <p:cNvSpPr/>
-          <p:nvPr>
-            <p:ph idx="2" type="sldImg"/>
-          </p:nvPr>
-        </p:nvSpPr>
-        <p:spPr>
-          <a:xfrm>
-            <a:off x="1714825" y="1371600"/>
-            <a:ext cx="6858325" cy="6858000"/>
-          </a:xfrm>
-          <a:custGeom>
-            <a:rect b="b" l="l" r="r" t="t"/>
-            <a:pathLst>
-              <a:path extrusionOk="0" h="120000" w="120000">
-                <a:moveTo>
-                  <a:pt x="0" y="0"/>
-                </a:moveTo>
-                <a:lnTo>
-                  <a:pt x="120000" y="0"/>
-                </a:lnTo>
-                <a:lnTo>
-                  <a:pt x="120000" y="120000"/>
-                </a:lnTo>
-                <a:lnTo>
-                  <a:pt x="0" y="120000"/>
-                </a:lnTo>
-                <a:close/>
-              </a:path>
-            </a:pathLst>
-          </a:custGeom>
-        </p:spPr>
-      </p:sp>
-    </p:spTree>
-  </p:cSld>
-  <p:clrMapOvr>
-    <a:masterClrMapping/>
-  </p:clrMapOvr>
-</p:notes>
-</file>
-
-<file path=ppt/notesSlides/notesSlide14.xml><?xml version="1.0" encoding="utf-8"?>
-<p:notes xmlns:a="http://schemas.openxmlformats.org/drawingml/2006/main" xmlns:r="http://schemas.openxmlformats.org/officeDocument/2006/relationships" xmlns:mc="http://schemas.openxmlformats.org/markup-compatibility/2006" xmlns:mv="urn:schemas-microsoft-com:mac:vml" xmlns:p="http://schemas.openxmlformats.org/presentationml/2006/main" xmlns:c="http://schemas.openxmlformats.org/drawingml/2006/chart" xmlns:dgm="http://schemas.openxmlformats.org/drawingml/2006/diagram" xmlns:o="urn:schemas-microsoft-com:office:office" xmlns:v="urn:schemas-microsoft-com:vml" xmlns:pvml="urn:schemas-microsoft-com:office:powerpoint" xmlns:com="http://schemas.openxmlformats.org/drawingml/2006/compatibility" xmlns:p14="http://schemas.microsoft.com/office/powerpoint/2010/main" xmlns:p15="http://schemas.microsoft.com/office/powerpoint/2012/main" xmlns:ahyp="http://schemas.microsoft.com/office/drawing/2018/hyperlinkcolor" showMasterPhAnim="0" showMasterSp="0">
-  <p:cSld>
-    <p:spTree>
-      <p:nvGrpSpPr>
-        <p:cNvPr id="146" name="Shape 146"/>
-        <p:cNvGrpSpPr/>
-        <p:nvPr/>
-      </p:nvGrpSpPr>
-      <p:grpSpPr>
-        <a:xfrm>
-          <a:off x="0" y="0"/>
-          <a:ext cx="0" cy="0"/>
-          <a:chOff x="0" y="0"/>
-          <a:chExt cx="0" cy="0"/>
-        </a:xfrm>
-      </p:grpSpPr>
-      <p:sp>
-        <p:nvSpPr>
-          <p:cNvPr id="147" name="Google Shape;147;p21:notes"/>
-          <p:cNvSpPr txBox="1"/>
-          <p:nvPr>
-            <p:ph idx="1" type="body"/>
-          </p:nvPr>
-        </p:nvSpPr>
-        <p:spPr>
-          <a:xfrm>
-            <a:off x="1028700" y="8686800"/>
-            <a:ext cx="8229600" cy="8229600"/>
-          </a:xfrm>
-          <a:prstGeom prst="rect">
-            <a:avLst/>
-          </a:prstGeom>
-        </p:spPr>
-        <p:txBody>
-          <a:bodyPr anchorCtr="0" anchor="t" bIns="91425" lIns="91425" spcFirstLastPara="1" rIns="91425" wrap="square" tIns="91425">
-            <a:noAutofit/>
-          </a:bodyPr>
-          <a:lstStyle/>
-          <a:p>
-            <a:pPr indent="0" lvl="0" marL="0" rtl="0" algn="l">
-              <a:spcBef>
-                <a:spcPts val="0"/>
-              </a:spcBef>
-              <a:spcAft>
-                <a:spcPts val="0"/>
-              </a:spcAft>
-              <a:buNone/>
-            </a:pPr>
-            <a:r>
-              <a:t/>
-            </a:r>
-            <a:endParaRPr/>
-          </a:p>
-        </p:txBody>
-      </p:sp>
-      <p:sp>
-        <p:nvSpPr>
-          <p:cNvPr id="148" name="Google Shape;148;p21:notes"/>
+          <p:cNvPr id="146" name="Google Shape;146;p21:notes"/>
           <p:cNvSpPr/>
           <p:nvPr>
             <p:ph idx="2" type="sldImg"/>
@@ -1826,7 +1737,7 @@
   <p:cSld>
     <p:spTree>
       <p:nvGrpSpPr>
-        <p:cNvPr id="76" name="Shape 76"/>
+        <p:cNvPr id="79" name="Shape 79"/>
         <p:cNvGrpSpPr/>
         <p:nvPr/>
       </p:nvGrpSpPr>
@@ -1840,7 +1751,7 @@
       </p:grpSpPr>
       <p:sp>
         <p:nvSpPr>
-          <p:cNvPr id="77" name="Google Shape;77;p12:notes"/>
+          <p:cNvPr id="80" name="Google Shape;80;p12:notes"/>
           <p:cNvSpPr txBox="1"/>
           <p:nvPr>
             <p:ph idx="1" type="body"/>
@@ -1879,7 +1790,7 @@
       </p:sp>
       <p:sp>
         <p:nvSpPr>
-          <p:cNvPr id="78" name="Google Shape;78;p12:notes"/>
+          <p:cNvPr id="81" name="Google Shape;81;p12:notes"/>
           <p:cNvSpPr/>
           <p:nvPr>
             <p:ph idx="2" type="sldImg"/>
@@ -1925,7 +1836,7 @@
   <p:cSld>
     <p:spTree>
       <p:nvGrpSpPr>
-        <p:cNvPr id="84" name="Shape 84"/>
+        <p:cNvPr id="90" name="Shape 90"/>
         <p:cNvGrpSpPr/>
         <p:nvPr/>
       </p:nvGrpSpPr>
@@ -1939,7 +1850,7 @@
       </p:grpSpPr>
       <p:sp>
         <p:nvSpPr>
-          <p:cNvPr id="85" name="Google Shape;85;g3ec59441aad_1_25:notes"/>
+          <p:cNvPr id="91" name="Google Shape;91;p10:notes"/>
           <p:cNvSpPr txBox="1"/>
           <p:nvPr>
             <p:ph idx="1" type="body"/>
@@ -1978,7 +1889,7 @@
       </p:sp>
       <p:sp>
         <p:nvSpPr>
-          <p:cNvPr id="86" name="Google Shape;86;g3ec59441aad_1_25:notes"/>
+          <p:cNvPr id="92" name="Google Shape;92;p10:notes"/>
           <p:cNvSpPr/>
           <p:nvPr>
             <p:ph idx="2" type="sldImg"/>
@@ -1987,7 +1898,7 @@
         <p:spPr>
           <a:xfrm>
             <a:off x="1714825" y="1371600"/>
-            <a:ext cx="6858300" cy="6858000"/>
+            <a:ext cx="6858325" cy="6858000"/>
           </a:xfrm>
           <a:custGeom>
             <a:rect b="b" l="l" r="r" t="t"/>
@@ -2024,7 +1935,7 @@
   <p:cSld>
     <p:spTree>
       <p:nvGrpSpPr>
-        <p:cNvPr id="92" name="Shape 92"/>
+        <p:cNvPr id="100" name="Shape 100"/>
         <p:cNvGrpSpPr/>
         <p:nvPr/>
       </p:nvGrpSpPr>
@@ -2038,7 +1949,7 @@
       </p:grpSpPr>
       <p:sp>
         <p:nvSpPr>
-          <p:cNvPr id="93" name="Google Shape;93;p10:notes"/>
+          <p:cNvPr id="101" name="Google Shape;101;p13:notes"/>
           <p:cNvSpPr txBox="1"/>
           <p:nvPr>
             <p:ph idx="1" type="body"/>
@@ -2077,7 +1988,7 @@
       </p:sp>
       <p:sp>
         <p:nvSpPr>
-          <p:cNvPr id="94" name="Google Shape;94;p10:notes"/>
+          <p:cNvPr id="102" name="Google Shape;102;p13:notes"/>
           <p:cNvSpPr/>
           <p:nvPr>
             <p:ph idx="2" type="sldImg"/>
@@ -3326,7 +3237,7 @@
     </p:bg>
     <p:spTree>
       <p:nvGrpSpPr>
-        <p:cNvPr id="105" name="Shape 105"/>
+        <p:cNvPr id="115" name="Shape 115"/>
         <p:cNvGrpSpPr/>
         <p:nvPr/>
       </p:nvGrpSpPr>
@@ -3340,7 +3251,7 @@
       </p:grpSpPr>
       <p:sp>
         <p:nvSpPr>
-          <p:cNvPr id="106" name="Google Shape;106;p12"/>
+          <p:cNvPr id="116" name="Google Shape;116;p12"/>
           <p:cNvSpPr/>
           <p:nvPr/>
         </p:nvSpPr>
@@ -3390,22 +3301,326 @@
                 <a:cs typeface="Montserrat"/>
                 <a:sym typeface="Montserrat"/>
               </a:rPr>
-              <a:t>Implementation</a:t>
+              <a:t>System Architecture</a:t>
             </a:r>
             <a:endParaRPr/>
           </a:p>
         </p:txBody>
       </p:sp>
+      <p:pic>
+        <p:nvPicPr>
+          <p:cNvPr id="117" name="Google Shape;117;p12"/>
+          <p:cNvPicPr preferRelativeResize="0"/>
+          <p:nvPr/>
+        </p:nvPicPr>
+        <p:blipFill rotWithShape="1">
+          <a:blip r:embed="rId3">
+            <a:alphaModFix/>
+          </a:blip>
+          <a:srcRect b="0" l="0" r="0" t="0"/>
+          <a:stretch/>
+        </p:blipFill>
+        <p:spPr>
+          <a:xfrm>
+            <a:off x="4343897" y="1600000"/>
+            <a:ext cx="9751478" cy="8295300"/>
+          </a:xfrm>
+          <a:prstGeom prst="rect">
+            <a:avLst/>
+          </a:prstGeom>
+          <a:noFill/>
+          <a:ln>
+            <a:noFill/>
+          </a:ln>
+        </p:spPr>
+      </p:pic>
+      <p:pic>
+        <p:nvPicPr>
+          <p:cNvPr id="118" name="Google Shape;118;p12"/>
+          <p:cNvPicPr preferRelativeResize="0"/>
+          <p:nvPr/>
+        </p:nvPicPr>
+        <p:blipFill rotWithShape="1">
+          <a:blip r:embed="rId4">
+            <a:alphaModFix/>
+          </a:blip>
+          <a:srcRect b="0" l="0" r="0" t="0"/>
+          <a:stretch/>
+        </p:blipFill>
+        <p:spPr>
+          <a:xfrm>
+            <a:off x="14900000" y="780000"/>
+            <a:ext cx="2480000" cy="720500"/>
+          </a:xfrm>
+          <a:prstGeom prst="rect">
+            <a:avLst/>
+          </a:prstGeom>
+          <a:noFill/>
+          <a:ln>
+            <a:noFill/>
+          </a:ln>
+        </p:spPr>
+      </p:pic>
       <p:sp>
         <p:nvSpPr>
-          <p:cNvPr id="107" name="Google Shape;107;p12"/>
+          <p:cNvPr id="119" name="Google Shape;119;p12"/>
           <p:cNvSpPr/>
           <p:nvPr/>
         </p:nvSpPr>
         <p:spPr>
           <a:xfrm>
-            <a:off x="1095375" y="1900000"/>
-            <a:ext cx="7700100" cy="3725700"/>
+            <a:off x="16400000" y="9550000"/>
+            <a:ext cx="1500000" cy="450000"/>
+          </a:xfrm>
+          <a:prstGeom prst="rect">
+            <a:avLst/>
+          </a:prstGeom>
+          <a:noFill/>
+          <a:ln>
+            <a:noFill/>
+          </a:ln>
+        </p:spPr>
+        <p:txBody>
+          <a:bodyPr anchorCtr="0" anchor="b" bIns="0" lIns="0" spcFirstLastPara="1" rIns="0" wrap="square" tIns="0">
+            <a:noAutofit/>
+          </a:bodyPr>
+          <a:lstStyle/>
+          <a:p>
+            <a:pPr indent="0" lvl="0" marL="0" marR="0" rtl="0" algn="r">
+              <a:spcBef>
+                <a:spcPts val="0"/>
+              </a:spcBef>
+              <a:spcAft>
+                <a:spcPts val="0"/>
+              </a:spcAft>
+              <a:buClr>
+                <a:srgbClr val="9AA3AB"/>
+              </a:buClr>
+              <a:buSzPts val="1300"/>
+              <a:buFont typeface="IBM Plex Mono"/>
+              <a:buNone/>
+            </a:pPr>
+            <a:r>
+              <a:rPr b="0" i="0" lang="en-US" sz="1300" u="none" cap="none" strike="noStrike">
+                <a:solidFill>
+                  <a:srgbClr val="9AA3AB"/>
+                </a:solidFill>
+                <a:latin typeface="IBM Plex Mono"/>
+                <a:ea typeface="IBM Plex Mono"/>
+                <a:cs typeface="IBM Plex Mono"/>
+                <a:sym typeface="IBM Plex Mono"/>
+              </a:rPr>
+              <a:t>1</a:t>
+            </a:r>
+            <a:r>
+              <a:rPr lang="en-US" sz="1300">
+                <a:solidFill>
+                  <a:srgbClr val="9AA3AB"/>
+                </a:solidFill>
+                <a:latin typeface="IBM Plex Mono"/>
+                <a:ea typeface="IBM Plex Mono"/>
+                <a:cs typeface="IBM Plex Mono"/>
+                <a:sym typeface="IBM Plex Mono"/>
+              </a:rPr>
+              <a:t>0</a:t>
+            </a:r>
+            <a:r>
+              <a:rPr b="0" i="0" lang="en-US" sz="1300" u="none" cap="none" strike="noStrike">
+                <a:solidFill>
+                  <a:srgbClr val="9AA3AB"/>
+                </a:solidFill>
+                <a:latin typeface="IBM Plex Mono"/>
+                <a:ea typeface="IBM Plex Mono"/>
+                <a:cs typeface="IBM Plex Mono"/>
+                <a:sym typeface="IBM Plex Mono"/>
+              </a:rPr>
+              <a:t>/</a:t>
+            </a:r>
+            <a:r>
+              <a:rPr lang="en-US" sz="1300">
+                <a:solidFill>
+                  <a:srgbClr val="9AA3AB"/>
+                </a:solidFill>
+                <a:latin typeface="IBM Plex Mono"/>
+                <a:ea typeface="IBM Plex Mono"/>
+                <a:cs typeface="IBM Plex Mono"/>
+                <a:sym typeface="IBM Plex Mono"/>
+              </a:rPr>
+              <a:t>13</a:t>
+            </a:r>
+            <a:endParaRPr/>
+          </a:p>
+        </p:txBody>
+      </p:sp>
+    </p:spTree>
+  </p:cSld>
+  <p:clrMapOvr>
+    <a:masterClrMapping/>
+  </p:clrMapOvr>
+</p:sld>
+</file>
+
+<file path=ppt/slides/slide11.xml><?xml version="1.0" encoding="utf-8"?>
+<p:sld xmlns:a="http://schemas.openxmlformats.org/drawingml/2006/main" xmlns:r="http://schemas.openxmlformats.org/officeDocument/2006/relationships" xmlns:mc="http://schemas.openxmlformats.org/markup-compatibility/2006" xmlns:mv="urn:schemas-microsoft-com:mac:vml" xmlns:p="http://schemas.openxmlformats.org/presentationml/2006/main" xmlns:c="http://schemas.openxmlformats.org/drawingml/2006/chart" xmlns:dgm="http://schemas.openxmlformats.org/drawingml/2006/diagram" xmlns:o="urn:schemas-microsoft-com:office:office" xmlns:v="urn:schemas-microsoft-com:vml" xmlns:pvml="urn:schemas-microsoft-com:office:powerpoint" xmlns:com="http://schemas.openxmlformats.org/drawingml/2006/compatibility" xmlns:p14="http://schemas.microsoft.com/office/powerpoint/2010/main" xmlns:p15="http://schemas.microsoft.com/office/powerpoint/2012/main" xmlns:ahyp="http://schemas.microsoft.com/office/drawing/2018/hyperlinkcolor">
+  <p:cSld>
+    <p:bg>
+      <p:bgPr>
+        <a:solidFill>
+          <a:srgbClr val="FFFFFF"/>
+        </a:solidFill>
+      </p:bgPr>
+    </p:bg>
+    <p:spTree>
+      <p:nvGrpSpPr>
+        <p:cNvPr id="123" name="Shape 123"/>
+        <p:cNvGrpSpPr/>
+        <p:nvPr/>
+      </p:nvGrpSpPr>
+      <p:grpSpPr>
+        <a:xfrm>
+          <a:off x="0" y="0"/>
+          <a:ext cx="0" cy="0"/>
+          <a:chOff x="0" y="0"/>
+          <a:chExt cx="0" cy="0"/>
+        </a:xfrm>
+      </p:grpSpPr>
+      <p:sp>
+        <p:nvSpPr>
+          <p:cNvPr id="124" name="Google Shape;124;p13"/>
+          <p:cNvSpPr/>
+          <p:nvPr/>
+        </p:nvSpPr>
+        <p:spPr>
+          <a:xfrm>
+            <a:off x="1095375" y="900000"/>
+            <a:ext cx="13000000" cy="700000"/>
+          </a:xfrm>
+          <a:prstGeom prst="rect">
+            <a:avLst/>
+          </a:prstGeom>
+          <a:noFill/>
+          <a:ln>
+            <a:noFill/>
+          </a:ln>
+        </p:spPr>
+        <p:txBody>
+          <a:bodyPr anchorCtr="0" anchor="t" bIns="0" lIns="0" spcFirstLastPara="1" rIns="0" wrap="square" tIns="0">
+            <a:noAutofit/>
+          </a:bodyPr>
+          <a:lstStyle/>
+          <a:p>
+            <a:pPr indent="0" lvl="0" marL="0" rtl="0" algn="l">
+              <a:lnSpc>
+                <a:spcPct val="114285"/>
+              </a:lnSpc>
+              <a:spcBef>
+                <a:spcPts val="0"/>
+              </a:spcBef>
+              <a:spcAft>
+                <a:spcPts val="0"/>
+              </a:spcAft>
+              <a:buClr>
+                <a:srgbClr val="1A1A1A"/>
+              </a:buClr>
+              <a:buSzPts val="2800"/>
+              <a:buFont typeface="Montserrat"/>
+              <a:buNone/>
+            </a:pPr>
+            <a:r>
+              <a:rPr b="1" lang="en-US" sz="2800">
+                <a:solidFill>
+                  <a:srgbClr val="1A1A1A"/>
+                </a:solidFill>
+                <a:latin typeface="Montserrat"/>
+                <a:ea typeface="Montserrat"/>
+                <a:cs typeface="Montserrat"/>
+                <a:sym typeface="Montserrat"/>
+              </a:rPr>
+              <a:t>Implementation results</a:t>
+            </a:r>
+            <a:endParaRPr/>
+          </a:p>
+        </p:txBody>
+      </p:sp>
+      <p:sp>
+        <p:nvSpPr>
+          <p:cNvPr id="125" name="Google Shape;125;p13"/>
+          <p:cNvSpPr/>
+          <p:nvPr/>
+        </p:nvSpPr>
+        <p:spPr>
+          <a:xfrm>
+            <a:off x="1095375" y="2167875"/>
+            <a:ext cx="16043700" cy="1002300"/>
+          </a:xfrm>
+          <a:prstGeom prst="roundRect">
+            <a:avLst>
+              <a:gd fmla="val 6000" name="adj"/>
+            </a:avLst>
+          </a:prstGeom>
+          <a:solidFill>
+            <a:srgbClr val="40BA21"/>
+          </a:solidFill>
+          <a:ln>
+            <a:noFill/>
+          </a:ln>
+        </p:spPr>
+        <p:txBody>
+          <a:bodyPr anchorCtr="0" anchor="ctr" bIns="434000" lIns="620000" spcFirstLastPara="1" rIns="620000" wrap="square" tIns="434000">
+            <a:noAutofit/>
+          </a:bodyPr>
+          <a:lstStyle/>
+          <a:p>
+            <a:pPr indent="0" lvl="0" marL="0" marR="0" rtl="0" algn="l">
+              <a:lnSpc>
+                <a:spcPct val="131578"/>
+              </a:lnSpc>
+              <a:spcBef>
+                <a:spcPts val="0"/>
+              </a:spcBef>
+              <a:spcAft>
+                <a:spcPts val="0"/>
+              </a:spcAft>
+              <a:buNone/>
+            </a:pPr>
+            <a:r>
+              <a:rPr b="0" i="0" lang="en-US" sz="1900" u="none" cap="none" strike="noStrike">
+                <a:solidFill>
+                  <a:srgbClr val="FFFFFF"/>
+                </a:solidFill>
+                <a:latin typeface="IBM Plex Sans Medium"/>
+                <a:ea typeface="IBM Plex Sans Medium"/>
+                <a:cs typeface="IBM Plex Sans Medium"/>
+                <a:sym typeface="IBM Plex Sans Medium"/>
+              </a:rPr>
+              <a:t>The system was running on a Linux host inside a Podman container. Virtualized using QEMU</a:t>
+            </a:r>
+            <a:r>
+              <a:rPr lang="en-US" sz="1900">
+                <a:solidFill>
+                  <a:srgbClr val="FFFFFF"/>
+                </a:solidFill>
+                <a:latin typeface="IBM Plex Sans Medium"/>
+                <a:ea typeface="IBM Plex Sans Medium"/>
+                <a:cs typeface="IBM Plex Sans Medium"/>
+                <a:sym typeface="IBM Plex Sans Medium"/>
+              </a:rPr>
+              <a:t> with options for AES/SHA hardware acceleration and virtual NVMe usage </a:t>
+            </a:r>
+            <a:endParaRPr/>
+          </a:p>
+        </p:txBody>
+      </p:sp>
+      <p:sp>
+        <p:nvSpPr>
+          <p:cNvPr id="126" name="Google Shape;126;p13"/>
+          <p:cNvSpPr/>
+          <p:nvPr/>
+        </p:nvSpPr>
+        <p:spPr>
+          <a:xfrm>
+            <a:off x="1095375" y="3566900"/>
+            <a:ext cx="7119900" cy="2470500"/>
           </a:xfrm>
           <a:prstGeom prst="roundRect">
             <a:avLst>
@@ -3420,106 +3635,54 @@
           </a:ln>
         </p:spPr>
         <p:txBody>
-          <a:bodyPr anchorCtr="0" anchor="t" bIns="364000" lIns="520000" spcFirstLastPara="1" rIns="520000" wrap="square" tIns="364000">
+          <a:bodyPr anchorCtr="0" anchor="ctr" bIns="392000" lIns="560000" spcFirstLastPara="1" rIns="560000" wrap="square" tIns="392000">
             <a:noAutofit/>
           </a:bodyPr>
           <a:lstStyle/>
           <a:p>
             <a:pPr indent="0" lvl="0" marL="0" marR="0" rtl="0" algn="l">
               <a:lnSpc>
-                <a:spcPct val="126315"/>
-              </a:lnSpc>
-              <a:spcBef>
-                <a:spcPts val="0"/>
-              </a:spcBef>
-              <a:spcAft>
-                <a:spcPts val="0"/>
-              </a:spcAft>
-              <a:buClr>
-                <a:srgbClr val="1A1A1A"/>
-              </a:buClr>
-              <a:buSzPts val="1900"/>
-              <a:buFont typeface="Montserrat SemiBold"/>
+                <a:spcPct val="117499"/>
+              </a:lnSpc>
+              <a:spcBef>
+                <a:spcPts val="0"/>
+              </a:spcBef>
+              <a:spcAft>
+                <a:spcPts val="0"/>
+              </a:spcAft>
               <a:buNone/>
             </a:pPr>
             <a:r>
-              <a:rPr b="1" i="0" lang="en-US" sz="1900" u="none" cap="none" strike="noStrike">
-                <a:solidFill>
-                  <a:srgbClr val="1A1A1A"/>
+              <a:rPr b="1" lang="en-US" sz="2000">
+                <a:solidFill>
+                  <a:srgbClr val="2E8B16"/>
                 </a:solidFill>
                 <a:latin typeface="Montserrat SemiBold"/>
                 <a:ea typeface="Montserrat SemiBold"/>
                 <a:cs typeface="Montserrat SemiBold"/>
                 <a:sym typeface="Montserrat SemiBold"/>
               </a:rPr>
-              <a:t>Built on file_vault</a:t>
-            </a:r>
-            <a:r>
-              <a:rPr b="1" baseline="30000" i="0" lang="en-US" sz="1900" u="none" cap="none" strike="noStrike">
-                <a:solidFill>
-                  <a:srgbClr val="1A1A1A"/>
-                </a:solidFill>
-                <a:latin typeface="Montserrat SemiBold"/>
-                <a:ea typeface="Montserrat SemiBold"/>
-                <a:cs typeface="Montserrat SemiBold"/>
-                <a:sym typeface="Montserrat SemiBold"/>
-              </a:rPr>
-              <a:t>2</a:t>
-            </a:r>
-            <a:r>
-              <a:rPr b="1" i="0" lang="en-US" sz="1900" u="none" cap="none" strike="noStrike">
-                <a:solidFill>
-                  <a:srgbClr val="1A1A1A"/>
-                </a:solidFill>
-                <a:latin typeface="Montserrat SemiBold"/>
-                <a:ea typeface="Montserrat SemiBold"/>
-                <a:cs typeface="Montserrat SemiBold"/>
-                <a:sym typeface="Montserrat SemiBold"/>
-              </a:rPr>
-              <a:t> (based on Tresor)</a:t>
-            </a:r>
-            <a:r>
-              <a:rPr b="1" lang="en-US" sz="1900">
-                <a:solidFill>
-                  <a:srgbClr val="1A1A1A"/>
-                </a:solidFill>
-                <a:latin typeface="Montserrat SemiBold"/>
-                <a:ea typeface="Montserrat SemiBold"/>
-                <a:cs typeface="Montserrat SemiBold"/>
-                <a:sym typeface="Montserrat SemiBold"/>
-              </a:rPr>
-              <a:t>:</a:t>
-            </a:r>
-            <a:endParaRPr b="1" i="0" sz="1900" u="none" cap="none" strike="noStrike">
-              <a:solidFill>
-                <a:srgbClr val="1A1A1A"/>
-              </a:solidFill>
-              <a:latin typeface="Montserrat SemiBold"/>
-              <a:ea typeface="Montserrat SemiBold"/>
-              <a:cs typeface="Montserrat SemiBold"/>
-              <a:sym typeface="Montserrat SemiBold"/>
-            </a:endParaRPr>
-          </a:p>
-          <a:p>
-            <a:pPr indent="-380000" lvl="0" marL="380000" marR="0" rtl="0" algn="l">
-              <a:lnSpc>
-                <a:spcPct val="126470"/>
-              </a:lnSpc>
-              <a:spcBef>
-                <a:spcPts val="300"/>
-              </a:spcBef>
-              <a:spcAft>
-                <a:spcPts val="0"/>
-              </a:spcAft>
-              <a:buClr>
-                <a:srgbClr val="1A1A1A"/>
-              </a:buClr>
-              <a:buSzPts val="1700"/>
-              <a:buFont typeface="Arial"/>
-              <a:buChar char="•"/>
-            </a:pPr>
-            <a:r>
-              <a:rPr b="0" i="0" lang="en-US" sz="1700" u="none" cap="none" strike="noStrike">
+              <a:t>All functional checks were passed</a:t>
+            </a:r>
+            <a:endParaRPr/>
+          </a:p>
+          <a:p>
+            <a:pPr indent="-342900" lvl="0" marL="457200" rtl="0" algn="l">
+              <a:lnSpc>
+                <a:spcPct val="95833"/>
+              </a:lnSpc>
+              <a:spcBef>
+                <a:spcPts val="0"/>
+              </a:spcBef>
+              <a:spcAft>
+                <a:spcPts val="0"/>
+              </a:spcAft>
+              <a:buSzPts val="1800"/>
+              <a:buFont typeface="IBM Plex Sans"/>
+              <a:buChar char="●"/>
+            </a:pPr>
+            <a:r>
+              <a:rPr lang="en-US" sz="1800">
                 <a:solidFill>
                   <a:srgbClr val="1A1A1A"/>
                 </a:solidFill>
@@ -3528,558 +3691,11 @@
                 <a:cs typeface="IBM Plex Sans"/>
                 <a:sym typeface="IBM Plex Sans"/>
               </a:rPr>
-              <a:t>Tresor: AES on 4K blocks, SHA-256 integrity, CoW atomicity</a:t>
-            </a:r>
-            <a:endParaRPr/>
-          </a:p>
-          <a:p>
-            <a:pPr indent="-380000" lvl="0" marL="380000" marR="0" rtl="0" algn="l">
-              <a:lnSpc>
-                <a:spcPct val="126470"/>
-              </a:lnSpc>
-              <a:spcBef>
-                <a:spcPts val="200"/>
-              </a:spcBef>
-              <a:spcAft>
-                <a:spcPts val="0"/>
-              </a:spcAft>
-              <a:buClr>
+              <a:t>Normal boot / shutdown / restore cycle</a:t>
+            </a:r>
+            <a:endParaRPr sz="1800">
+              <a:solidFill>
                 <a:srgbClr val="1A1A1A"/>
-              </a:buClr>
-              <a:buSzPts val="1700"/>
-              <a:buFont typeface="Arial"/>
-              <a:buChar char="•"/>
-            </a:pPr>
-            <a:r>
-              <a:rPr b="0" i="0" lang="en-US" sz="1700" u="none" cap="none" strike="noStrike">
-                <a:solidFill>
-                  <a:srgbClr val="1A1A1A"/>
-                </a:solidFill>
-                <a:latin typeface="IBM Plex Sans"/>
-                <a:ea typeface="IBM Plex Sans"/>
-                <a:cs typeface="IBM Plex Sans"/>
-                <a:sym typeface="IBM Plex Sans"/>
-              </a:rPr>
-              <a:t>file_vault: state orchestrator providing a secure FS session</a:t>
-            </a:r>
-            <a:endParaRPr/>
-          </a:p>
-        </p:txBody>
-      </p:sp>
-      <p:sp>
-        <p:nvSpPr>
-          <p:cNvPr id="108" name="Google Shape;108;p12"/>
-          <p:cNvSpPr/>
-          <p:nvPr/>
-        </p:nvSpPr>
-        <p:spPr>
-          <a:xfrm>
-            <a:off x="9395375" y="1900000"/>
-            <a:ext cx="7754700" cy="3725700"/>
-          </a:xfrm>
-          <a:prstGeom prst="roundRect">
-            <a:avLst>
-              <a:gd fmla="val 6000" name="adj"/>
-            </a:avLst>
-          </a:prstGeom>
-          <a:solidFill>
-            <a:srgbClr val="40BA21"/>
-          </a:solidFill>
-          <a:ln>
-            <a:noFill/>
-          </a:ln>
-        </p:spPr>
-        <p:txBody>
-          <a:bodyPr anchorCtr="0" anchor="t" bIns="364000" lIns="520000" spcFirstLastPara="1" rIns="520000" wrap="square" tIns="364000">
-            <a:noAutofit/>
-          </a:bodyPr>
-          <a:lstStyle/>
-          <a:p>
-            <a:pPr indent="0" lvl="0" marL="0" marR="0" rtl="0" algn="l">
-              <a:lnSpc>
-                <a:spcPct val="126315"/>
-              </a:lnSpc>
-              <a:spcBef>
-                <a:spcPts val="0"/>
-              </a:spcBef>
-              <a:spcAft>
-                <a:spcPts val="0"/>
-              </a:spcAft>
-              <a:buClr>
-                <a:srgbClr val="FFFFFF"/>
-              </a:buClr>
-              <a:buSzPts val="1900"/>
-              <a:buFont typeface="Montserrat SemiBold"/>
-              <a:buNone/>
-            </a:pPr>
-            <a:r>
-              <a:rPr b="1" i="0" lang="en-US" sz="1900" u="none" cap="none" strike="noStrike">
-                <a:solidFill>
-                  <a:srgbClr val="FFFFFF"/>
-                </a:solidFill>
-                <a:latin typeface="Montserrat SemiBold"/>
-                <a:ea typeface="Montserrat SemiBold"/>
-                <a:cs typeface="Montserrat SemiBold"/>
-                <a:sym typeface="Montserrat SemiBold"/>
-              </a:rPr>
-              <a:t>Implemented se_vault</a:t>
-            </a:r>
-            <a:r>
-              <a:rPr b="1" baseline="30000" i="0" lang="en-US" sz="1900" u="none" cap="none" strike="noStrike">
-                <a:solidFill>
-                  <a:srgbClr val="FFFFFF"/>
-                </a:solidFill>
-                <a:latin typeface="Montserrat SemiBold"/>
-                <a:ea typeface="Montserrat SemiBold"/>
-                <a:cs typeface="Montserrat SemiBold"/>
-                <a:sym typeface="Montserrat SemiBold"/>
-              </a:rPr>
-              <a:t>1</a:t>
-            </a:r>
-            <a:r>
-              <a:rPr b="1" i="0" lang="en-US" sz="1900" u="none" cap="none" strike="noStrike">
-                <a:solidFill>
-                  <a:srgbClr val="FFFFFF"/>
-                </a:solidFill>
-                <a:latin typeface="Montserrat SemiBold"/>
-                <a:ea typeface="Montserrat SemiBold"/>
-                <a:cs typeface="Montserrat SemiBold"/>
-                <a:sym typeface="Montserrat SemiBold"/>
-              </a:rPr>
-              <a:t>  as modified file_vault</a:t>
-            </a:r>
-            <a:endParaRPr b="1" i="0" sz="1900" u="none" cap="none" strike="noStrike">
-              <a:solidFill>
-                <a:srgbClr val="FFFFFF"/>
-              </a:solidFill>
-              <a:latin typeface="Montserrat SemiBold"/>
-              <a:ea typeface="Montserrat SemiBold"/>
-              <a:cs typeface="Montserrat SemiBold"/>
-              <a:sym typeface="Montserrat SemiBold"/>
-            </a:endParaRPr>
-          </a:p>
-          <a:p>
-            <a:pPr indent="0" lvl="0" marL="0" marR="0" rtl="0" algn="l">
-              <a:lnSpc>
-                <a:spcPct val="126315"/>
-              </a:lnSpc>
-              <a:spcBef>
-                <a:spcPts val="300"/>
-              </a:spcBef>
-              <a:spcAft>
-                <a:spcPts val="0"/>
-              </a:spcAft>
-              <a:buClr>
-                <a:srgbClr val="FFFFFF"/>
-              </a:buClr>
-              <a:buSzPts val="1900"/>
-              <a:buFont typeface="Montserrat SemiBold"/>
-              <a:buNone/>
-            </a:pPr>
-            <a:r>
-              <a:rPr b="1" i="0" lang="en-US" sz="1900" u="none" cap="none" strike="noStrike">
-                <a:solidFill>
-                  <a:srgbClr val="FFFFFF"/>
-                </a:solidFill>
-                <a:latin typeface="Montserrat SemiBold"/>
-                <a:ea typeface="Montserrat SemiBold"/>
-                <a:cs typeface="Montserrat SemiBold"/>
-                <a:sym typeface="Montserrat SemiBold"/>
-              </a:rPr>
-              <a:t>Changes:</a:t>
-            </a:r>
-            <a:endParaRPr b="1" i="0" sz="1900" u="none" cap="none" strike="noStrike">
-              <a:solidFill>
-                <a:srgbClr val="FFFFFF"/>
-              </a:solidFill>
-              <a:latin typeface="Montserrat SemiBold"/>
-              <a:ea typeface="Montserrat SemiBold"/>
-              <a:cs typeface="Montserrat SemiBold"/>
-              <a:sym typeface="Montserrat SemiBold"/>
-            </a:endParaRPr>
-          </a:p>
-          <a:p>
-            <a:pPr indent="-366350" lvl="0" marL="360000" marR="0" rtl="0" algn="l">
-              <a:lnSpc>
-                <a:spcPct val="128125"/>
-              </a:lnSpc>
-              <a:spcBef>
-                <a:spcPts val="300"/>
-              </a:spcBef>
-              <a:spcAft>
-                <a:spcPts val="0"/>
-              </a:spcAft>
-              <a:buClr>
-                <a:srgbClr val="FFFFFF"/>
-              </a:buClr>
-              <a:buSzPts val="1700"/>
-              <a:buFont typeface="Arial"/>
-              <a:buChar char="•"/>
-            </a:pPr>
-            <a:r>
-              <a:rPr b="0" i="0" lang="en-US" sz="1700" u="none" cap="none" strike="noStrike">
-                <a:solidFill>
-                  <a:srgbClr val="FFFFFF"/>
-                </a:solidFill>
-                <a:latin typeface="IBM Plex Sans"/>
-                <a:ea typeface="IBM Plex Sans"/>
-                <a:cs typeface="IBM Plex Sans"/>
-                <a:sym typeface="IBM Plex Sans"/>
-              </a:rPr>
-              <a:t>Headless operation</a:t>
-            </a:r>
-            <a:endParaRPr sz="1700"/>
-          </a:p>
-          <a:p>
-            <a:pPr indent="-366350" lvl="0" marL="360000" marR="0" rtl="0" algn="l">
-              <a:lnSpc>
-                <a:spcPct val="128125"/>
-              </a:lnSpc>
-              <a:spcBef>
-                <a:spcPts val="150"/>
-              </a:spcBef>
-              <a:spcAft>
-                <a:spcPts val="0"/>
-              </a:spcAft>
-              <a:buClr>
-                <a:srgbClr val="FFFFFF"/>
-              </a:buClr>
-              <a:buSzPts val="1700"/>
-              <a:buFont typeface="Arial"/>
-              <a:buChar char="•"/>
-            </a:pPr>
-            <a:r>
-              <a:rPr b="0" i="0" lang="en-US" sz="1700" u="none" cap="none" strike="noStrike">
-                <a:solidFill>
-                  <a:srgbClr val="FFFFFF"/>
-                </a:solidFill>
-                <a:latin typeface="IBM Plex Sans"/>
-                <a:ea typeface="IBM Plex Sans"/>
-                <a:cs typeface="IBM Plex Sans"/>
-                <a:sym typeface="IBM Plex Sans"/>
-              </a:rPr>
-              <a:t>Passphrase replaced </a:t>
-            </a:r>
-            <a:r>
-              <a:rPr b="1" i="0" lang="en-US" sz="1700" u="none" cap="none" strike="noStrike">
-                <a:solidFill>
-                  <a:srgbClr val="FFFFFF"/>
-                </a:solidFill>
-                <a:latin typeface="IBM Plex Sans"/>
-                <a:ea typeface="IBM Plex Sans"/>
-                <a:cs typeface="IBM Plex Sans"/>
-                <a:sym typeface="IBM Plex Sans"/>
-              </a:rPr>
-              <a:t>by USB key file</a:t>
-            </a:r>
-            <a:endParaRPr sz="1700"/>
-          </a:p>
-          <a:p>
-            <a:pPr indent="-366350" lvl="0" marL="360000" marR="0" rtl="0" algn="l">
-              <a:lnSpc>
-                <a:spcPct val="128125"/>
-              </a:lnSpc>
-              <a:spcBef>
-                <a:spcPts val="150"/>
-              </a:spcBef>
-              <a:spcAft>
-                <a:spcPts val="0"/>
-              </a:spcAft>
-              <a:buClr>
-                <a:srgbClr val="FFFFFF"/>
-              </a:buClr>
-              <a:buSzPts val="1700"/>
-              <a:buFont typeface="Arial"/>
-              <a:buChar char="•"/>
-            </a:pPr>
-            <a:r>
-              <a:rPr b="0" i="0" lang="en-US" sz="1700" u="none" cap="none" strike="noStrike">
-                <a:solidFill>
-                  <a:srgbClr val="FFFFFF"/>
-                </a:solidFill>
-                <a:latin typeface="IBM Plex Sans"/>
-                <a:ea typeface="IBM Plex Sans"/>
-                <a:cs typeface="IBM Plex Sans"/>
-                <a:sym typeface="IBM Plex Sans"/>
-              </a:rPr>
-              <a:t>rump_fs/ext2 replaced by </a:t>
-            </a:r>
-            <a:r>
-              <a:rPr b="1" i="0" lang="en-US" sz="1700" u="none" cap="none" strike="noStrike">
-                <a:solidFill>
-                  <a:srgbClr val="FFFFFF"/>
-                </a:solidFill>
-                <a:latin typeface="IBM Plex Sans"/>
-                <a:ea typeface="IBM Plex Sans"/>
-                <a:cs typeface="IBM Plex Sans"/>
-                <a:sym typeface="IBM Plex Sans"/>
-              </a:rPr>
-              <a:t>lwext4/ext4</a:t>
-            </a:r>
-            <a:endParaRPr sz="1700"/>
-          </a:p>
-          <a:p>
-            <a:pPr indent="-366350" lvl="0" marL="360000" marR="0" rtl="0" algn="l">
-              <a:lnSpc>
-                <a:spcPct val="128125"/>
-              </a:lnSpc>
-              <a:spcBef>
-                <a:spcPts val="150"/>
-              </a:spcBef>
-              <a:spcAft>
-                <a:spcPts val="0"/>
-              </a:spcAft>
-              <a:buClr>
-                <a:srgbClr val="FFFFFF"/>
-              </a:buClr>
-              <a:buSzPts val="1700"/>
-              <a:buFont typeface="Arial"/>
-              <a:buChar char="•"/>
-            </a:pPr>
-            <a:r>
-              <a:rPr b="0" i="0" lang="en-US" sz="1700" u="none" cap="none" strike="noStrike">
-                <a:solidFill>
-                  <a:srgbClr val="FFFFFF"/>
-                </a:solidFill>
-                <a:latin typeface="IBM Plex Sans"/>
-                <a:ea typeface="IBM Plex Sans"/>
-                <a:cs typeface="IBM Plex Sans"/>
-                <a:sym typeface="IBM Plex Sans"/>
-              </a:rPr>
-              <a:t>Added </a:t>
-            </a:r>
-            <a:r>
-              <a:rPr b="1" i="0" lang="en-US" sz="1700" u="none" cap="none" strike="noStrike">
-                <a:solidFill>
-                  <a:srgbClr val="FFFFFF"/>
-                </a:solidFill>
-                <a:latin typeface="IBM Plex Sans"/>
-                <a:ea typeface="IBM Plex Sans"/>
-                <a:cs typeface="IBM Plex Sans"/>
-                <a:sym typeface="IBM Plex Sans"/>
-              </a:rPr>
-              <a:t>fsck</a:t>
-            </a:r>
-            <a:r>
-              <a:rPr b="0" i="0" lang="en-US" sz="1700" u="none" cap="none" strike="noStrike">
-                <a:solidFill>
-                  <a:srgbClr val="FFFFFF"/>
-                </a:solidFill>
-                <a:latin typeface="IBM Plex Sans"/>
-                <a:ea typeface="IBM Plex Sans"/>
-                <a:cs typeface="IBM Plex Sans"/>
-                <a:sym typeface="IBM Plex Sans"/>
-              </a:rPr>
-              <a:t> crash-recovery support</a:t>
-            </a:r>
-            <a:endParaRPr sz="1700"/>
-          </a:p>
-          <a:p>
-            <a:pPr indent="-366350" lvl="0" marL="360000" marR="0" rtl="0" algn="l">
-              <a:lnSpc>
-                <a:spcPct val="128125"/>
-              </a:lnSpc>
-              <a:spcBef>
-                <a:spcPts val="150"/>
-              </a:spcBef>
-              <a:spcAft>
-                <a:spcPts val="0"/>
-              </a:spcAft>
-              <a:buClr>
-                <a:srgbClr val="FFFFFF"/>
-              </a:buClr>
-              <a:buSzPts val="1700"/>
-              <a:buFont typeface="Arial"/>
-              <a:buChar char="•"/>
-            </a:pPr>
-            <a:r>
-              <a:rPr b="0" i="0" lang="en-US" sz="1700" u="none" cap="none" strike="noStrike">
-                <a:solidFill>
-                  <a:srgbClr val="FFFFFF"/>
-                </a:solidFill>
-                <a:latin typeface="IBM Plex Sans"/>
-                <a:ea typeface="IBM Plex Sans"/>
-                <a:cs typeface="IBM Plex Sans"/>
-                <a:sym typeface="IBM Plex Sans"/>
-              </a:rPr>
-              <a:t>Direct block session (skip image file)</a:t>
-            </a:r>
-            <a:endParaRPr sz="1700"/>
-          </a:p>
-          <a:p>
-            <a:pPr indent="-366350" lvl="0" marL="360000" marR="0" rtl="0" algn="l">
-              <a:lnSpc>
-                <a:spcPct val="128125"/>
-              </a:lnSpc>
-              <a:spcBef>
-                <a:spcPts val="150"/>
-              </a:spcBef>
-              <a:spcAft>
-                <a:spcPts val="0"/>
-              </a:spcAft>
-              <a:buClr>
-                <a:srgbClr val="FFFFFF"/>
-              </a:buClr>
-              <a:buSzPts val="1700"/>
-              <a:buFont typeface="Arial"/>
-              <a:buChar char="•"/>
-            </a:pPr>
-            <a:r>
-              <a:rPr b="0" i="0" lang="en-US" sz="1700" u="none" cap="none" strike="noStrike">
-                <a:solidFill>
-                  <a:srgbClr val="FFFFFF"/>
-                </a:solidFill>
-                <a:latin typeface="IBM Plex Sans"/>
-                <a:ea typeface="IBM Plex Sans"/>
-                <a:cs typeface="IBM Plex Sans"/>
-                <a:sym typeface="IBM Plex Sans"/>
-              </a:rPr>
-              <a:t>All block sizes standardized to 4K</a:t>
-            </a:r>
-            <a:endParaRPr sz="1700"/>
-          </a:p>
-          <a:p>
-            <a:pPr indent="-366350" lvl="0" marL="360000" marR="0" rtl="0" algn="l">
-              <a:lnSpc>
-                <a:spcPct val="128125"/>
-              </a:lnSpc>
-              <a:spcBef>
-                <a:spcPts val="150"/>
-              </a:spcBef>
-              <a:spcAft>
-                <a:spcPts val="0"/>
-              </a:spcAft>
-              <a:buClr>
-                <a:srgbClr val="FFFFFF"/>
-              </a:buClr>
-              <a:buSzPts val="1700"/>
-              <a:buFont typeface="Arial"/>
-              <a:buChar char="•"/>
-            </a:pPr>
-            <a:r>
-              <a:rPr b="0" i="0" lang="en-US" sz="1700" u="none" cap="none" strike="noStrike">
-                <a:solidFill>
-                  <a:srgbClr val="FFFFFF"/>
-                </a:solidFill>
-                <a:latin typeface="IBM Plex Sans"/>
-                <a:ea typeface="IBM Plex Sans"/>
-                <a:cs typeface="IBM Plex Sans"/>
-                <a:sym typeface="IBM Plex Sans"/>
-              </a:rPr>
-              <a:t>Graceful shutdown sequence added</a:t>
-            </a:r>
-            <a:endParaRPr sz="1700"/>
-          </a:p>
-        </p:txBody>
-      </p:sp>
-      <p:sp>
-        <p:nvSpPr>
-          <p:cNvPr id="109" name="Google Shape;109;p12"/>
-          <p:cNvSpPr/>
-          <p:nvPr/>
-        </p:nvSpPr>
-        <p:spPr>
-          <a:xfrm>
-            <a:off x="1095375" y="8499225"/>
-            <a:ext cx="13500000" cy="1450800"/>
-          </a:xfrm>
-          <a:prstGeom prst="rect">
-            <a:avLst/>
-          </a:prstGeom>
-          <a:noFill/>
-          <a:ln>
-            <a:noFill/>
-          </a:ln>
-        </p:spPr>
-        <p:txBody>
-          <a:bodyPr anchorCtr="0" anchor="b" bIns="0" lIns="0" spcFirstLastPara="1" rIns="0" wrap="square" tIns="0">
-            <a:noAutofit/>
-          </a:bodyPr>
-          <a:lstStyle/>
-          <a:p>
-            <a:pPr indent="0" lvl="0" marL="0" marR="0" rtl="0" algn="l">
-              <a:lnSpc>
-                <a:spcPct val="93750"/>
-              </a:lnSpc>
-              <a:spcBef>
-                <a:spcPts val="0"/>
-              </a:spcBef>
-              <a:spcAft>
-                <a:spcPts val="0"/>
-              </a:spcAft>
-              <a:buNone/>
-            </a:pPr>
-            <a:r>
-              <a:rPr b="1" baseline="30000" i="0" lang="en-US" sz="1600" u="none" cap="none" strike="noStrike">
-                <a:solidFill>
-                  <a:srgbClr val="9AA3AB"/>
-                </a:solidFill>
-                <a:latin typeface="IBM Plex Sans Medium"/>
-                <a:ea typeface="IBM Plex Sans Medium"/>
-                <a:cs typeface="IBM Plex Sans Medium"/>
-                <a:sym typeface="IBM Plex Sans Medium"/>
-              </a:rPr>
-              <a:t>1</a:t>
-            </a:r>
-            <a:r>
-              <a:rPr b="0" i="0" lang="en-US" sz="1600" u="none" cap="none" strike="noStrike">
-                <a:solidFill>
-                  <a:srgbClr val="9AA3AB"/>
-                </a:solidFill>
-                <a:latin typeface="IBM Plex Sans"/>
-                <a:ea typeface="IBM Plex Sans"/>
-                <a:cs typeface="IBM Plex Sans"/>
-                <a:sym typeface="IBM Plex Sans"/>
-              </a:rPr>
-              <a:t>https://github.com/genodelabs/genode/tree/sculpt-25.04/repos/gems/src/app/file_vault</a:t>
-            </a:r>
-            <a:endParaRPr/>
-          </a:p>
-          <a:p>
-            <a:pPr indent="0" lvl="0" marL="0" marR="0" rtl="0" algn="l">
-              <a:lnSpc>
-                <a:spcPct val="93750"/>
-              </a:lnSpc>
-              <a:spcBef>
-                <a:spcPts val="60"/>
-              </a:spcBef>
-              <a:spcAft>
-                <a:spcPts val="0"/>
-              </a:spcAft>
-              <a:buClr>
-                <a:srgbClr val="9AA3AB"/>
-              </a:buClr>
-              <a:buSzPts val="1600"/>
-              <a:buFont typeface="IBM Plex Sans Medium"/>
-              <a:buNone/>
-            </a:pPr>
-            <a:r>
-              <a:rPr b="1" baseline="30000" i="0" lang="en-US" sz="1600" u="none" cap="none" strike="noStrike">
-                <a:solidFill>
-                  <a:srgbClr val="9AA3AB"/>
-                </a:solidFill>
-                <a:latin typeface="IBM Plex Sans Medium"/>
-                <a:ea typeface="IBM Plex Sans Medium"/>
-                <a:cs typeface="IBM Plex Sans Medium"/>
-                <a:sym typeface="IBM Plex Sans Medium"/>
-              </a:rPr>
-              <a:t>2</a:t>
-            </a:r>
-            <a:r>
-              <a:rPr b="0" i="0" lang="en-US" sz="1600" u="none" cap="none" strike="noStrike">
-                <a:solidFill>
-                  <a:srgbClr val="9AA3AB"/>
-                </a:solidFill>
-                <a:latin typeface="IBM Plex Sans"/>
-                <a:ea typeface="IBM Plex Sans"/>
-                <a:cs typeface="IBM Plex Sans"/>
-                <a:sym typeface="IBM Plex Sans"/>
-              </a:rPr>
-              <a:t>https://github.com/VoronM1522/genode/tree/se/repos/gems/src/app/se_vault</a:t>
-            </a:r>
-            <a:endParaRPr b="0" i="0" sz="1600" u="none" cap="none" strike="noStrike">
-              <a:solidFill>
-                <a:srgbClr val="9AA3AB"/>
               </a:solidFill>
               <a:latin typeface="IBM Plex Sans"/>
               <a:ea typeface="IBM Plex Sans"/>
@@ -4088,62 +3704,38 @@
             </a:endParaRPr>
           </a:p>
           <a:p>
-            <a:pPr indent="0" lvl="0" marL="0" rtl="0" algn="l">
-              <a:lnSpc>
-                <a:spcPct val="93750"/>
-              </a:lnSpc>
-              <a:spcBef>
-                <a:spcPts val="60"/>
-              </a:spcBef>
-              <a:spcAft>
-                <a:spcPts val="0"/>
-              </a:spcAft>
-              <a:buClr>
-                <a:srgbClr val="9AA3AB"/>
-              </a:buClr>
-              <a:buSzPts val="1600"/>
-              <a:buFont typeface="IBM Plex Sans Medium"/>
-              <a:buNone/>
-            </a:pPr>
-            <a:r>
-              <a:rPr b="1" baseline="30000" lang="en-US" sz="1600">
-                <a:solidFill>
-                  <a:srgbClr val="9AA3AB"/>
-                </a:solidFill>
-                <a:latin typeface="IBM Plex Sans Medium"/>
-                <a:ea typeface="IBM Plex Sans Medium"/>
-                <a:cs typeface="IBM Plex Sans Medium"/>
-                <a:sym typeface="IBM Plex Sans Medium"/>
-              </a:rPr>
-              <a:t>3</a:t>
-            </a:r>
-            <a:r>
-              <a:rPr b="1" baseline="30000" lang="en-US" sz="1600">
-                <a:solidFill>
-                  <a:srgbClr val="9AA3AB"/>
-                </a:solidFill>
-                <a:latin typeface="IBM Plex Sans Medium"/>
-                <a:ea typeface="IBM Plex Sans Medium"/>
-                <a:cs typeface="IBM Plex Sans Medium"/>
-                <a:sym typeface="IBM Plex Sans Medium"/>
-              </a:rPr>
-              <a:t> </a:t>
-            </a:r>
-            <a:r>
-              <a:rPr lang="en-US" sz="1600">
-                <a:solidFill>
-                  <a:srgbClr val="9AA3AB"/>
+            <a:pPr indent="-336550" lvl="0" marL="457200" rtl="0" algn="l">
+              <a:lnSpc>
+                <a:spcPct val="95833"/>
+              </a:lnSpc>
+              <a:spcBef>
+                <a:spcPts val="0"/>
+              </a:spcBef>
+              <a:spcAft>
+                <a:spcPts val="0"/>
+              </a:spcAft>
+              <a:buClr>
+                <a:srgbClr val="1A1A1A"/>
+              </a:buClr>
+              <a:buSzPts val="1700"/>
+              <a:buFont typeface="IBM Plex Sans"/>
+              <a:buChar char="●"/>
+            </a:pPr>
+            <a:r>
+              <a:rPr lang="en-US" sz="1800">
+                <a:solidFill>
+                  <a:srgbClr val="1A1A1A"/>
                 </a:solidFill>
                 <a:latin typeface="IBM Plex Sans"/>
                 <a:ea typeface="IBM Plex Sans"/>
                 <a:cs typeface="IBM Plex Sans"/>
                 <a:sym typeface="IBM Plex Sans"/>
               </a:rPr>
-              <a:t>https://github.com/VoronM1522/genode-wundertuete</a:t>
-            </a:r>
-            <a:endParaRPr sz="1600">
+              <a:t>Encrypted image cannot be mounted without key</a:t>
+            </a:r>
+            <a:endParaRPr sz="1800">
               <a:solidFill>
-                <a:srgbClr val="9AA3AB"/>
+                <a:srgbClr val="1A1A1A"/>
               </a:solidFill>
               <a:latin typeface="IBM Plex Sans"/>
               <a:ea typeface="IBM Plex Sans"/>
@@ -4152,50 +3744,38 @@
             </a:endParaRPr>
           </a:p>
           <a:p>
-            <a:pPr indent="0" lvl="0" marL="0" rtl="0" algn="l">
-              <a:lnSpc>
-                <a:spcPct val="93750"/>
-              </a:lnSpc>
-              <a:spcBef>
-                <a:spcPts val="60"/>
-              </a:spcBef>
-              <a:spcAft>
-                <a:spcPts val="0"/>
-              </a:spcAft>
-              <a:buClr>
-                <a:srgbClr val="9AA3AB"/>
-              </a:buClr>
-              <a:buSzPts val="1600"/>
-              <a:buFont typeface="IBM Plex Sans Medium"/>
-              <a:buNone/>
-            </a:pPr>
-            <a:r>
-              <a:rPr b="1" baseline="30000" lang="en-US" sz="1600">
-                <a:solidFill>
-                  <a:srgbClr val="9AA3AB"/>
-                </a:solidFill>
-                <a:latin typeface="IBM Plex Sans Medium"/>
-                <a:ea typeface="IBM Plex Sans Medium"/>
-                <a:cs typeface="IBM Plex Sans Medium"/>
-                <a:sym typeface="IBM Plex Sans Medium"/>
-              </a:rPr>
-              <a:t>4</a:t>
-            </a:r>
-            <a:r>
-              <a:rPr lang="en-US" sz="1600">
-                <a:solidFill>
-                  <a:srgbClr val="9AA3AB"/>
+            <a:pPr indent="-342900" lvl="0" marL="457200" rtl="0" algn="l">
+              <a:lnSpc>
+                <a:spcPct val="95833"/>
+              </a:lnSpc>
+              <a:spcBef>
+                <a:spcPts val="0"/>
+              </a:spcBef>
+              <a:spcAft>
+                <a:spcPts val="0"/>
+              </a:spcAft>
+              <a:buClr>
+                <a:srgbClr val="1A1A1A"/>
+              </a:buClr>
+              <a:buSzPts val="1800"/>
+              <a:buFont typeface="IBM Plex Sans"/>
+              <a:buChar char="●"/>
+            </a:pPr>
+            <a:r>
+              <a:rPr lang="en-US" sz="1800">
+                <a:solidFill>
+                  <a:srgbClr val="1A1A1A"/>
                 </a:solidFill>
                 <a:latin typeface="IBM Plex Sans"/>
                 <a:ea typeface="IBM Plex Sans"/>
                 <a:cs typeface="IBM Plex Sans"/>
                 <a:sym typeface="IBM Plex Sans"/>
               </a:rPr>
-              <a:t>https://github.com/VoronM1522/phantomuserland-snapper</a:t>
-            </a:r>
-            <a:endParaRPr sz="1600">
+              <a:t>Key/hash replacement attack — superblock not detected</a:t>
+            </a:r>
+            <a:endParaRPr sz="1800">
               <a:solidFill>
-                <a:srgbClr val="9AA3AB"/>
+                <a:srgbClr val="1A1A1A"/>
               </a:solidFill>
               <a:latin typeface="IBM Plex Sans"/>
               <a:ea typeface="IBM Plex Sans"/>
@@ -4204,50 +3784,50 @@
             </a:endParaRPr>
           </a:p>
           <a:p>
-            <a:pPr indent="0" lvl="0" marL="0" rtl="0" algn="l">
-              <a:lnSpc>
-                <a:spcPct val="93750"/>
-              </a:lnSpc>
-              <a:spcBef>
-                <a:spcPts val="60"/>
-              </a:spcBef>
-              <a:spcAft>
-                <a:spcPts val="0"/>
-              </a:spcAft>
-              <a:buClr>
-                <a:srgbClr val="9AA3AB"/>
-              </a:buClr>
-              <a:buSzPts val="1600"/>
-              <a:buFont typeface="IBM Plex Sans Medium"/>
-              <a:buNone/>
-            </a:pPr>
-            <a:r>
-              <a:rPr b="1" baseline="30000" lang="en-US" sz="1600">
-                <a:solidFill>
-                  <a:srgbClr val="9AA3AB"/>
-                </a:solidFill>
-                <a:latin typeface="IBM Plex Sans Medium"/>
-                <a:ea typeface="IBM Plex Sans Medium"/>
-                <a:cs typeface="IBM Plex Sans Medium"/>
-                <a:sym typeface="IBM Plex Sans Medium"/>
-              </a:rPr>
-              <a:t>5 </a:t>
-            </a:r>
-            <a:r>
-              <a:rPr lang="en-US" sz="1600">
-                <a:solidFill>
-                  <a:srgbClr val="9AA3AB"/>
+            <a:pPr indent="-342900" lvl="0" marL="457200" rtl="0" algn="l">
+              <a:lnSpc>
+                <a:spcPct val="95833"/>
+              </a:lnSpc>
+              <a:spcBef>
+                <a:spcPts val="0"/>
+              </a:spcBef>
+              <a:spcAft>
+                <a:spcPts val="0"/>
+              </a:spcAft>
+              <a:buClr>
+                <a:srgbClr val="1A1A1A"/>
+              </a:buClr>
+              <a:buSzPts val="1800"/>
+              <a:buFont typeface="IBM Plex Sans"/>
+              <a:buChar char="●"/>
+            </a:pPr>
+            <a:r>
+              <a:rPr lang="en-US" sz="1800">
+                <a:solidFill>
+                  <a:srgbClr val="1A1A1A"/>
                 </a:solidFill>
                 <a:latin typeface="IBM Plex Sans"/>
                 <a:ea typeface="IBM Plex Sans"/>
                 <a:cs typeface="IBM Plex Sans"/>
                 <a:sym typeface="IBM Plex Sans"/>
               </a:rPr>
-              <a:t>https://github.com/VoronM1522/snapper</a:t>
-            </a:r>
-            <a:endParaRPr sz="1600">
+              <a:t>Crash recovery via </a:t>
+            </a:r>
+            <a:r>
+              <a:rPr i="1" lang="en-US" sz="1800">
+                <a:solidFill>
+                  <a:srgbClr val="1A1A1A"/>
+                </a:solidFill>
+                <a:latin typeface="IBM Plex Sans"/>
+                <a:ea typeface="IBM Plex Sans"/>
+                <a:cs typeface="IBM Plex Sans"/>
+                <a:sym typeface="IBM Plex Sans"/>
+              </a:rPr>
+              <a:t>fsck</a:t>
+            </a:r>
+            <a:endParaRPr sz="1800">
               <a:solidFill>
-                <a:srgbClr val="9AA3AB"/>
+                <a:srgbClr val="1A1A1A"/>
               </a:solidFill>
               <a:latin typeface="IBM Plex Sans"/>
               <a:ea typeface="IBM Plex Sans"/>
@@ -4255,63 +3835,11 @@
               <a:sym typeface="IBM Plex Sans"/>
             </a:endParaRPr>
           </a:p>
-          <a:p>
-            <a:pPr indent="0" lvl="0" marL="0" rtl="0" algn="l">
-              <a:lnSpc>
-                <a:spcPct val="93750"/>
-              </a:lnSpc>
-              <a:spcBef>
-                <a:spcPts val="60"/>
-              </a:spcBef>
-              <a:spcAft>
-                <a:spcPts val="0"/>
-              </a:spcAft>
-              <a:buClr>
-                <a:srgbClr val="9AA3AB"/>
-              </a:buClr>
-              <a:buSzPts val="1600"/>
-              <a:buFont typeface="IBM Plex Sans Medium"/>
-              <a:buNone/>
-            </a:pPr>
-            <a:r>
-              <a:rPr b="1" baseline="30000" lang="en-US" sz="1600">
-                <a:solidFill>
-                  <a:srgbClr val="9AA3AB"/>
-                </a:solidFill>
-                <a:latin typeface="IBM Plex Sans Medium"/>
-                <a:ea typeface="IBM Plex Sans Medium"/>
-                <a:cs typeface="IBM Plex Sans Medium"/>
-                <a:sym typeface="IBM Plex Sans Medium"/>
-              </a:rPr>
-              <a:t>6</a:t>
-            </a:r>
-            <a:r>
-              <a:rPr lang="en-US" sz="1600">
-                <a:solidFill>
-                  <a:srgbClr val="9AA3AB"/>
-                </a:solidFill>
-                <a:latin typeface="IBM Plex Sans"/>
-                <a:ea typeface="IBM Plex Sans"/>
-                <a:cs typeface="IBM Plex Sans"/>
-                <a:sym typeface="IBM Plex Sans"/>
-              </a:rPr>
-              <a:t>https://github.com/VoronM1522/genode/tree/se/repos/os</a:t>
-            </a:r>
-            <a:endParaRPr sz="1600">
-              <a:solidFill>
-                <a:srgbClr val="9AA3AB"/>
-              </a:solidFill>
-              <a:latin typeface="IBM Plex Sans"/>
-              <a:ea typeface="IBM Plex Sans"/>
-              <a:cs typeface="IBM Plex Sans"/>
-              <a:sym typeface="IBM Plex Sans"/>
-            </a:endParaRPr>
-          </a:p>
         </p:txBody>
       </p:sp>
       <p:pic>
         <p:nvPicPr>
-          <p:cNvPr id="110" name="Google Shape;110;p12"/>
+          <p:cNvPr id="127" name="Google Shape;127;p13"/>
           <p:cNvPicPr preferRelativeResize="0"/>
           <p:nvPr/>
         </p:nvPicPr>
@@ -4338,7 +3866,7 @@
       </p:pic>
       <p:sp>
         <p:nvSpPr>
-          <p:cNvPr id="111" name="Google Shape;111;p12"/>
+          <p:cNvPr id="128" name="Google Shape;128;p13"/>
           <p:cNvSpPr/>
           <p:nvPr/>
         </p:nvSpPr>
@@ -4376,7 +3904,7 @@
               <a:buNone/>
             </a:pPr>
             <a:r>
-              <a:rPr lang="en-US" sz="1300">
+              <a:rPr b="0" i="0" lang="en-US" sz="1300" u="none" cap="none" strike="noStrike">
                 <a:solidFill>
                   <a:srgbClr val="9AA3AB"/>
                 </a:solidFill>
@@ -4385,10 +3913,10 @@
                 <a:cs typeface="IBM Plex Mono"/>
                 <a:sym typeface="IBM Plex Mono"/>
               </a:rPr>
-              <a:t>9</a:t>
-            </a:r>
-            <a:r>
-              <a:rPr b="0" i="0" lang="en-US" sz="1300" u="none" cap="none" strike="noStrike">
+              <a:t>1</a:t>
+            </a:r>
+            <a:r>
+              <a:rPr lang="en-US" sz="1300">
                 <a:solidFill>
                   <a:srgbClr val="9AA3AB"/>
                 </a:solidFill>
@@ -4397,10 +3925,10 @@
                 <a:cs typeface="IBM Plex Mono"/>
                 <a:sym typeface="IBM Plex Mono"/>
               </a:rPr>
-              <a:t>/</a:t>
-            </a:r>
-            <a:r>
-              <a:rPr lang="en-US" sz="1300">
+              <a:t>1</a:t>
+            </a:r>
+            <a:r>
+              <a:rPr b="0" i="0" lang="en-US" sz="1300" u="none" cap="none" strike="noStrike">
                 <a:solidFill>
                   <a:srgbClr val="9AA3AB"/>
                 </a:solidFill>
@@ -4409,689 +3937,10 @@
                 <a:cs typeface="IBM Plex Mono"/>
                 <a:sym typeface="IBM Plex Mono"/>
               </a:rPr>
-              <a:t>13</a:t>
-            </a:r>
-            <a:endParaRPr/>
-          </a:p>
-        </p:txBody>
-      </p:sp>
-      <p:sp>
-        <p:nvSpPr>
-          <p:cNvPr id="112" name="Google Shape;112;p12"/>
-          <p:cNvSpPr/>
-          <p:nvPr/>
-        </p:nvSpPr>
-        <p:spPr>
-          <a:xfrm>
-            <a:off x="1095375" y="5925700"/>
-            <a:ext cx="7700100" cy="2393700"/>
-          </a:xfrm>
-          <a:prstGeom prst="roundRect">
-            <a:avLst>
-              <a:gd fmla="val 6000" name="adj"/>
-            </a:avLst>
-          </a:prstGeom>
-          <a:solidFill>
-            <a:srgbClr val="EEF1F4"/>
-          </a:solidFill>
-          <a:ln>
-            <a:noFill/>
-          </a:ln>
-        </p:spPr>
-        <p:txBody>
-          <a:bodyPr anchorCtr="0" anchor="t" bIns="364000" lIns="520000" spcFirstLastPara="1" rIns="520000" wrap="square" tIns="364000">
-            <a:noAutofit/>
-          </a:bodyPr>
-          <a:lstStyle/>
-          <a:p>
-            <a:pPr indent="0" lvl="0" marL="0" marR="0" rtl="0" algn="l">
-              <a:lnSpc>
-                <a:spcPct val="126315"/>
-              </a:lnSpc>
-              <a:spcBef>
-                <a:spcPts val="0"/>
-              </a:spcBef>
-              <a:spcAft>
-                <a:spcPts val="0"/>
-              </a:spcAft>
-              <a:buClr>
-                <a:srgbClr val="1A1A1A"/>
-              </a:buClr>
-              <a:buSzPts val="1900"/>
-              <a:buFont typeface="Montserrat SemiBold"/>
-              <a:buNone/>
-            </a:pPr>
-            <a:r>
-              <a:rPr b="1" lang="en-US" sz="1900">
-                <a:solidFill>
-                  <a:srgbClr val="1A1A1A"/>
-                </a:solidFill>
-                <a:latin typeface="Montserrat SemiBold"/>
-                <a:ea typeface="Montserrat SemiBold"/>
-                <a:cs typeface="Montserrat SemiBold"/>
-                <a:sym typeface="Montserrat SemiBold"/>
-              </a:rPr>
-              <a:t>Related fixes &amp; Adaptations:</a:t>
-            </a:r>
-            <a:endParaRPr b="1" i="0" sz="1900" u="none" cap="none" strike="noStrike">
-              <a:solidFill>
-                <a:srgbClr val="1A1A1A"/>
-              </a:solidFill>
-              <a:latin typeface="Montserrat SemiBold"/>
-              <a:ea typeface="Montserrat SemiBold"/>
-              <a:cs typeface="Montserrat SemiBold"/>
-              <a:sym typeface="Montserrat SemiBold"/>
-            </a:endParaRPr>
-          </a:p>
-          <a:p>
-            <a:pPr indent="-380001" lvl="0" marL="380001" marR="0" rtl="0" algn="l">
-              <a:lnSpc>
-                <a:spcPct val="126470"/>
-              </a:lnSpc>
-              <a:spcBef>
-                <a:spcPts val="300"/>
-              </a:spcBef>
-              <a:spcAft>
-                <a:spcPts val="0"/>
-              </a:spcAft>
-              <a:buClr>
-                <a:srgbClr val="1A1A1A"/>
-              </a:buClr>
-              <a:buSzPts val="1700"/>
-              <a:buFont typeface="Arial"/>
-              <a:buChar char="•"/>
-            </a:pPr>
-            <a:r>
-              <a:rPr lang="en-US" sz="1700">
-                <a:solidFill>
-                  <a:srgbClr val="1A1A1A"/>
-                </a:solidFill>
-                <a:latin typeface="IBM Plex Sans"/>
-                <a:ea typeface="IBM Plex Sans"/>
-                <a:cs typeface="IBM Plex Sans"/>
-                <a:sym typeface="IBM Plex Sans"/>
-              </a:rPr>
-              <a:t>lwext4</a:t>
-            </a:r>
-            <a:r>
-              <a:rPr baseline="30000" lang="en-US" sz="1700">
-                <a:solidFill>
-                  <a:srgbClr val="1A1A1A"/>
-                </a:solidFill>
-                <a:latin typeface="IBM Plex Sans"/>
-                <a:ea typeface="IBM Plex Sans"/>
-                <a:cs typeface="IBM Plex Sans"/>
-                <a:sym typeface="IBM Plex Sans"/>
-              </a:rPr>
-              <a:t>3</a:t>
-            </a:r>
-            <a:r>
-              <a:rPr lang="en-US" sz="1700">
-                <a:solidFill>
-                  <a:srgbClr val="1A1A1A"/>
-                </a:solidFill>
-                <a:latin typeface="IBM Plex Sans"/>
-                <a:ea typeface="IBM Plex Sans"/>
-                <a:cs typeface="IBM Plex Sans"/>
-                <a:sym typeface="IBM Plex Sans"/>
-              </a:rPr>
-              <a:t> (</a:t>
-            </a:r>
-            <a:r>
-              <a:rPr lang="en-US" sz="1700">
-                <a:solidFill>
-                  <a:srgbClr val="1A1A1A"/>
-                </a:solidFill>
-                <a:latin typeface="IBM Plex Sans"/>
-                <a:ea typeface="IBM Plex Sans"/>
-                <a:cs typeface="IBM Plex Sans"/>
-                <a:sym typeface="IBM Plex Sans"/>
-              </a:rPr>
-              <a:t>ftruncate and sync</a:t>
-            </a:r>
-            <a:r>
-              <a:rPr lang="en-US">
-                <a:solidFill>
-                  <a:schemeClr val="dk1"/>
-                </a:solidFill>
-              </a:rPr>
-              <a:t>)</a:t>
-            </a:r>
-            <a:endParaRPr>
-              <a:solidFill>
-                <a:schemeClr val="dk1"/>
-              </a:solidFill>
-            </a:endParaRPr>
-          </a:p>
-          <a:p>
-            <a:pPr indent="-380001" lvl="0" marL="380001" marR="0" rtl="0" algn="l">
-              <a:lnSpc>
-                <a:spcPct val="126470"/>
-              </a:lnSpc>
-              <a:spcBef>
-                <a:spcPts val="300"/>
-              </a:spcBef>
-              <a:spcAft>
-                <a:spcPts val="0"/>
-              </a:spcAft>
-              <a:buClr>
-                <a:schemeClr val="dk1"/>
-              </a:buClr>
-              <a:buSzPts val="1700"/>
-              <a:buChar char="•"/>
-            </a:pPr>
-            <a:r>
-              <a:rPr lang="en-US" sz="1700">
-                <a:solidFill>
-                  <a:schemeClr val="dk1"/>
-                </a:solidFill>
-                <a:latin typeface="IBM Plex Sans"/>
-                <a:ea typeface="IBM Plex Sans"/>
-                <a:cs typeface="IBM Plex Sans"/>
-                <a:sym typeface="IBM Plex Sans"/>
-              </a:rPr>
-              <a:t>isomem</a:t>
-            </a:r>
-            <a:r>
-              <a:rPr baseline="30000" lang="en-US" sz="1700">
-                <a:solidFill>
-                  <a:schemeClr val="dk1"/>
-                </a:solidFill>
-                <a:latin typeface="IBM Plex Sans"/>
-                <a:ea typeface="IBM Plex Sans"/>
-                <a:cs typeface="IBM Plex Sans"/>
-                <a:sym typeface="IBM Plex Sans"/>
-              </a:rPr>
-              <a:t>4</a:t>
-            </a:r>
-            <a:r>
-              <a:rPr lang="en-US" sz="1700">
-                <a:solidFill>
-                  <a:schemeClr val="dk1"/>
-                </a:solidFill>
-                <a:latin typeface="IBM Plex Sans"/>
-                <a:ea typeface="IBM Plex Sans"/>
-                <a:cs typeface="IBM Plex Sans"/>
-                <a:sym typeface="IBM Plex Sans"/>
-              </a:rPr>
-              <a:t> (</a:t>
-            </a:r>
-            <a:r>
-              <a:rPr lang="en-US" sz="1700">
-                <a:solidFill>
-                  <a:srgbClr val="1A1A1A"/>
-                </a:solidFill>
-                <a:latin typeface="IBM Plex Sans"/>
-                <a:ea typeface="IBM Plex Sans"/>
-                <a:cs typeface="IBM Plex Sans"/>
-                <a:sym typeface="IBM Plex Sans"/>
-              </a:rPr>
-              <a:t>power-off button callback and graceful shutdown</a:t>
-            </a:r>
-            <a:r>
-              <a:rPr lang="en-US" sz="1700">
-                <a:solidFill>
-                  <a:schemeClr val="dk1"/>
-                </a:solidFill>
-                <a:latin typeface="IBM Plex Sans"/>
-                <a:ea typeface="IBM Plex Sans"/>
-                <a:cs typeface="IBM Plex Sans"/>
-                <a:sym typeface="IBM Plex Sans"/>
-              </a:rPr>
-              <a:t>)</a:t>
-            </a:r>
-            <a:endParaRPr sz="1700">
-              <a:solidFill>
-                <a:schemeClr val="dk1"/>
-              </a:solidFill>
-              <a:latin typeface="IBM Plex Sans"/>
-              <a:ea typeface="IBM Plex Sans"/>
-              <a:cs typeface="IBM Plex Sans"/>
-              <a:sym typeface="IBM Plex Sans"/>
-            </a:endParaRPr>
-          </a:p>
-          <a:p>
-            <a:pPr indent="-380001" lvl="0" marL="380001" marR="0" rtl="0" algn="l">
-              <a:lnSpc>
-                <a:spcPct val="126470"/>
-              </a:lnSpc>
-              <a:spcBef>
-                <a:spcPts val="300"/>
-              </a:spcBef>
-              <a:spcAft>
-                <a:spcPts val="0"/>
-              </a:spcAft>
-              <a:buClr>
-                <a:schemeClr val="dk1"/>
-              </a:buClr>
-              <a:buSzPts val="1700"/>
-              <a:buChar char="•"/>
-            </a:pPr>
-            <a:r>
-              <a:rPr lang="en-US" sz="1700">
-                <a:solidFill>
-                  <a:srgbClr val="1A1A1A"/>
-                </a:solidFill>
-                <a:latin typeface="IBM Plex Sans"/>
-                <a:ea typeface="IBM Plex Sans"/>
-                <a:cs typeface="IBM Plex Sans"/>
-                <a:sym typeface="IBM Plex Sans"/>
-              </a:rPr>
-              <a:t>snapper</a:t>
-            </a:r>
-            <a:r>
-              <a:rPr baseline="30000" lang="en-US" sz="1700">
-                <a:solidFill>
-                  <a:srgbClr val="1A1A1A"/>
-                </a:solidFill>
-                <a:latin typeface="IBM Plex Sans"/>
-                <a:ea typeface="IBM Plex Sans"/>
-                <a:cs typeface="IBM Plex Sans"/>
-                <a:sym typeface="IBM Plex Sans"/>
-              </a:rPr>
-              <a:t>5</a:t>
-            </a:r>
-            <a:r>
-              <a:rPr lang="en-US" sz="1700">
-                <a:solidFill>
-                  <a:srgbClr val="1A1A1A"/>
-                </a:solidFill>
-                <a:latin typeface="IBM Plex Sans"/>
-                <a:ea typeface="IBM Plex Sans"/>
-                <a:cs typeface="IBM Plex Sans"/>
-                <a:sym typeface="IBM Plex Sans"/>
-              </a:rPr>
-              <a:t> (client counter and graceful shutdown)</a:t>
-            </a:r>
-            <a:endParaRPr sz="1700">
-              <a:solidFill>
-                <a:srgbClr val="1A1A1A"/>
-              </a:solidFill>
-              <a:latin typeface="IBM Plex Sans"/>
-              <a:ea typeface="IBM Plex Sans"/>
-              <a:cs typeface="IBM Plex Sans"/>
-              <a:sym typeface="IBM Plex Sans"/>
-            </a:endParaRPr>
-          </a:p>
-          <a:p>
-            <a:pPr indent="-380001" lvl="0" marL="380001" marR="0" rtl="0" algn="l">
-              <a:lnSpc>
-                <a:spcPct val="126470"/>
-              </a:lnSpc>
-              <a:spcBef>
-                <a:spcPts val="300"/>
-              </a:spcBef>
-              <a:spcAft>
-                <a:spcPts val="0"/>
-              </a:spcAft>
-              <a:buClr>
-                <a:schemeClr val="dk1"/>
-              </a:buClr>
-              <a:buSzPts val="1700"/>
-              <a:buChar char="•"/>
-            </a:pPr>
-            <a:r>
-              <a:rPr lang="en-US" sz="1700">
-                <a:solidFill>
-                  <a:schemeClr val="dk1"/>
-                </a:solidFill>
-                <a:latin typeface="IBM Plex Sans"/>
-                <a:ea typeface="IBM Plex Sans"/>
-                <a:cs typeface="IBM Plex Sans"/>
-                <a:sym typeface="IBM Plex Sans"/>
-              </a:rPr>
-              <a:t>vfs</a:t>
-            </a:r>
-            <a:r>
-              <a:rPr baseline="30000" lang="en-US" sz="1700">
-                <a:solidFill>
-                  <a:schemeClr val="dk1"/>
-                </a:solidFill>
-                <a:latin typeface="IBM Plex Sans"/>
-                <a:ea typeface="IBM Plex Sans"/>
-                <a:cs typeface="IBM Plex Sans"/>
-                <a:sym typeface="IBM Plex Sans"/>
-              </a:rPr>
-              <a:t>6</a:t>
-            </a:r>
-            <a:r>
-              <a:rPr lang="en-US" sz="1700">
-                <a:solidFill>
-                  <a:schemeClr val="dk1"/>
-                </a:solidFill>
-                <a:latin typeface="IBM Plex Sans"/>
-                <a:ea typeface="IBM Plex Sans"/>
-                <a:cs typeface="IBM Plex Sans"/>
-                <a:sym typeface="IBM Plex Sans"/>
-              </a:rPr>
-              <a:t> (</a:t>
-            </a:r>
-            <a:r>
-              <a:rPr lang="en-US" sz="1700">
-                <a:solidFill>
-                  <a:srgbClr val="1A1A1A"/>
-                </a:solidFill>
-                <a:latin typeface="IBM Plex Sans"/>
-                <a:ea typeface="IBM Plex Sans"/>
-                <a:cs typeface="IBM Plex Sans"/>
-                <a:sym typeface="IBM Plex Sans"/>
-              </a:rPr>
-              <a:t>client counter, graceful shutdown and clean unmount</a:t>
-            </a:r>
-            <a:r>
-              <a:rPr lang="en-US" sz="1700">
-                <a:solidFill>
-                  <a:schemeClr val="dk1"/>
-                </a:solidFill>
-                <a:latin typeface="IBM Plex Sans"/>
-                <a:ea typeface="IBM Plex Sans"/>
-                <a:cs typeface="IBM Plex Sans"/>
-                <a:sym typeface="IBM Plex Sans"/>
-              </a:rPr>
-              <a:t>)</a:t>
-            </a:r>
-            <a:endParaRPr/>
-          </a:p>
-        </p:txBody>
-      </p:sp>
-      <p:sp>
-        <p:nvSpPr>
-          <p:cNvPr id="113" name="Google Shape;113;p12"/>
-          <p:cNvSpPr/>
-          <p:nvPr/>
-        </p:nvSpPr>
-        <p:spPr>
-          <a:xfrm>
-            <a:off x="9395375" y="5925700"/>
-            <a:ext cx="7754700" cy="2393700"/>
-          </a:xfrm>
-          <a:prstGeom prst="roundRect">
-            <a:avLst>
-              <a:gd fmla="val 6000" name="adj"/>
-            </a:avLst>
-          </a:prstGeom>
-          <a:solidFill>
-            <a:srgbClr val="40BA21"/>
-          </a:solidFill>
-          <a:ln>
-            <a:noFill/>
-          </a:ln>
-        </p:spPr>
-        <p:txBody>
-          <a:bodyPr anchorCtr="0" anchor="t" bIns="364000" lIns="520000" spcFirstLastPara="1" rIns="520000" wrap="square" tIns="364000">
-            <a:noAutofit/>
-          </a:bodyPr>
-          <a:lstStyle/>
-          <a:p>
-            <a:pPr indent="0" lvl="0" marL="0" marR="0" rtl="0" algn="l">
-              <a:lnSpc>
-                <a:spcPct val="126315"/>
-              </a:lnSpc>
-              <a:spcBef>
-                <a:spcPts val="300"/>
-              </a:spcBef>
-              <a:spcAft>
-                <a:spcPts val="0"/>
-              </a:spcAft>
-              <a:buClr>
-                <a:srgbClr val="FFFFFF"/>
-              </a:buClr>
-              <a:buSzPts val="1900"/>
-              <a:buFont typeface="Montserrat SemiBold"/>
-              <a:buNone/>
-            </a:pPr>
-            <a:r>
-              <a:rPr b="1" lang="en-US" sz="1900">
-                <a:solidFill>
-                  <a:srgbClr val="FFFFFF"/>
-                </a:solidFill>
-                <a:latin typeface="Montserrat SemiBold"/>
-                <a:ea typeface="Montserrat SemiBold"/>
-                <a:cs typeface="Montserrat SemiBold"/>
-                <a:sym typeface="Montserrat SemiBold"/>
-              </a:rPr>
-              <a:t>Optimization:</a:t>
-            </a:r>
-            <a:endParaRPr b="1" i="0" sz="1900" u="none" cap="none" strike="noStrike">
-              <a:solidFill>
-                <a:srgbClr val="FFFFFF"/>
-              </a:solidFill>
-              <a:latin typeface="Montserrat SemiBold"/>
-              <a:ea typeface="Montserrat SemiBold"/>
-              <a:cs typeface="Montserrat SemiBold"/>
-              <a:sym typeface="Montserrat SemiBold"/>
-            </a:endParaRPr>
-          </a:p>
-          <a:p>
-            <a:pPr indent="0" lvl="0" marL="0" rtl="0" algn="l">
-              <a:lnSpc>
-                <a:spcPct val="126315"/>
-              </a:lnSpc>
-              <a:spcBef>
-                <a:spcPts val="0"/>
-              </a:spcBef>
-              <a:spcAft>
-                <a:spcPts val="0"/>
-              </a:spcAft>
-              <a:buClr>
-                <a:schemeClr val="dk1"/>
-              </a:buClr>
-              <a:buFont typeface="Arial"/>
-              <a:buNone/>
-            </a:pPr>
-            <a:r>
-              <a:rPr lang="en-US" sz="1700">
-                <a:solidFill>
-                  <a:schemeClr val="lt1"/>
-                </a:solidFill>
-                <a:latin typeface="IBM Plex Sans"/>
-                <a:ea typeface="IBM Plex Sans"/>
-                <a:cs typeface="IBM Plex Sans"/>
-                <a:sym typeface="IBM Plex Sans"/>
-              </a:rPr>
-              <a:t>U</a:t>
-            </a:r>
-            <a:r>
-              <a:rPr lang="en-US" sz="1700">
-                <a:solidFill>
-                  <a:schemeClr val="lt1"/>
-                </a:solidFill>
-                <a:latin typeface="IBM Plex Sans"/>
-                <a:ea typeface="IBM Plex Sans"/>
-                <a:cs typeface="IBM Plex Sans"/>
-                <a:sym typeface="IBM Plex Sans"/>
-              </a:rPr>
-              <a:t>sing a “Block” session directly — initialization time reduced from ≈20 min to ≈1 min</a:t>
-            </a:r>
-            <a:endParaRPr sz="1700"/>
-          </a:p>
-        </p:txBody>
-      </p:sp>
-    </p:spTree>
-  </p:cSld>
-  <p:clrMapOvr>
-    <a:masterClrMapping/>
-  </p:clrMapOvr>
-</p:sld>
-</file>
-
-<file path=ppt/slides/slide11.xml><?xml version="1.0" encoding="utf-8"?>
-<p:sld xmlns:a="http://schemas.openxmlformats.org/drawingml/2006/main" xmlns:r="http://schemas.openxmlformats.org/officeDocument/2006/relationships" xmlns:mc="http://schemas.openxmlformats.org/markup-compatibility/2006" xmlns:mv="urn:schemas-microsoft-com:mac:vml" xmlns:p="http://schemas.openxmlformats.org/presentationml/2006/main" xmlns:c="http://schemas.openxmlformats.org/drawingml/2006/chart" xmlns:dgm="http://schemas.openxmlformats.org/drawingml/2006/diagram" xmlns:o="urn:schemas-microsoft-com:office:office" xmlns:v="urn:schemas-microsoft-com:vml" xmlns:pvml="urn:schemas-microsoft-com:office:powerpoint" xmlns:com="http://schemas.openxmlformats.org/drawingml/2006/compatibility" xmlns:p14="http://schemas.microsoft.com/office/powerpoint/2010/main" xmlns:p15="http://schemas.microsoft.com/office/powerpoint/2012/main" xmlns:ahyp="http://schemas.microsoft.com/office/drawing/2018/hyperlinkcolor">
-  <p:cSld>
-    <p:bg>
-      <p:bgPr>
-        <a:solidFill>
-          <a:srgbClr val="FFFFFF"/>
-        </a:solidFill>
-      </p:bgPr>
-    </p:bg>
-    <p:spTree>
-      <p:nvGrpSpPr>
-        <p:cNvPr id="117" name="Shape 117"/>
-        <p:cNvGrpSpPr/>
-        <p:nvPr/>
-      </p:nvGrpSpPr>
-      <p:grpSpPr>
-        <a:xfrm>
-          <a:off x="0" y="0"/>
-          <a:ext cx="0" cy="0"/>
-          <a:chOff x="0" y="0"/>
-          <a:chExt cx="0" cy="0"/>
-        </a:xfrm>
-      </p:grpSpPr>
-      <p:sp>
-        <p:nvSpPr>
-          <p:cNvPr id="118" name="Google Shape;118;p13"/>
-          <p:cNvSpPr/>
-          <p:nvPr/>
-        </p:nvSpPr>
-        <p:spPr>
-          <a:xfrm>
-            <a:off x="1095375" y="900000"/>
-            <a:ext cx="13000000" cy="700000"/>
-          </a:xfrm>
-          <a:prstGeom prst="rect">
-            <a:avLst/>
-          </a:prstGeom>
-          <a:noFill/>
-          <a:ln>
-            <a:noFill/>
-          </a:ln>
-        </p:spPr>
-        <p:txBody>
-          <a:bodyPr anchorCtr="0" anchor="t" bIns="0" lIns="0" spcFirstLastPara="1" rIns="0" wrap="square" tIns="0">
-            <a:noAutofit/>
-          </a:bodyPr>
-          <a:lstStyle/>
-          <a:p>
-            <a:pPr indent="0" lvl="0" marL="0" marR="0" rtl="0" algn="l">
-              <a:lnSpc>
-                <a:spcPct val="114285"/>
-              </a:lnSpc>
-              <a:spcBef>
-                <a:spcPts val="0"/>
-              </a:spcBef>
-              <a:spcAft>
-                <a:spcPts val="0"/>
-              </a:spcAft>
-              <a:buClr>
-                <a:srgbClr val="1A1A1A"/>
-              </a:buClr>
-              <a:buSzPts val="2800"/>
-              <a:buFont typeface="Montserrat"/>
-              <a:buNone/>
-            </a:pPr>
-            <a:r>
-              <a:rPr b="1" i="0" lang="en-US" sz="2800" u="none" cap="none" strike="noStrike">
-                <a:solidFill>
-                  <a:srgbClr val="1A1A1A"/>
-                </a:solidFill>
-                <a:latin typeface="Montserrat"/>
-                <a:ea typeface="Montserrat"/>
-                <a:cs typeface="Montserrat"/>
-                <a:sym typeface="Montserrat"/>
-              </a:rPr>
-              <a:t>System Architecture</a:t>
-            </a:r>
-            <a:endParaRPr/>
-          </a:p>
-        </p:txBody>
-      </p:sp>
-      <p:pic>
-        <p:nvPicPr>
-          <p:cNvPr id="119" name="Google Shape;119;p13"/>
-          <p:cNvPicPr preferRelativeResize="0"/>
-          <p:nvPr/>
-        </p:nvPicPr>
-        <p:blipFill rotWithShape="1">
-          <a:blip r:embed="rId3">
-            <a:alphaModFix/>
-          </a:blip>
-          <a:srcRect b="0" l="0" r="0" t="0"/>
-          <a:stretch/>
-        </p:blipFill>
-        <p:spPr>
-          <a:xfrm>
-            <a:off x="4343897" y="1600000"/>
-            <a:ext cx="9751478" cy="8295300"/>
-          </a:xfrm>
-          <a:prstGeom prst="rect">
-            <a:avLst/>
-          </a:prstGeom>
-          <a:noFill/>
-          <a:ln>
-            <a:noFill/>
-          </a:ln>
-        </p:spPr>
-      </p:pic>
-      <p:pic>
-        <p:nvPicPr>
-          <p:cNvPr id="120" name="Google Shape;120;p13"/>
-          <p:cNvPicPr preferRelativeResize="0"/>
-          <p:nvPr/>
-        </p:nvPicPr>
-        <p:blipFill rotWithShape="1">
-          <a:blip r:embed="rId4">
-            <a:alphaModFix/>
-          </a:blip>
-          <a:srcRect b="0" l="0" r="0" t="0"/>
-          <a:stretch/>
-        </p:blipFill>
-        <p:spPr>
-          <a:xfrm>
-            <a:off x="14900000" y="780000"/>
-            <a:ext cx="2480000" cy="720500"/>
-          </a:xfrm>
-          <a:prstGeom prst="rect">
-            <a:avLst/>
-          </a:prstGeom>
-          <a:noFill/>
-          <a:ln>
-            <a:noFill/>
-          </a:ln>
-        </p:spPr>
-      </p:pic>
-      <p:sp>
-        <p:nvSpPr>
-          <p:cNvPr id="121" name="Google Shape;121;p13"/>
-          <p:cNvSpPr/>
-          <p:nvPr/>
-        </p:nvSpPr>
-        <p:spPr>
-          <a:xfrm>
-            <a:off x="16400000" y="9550000"/>
-            <a:ext cx="1500000" cy="450000"/>
-          </a:xfrm>
-          <a:prstGeom prst="rect">
-            <a:avLst/>
-          </a:prstGeom>
-          <a:noFill/>
-          <a:ln>
-            <a:noFill/>
-          </a:ln>
-        </p:spPr>
-        <p:txBody>
-          <a:bodyPr anchorCtr="0" anchor="b" bIns="0" lIns="0" spcFirstLastPara="1" rIns="0" wrap="square" tIns="0">
-            <a:noAutofit/>
-          </a:bodyPr>
-          <a:lstStyle/>
-          <a:p>
-            <a:pPr indent="0" lvl="0" marL="0" marR="0" rtl="0" algn="r">
-              <a:spcBef>
-                <a:spcPts val="0"/>
-              </a:spcBef>
-              <a:spcAft>
-                <a:spcPts val="0"/>
-              </a:spcAft>
-              <a:buClr>
-                <a:srgbClr val="9AA3AB"/>
-              </a:buClr>
-              <a:buSzPts val="1300"/>
-              <a:buFont typeface="IBM Plex Mono"/>
-              <a:buNone/>
-            </a:pPr>
-            <a:r>
-              <a:rPr b="0" i="0" lang="en-US" sz="1300" u="none" cap="none" strike="noStrike">
+              <a:t>/</a:t>
+            </a:r>
+            <a:r>
+              <a:rPr lang="en-US" sz="1300">
                 <a:solidFill>
                   <a:srgbClr val="9AA3AB"/>
                 </a:solidFill>
@@ -5100,545 +3949,6 @@
                 <a:cs typeface="IBM Plex Mono"/>
                 <a:sym typeface="IBM Plex Mono"/>
               </a:rPr>
-              <a:t>1</a:t>
-            </a:r>
-            <a:r>
-              <a:rPr lang="en-US" sz="1300">
-                <a:solidFill>
-                  <a:srgbClr val="9AA3AB"/>
-                </a:solidFill>
-                <a:latin typeface="IBM Plex Mono"/>
-                <a:ea typeface="IBM Plex Mono"/>
-                <a:cs typeface="IBM Plex Mono"/>
-                <a:sym typeface="IBM Plex Mono"/>
-              </a:rPr>
-              <a:t>0</a:t>
-            </a:r>
-            <a:r>
-              <a:rPr b="0" i="0" lang="en-US" sz="1300" u="none" cap="none" strike="noStrike">
-                <a:solidFill>
-                  <a:srgbClr val="9AA3AB"/>
-                </a:solidFill>
-                <a:latin typeface="IBM Plex Mono"/>
-                <a:ea typeface="IBM Plex Mono"/>
-                <a:cs typeface="IBM Plex Mono"/>
-                <a:sym typeface="IBM Plex Mono"/>
-              </a:rPr>
-              <a:t>/</a:t>
-            </a:r>
-            <a:r>
-              <a:rPr lang="en-US" sz="1300">
-                <a:solidFill>
-                  <a:srgbClr val="9AA3AB"/>
-                </a:solidFill>
-                <a:latin typeface="IBM Plex Mono"/>
-                <a:ea typeface="IBM Plex Mono"/>
-                <a:cs typeface="IBM Plex Mono"/>
-                <a:sym typeface="IBM Plex Mono"/>
-              </a:rPr>
-              <a:t>13</a:t>
-            </a:r>
-            <a:endParaRPr/>
-          </a:p>
-        </p:txBody>
-      </p:sp>
-    </p:spTree>
-  </p:cSld>
-  <p:clrMapOvr>
-    <a:masterClrMapping/>
-  </p:clrMapOvr>
-</p:sld>
-</file>
-
-<file path=ppt/slides/slide12.xml><?xml version="1.0" encoding="utf-8"?>
-<p:sld xmlns:a="http://schemas.openxmlformats.org/drawingml/2006/main" xmlns:r="http://schemas.openxmlformats.org/officeDocument/2006/relationships" xmlns:mc="http://schemas.openxmlformats.org/markup-compatibility/2006" xmlns:mv="urn:schemas-microsoft-com:mac:vml" xmlns:p="http://schemas.openxmlformats.org/presentationml/2006/main" xmlns:c="http://schemas.openxmlformats.org/drawingml/2006/chart" xmlns:dgm="http://schemas.openxmlformats.org/drawingml/2006/diagram" xmlns:o="urn:schemas-microsoft-com:office:office" xmlns:v="urn:schemas-microsoft-com:vml" xmlns:pvml="urn:schemas-microsoft-com:office:powerpoint" xmlns:com="http://schemas.openxmlformats.org/drawingml/2006/compatibility" xmlns:p14="http://schemas.microsoft.com/office/powerpoint/2010/main" xmlns:p15="http://schemas.microsoft.com/office/powerpoint/2012/main" xmlns:ahyp="http://schemas.microsoft.com/office/drawing/2018/hyperlinkcolor">
-  <p:cSld>
-    <p:bg>
-      <p:bgPr>
-        <a:solidFill>
-          <a:srgbClr val="FFFFFF"/>
-        </a:solidFill>
-      </p:bgPr>
-    </p:bg>
-    <p:spTree>
-      <p:nvGrpSpPr>
-        <p:cNvPr id="125" name="Shape 125"/>
-        <p:cNvGrpSpPr/>
-        <p:nvPr/>
-      </p:nvGrpSpPr>
-      <p:grpSpPr>
-        <a:xfrm>
-          <a:off x="0" y="0"/>
-          <a:ext cx="0" cy="0"/>
-          <a:chOff x="0" y="0"/>
-          <a:chExt cx="0" cy="0"/>
-        </a:xfrm>
-      </p:grpSpPr>
-      <p:sp>
-        <p:nvSpPr>
-          <p:cNvPr id="126" name="Google Shape;126;p14"/>
-          <p:cNvSpPr/>
-          <p:nvPr/>
-        </p:nvSpPr>
-        <p:spPr>
-          <a:xfrm>
-            <a:off x="1095375" y="900000"/>
-            <a:ext cx="13000000" cy="700000"/>
-          </a:xfrm>
-          <a:prstGeom prst="rect">
-            <a:avLst/>
-          </a:prstGeom>
-          <a:noFill/>
-          <a:ln>
-            <a:noFill/>
-          </a:ln>
-        </p:spPr>
-        <p:txBody>
-          <a:bodyPr anchorCtr="0" anchor="t" bIns="0" lIns="0" spcFirstLastPara="1" rIns="0" wrap="square" tIns="0">
-            <a:noAutofit/>
-          </a:bodyPr>
-          <a:lstStyle/>
-          <a:p>
-            <a:pPr indent="0" lvl="0" marL="0" rtl="0" algn="l">
-              <a:lnSpc>
-                <a:spcPct val="114285"/>
-              </a:lnSpc>
-              <a:spcBef>
-                <a:spcPts val="0"/>
-              </a:spcBef>
-              <a:spcAft>
-                <a:spcPts val="0"/>
-              </a:spcAft>
-              <a:buClr>
-                <a:srgbClr val="1A1A1A"/>
-              </a:buClr>
-              <a:buSzPts val="2800"/>
-              <a:buFont typeface="Montserrat"/>
-              <a:buNone/>
-            </a:pPr>
-            <a:r>
-              <a:rPr b="1" lang="en-US" sz="2800">
-                <a:solidFill>
-                  <a:srgbClr val="1A1A1A"/>
-                </a:solidFill>
-                <a:latin typeface="Montserrat"/>
-                <a:ea typeface="Montserrat"/>
-                <a:cs typeface="Montserrat"/>
-                <a:sym typeface="Montserrat"/>
-              </a:rPr>
-              <a:t>Implementation results</a:t>
-            </a:r>
-            <a:endParaRPr/>
-          </a:p>
-        </p:txBody>
-      </p:sp>
-      <p:sp>
-        <p:nvSpPr>
-          <p:cNvPr id="127" name="Google Shape;127;p14"/>
-          <p:cNvSpPr/>
-          <p:nvPr/>
-        </p:nvSpPr>
-        <p:spPr>
-          <a:xfrm>
-            <a:off x="1095375" y="2167875"/>
-            <a:ext cx="16043700" cy="1002300"/>
-          </a:xfrm>
-          <a:prstGeom prst="roundRect">
-            <a:avLst>
-              <a:gd fmla="val 6000" name="adj"/>
-            </a:avLst>
-          </a:prstGeom>
-          <a:solidFill>
-            <a:srgbClr val="40BA21"/>
-          </a:solidFill>
-          <a:ln>
-            <a:noFill/>
-          </a:ln>
-        </p:spPr>
-        <p:txBody>
-          <a:bodyPr anchorCtr="0" anchor="ctr" bIns="434000" lIns="620000" spcFirstLastPara="1" rIns="620000" wrap="square" tIns="434000">
-            <a:noAutofit/>
-          </a:bodyPr>
-          <a:lstStyle/>
-          <a:p>
-            <a:pPr indent="0" lvl="0" marL="0" marR="0" rtl="0" algn="l">
-              <a:lnSpc>
-                <a:spcPct val="131578"/>
-              </a:lnSpc>
-              <a:spcBef>
-                <a:spcPts val="0"/>
-              </a:spcBef>
-              <a:spcAft>
-                <a:spcPts val="0"/>
-              </a:spcAft>
-              <a:buNone/>
-            </a:pPr>
-            <a:r>
-              <a:rPr b="0" i="0" lang="en-US" sz="1900" u="none" cap="none" strike="noStrike">
-                <a:solidFill>
-                  <a:srgbClr val="FFFFFF"/>
-                </a:solidFill>
-                <a:latin typeface="IBM Plex Sans Medium"/>
-                <a:ea typeface="IBM Plex Sans Medium"/>
-                <a:cs typeface="IBM Plex Sans Medium"/>
-                <a:sym typeface="IBM Plex Sans Medium"/>
-              </a:rPr>
-              <a:t>The system was running on a Linux host inside a Podman container. Virtualized using QEMU</a:t>
-            </a:r>
-            <a:r>
-              <a:rPr lang="en-US" sz="1900">
-                <a:solidFill>
-                  <a:srgbClr val="FFFFFF"/>
-                </a:solidFill>
-                <a:latin typeface="IBM Plex Sans Medium"/>
-                <a:ea typeface="IBM Plex Sans Medium"/>
-                <a:cs typeface="IBM Plex Sans Medium"/>
-                <a:sym typeface="IBM Plex Sans Medium"/>
-              </a:rPr>
-              <a:t> with options for AES/SHA hardware acceleration and virtual NVMe usage </a:t>
-            </a:r>
-            <a:endParaRPr/>
-          </a:p>
-        </p:txBody>
-      </p:sp>
-      <p:sp>
-        <p:nvSpPr>
-          <p:cNvPr id="128" name="Google Shape;128;p14"/>
-          <p:cNvSpPr/>
-          <p:nvPr/>
-        </p:nvSpPr>
-        <p:spPr>
-          <a:xfrm>
-            <a:off x="1095375" y="3566900"/>
-            <a:ext cx="7119900" cy="2470500"/>
-          </a:xfrm>
-          <a:prstGeom prst="roundRect">
-            <a:avLst>
-              <a:gd fmla="val 6000" name="adj"/>
-            </a:avLst>
-          </a:prstGeom>
-          <a:solidFill>
-            <a:srgbClr val="EEF1F4"/>
-          </a:solidFill>
-          <a:ln>
-            <a:noFill/>
-          </a:ln>
-        </p:spPr>
-        <p:txBody>
-          <a:bodyPr anchorCtr="0" anchor="ctr" bIns="392000" lIns="560000" spcFirstLastPara="1" rIns="560000" wrap="square" tIns="392000">
-            <a:noAutofit/>
-          </a:bodyPr>
-          <a:lstStyle/>
-          <a:p>
-            <a:pPr indent="0" lvl="0" marL="0" marR="0" rtl="0" algn="l">
-              <a:lnSpc>
-                <a:spcPct val="117499"/>
-              </a:lnSpc>
-              <a:spcBef>
-                <a:spcPts val="0"/>
-              </a:spcBef>
-              <a:spcAft>
-                <a:spcPts val="0"/>
-              </a:spcAft>
-              <a:buNone/>
-            </a:pPr>
-            <a:r>
-              <a:rPr b="1" lang="en-US" sz="2000">
-                <a:solidFill>
-                  <a:srgbClr val="2E8B16"/>
-                </a:solidFill>
-                <a:latin typeface="Montserrat SemiBold"/>
-                <a:ea typeface="Montserrat SemiBold"/>
-                <a:cs typeface="Montserrat SemiBold"/>
-                <a:sym typeface="Montserrat SemiBold"/>
-              </a:rPr>
-              <a:t>All functional checks were passed</a:t>
-            </a:r>
-            <a:endParaRPr/>
-          </a:p>
-          <a:p>
-            <a:pPr indent="-342900" lvl="0" marL="457200" rtl="0" algn="l">
-              <a:lnSpc>
-                <a:spcPct val="95833"/>
-              </a:lnSpc>
-              <a:spcBef>
-                <a:spcPts val="0"/>
-              </a:spcBef>
-              <a:spcAft>
-                <a:spcPts val="0"/>
-              </a:spcAft>
-              <a:buSzPts val="1800"/>
-              <a:buFont typeface="IBM Plex Sans"/>
-              <a:buChar char="●"/>
-            </a:pPr>
-            <a:r>
-              <a:rPr lang="en-US" sz="1800">
-                <a:solidFill>
-                  <a:srgbClr val="1A1A1A"/>
-                </a:solidFill>
-                <a:latin typeface="IBM Plex Sans"/>
-                <a:ea typeface="IBM Plex Sans"/>
-                <a:cs typeface="IBM Plex Sans"/>
-                <a:sym typeface="IBM Plex Sans"/>
-              </a:rPr>
-              <a:t>Normal boot / shutdown / restore cycle</a:t>
-            </a:r>
-            <a:endParaRPr sz="1800">
-              <a:solidFill>
-                <a:srgbClr val="1A1A1A"/>
-              </a:solidFill>
-              <a:latin typeface="IBM Plex Sans"/>
-              <a:ea typeface="IBM Plex Sans"/>
-              <a:cs typeface="IBM Plex Sans"/>
-              <a:sym typeface="IBM Plex Sans"/>
-            </a:endParaRPr>
-          </a:p>
-          <a:p>
-            <a:pPr indent="-336550" lvl="0" marL="457200" rtl="0" algn="l">
-              <a:lnSpc>
-                <a:spcPct val="95833"/>
-              </a:lnSpc>
-              <a:spcBef>
-                <a:spcPts val="0"/>
-              </a:spcBef>
-              <a:spcAft>
-                <a:spcPts val="0"/>
-              </a:spcAft>
-              <a:buClr>
-                <a:srgbClr val="1A1A1A"/>
-              </a:buClr>
-              <a:buSzPts val="1700"/>
-              <a:buFont typeface="IBM Plex Sans"/>
-              <a:buChar char="●"/>
-            </a:pPr>
-            <a:r>
-              <a:rPr lang="en-US" sz="1800">
-                <a:solidFill>
-                  <a:srgbClr val="1A1A1A"/>
-                </a:solidFill>
-                <a:latin typeface="IBM Plex Sans"/>
-                <a:ea typeface="IBM Plex Sans"/>
-                <a:cs typeface="IBM Plex Sans"/>
-                <a:sym typeface="IBM Plex Sans"/>
-              </a:rPr>
-              <a:t>Encrypted image cannot be mounted without key</a:t>
-            </a:r>
-            <a:endParaRPr sz="1800">
-              <a:solidFill>
-                <a:srgbClr val="1A1A1A"/>
-              </a:solidFill>
-              <a:latin typeface="IBM Plex Sans"/>
-              <a:ea typeface="IBM Plex Sans"/>
-              <a:cs typeface="IBM Plex Sans"/>
-              <a:sym typeface="IBM Plex Sans"/>
-            </a:endParaRPr>
-          </a:p>
-          <a:p>
-            <a:pPr indent="-342900" lvl="0" marL="457200" rtl="0" algn="l">
-              <a:lnSpc>
-                <a:spcPct val="95833"/>
-              </a:lnSpc>
-              <a:spcBef>
-                <a:spcPts val="0"/>
-              </a:spcBef>
-              <a:spcAft>
-                <a:spcPts val="0"/>
-              </a:spcAft>
-              <a:buClr>
-                <a:srgbClr val="1A1A1A"/>
-              </a:buClr>
-              <a:buSzPts val="1800"/>
-              <a:buFont typeface="IBM Plex Sans"/>
-              <a:buChar char="●"/>
-            </a:pPr>
-            <a:r>
-              <a:rPr lang="en-US" sz="1800">
-                <a:solidFill>
-                  <a:srgbClr val="1A1A1A"/>
-                </a:solidFill>
-                <a:latin typeface="IBM Plex Sans"/>
-                <a:ea typeface="IBM Plex Sans"/>
-                <a:cs typeface="IBM Plex Sans"/>
-                <a:sym typeface="IBM Plex Sans"/>
-              </a:rPr>
-              <a:t>Key/hash replacement attack — superblock not detected</a:t>
-            </a:r>
-            <a:endParaRPr sz="1800">
-              <a:solidFill>
-                <a:srgbClr val="1A1A1A"/>
-              </a:solidFill>
-              <a:latin typeface="IBM Plex Sans"/>
-              <a:ea typeface="IBM Plex Sans"/>
-              <a:cs typeface="IBM Plex Sans"/>
-              <a:sym typeface="IBM Plex Sans"/>
-            </a:endParaRPr>
-          </a:p>
-          <a:p>
-            <a:pPr indent="-342900" lvl="0" marL="457200" rtl="0" algn="l">
-              <a:lnSpc>
-                <a:spcPct val="95833"/>
-              </a:lnSpc>
-              <a:spcBef>
-                <a:spcPts val="0"/>
-              </a:spcBef>
-              <a:spcAft>
-                <a:spcPts val="0"/>
-              </a:spcAft>
-              <a:buClr>
-                <a:srgbClr val="1A1A1A"/>
-              </a:buClr>
-              <a:buSzPts val="1800"/>
-              <a:buFont typeface="IBM Plex Sans"/>
-              <a:buChar char="●"/>
-            </a:pPr>
-            <a:r>
-              <a:rPr lang="en-US" sz="1800">
-                <a:solidFill>
-                  <a:srgbClr val="1A1A1A"/>
-                </a:solidFill>
-                <a:latin typeface="IBM Plex Sans"/>
-                <a:ea typeface="IBM Plex Sans"/>
-                <a:cs typeface="IBM Plex Sans"/>
-                <a:sym typeface="IBM Plex Sans"/>
-              </a:rPr>
-              <a:t>Crash recovery via </a:t>
-            </a:r>
-            <a:r>
-              <a:rPr i="1" lang="en-US" sz="1800">
-                <a:solidFill>
-                  <a:srgbClr val="1A1A1A"/>
-                </a:solidFill>
-                <a:latin typeface="IBM Plex Sans"/>
-                <a:ea typeface="IBM Plex Sans"/>
-                <a:cs typeface="IBM Plex Sans"/>
-                <a:sym typeface="IBM Plex Sans"/>
-              </a:rPr>
-              <a:t>fsck</a:t>
-            </a:r>
-            <a:endParaRPr sz="1800">
-              <a:solidFill>
-                <a:srgbClr val="1A1A1A"/>
-              </a:solidFill>
-              <a:latin typeface="IBM Plex Sans"/>
-              <a:ea typeface="IBM Plex Sans"/>
-              <a:cs typeface="IBM Plex Sans"/>
-              <a:sym typeface="IBM Plex Sans"/>
-            </a:endParaRPr>
-          </a:p>
-        </p:txBody>
-      </p:sp>
-      <p:pic>
-        <p:nvPicPr>
-          <p:cNvPr id="129" name="Google Shape;129;p14"/>
-          <p:cNvPicPr preferRelativeResize="0"/>
-          <p:nvPr/>
-        </p:nvPicPr>
-        <p:blipFill rotWithShape="1">
-          <a:blip r:embed="rId3">
-            <a:alphaModFix/>
-          </a:blip>
-          <a:srcRect b="0" l="0" r="0" t="0"/>
-          <a:stretch/>
-        </p:blipFill>
-        <p:spPr>
-          <a:xfrm>
-            <a:off x="14900000" y="780000"/>
-            <a:ext cx="2480000" cy="720500"/>
-          </a:xfrm>
-          <a:prstGeom prst="rect">
-            <a:avLst/>
-          </a:prstGeom>
-          <a:noFill/>
-          <a:ln>
-            <a:noFill/>
-          </a:ln>
-        </p:spPr>
-      </p:pic>
-      <p:sp>
-        <p:nvSpPr>
-          <p:cNvPr id="130" name="Google Shape;130;p14"/>
-          <p:cNvSpPr/>
-          <p:nvPr/>
-        </p:nvSpPr>
-        <p:spPr>
-          <a:xfrm>
-            <a:off x="16400000" y="9550000"/>
-            <a:ext cx="1500000" cy="450000"/>
-          </a:xfrm>
-          <a:prstGeom prst="rect">
-            <a:avLst/>
-          </a:prstGeom>
-          <a:noFill/>
-          <a:ln>
-            <a:noFill/>
-          </a:ln>
-        </p:spPr>
-        <p:txBody>
-          <a:bodyPr anchorCtr="0" anchor="b" bIns="0" lIns="0" spcFirstLastPara="1" rIns="0" wrap="square" tIns="0">
-            <a:noAutofit/>
-          </a:bodyPr>
-          <a:lstStyle/>
-          <a:p>
-            <a:pPr indent="0" lvl="0" marL="0" marR="0" rtl="0" algn="r">
-              <a:spcBef>
-                <a:spcPts val="0"/>
-              </a:spcBef>
-              <a:spcAft>
-                <a:spcPts val="0"/>
-              </a:spcAft>
-              <a:buClr>
-                <a:srgbClr val="9AA3AB"/>
-              </a:buClr>
-              <a:buSzPts val="1300"/>
-              <a:buFont typeface="IBM Plex Mono"/>
-              <a:buNone/>
-            </a:pPr>
-            <a:r>
-              <a:rPr b="0" i="0" lang="en-US" sz="1300" u="none" cap="none" strike="noStrike">
-                <a:solidFill>
-                  <a:srgbClr val="9AA3AB"/>
-                </a:solidFill>
-                <a:latin typeface="IBM Plex Mono"/>
-                <a:ea typeface="IBM Plex Mono"/>
-                <a:cs typeface="IBM Plex Mono"/>
-                <a:sym typeface="IBM Plex Mono"/>
-              </a:rPr>
-              <a:t>1</a:t>
-            </a:r>
-            <a:r>
-              <a:rPr lang="en-US" sz="1300">
-                <a:solidFill>
-                  <a:srgbClr val="9AA3AB"/>
-                </a:solidFill>
-                <a:latin typeface="IBM Plex Mono"/>
-                <a:ea typeface="IBM Plex Mono"/>
-                <a:cs typeface="IBM Plex Mono"/>
-                <a:sym typeface="IBM Plex Mono"/>
-              </a:rPr>
-              <a:t>1</a:t>
-            </a:r>
-            <a:r>
-              <a:rPr b="0" i="0" lang="en-US" sz="1300" u="none" cap="none" strike="noStrike">
-                <a:solidFill>
-                  <a:srgbClr val="9AA3AB"/>
-                </a:solidFill>
-                <a:latin typeface="IBM Plex Mono"/>
-                <a:ea typeface="IBM Plex Mono"/>
-                <a:cs typeface="IBM Plex Mono"/>
-                <a:sym typeface="IBM Plex Mono"/>
-              </a:rPr>
-              <a:t>/</a:t>
-            </a:r>
-            <a:r>
-              <a:rPr lang="en-US" sz="1300">
-                <a:solidFill>
-                  <a:srgbClr val="9AA3AB"/>
-                </a:solidFill>
-                <a:latin typeface="IBM Plex Mono"/>
-                <a:ea typeface="IBM Plex Mono"/>
-                <a:cs typeface="IBM Plex Mono"/>
-                <a:sym typeface="IBM Plex Mono"/>
-              </a:rPr>
               <a:t>13</a:t>
             </a:r>
             <a:endParaRPr/>
@@ -5647,7 +3957,7 @@
       </p:sp>
       <p:graphicFrame>
         <p:nvGraphicFramePr>
-          <p:cNvPr id="131" name="Google Shape;131;p14"/>
+          <p:cNvPr id="129" name="Google Shape;129;p13"/>
           <p:cNvGraphicFramePr/>
           <p:nvPr/>
         </p:nvGraphicFramePr>
@@ -5660,7 +3970,7 @@
             <a:tbl>
               <a:tblPr>
                 <a:noFill/>
-                <a:tableStyleId>{9DCD8CC6-605B-463A-97F4-F1FC5EB6F047}</a:tableStyleId>
+                <a:tableStyleId>{16598436-0C82-461B-8716-D7F4A8F73A9F}</a:tableStyleId>
               </a:tblPr>
               <a:tblGrid>
                 <a:gridCol w="2152050"/>
@@ -5668,7 +3978,7 @@
                 <a:gridCol w="1499500"/>
                 <a:gridCol w="1514475"/>
               </a:tblGrid>
-              <a:tr h="937000">
+              <a:tr h="1038625">
                 <a:tc>
                   <a:txBody>
                     <a:bodyPr/>
@@ -5810,7 +4120,7 @@
                   </a:tcPr>
                 </a:tc>
               </a:tr>
-              <a:tr h="937000">
+              <a:tr h="1038625">
                 <a:tc>
                   <a:txBody>
                     <a:bodyPr/>
@@ -5952,7 +4262,7 @@
                   </a:tcPr>
                 </a:tc>
               </a:tr>
-              <a:tr h="937000">
+              <a:tr h="1038625">
                 <a:tc>
                   <a:txBody>
                     <a:bodyPr/>
@@ -6100,7 +4410,7 @@
       </p:graphicFrame>
       <p:sp>
         <p:nvSpPr>
-          <p:cNvPr id="132" name="Google Shape;132;p14"/>
+          <p:cNvPr id="130" name="Google Shape;130;p13"/>
           <p:cNvSpPr/>
           <p:nvPr/>
         </p:nvSpPr>
@@ -6245,14 +4555,14 @@
       </p:sp>
       <p:sp>
         <p:nvSpPr>
-          <p:cNvPr id="133" name="Google Shape;133;p14"/>
+          <p:cNvPr id="131" name="Google Shape;131;p13"/>
           <p:cNvSpPr/>
           <p:nvPr/>
         </p:nvSpPr>
         <p:spPr>
           <a:xfrm>
-            <a:off x="10019175" y="6420833"/>
-            <a:ext cx="7119900" cy="2811000"/>
+            <a:off x="10019175" y="6420824"/>
+            <a:ext cx="7119900" cy="3129300"/>
           </a:xfrm>
           <a:prstGeom prst="roundRect">
             <a:avLst>
@@ -6299,167 +4609,7 @@
                 <a:cs typeface="IBM Plex Sans Medium"/>
                 <a:sym typeface="IBM Plex Sans Medium"/>
               </a:rPr>
-              <a:t>Performance target  was not met. The reason requires additional investigation</a:t>
-            </a:r>
-            <a:endParaRPr sz="2000">
-              <a:solidFill>
-                <a:srgbClr val="FFFFFF"/>
-              </a:solidFill>
-              <a:latin typeface="IBM Plex Sans Medium"/>
-              <a:ea typeface="IBM Plex Sans Medium"/>
-              <a:cs typeface="IBM Plex Sans Medium"/>
-              <a:sym typeface="IBM Plex Sans Medium"/>
-            </a:endParaRPr>
-          </a:p>
-          <a:p>
-            <a:pPr indent="0" lvl="0" marL="0" marR="0" rtl="0" algn="l">
-              <a:lnSpc>
-                <a:spcPct val="126315"/>
-              </a:lnSpc>
-              <a:spcBef>
-                <a:spcPts val="0"/>
-              </a:spcBef>
-              <a:spcAft>
-                <a:spcPts val="0"/>
-              </a:spcAft>
-              <a:buClr>
-                <a:srgbClr val="FFFFFF"/>
-              </a:buClr>
-              <a:buSzPts val="1900"/>
-              <a:buFont typeface="Montserrat SemiBold"/>
-              <a:buNone/>
-            </a:pPr>
-            <a:r>
-              <a:rPr b="1" lang="en-US" sz="2000">
-                <a:solidFill>
-                  <a:srgbClr val="FFFFFF"/>
-                </a:solidFill>
-                <a:latin typeface="Montserrat SemiBold"/>
-                <a:ea typeface="Montserrat SemiBold"/>
-                <a:cs typeface="Montserrat SemiBold"/>
-                <a:sym typeface="Montserrat SemiBold"/>
-              </a:rPr>
-              <a:t>Possible:</a:t>
-            </a:r>
-            <a:endParaRPr b="1" sz="2000">
-              <a:solidFill>
-                <a:srgbClr val="FFFFFF"/>
-              </a:solidFill>
-              <a:latin typeface="Montserrat SemiBold"/>
-              <a:ea typeface="Montserrat SemiBold"/>
-              <a:cs typeface="Montserrat SemiBold"/>
-              <a:sym typeface="Montserrat SemiBold"/>
-            </a:endParaRPr>
-          </a:p>
-          <a:p>
-            <a:pPr indent="-342900" lvl="0" marL="457200" marR="0" rtl="0" algn="l">
-              <a:lnSpc>
-                <a:spcPct val="127777"/>
-              </a:lnSpc>
-              <a:spcBef>
-                <a:spcPts val="250"/>
-              </a:spcBef>
-              <a:spcAft>
-                <a:spcPts val="0"/>
-              </a:spcAft>
-              <a:buClr>
-                <a:srgbClr val="FFFFFF"/>
-              </a:buClr>
-              <a:buSzPts val="1800"/>
-              <a:buFont typeface="IBM Plex Sans"/>
-              <a:buChar char="●"/>
-            </a:pPr>
-            <a:r>
-              <a:rPr b="0" i="0" lang="en-US" sz="1800" u="none" cap="none" strike="noStrike">
-                <a:solidFill>
-                  <a:srgbClr val="FFFFFF"/>
-                </a:solidFill>
-                <a:latin typeface="IBM Plex Sans"/>
-                <a:ea typeface="IBM Plex Sans"/>
-                <a:cs typeface="IBM Plex Sans"/>
-                <a:sym typeface="IBM Plex Sans"/>
-              </a:rPr>
-              <a:t>Known Tresor limitation — no multithreading optimization and high complexity</a:t>
-            </a:r>
-            <a:endParaRPr sz="1800">
-              <a:solidFill>
-                <a:srgbClr val="FFFFFF"/>
-              </a:solidFill>
-              <a:latin typeface="IBM Plex Sans"/>
-              <a:ea typeface="IBM Plex Sans"/>
-              <a:cs typeface="IBM Plex Sans"/>
-              <a:sym typeface="IBM Plex Sans"/>
-            </a:endParaRPr>
-          </a:p>
-          <a:p>
-            <a:pPr indent="-342900" lvl="0" marL="457200" marR="0" rtl="0" algn="l">
-              <a:lnSpc>
-                <a:spcPct val="127777"/>
-              </a:lnSpc>
-              <a:spcBef>
-                <a:spcPts val="0"/>
-              </a:spcBef>
-              <a:spcAft>
-                <a:spcPts val="0"/>
-              </a:spcAft>
-              <a:buClr>
-                <a:srgbClr val="FFFFFF"/>
-              </a:buClr>
-              <a:buSzPts val="1800"/>
-              <a:buFont typeface="IBM Plex Sans"/>
-              <a:buChar char="●"/>
-            </a:pPr>
-            <a:r>
-              <a:rPr lang="en-US" sz="1800">
-                <a:solidFill>
-                  <a:srgbClr val="FFFFFF"/>
-                </a:solidFill>
-                <a:latin typeface="IBM Plex Sans"/>
-                <a:ea typeface="IBM Plex Sans"/>
-                <a:cs typeface="IBM Plex Sans"/>
-                <a:sym typeface="IBM Plex Sans"/>
-              </a:rPr>
-              <a:t>Scheduling issues</a:t>
-            </a:r>
-            <a:endParaRPr sz="1800">
-              <a:solidFill>
-                <a:srgbClr val="FFFFFF"/>
-              </a:solidFill>
-              <a:latin typeface="IBM Plex Sans"/>
-              <a:ea typeface="IBM Plex Sans"/>
-              <a:cs typeface="IBM Plex Sans"/>
-              <a:sym typeface="IBM Plex Sans"/>
-            </a:endParaRPr>
-          </a:p>
-          <a:p>
-            <a:pPr indent="-342900" lvl="0" marL="457200" marR="0" rtl="0" algn="l">
-              <a:lnSpc>
-                <a:spcPct val="127777"/>
-              </a:lnSpc>
-              <a:spcBef>
-                <a:spcPts val="0"/>
-              </a:spcBef>
-              <a:spcAft>
-                <a:spcPts val="0"/>
-              </a:spcAft>
-              <a:buClr>
-                <a:srgbClr val="FFFFFF"/>
-              </a:buClr>
-              <a:buSzPts val="1800"/>
-              <a:buFont typeface="IBM Plex Sans"/>
-              <a:buChar char="●"/>
-            </a:pPr>
-            <a:r>
-              <a:rPr lang="en-US" sz="1800">
-                <a:solidFill>
-                  <a:srgbClr val="FFFFFF"/>
-                </a:solidFill>
-                <a:latin typeface="IBM Plex Sans"/>
-                <a:ea typeface="IBM Plex Sans"/>
-                <a:cs typeface="IBM Plex Sans"/>
-                <a:sym typeface="IBM Plex Sans"/>
-              </a:rPr>
-              <a:t>Multi-level implementation</a:t>
+              <a:t>A performance bug was found during the implementation. Reasons require additional investigation. One of them is a known optimization issue in Tresor</a:t>
             </a:r>
             <a:endParaRPr sz="1800">
               <a:solidFill>
@@ -6481,12 +4631,12 @@
 </p:sld>
 </file>
 
-<file path=ppt/slides/slide13.xml><?xml version="1.0" encoding="utf-8"?>
+<file path=ppt/slides/slide12.xml><?xml version="1.0" encoding="utf-8"?>
 <p:sld xmlns:a="http://schemas.openxmlformats.org/drawingml/2006/main" xmlns:r="http://schemas.openxmlformats.org/officeDocument/2006/relationships" xmlns:mc="http://schemas.openxmlformats.org/markup-compatibility/2006" xmlns:mv="urn:schemas-microsoft-com:mac:vml" xmlns:p="http://schemas.openxmlformats.org/presentationml/2006/main" xmlns:c="http://schemas.openxmlformats.org/drawingml/2006/chart" xmlns:dgm="http://schemas.openxmlformats.org/drawingml/2006/diagram" xmlns:o="urn:schemas-microsoft-com:office:office" xmlns:v="urn:schemas-microsoft-com:vml" xmlns:pvml="urn:schemas-microsoft-com:office:powerpoint" xmlns:com="http://schemas.openxmlformats.org/drawingml/2006/compatibility" xmlns:p14="http://schemas.microsoft.com/office/powerpoint/2010/main" xmlns:p15="http://schemas.microsoft.com/office/powerpoint/2012/main" xmlns:ahyp="http://schemas.microsoft.com/office/drawing/2018/hyperlinkcolor">
   <p:cSld>
     <p:spTree>
       <p:nvGrpSpPr>
-        <p:cNvPr id="137" name="Shape 137"/>
+        <p:cNvPr id="135" name="Shape 135"/>
         <p:cNvGrpSpPr/>
         <p:nvPr/>
       </p:nvGrpSpPr>
@@ -6500,7 +4650,7 @@
       </p:grpSpPr>
       <p:sp>
         <p:nvSpPr>
-          <p:cNvPr id="138" name="Google Shape;138;p15"/>
+          <p:cNvPr id="136" name="Google Shape;136;p14"/>
           <p:cNvSpPr/>
           <p:nvPr/>
         </p:nvSpPr>
@@ -6578,14 +4728,14 @@
       </p:sp>
       <p:sp>
         <p:nvSpPr>
-          <p:cNvPr id="139" name="Google Shape;139;p15"/>
+          <p:cNvPr id="137" name="Google Shape;137;p14"/>
           <p:cNvSpPr/>
           <p:nvPr/>
         </p:nvSpPr>
         <p:spPr>
           <a:xfrm>
-            <a:off x="9493800" y="5541400"/>
-            <a:ext cx="8049900" cy="4008600"/>
+            <a:off x="9493875" y="2858500"/>
+            <a:ext cx="8049900" cy="2404200"/>
           </a:xfrm>
           <a:prstGeom prst="roundRect">
             <a:avLst>
@@ -6605,75 +4755,42 @@
           </a:bodyPr>
           <a:lstStyle/>
           <a:p>
-            <a:pPr indent="-342900" lvl="0" marL="342900" marR="0" rtl="0" algn="l">
+            <a:pPr indent="0" lvl="0" marL="0" rtl="0" algn="l">
               <a:lnSpc>
                 <a:spcPct val="130000"/>
               </a:lnSpc>
               <a:spcBef>
-                <a:spcPts val="0"/>
-              </a:spcBef>
-              <a:spcAft>
-                <a:spcPts val="0"/>
-              </a:spcAft>
-              <a:buClr>
-                <a:srgbClr val="FFFFFF"/>
-              </a:buClr>
-              <a:buSzPts val="2000"/>
-              <a:buFont typeface="Arial"/>
-              <a:buChar char="•"/>
-            </a:pPr>
-            <a:r>
-              <a:rPr b="1" lang="en-US" sz="2000">
-                <a:solidFill>
-                  <a:srgbClr val="FFFFFF"/>
-                </a:solidFill>
-                <a:latin typeface="Montserrat SemiBold"/>
-                <a:ea typeface="Montserrat SemiBold"/>
-                <a:cs typeface="Montserrat SemiBold"/>
-                <a:sym typeface="Montserrat SemiBold"/>
-              </a:rPr>
-              <a:t>Semi-enclosed environment model</a:t>
-            </a:r>
-            <a:r>
-              <a:rPr b="1" i="0" lang="en-US" sz="2000" u="none" cap="none" strike="noStrike">
-                <a:solidFill>
-                  <a:srgbClr val="FFFFFF"/>
-                </a:solidFill>
-                <a:latin typeface="Montserrat SemiBold"/>
-                <a:ea typeface="Montserrat SemiBold"/>
-                <a:cs typeface="Montserrat SemiBold"/>
-                <a:sym typeface="Montserrat SemiBold"/>
-              </a:rPr>
-              <a:t> </a:t>
-            </a:r>
-            <a:r>
-              <a:rPr b="1" lang="en-US" sz="2000">
-                <a:solidFill>
-                  <a:srgbClr val="FFFFFF"/>
-                </a:solidFill>
-                <a:latin typeface="Montserrat SemiBold"/>
-                <a:ea typeface="Montserrat SemiBold"/>
-                <a:cs typeface="Montserrat SemiBold"/>
-                <a:sym typeface="Montserrat SemiBold"/>
-              </a:rPr>
-              <a:t>was</a:t>
-            </a:r>
-            <a:r>
-              <a:rPr b="1" i="0" lang="en-US" sz="2000" u="none" cap="none" strike="noStrike">
-                <a:solidFill>
-                  <a:srgbClr val="FFFFFF"/>
-                </a:solidFill>
-                <a:latin typeface="Montserrat SemiBold"/>
-                <a:ea typeface="Montserrat SemiBold"/>
-                <a:cs typeface="Montserrat SemiBold"/>
-                <a:sym typeface="Montserrat SemiBold"/>
-              </a:rPr>
-              <a:t> examined</a:t>
-            </a:r>
-            <a:endParaRPr/>
-          </a:p>
-          <a:p>
-            <a:pPr indent="-342900" lvl="0" marL="342900" marR="0" rtl="0" algn="l">
+                <a:spcPts val="900"/>
+              </a:spcBef>
+              <a:spcAft>
+                <a:spcPts val="0"/>
+              </a:spcAft>
+              <a:buNone/>
+            </a:pPr>
+            <a:r>
+              <a:rPr lang="en-US" sz="1900">
+                <a:solidFill>
+                  <a:schemeClr val="lt1"/>
+                </a:solidFill>
+                <a:latin typeface="IBM Plex Sans Medium"/>
+                <a:ea typeface="IBM Plex Sans Medium"/>
+                <a:cs typeface="IBM Plex Sans Medium"/>
+                <a:sym typeface="IBM Plex Sans Medium"/>
+              </a:rPr>
+              <a:t>The prototype demonstrates feasibility and functional protection, but is not production-ready.</a:t>
+            </a:r>
+            <a:endParaRPr sz="1900">
+              <a:solidFill>
+                <a:schemeClr val="lt1"/>
+              </a:solidFill>
+              <a:latin typeface="IBM Plex Sans Medium"/>
+              <a:ea typeface="IBM Plex Sans Medium"/>
+              <a:cs typeface="IBM Plex Sans Medium"/>
+              <a:sym typeface="IBM Plex Sans Medium"/>
+            </a:endParaRPr>
+          </a:p>
+          <a:p>
+            <a:pPr indent="0" lvl="0" marL="0" rtl="0" algn="l">
               <a:lnSpc>
                 <a:spcPct val="130000"/>
               </a:lnSpc>
@@ -6683,72 +4800,35 @@
               <a:spcAft>
                 <a:spcPts val="0"/>
               </a:spcAft>
-              <a:buClr>
-                <a:srgbClr val="FFFFFF"/>
-              </a:buClr>
-              <a:buSzPts val="2000"/>
-              <a:buFont typeface="Arial"/>
-              <a:buChar char="•"/>
-            </a:pPr>
-            <a:r>
-              <a:rPr b="1" i="0" lang="en-US" sz="2000" u="none" cap="none" strike="noStrike">
-                <a:solidFill>
-                  <a:srgbClr val="FFFFFF"/>
-                </a:solidFill>
-                <a:latin typeface="Montserrat SemiBold"/>
-                <a:ea typeface="Montserrat SemiBold"/>
-                <a:cs typeface="Montserrat SemiBold"/>
-                <a:sym typeface="Montserrat SemiBold"/>
-              </a:rPr>
-              <a:t>A security approach was selected</a:t>
-            </a:r>
-            <a:endParaRPr/>
-          </a:p>
-          <a:p>
-            <a:pPr indent="-342900" lvl="0" marL="342900" marR="0" rtl="0" algn="l">
-              <a:lnSpc>
-                <a:spcPct val="130000"/>
-              </a:lnSpc>
-              <a:spcBef>
-                <a:spcPts val="900"/>
-              </a:spcBef>
-              <a:spcAft>
-                <a:spcPts val="0"/>
-              </a:spcAft>
-              <a:buClr>
-                <a:srgbClr val="FFFFFF"/>
-              </a:buClr>
-              <a:buSzPts val="2000"/>
-              <a:buFont typeface="Arial"/>
-              <a:buChar char="•"/>
-            </a:pPr>
-            <a:r>
-              <a:rPr b="1" i="0" lang="en-US" sz="2000" u="none" cap="none" strike="noStrike">
-                <a:solidFill>
-                  <a:srgbClr val="FFFFFF"/>
-                </a:solidFill>
-                <a:latin typeface="Montserrat SemiBold"/>
-                <a:ea typeface="Montserrat SemiBold"/>
-                <a:cs typeface="Montserrat SemiBold"/>
-                <a:sym typeface="Montserrat SemiBold"/>
-              </a:rPr>
-              <a:t>Developed se_vault based on file_vault</a:t>
-            </a:r>
-            <a:endParaRPr b="1" i="0" sz="2000" u="none" cap="none" strike="noStrike">
+              <a:buNone/>
+            </a:pPr>
+            <a:r>
+              <a:rPr lang="en-US" sz="1900">
+                <a:solidFill>
+                  <a:schemeClr val="lt1"/>
+                </a:solidFill>
+                <a:latin typeface="IBM Plex Sans Medium"/>
+                <a:ea typeface="IBM Plex Sans Medium"/>
+                <a:cs typeface="IBM Plex Sans Medium"/>
+                <a:sym typeface="IBM Plex Sans Medium"/>
+              </a:rPr>
+              <a:t>The current overheads may be acceptable in certain scenarios</a:t>
+            </a:r>
+            <a:endParaRPr sz="1900">
               <a:solidFill>
-                <a:srgbClr val="FFFFFF"/>
+                <a:schemeClr val="lt1"/>
               </a:solidFill>
-              <a:latin typeface="Montserrat SemiBold"/>
-              <a:ea typeface="Montserrat SemiBold"/>
-              <a:cs typeface="Montserrat SemiBold"/>
-              <a:sym typeface="Montserrat SemiBold"/>
+              <a:latin typeface="IBM Plex Sans Medium"/>
+              <a:ea typeface="IBM Plex Sans Medium"/>
+              <a:cs typeface="IBM Plex Sans Medium"/>
+              <a:sym typeface="IBM Plex Sans Medium"/>
             </a:endParaRPr>
           </a:p>
         </p:txBody>
       </p:sp>
       <p:sp>
         <p:nvSpPr>
-          <p:cNvPr id="140" name="Google Shape;140;p15"/>
+          <p:cNvPr id="138" name="Google Shape;138;p14"/>
           <p:cNvSpPr/>
           <p:nvPr/>
         </p:nvSpPr>
@@ -6932,7 +5012,7 @@
                 <a:cs typeface="IBM Plex Sans"/>
                 <a:sym typeface="IBM Plex Sans"/>
               </a:rPr>
-              <a:t>investigate the problem with implementation</a:t>
+              <a:t>investigate the problem</a:t>
             </a:r>
             <a:r>
               <a:rPr b="0" i="0" lang="en-US" sz="1900" u="none" cap="none" strike="noStrike">
@@ -6976,23 +5056,63 @@
                 <a:cs typeface="IBM Plex Sans"/>
                 <a:sym typeface="IBM Plex Sans"/>
               </a:rPr>
-              <a:t>Merge Snapper and Tresor snapshot concepts; bring the PoC to industrial scale</a:t>
-            </a:r>
-            <a:endParaRPr b="0" i="0" sz="1900" u="none" cap="none" strike="noStrike">
+              <a:t>Merge Snapper and Tresor snapshot concepts;</a:t>
+            </a:r>
+            <a:endParaRPr sz="1900">
               <a:solidFill>
                 <a:schemeClr val="dk1"/>
               </a:solidFill>
-              <a:latin typeface="Calibri"/>
-              <a:ea typeface="Calibri"/>
-              <a:cs typeface="Calibri"/>
-              <a:sym typeface="Calibri"/>
+              <a:latin typeface="IBM Plex Sans"/>
+              <a:ea typeface="IBM Plex Sans"/>
+              <a:cs typeface="IBM Plex Sans"/>
+              <a:sym typeface="IBM Plex Sans"/>
+            </a:endParaRPr>
+          </a:p>
+          <a:p>
+            <a:pPr indent="-279400" lvl="0" marL="285750" marR="0" rtl="0" algn="l">
+              <a:lnSpc>
+                <a:spcPct val="115000"/>
+              </a:lnSpc>
+              <a:spcBef>
+                <a:spcPts val="300"/>
+              </a:spcBef>
+              <a:spcAft>
+                <a:spcPts val="0"/>
+              </a:spcAft>
+              <a:buClr>
+                <a:schemeClr val="dk1"/>
+              </a:buClr>
+              <a:buSzPts val="1900"/>
+              <a:buFont typeface="Arial"/>
+              <a:buChar char="•"/>
+            </a:pPr>
+            <a:r>
+              <a:rPr lang="en-US" sz="1900">
+                <a:solidFill>
+                  <a:schemeClr val="dk1"/>
+                </a:solidFill>
+                <a:latin typeface="IBM Plex Sans"/>
+                <a:ea typeface="IBM Plex Sans"/>
+                <a:cs typeface="IBM Plex Sans"/>
+                <a:sym typeface="IBM Plex Sans"/>
+              </a:rPr>
+              <a:t>Consider other scenarios or additions to the current one, including alternative access options and hardware configurations</a:t>
+            </a:r>
+            <a:endParaRPr sz="1900">
+              <a:solidFill>
+                <a:schemeClr val="dk1"/>
+              </a:solidFill>
+              <a:latin typeface="IBM Plex Sans"/>
+              <a:ea typeface="IBM Plex Sans"/>
+              <a:cs typeface="IBM Plex Sans"/>
+              <a:sym typeface="IBM Plex Sans"/>
             </a:endParaRPr>
           </a:p>
         </p:txBody>
       </p:sp>
       <p:pic>
         <p:nvPicPr>
-          <p:cNvPr id="141" name="Google Shape;141;p15"/>
+          <p:cNvPr id="139" name="Google Shape;139;p14"/>
           <p:cNvPicPr preferRelativeResize="0"/>
           <p:nvPr/>
         </p:nvPicPr>
@@ -7019,7 +5139,7 @@
       </p:pic>
       <p:sp>
         <p:nvSpPr>
-          <p:cNvPr id="142" name="Google Shape;142;p15"/>
+          <p:cNvPr id="140" name="Google Shape;140;p14"/>
           <p:cNvSpPr/>
           <p:nvPr/>
         </p:nvSpPr>
@@ -7110,7 +5230,7 @@
       </p:sp>
       <p:sp>
         <p:nvSpPr>
-          <p:cNvPr id="143" name="Google Shape;143;p15"/>
+          <p:cNvPr id="141" name="Google Shape;141;p14"/>
           <p:cNvSpPr/>
           <p:nvPr/>
         </p:nvSpPr>
@@ -7360,14 +5480,14 @@
       </p:sp>
       <p:sp>
         <p:nvSpPr>
-          <p:cNvPr id="144" name="Google Shape;144;p15"/>
+          <p:cNvPr id="142" name="Google Shape;142;p14"/>
           <p:cNvSpPr/>
           <p:nvPr/>
         </p:nvSpPr>
         <p:spPr>
           <a:xfrm>
-            <a:off x="9493800" y="2858525"/>
-            <a:ext cx="8049900" cy="2404200"/>
+            <a:off x="9493875" y="5541400"/>
+            <a:ext cx="8049900" cy="4008600"/>
           </a:xfrm>
           <a:prstGeom prst="roundRect">
             <a:avLst>
@@ -7387,38 +5507,73 @@
           </a:bodyPr>
           <a:lstStyle/>
           <a:p>
-            <a:pPr indent="0" lvl="0" marL="0" marR="0" rtl="0" algn="l">
-              <a:lnSpc>
-                <a:spcPct val="131707"/>
-              </a:lnSpc>
-              <a:spcBef>
-                <a:spcPts val="0"/>
-              </a:spcBef>
-              <a:spcAft>
-                <a:spcPts val="0"/>
-              </a:spcAft>
-              <a:buClr>
-                <a:srgbClr val="FFFFFF"/>
-              </a:buClr>
-              <a:buSzPts val="2050"/>
+            <a:pPr indent="0" lvl="0" marL="0" rtl="0" algn="l">
+              <a:lnSpc>
+                <a:spcPct val="130000"/>
+              </a:lnSpc>
+              <a:spcBef>
+                <a:spcPts val="900"/>
+              </a:spcBef>
+              <a:spcAft>
+                <a:spcPts val="0"/>
+              </a:spcAft>
+              <a:buNone/>
+            </a:pPr>
+            <a:r>
+              <a:rPr b="1" lang="en-US" sz="1900">
+                <a:solidFill>
+                  <a:schemeClr val="lt1"/>
+                </a:solidFill>
+                <a:latin typeface="Montserrat SemiBold"/>
+                <a:ea typeface="Montserrat SemiBold"/>
+                <a:cs typeface="Montserrat SemiBold"/>
+                <a:sym typeface="Montserrat SemiBold"/>
+              </a:rPr>
+              <a:t>Results:</a:t>
+            </a:r>
+            <a:endParaRPr b="1" sz="1900">
+              <a:solidFill>
+                <a:schemeClr val="lt1"/>
+              </a:solidFill>
+              <a:latin typeface="Montserrat SemiBold"/>
+              <a:ea typeface="Montserrat SemiBold"/>
+              <a:cs typeface="Montserrat SemiBold"/>
+              <a:sym typeface="Montserrat SemiBold"/>
+            </a:endParaRPr>
+          </a:p>
+          <a:p>
+            <a:pPr indent="-349250" lvl="0" marL="457200" rtl="0" algn="l">
+              <a:lnSpc>
+                <a:spcPct val="130000"/>
+              </a:lnSpc>
+              <a:spcBef>
+                <a:spcPts val="900"/>
+              </a:spcBef>
+              <a:spcAft>
+                <a:spcPts val="0"/>
+              </a:spcAft>
+              <a:buClr>
+                <a:schemeClr val="lt1"/>
+              </a:buClr>
+              <a:buSzPts val="1900"/>
               <a:buFont typeface="IBM Plex Sans Medium"/>
-              <a:buNone/>
-            </a:pPr>
-            <a:r>
-              <a:rPr b="0" i="0" lang="en-US" sz="2000" u="none" cap="none" strike="noStrike">
-                <a:solidFill>
-                  <a:srgbClr val="FFFFFF"/>
+              <a:buChar char="•"/>
+            </a:pPr>
+            <a:r>
+              <a:rPr lang="en-US" sz="1900">
+                <a:solidFill>
+                  <a:schemeClr val="lt1"/>
                 </a:solidFill>
                 <a:latin typeface="IBM Plex Sans Medium"/>
                 <a:ea typeface="IBM Plex Sans Medium"/>
                 <a:cs typeface="IBM Plex Sans Medium"/>
                 <a:sym typeface="IBM Plex Sans Medium"/>
               </a:rPr>
-              <a:t>The prototype demonstrates feasibility and functional protection, but is not production-ready.</a:t>
-            </a:r>
-            <a:endParaRPr sz="2000">
+              <a:t>Computer usage scenarios have been described and classified</a:t>
+            </a:r>
+            <a:endParaRPr sz="1900">
               <a:solidFill>
-                <a:srgbClr val="FFFFFF"/>
+                <a:schemeClr val="lt1"/>
               </a:solidFill>
               <a:latin typeface="IBM Plex Sans Medium"/>
               <a:ea typeface="IBM Plex Sans Medium"/>
@@ -7427,54 +5582,125 @@
             </a:endParaRPr>
           </a:p>
           <a:p>
-            <a:pPr indent="0" lvl="0" marL="0" marR="0" rtl="0" algn="l">
-              <a:lnSpc>
-                <a:spcPct val="131707"/>
-              </a:lnSpc>
-              <a:spcBef>
-                <a:spcPts val="0"/>
-              </a:spcBef>
-              <a:spcAft>
-                <a:spcPts val="0"/>
-              </a:spcAft>
-              <a:buClr>
-                <a:srgbClr val="FFFFFF"/>
-              </a:buClr>
-              <a:buSzPts val="2050"/>
+            <a:pPr indent="-349250" lvl="0" marL="457200" rtl="0" algn="l">
+              <a:lnSpc>
+                <a:spcPct val="130000"/>
+              </a:lnSpc>
+              <a:spcBef>
+                <a:spcPts val="900"/>
+              </a:spcBef>
+              <a:spcAft>
+                <a:spcPts val="0"/>
+              </a:spcAft>
+              <a:buClr>
+                <a:schemeClr val="lt1"/>
+              </a:buClr>
+              <a:buSzPts val="1900"/>
               <a:buFont typeface="IBM Plex Sans Medium"/>
-              <a:buNone/>
-            </a:pPr>
-            <a:r>
-              <a:rPr lang="en-US" sz="2000">
-                <a:solidFill>
-                  <a:srgbClr val="FFFFFF"/>
+              <a:buChar char="•"/>
+            </a:pPr>
+            <a:r>
+              <a:rPr lang="en-US" sz="1900">
+                <a:solidFill>
+                  <a:schemeClr val="lt1"/>
                 </a:solidFill>
                 <a:latin typeface="IBM Plex Sans Medium"/>
                 <a:ea typeface="IBM Plex Sans Medium"/>
                 <a:cs typeface="IBM Plex Sans Medium"/>
                 <a:sym typeface="IBM Plex Sans Medium"/>
               </a:rPr>
-              <a:t>T</a:t>
-            </a:r>
-            <a:r>
-              <a:rPr b="0" i="0" lang="en-US" sz="2000" u="none" cap="none" strike="noStrike">
-                <a:solidFill>
-                  <a:srgbClr val="FFFFFF"/>
+              <a:t>Scenarios requiring encryption and access analysis have been selected</a:t>
+            </a:r>
+            <a:endParaRPr sz="1900">
+              <a:solidFill>
+                <a:schemeClr val="lt1"/>
+              </a:solidFill>
+              <a:latin typeface="IBM Plex Sans Medium"/>
+              <a:ea typeface="IBM Plex Sans Medium"/>
+              <a:cs typeface="IBM Plex Sans Medium"/>
+              <a:sym typeface="IBM Plex Sans Medium"/>
+            </a:endParaRPr>
+          </a:p>
+          <a:p>
+            <a:pPr indent="-349250" lvl="0" marL="457200" rtl="0" algn="l">
+              <a:lnSpc>
+                <a:spcPct val="130000"/>
+              </a:lnSpc>
+              <a:spcBef>
+                <a:spcPts val="900"/>
+              </a:spcBef>
+              <a:spcAft>
+                <a:spcPts val="0"/>
+              </a:spcAft>
+              <a:buClr>
+                <a:schemeClr val="lt1"/>
+              </a:buClr>
+              <a:buSzPts val="1900"/>
+              <a:buFont typeface="IBM Plex Sans Medium"/>
+              <a:buChar char="•"/>
+            </a:pPr>
+            <a:r>
+              <a:rPr lang="en-US" sz="1900">
+                <a:solidFill>
+                  <a:schemeClr val="lt1"/>
                 </a:solidFill>
                 <a:latin typeface="IBM Plex Sans Medium"/>
                 <a:ea typeface="IBM Plex Sans Medium"/>
                 <a:cs typeface="IBM Plex Sans Medium"/>
                 <a:sym typeface="IBM Plex Sans Medium"/>
               </a:rPr>
-              <a:t>he current overheads may be acceptable in certain scenarios.</a:t>
-            </a:r>
-            <a:endParaRPr sz="2000"/>
+              <a:t>The applicability of the scenarios was experimentally confirmed based on a mock-up implementation</a:t>
+            </a:r>
+            <a:endParaRPr sz="1900">
+              <a:solidFill>
+                <a:schemeClr val="lt1"/>
+              </a:solidFill>
+              <a:latin typeface="IBM Plex Sans Medium"/>
+              <a:ea typeface="IBM Plex Sans Medium"/>
+              <a:cs typeface="IBM Plex Sans Medium"/>
+              <a:sym typeface="IBM Plex Sans Medium"/>
+            </a:endParaRPr>
+          </a:p>
+          <a:p>
+            <a:pPr indent="0" lvl="0" marL="0" rtl="0" algn="l">
+              <a:lnSpc>
+                <a:spcPct val="130000"/>
+              </a:lnSpc>
+              <a:spcBef>
+                <a:spcPts val="900"/>
+              </a:spcBef>
+              <a:spcAft>
+                <a:spcPts val="0"/>
+              </a:spcAft>
+              <a:buNone/>
+            </a:pPr>
+            <a:r>
+              <a:rPr lang="en-US" sz="1900">
+                <a:solidFill>
+                  <a:schemeClr val="lt1"/>
+                </a:solidFill>
+                <a:latin typeface="IBM Plex Sans Medium"/>
+                <a:ea typeface="IBM Plex Sans Medium"/>
+                <a:cs typeface="IBM Plex Sans Medium"/>
+                <a:sym typeface="IBM Plex Sans Medium"/>
+              </a:rPr>
+              <a:t>Objectives of the work mostly achieved. The only issue is a bug in the implementation </a:t>
+            </a:r>
+            <a:endParaRPr sz="1900">
+              <a:solidFill>
+                <a:schemeClr val="lt1"/>
+              </a:solidFill>
+              <a:latin typeface="IBM Plex Sans Medium"/>
+              <a:ea typeface="IBM Plex Sans Medium"/>
+              <a:cs typeface="IBM Plex Sans Medium"/>
+              <a:sym typeface="IBM Plex Sans Medium"/>
+            </a:endParaRPr>
           </a:p>
         </p:txBody>
       </p:sp>
       <p:sp>
         <p:nvSpPr>
-          <p:cNvPr id="145" name="Google Shape;145;p15"/>
+          <p:cNvPr id="143" name="Google Shape;143;p14"/>
           <p:cNvSpPr/>
           <p:nvPr/>
         </p:nvSpPr>
@@ -7523,7 +5749,19 @@
                 <a:cs typeface="Montserrat SemiBold"/>
                 <a:sym typeface="Montserrat SemiBold"/>
               </a:rPr>
-              <a:t>4 of 5 requirements met; Consistent with the considered scenario </a:t>
+              <a:t>4 of 5 requirements met; Consistent with the considered scenari</a:t>
+            </a:r>
+            <a:r>
+              <a:rPr b="1" i="0" lang="en-US" sz="2200" u="none" cap="none" strike="noStrike">
+                <a:solidFill>
+                  <a:srgbClr val="FFFFFF"/>
+                </a:solidFill>
+                <a:latin typeface="Montserrat SemiBold"/>
+                <a:ea typeface="Montserrat SemiBold"/>
+                <a:cs typeface="Montserrat SemiBold"/>
+                <a:sym typeface="Montserrat SemiBold"/>
+              </a:rPr>
+              <a:t>o</a:t>
             </a:r>
             <a:endParaRPr b="1" i="0" sz="2200" u="none" cap="none" strike="noStrike">
               <a:solidFill>
@@ -7545,7 +5783,7 @@
 </p:sld>
 </file>
 
-<file path=ppt/slides/slide14.xml><?xml version="1.0" encoding="utf-8"?>
+<file path=ppt/slides/slide13.xml><?xml version="1.0" encoding="utf-8"?>
 <p:sld xmlns:a="http://schemas.openxmlformats.org/drawingml/2006/main" xmlns:r="http://schemas.openxmlformats.org/officeDocument/2006/relationships" xmlns:mc="http://schemas.openxmlformats.org/markup-compatibility/2006" xmlns:mv="urn:schemas-microsoft-com:mac:vml" xmlns:p="http://schemas.openxmlformats.org/presentationml/2006/main" xmlns:c="http://schemas.openxmlformats.org/drawingml/2006/chart" xmlns:dgm="http://schemas.openxmlformats.org/drawingml/2006/diagram" xmlns:o="urn:schemas-microsoft-com:office:office" xmlns:v="urn:schemas-microsoft-com:vml" xmlns:pvml="urn:schemas-microsoft-com:office:powerpoint" xmlns:com="http://schemas.openxmlformats.org/drawingml/2006/compatibility" xmlns:p14="http://schemas.microsoft.com/office/powerpoint/2010/main" xmlns:p15="http://schemas.microsoft.com/office/powerpoint/2012/main" xmlns:ahyp="http://schemas.microsoft.com/office/drawing/2018/hyperlinkcolor">
   <p:cSld>
     <p:bg>
@@ -7557,7 +5795,7 @@
     </p:bg>
     <p:spTree>
       <p:nvGrpSpPr>
-        <p:cNvPr id="149" name="Shape 149"/>
+        <p:cNvPr id="147" name="Shape 147"/>
         <p:cNvGrpSpPr/>
         <p:nvPr/>
       </p:nvGrpSpPr>
@@ -7571,7 +5809,7 @@
       </p:grpSpPr>
       <p:pic>
         <p:nvPicPr>
-          <p:cNvPr descr="preencoded.png" id="150" name="Google Shape;150;p16"/>
+          <p:cNvPr descr="preencoded.png" id="148" name="Google Shape;148;p15"/>
           <p:cNvPicPr preferRelativeResize="0"/>
           <p:nvPr/>
         </p:nvPicPr>
@@ -7598,7 +5836,7 @@
       </p:pic>
       <p:pic>
         <p:nvPicPr>
-          <p:cNvPr descr="preencoded.png" id="151" name="Google Shape;151;p16"/>
+          <p:cNvPr descr="preencoded.png" id="149" name="Google Shape;149;p15"/>
           <p:cNvPicPr preferRelativeResize="0"/>
           <p:nvPr/>
         </p:nvPicPr>
@@ -7625,7 +5863,7 @@
       </p:pic>
       <p:pic>
         <p:nvPicPr>
-          <p:cNvPr descr="preencoded.png" id="152" name="Google Shape;152;p16"/>
+          <p:cNvPr descr="preencoded.png" id="150" name="Google Shape;150;p15"/>
           <p:cNvPicPr preferRelativeResize="0"/>
           <p:nvPr/>
         </p:nvPicPr>
@@ -7652,7 +5890,7 @@
       </p:pic>
       <p:pic>
         <p:nvPicPr>
-          <p:cNvPr descr="preencoded.png" id="153" name="Google Shape;153;p16"/>
+          <p:cNvPr descr="preencoded.png" id="151" name="Google Shape;151;p15"/>
           <p:cNvPicPr preferRelativeResize="0"/>
           <p:nvPr/>
         </p:nvPicPr>
@@ -7679,7 +5917,7 @@
       </p:pic>
       <p:pic>
         <p:nvPicPr>
-          <p:cNvPr descr="preencoded.png" id="154" name="Google Shape;154;p16"/>
+          <p:cNvPr descr="preencoded.png" id="152" name="Google Shape;152;p15"/>
           <p:cNvPicPr preferRelativeResize="0"/>
           <p:nvPr/>
         </p:nvPicPr>
@@ -7706,7 +5944,7 @@
       </p:pic>
       <p:sp>
         <p:nvSpPr>
-          <p:cNvPr id="155" name="Google Shape;155;p16"/>
+          <p:cNvPr id="153" name="Google Shape;153;p15"/>
           <p:cNvSpPr/>
           <p:nvPr/>
         </p:nvSpPr>
@@ -7772,7 +6010,7 @@
       </p:sp>
       <p:pic>
         <p:nvPicPr>
-          <p:cNvPr id="156" name="Google Shape;156;p16"/>
+          <p:cNvPr id="154" name="Google Shape;154;p15"/>
           <p:cNvPicPr preferRelativeResize="0"/>
           <p:nvPr/>
         </p:nvPicPr>
@@ -9019,7 +7257,7 @@
               <a:buNone/>
             </a:pPr>
             <a:r>
-              <a:rPr b="1" i="0" lang="en-US" sz="1900" u="none" cap="none" strike="noStrike">
+              <a:rPr b="1" lang="en-US" sz="1900">
                 <a:solidFill>
                   <a:schemeClr val="dk1"/>
                 </a:solidFill>
@@ -9028,7 +7266,7 @@
                 <a:cs typeface="Montserrat SemiBold"/>
                 <a:sym typeface="Montserrat SemiBold"/>
               </a:rPr>
-              <a:t>Consequences</a:t>
+              <a:t>Drawbacks</a:t>
             </a:r>
             <a:endParaRPr>
               <a:solidFill>
@@ -9938,7 +8176,43 @@
               </a:rPr>
               <a:t>3</a:t>
             </a:r>
-            <a:endParaRPr b="1" baseline="30000" i="0" sz="1000" u="none" cap="none" strike="noStrike">
+            <a:r>
+              <a:rPr baseline="30000" lang="en-US" sz="2100">
+                <a:solidFill>
+                  <a:srgbClr val="FFFFFF"/>
+                </a:solidFill>
+                <a:latin typeface="Montserrat Medium"/>
+                <a:ea typeface="Montserrat Medium"/>
+                <a:cs typeface="Montserrat Medium"/>
+                <a:sym typeface="Montserrat Medium"/>
+              </a:rPr>
+              <a:t> </a:t>
+            </a:r>
+            <a:r>
+              <a:rPr lang="en-US" sz="2100">
+                <a:solidFill>
+                  <a:srgbClr val="FFFFFF"/>
+                </a:solidFill>
+                <a:latin typeface="Montserrat Medium"/>
+                <a:ea typeface="Montserrat Medium"/>
+                <a:cs typeface="Montserrat Medium"/>
+                <a:sym typeface="Montserrat Medium"/>
+              </a:rPr>
+              <a:t>T</a:t>
+            </a:r>
+            <a:r>
+              <a:rPr lang="en-US" sz="2100">
+                <a:solidFill>
+                  <a:srgbClr val="FFFFFF"/>
+                </a:solidFill>
+                <a:latin typeface="Montserrat Medium"/>
+                <a:ea typeface="Montserrat Medium"/>
+                <a:cs typeface="Montserrat Medium"/>
+                <a:sym typeface="Montserrat Medium"/>
+              </a:rPr>
+              <a:t>his is out test platform</a:t>
+            </a:r>
+            <a:endParaRPr b="1" i="0" sz="1000" u="none" cap="none" strike="noStrike">
               <a:solidFill>
                 <a:srgbClr val="FFFFFF"/>
               </a:solidFill>
@@ -12367,6 +10641,132 @@
           </a:ln>
         </p:spPr>
       </p:pic>
+      <p:cxnSp>
+        <p:nvCxnSpPr>
+          <p:cNvPr id="76" name="Google Shape;76;p8"/>
+          <p:cNvCxnSpPr>
+            <a:stCxn id="77" idx="1"/>
+          </p:cNvCxnSpPr>
+          <p:nvPr/>
+        </p:nvCxnSpPr>
+        <p:spPr>
+          <a:xfrm rot="10800000">
+            <a:off x="12162725" y="2418100"/>
+            <a:ext cx="3326400" cy="1722900"/>
+          </a:xfrm>
+          <a:prstGeom prst="straightConnector1">
+            <a:avLst/>
+          </a:prstGeom>
+          <a:noFill/>
+          <a:ln cap="flat" cmpd="sng" w="76200">
+            <a:solidFill>
+              <a:srgbClr val="FF0000"/>
+            </a:solidFill>
+            <a:prstDash val="solid"/>
+            <a:round/>
+            <a:headEnd len="med" w="med" type="none"/>
+            <a:tailEnd len="med" w="med" type="triangle"/>
+          </a:ln>
+        </p:spPr>
+      </p:cxnSp>
+      <p:cxnSp>
+        <p:nvCxnSpPr>
+          <p:cNvPr id="78" name="Google Shape;78;p8"/>
+          <p:cNvCxnSpPr>
+            <a:stCxn id="77" idx="1"/>
+          </p:cNvCxnSpPr>
+          <p:nvPr/>
+        </p:nvCxnSpPr>
+        <p:spPr>
+          <a:xfrm flipH="1">
+            <a:off x="13349825" y="4141000"/>
+            <a:ext cx="2139300" cy="4724400"/>
+          </a:xfrm>
+          <a:prstGeom prst="straightConnector1">
+            <a:avLst/>
+          </a:prstGeom>
+          <a:noFill/>
+          <a:ln cap="flat" cmpd="sng" w="76200">
+            <a:solidFill>
+              <a:srgbClr val="E8401C"/>
+            </a:solidFill>
+            <a:prstDash val="solid"/>
+            <a:round/>
+            <a:headEnd len="med" w="med" type="none"/>
+            <a:tailEnd len="med" w="med" type="triangle"/>
+          </a:ln>
+        </p:spPr>
+      </p:cxnSp>
+      <p:sp>
+        <p:nvSpPr>
+          <p:cNvPr id="77" name="Google Shape;77;p8"/>
+          <p:cNvSpPr/>
+          <p:nvPr/>
+        </p:nvSpPr>
+        <p:spPr>
+          <a:xfrm>
+            <a:off x="15489125" y="3780700"/>
+            <a:ext cx="2696400" cy="720600"/>
+          </a:xfrm>
+          <a:prstGeom prst="roundRect">
+            <a:avLst>
+              <a:gd fmla="val 6000" name="adj"/>
+            </a:avLst>
+          </a:prstGeom>
+          <a:solidFill>
+            <a:srgbClr val="40BA21"/>
+          </a:solidFill>
+          <a:ln>
+            <a:noFill/>
+          </a:ln>
+        </p:spPr>
+        <p:txBody>
+          <a:bodyPr anchorCtr="0" anchor="ctr" bIns="364000" lIns="520000" spcFirstLastPara="1" rIns="520000" wrap="square" tIns="364000">
+            <a:noAutofit/>
+          </a:bodyPr>
+          <a:lstStyle/>
+          <a:p>
+            <a:pPr indent="0" lvl="0" marL="0" marR="0" rtl="0" algn="l">
+              <a:lnSpc>
+                <a:spcPct val="126315"/>
+              </a:lnSpc>
+              <a:spcBef>
+                <a:spcPts val="0"/>
+              </a:spcBef>
+              <a:spcAft>
+                <a:spcPts val="0"/>
+              </a:spcAft>
+              <a:buClr>
+                <a:srgbClr val="FFFFFF"/>
+              </a:buClr>
+              <a:buSzPts val="1900"/>
+              <a:buFont typeface="Montserrat SemiBold"/>
+              <a:buNone/>
+            </a:pPr>
+            <a:r>
+              <a:rPr lang="en-US" sz="2000">
+                <a:solidFill>
+                  <a:srgbClr val="FFFFFF"/>
+                </a:solidFill>
+                <a:latin typeface="IBM Plex Sans Medium"/>
+                <a:ea typeface="IBM Plex Sans Medium"/>
+                <a:cs typeface="IBM Plex Sans Medium"/>
+                <a:sym typeface="IBM Plex Sans Medium"/>
+              </a:rPr>
+              <a:t>We consieder this scenario</a:t>
+            </a:r>
+            <a:endParaRPr sz="1800">
+              <a:solidFill>
+                <a:srgbClr val="FFFFFF"/>
+              </a:solidFill>
+              <a:latin typeface="IBM Plex Sans"/>
+              <a:ea typeface="IBM Plex Sans"/>
+              <a:cs typeface="IBM Plex Sans"/>
+              <a:sym typeface="IBM Plex Sans"/>
+            </a:endParaRPr>
+          </a:p>
+        </p:txBody>
+      </p:sp>
     </p:spTree>
   </p:cSld>
   <p:clrMapOvr>
@@ -12387,7 +10787,7 @@
     </p:bg>
     <p:spTree>
       <p:nvGrpSpPr>
-        <p:cNvPr id="79" name="Shape 79"/>
+        <p:cNvPr id="82" name="Shape 82"/>
         <p:cNvGrpSpPr/>
         <p:nvPr/>
       </p:nvGrpSpPr>
@@ -12401,7 +10801,7 @@
       </p:grpSpPr>
       <p:sp>
         <p:nvSpPr>
-          <p:cNvPr id="80" name="Google Shape;80;p9"/>
+          <p:cNvPr id="83" name="Google Shape;83;p9"/>
           <p:cNvSpPr/>
           <p:nvPr/>
         </p:nvSpPr>
@@ -12471,7 +10871,7 @@
       </p:sp>
       <p:pic>
         <p:nvPicPr>
-          <p:cNvPr id="81" name="Google Shape;81;p9"/>
+          <p:cNvPr id="84" name="Google Shape;84;p9"/>
           <p:cNvPicPr preferRelativeResize="0"/>
           <p:nvPr/>
         </p:nvPicPr>
@@ -12498,7 +10898,7 @@
       </p:pic>
       <p:sp>
         <p:nvSpPr>
-          <p:cNvPr id="82" name="Google Shape;82;p9"/>
+          <p:cNvPr id="85" name="Google Shape;85;p9"/>
           <p:cNvSpPr/>
           <p:nvPr/>
         </p:nvSpPr>
@@ -12577,7 +10977,7 @@
       </p:sp>
       <p:pic>
         <p:nvPicPr>
-          <p:cNvPr id="83" name="Google Shape;83;p9"/>
+          <p:cNvPr id="86" name="Google Shape;86;p9"/>
           <p:cNvPicPr preferRelativeResize="0"/>
           <p:nvPr/>
         </p:nvPicPr>
@@ -12603,6 +11003,132 @@
           </a:ln>
         </p:spPr>
       </p:pic>
+      <p:cxnSp>
+        <p:nvCxnSpPr>
+          <p:cNvPr id="87" name="Google Shape;87;p9"/>
+          <p:cNvCxnSpPr>
+            <a:stCxn id="88" idx="1"/>
+          </p:cNvCxnSpPr>
+          <p:nvPr/>
+        </p:nvCxnSpPr>
+        <p:spPr>
+          <a:xfrm rot="10800000">
+            <a:off x="12162725" y="2418100"/>
+            <a:ext cx="3326400" cy="1722900"/>
+          </a:xfrm>
+          <a:prstGeom prst="straightConnector1">
+            <a:avLst/>
+          </a:prstGeom>
+          <a:noFill/>
+          <a:ln cap="flat" cmpd="sng" w="76200">
+            <a:solidFill>
+              <a:srgbClr val="FF0000"/>
+            </a:solidFill>
+            <a:prstDash val="solid"/>
+            <a:round/>
+            <a:headEnd len="med" w="med" type="none"/>
+            <a:tailEnd len="med" w="med" type="triangle"/>
+          </a:ln>
+        </p:spPr>
+      </p:cxnSp>
+      <p:cxnSp>
+        <p:nvCxnSpPr>
+          <p:cNvPr id="89" name="Google Shape;89;p9"/>
+          <p:cNvCxnSpPr>
+            <a:stCxn id="88" idx="1"/>
+          </p:cNvCxnSpPr>
+          <p:nvPr/>
+        </p:nvCxnSpPr>
+        <p:spPr>
+          <a:xfrm flipH="1">
+            <a:off x="13349825" y="4141000"/>
+            <a:ext cx="2139300" cy="4724400"/>
+          </a:xfrm>
+          <a:prstGeom prst="straightConnector1">
+            <a:avLst/>
+          </a:prstGeom>
+          <a:noFill/>
+          <a:ln cap="flat" cmpd="sng" w="76200">
+            <a:solidFill>
+              <a:srgbClr val="E8401C"/>
+            </a:solidFill>
+            <a:prstDash val="solid"/>
+            <a:round/>
+            <a:headEnd len="med" w="med" type="none"/>
+            <a:tailEnd len="med" w="med" type="triangle"/>
+          </a:ln>
+        </p:spPr>
+      </p:cxnSp>
+      <p:sp>
+        <p:nvSpPr>
+          <p:cNvPr id="88" name="Google Shape;88;p9"/>
+          <p:cNvSpPr/>
+          <p:nvPr/>
+        </p:nvSpPr>
+        <p:spPr>
+          <a:xfrm>
+            <a:off x="15489125" y="3780700"/>
+            <a:ext cx="2696400" cy="720600"/>
+          </a:xfrm>
+          <a:prstGeom prst="roundRect">
+            <a:avLst>
+              <a:gd fmla="val 6000" name="adj"/>
+            </a:avLst>
+          </a:prstGeom>
+          <a:solidFill>
+            <a:srgbClr val="40BA21"/>
+          </a:solidFill>
+          <a:ln>
+            <a:noFill/>
+          </a:ln>
+        </p:spPr>
+        <p:txBody>
+          <a:bodyPr anchorCtr="0" anchor="ctr" bIns="364000" lIns="520000" spcFirstLastPara="1" rIns="520000" wrap="square" tIns="364000">
+            <a:noAutofit/>
+          </a:bodyPr>
+          <a:lstStyle/>
+          <a:p>
+            <a:pPr indent="0" lvl="0" marL="0" marR="0" rtl="0" algn="l">
+              <a:lnSpc>
+                <a:spcPct val="126315"/>
+              </a:lnSpc>
+              <a:spcBef>
+                <a:spcPts val="0"/>
+              </a:spcBef>
+              <a:spcAft>
+                <a:spcPts val="0"/>
+              </a:spcAft>
+              <a:buClr>
+                <a:srgbClr val="FFFFFF"/>
+              </a:buClr>
+              <a:buSzPts val="1900"/>
+              <a:buFont typeface="Montserrat SemiBold"/>
+              <a:buNone/>
+            </a:pPr>
+            <a:r>
+              <a:rPr lang="en-US" sz="2000">
+                <a:solidFill>
+                  <a:srgbClr val="FFFFFF"/>
+                </a:solidFill>
+                <a:latin typeface="IBM Plex Sans Medium"/>
+                <a:ea typeface="IBM Plex Sans Medium"/>
+                <a:cs typeface="IBM Plex Sans Medium"/>
+                <a:sym typeface="IBM Plex Sans Medium"/>
+              </a:rPr>
+              <a:t>We consieder this scenario</a:t>
+            </a:r>
+            <a:endParaRPr sz="1800">
+              <a:solidFill>
+                <a:srgbClr val="FFFFFF"/>
+              </a:solidFill>
+              <a:latin typeface="IBM Plex Sans"/>
+              <a:ea typeface="IBM Plex Sans"/>
+              <a:cs typeface="IBM Plex Sans"/>
+              <a:sym typeface="IBM Plex Sans"/>
+            </a:endParaRPr>
+          </a:p>
+        </p:txBody>
+      </p:sp>
     </p:spTree>
   </p:cSld>
   <p:clrMapOvr>
@@ -12623,7 +11149,7 @@
     </p:bg>
     <p:spTree>
       <p:nvGrpSpPr>
-        <p:cNvPr id="87" name="Shape 87"/>
+        <p:cNvPr id="93" name="Shape 93"/>
         <p:cNvGrpSpPr/>
         <p:nvPr/>
       </p:nvGrpSpPr>
@@ -12637,14 +11163,14 @@
       </p:grpSpPr>
       <p:sp>
         <p:nvSpPr>
-          <p:cNvPr id="88" name="Google Shape;88;p10"/>
+          <p:cNvPr id="94" name="Google Shape;94;p10"/>
           <p:cNvSpPr/>
           <p:nvPr/>
         </p:nvSpPr>
         <p:spPr>
           <a:xfrm>
             <a:off x="1095375" y="900000"/>
-            <a:ext cx="12999900" cy="699900"/>
+            <a:ext cx="13000000" cy="700000"/>
           </a:xfrm>
           <a:prstGeom prst="rect">
             <a:avLst/>
@@ -12660,7 +11186,7 @@
           </a:bodyPr>
           <a:lstStyle/>
           <a:p>
-            <a:pPr indent="0" lvl="0" marL="0" rtl="0" algn="l">
+            <a:pPr indent="0" lvl="0" marL="0" marR="0" rtl="0" algn="l">
               <a:lnSpc>
                 <a:spcPct val="114285"/>
               </a:lnSpc>
@@ -12678,7 +11204,7 @@
               <a:buNone/>
             </a:pPr>
             <a:r>
-              <a:rPr b="1" lang="en-US" sz="2800">
+              <a:rPr b="1" i="0" lang="en-US" sz="2800" u="none" cap="none" strike="noStrike">
                 <a:solidFill>
                   <a:srgbClr val="1A1A1A"/>
                 </a:solidFill>
@@ -12687,50 +11213,465 @@
                 <a:cs typeface="Montserrat"/>
                 <a:sym typeface="Montserrat"/>
               </a:rPr>
-              <a:t>Environment description: Usage scenarios</a:t>
-            </a:r>
-            <a:endParaRPr>
-              <a:solidFill>
-                <a:schemeClr val="dk1"/>
-              </a:solidFill>
-            </a:endParaRPr>
-          </a:p>
+              <a:t>Environment &amp; Requirements</a:t>
+            </a:r>
+            <a:endParaRPr/>
+          </a:p>
+        </p:txBody>
+      </p:sp>
+      <p:sp>
+        <p:nvSpPr>
+          <p:cNvPr id="95" name="Google Shape;95;p10"/>
+          <p:cNvSpPr/>
+          <p:nvPr/>
+        </p:nvSpPr>
+        <p:spPr>
+          <a:xfrm>
+            <a:off x="1095375" y="1850000"/>
+            <a:ext cx="16050000" cy="950000"/>
+          </a:xfrm>
+          <a:prstGeom prst="roundRect">
+            <a:avLst>
+              <a:gd fmla="val 6000" name="adj"/>
+            </a:avLst>
+          </a:prstGeom>
+          <a:solidFill>
+            <a:srgbClr val="40BA21"/>
+          </a:solidFill>
+          <a:ln>
+            <a:noFill/>
+          </a:ln>
+        </p:spPr>
+        <p:txBody>
+          <a:bodyPr anchorCtr="0" anchor="ctr" bIns="364000" lIns="520000" spcFirstLastPara="1" rIns="520000" wrap="square" tIns="364000">
+            <a:noAutofit/>
+          </a:bodyPr>
+          <a:lstStyle/>
           <a:p>
             <a:pPr indent="0" lvl="0" marL="0" marR="0" rtl="0" algn="l">
               <a:lnSpc>
-                <a:spcPct val="114285"/>
-              </a:lnSpc>
-              <a:spcBef>
-                <a:spcPts val="0"/>
-              </a:spcBef>
-              <a:spcAft>
-                <a:spcPts val="0"/>
-              </a:spcAft>
-              <a:buClr>
-                <a:srgbClr val="1A1A1A"/>
-              </a:buClr>
-              <a:buSzPts val="2800"/>
-              <a:buFont typeface="Montserrat"/>
+                <a:spcPct val="123809"/>
+              </a:lnSpc>
+              <a:spcBef>
+                <a:spcPts val="0"/>
+              </a:spcBef>
+              <a:spcAft>
+                <a:spcPts val="0"/>
+              </a:spcAft>
+              <a:buClr>
+                <a:srgbClr val="FFFFFF"/>
+              </a:buClr>
+              <a:buSzPts val="2100"/>
+              <a:buFont typeface="Montserrat SemiBold"/>
               <a:buNone/>
             </a:pPr>
             <a:r>
-              <a:t/>
-            </a:r>
-            <a:endParaRPr b="1" sz="2800">
-              <a:solidFill>
-                <a:srgbClr val="1A1A1A"/>
-              </a:solidFill>
-              <a:latin typeface="Montserrat"/>
-              <a:ea typeface="Montserrat"/>
-              <a:cs typeface="Montserrat"/>
-              <a:sym typeface="Montserrat"/>
-            </a:endParaRPr>
+              <a:rPr b="1" i="0" lang="en-US" sz="2100" u="none" cap="none" strike="noStrike">
+                <a:solidFill>
+                  <a:srgbClr val="FFFFFF"/>
+                </a:solidFill>
+                <a:latin typeface="Montserrat SemiBold"/>
+                <a:ea typeface="Montserrat SemiBold"/>
+                <a:cs typeface="Montserrat SemiBold"/>
+                <a:sym typeface="Montserrat SemiBold"/>
+              </a:rPr>
+              <a:t>No unauthorized access to data</a:t>
+            </a:r>
+            <a:endParaRPr/>
+          </a:p>
+        </p:txBody>
+      </p:sp>
+      <p:sp>
+        <p:nvSpPr>
+          <p:cNvPr id="96" name="Google Shape;96;p10"/>
+          <p:cNvSpPr/>
+          <p:nvPr/>
+        </p:nvSpPr>
+        <p:spPr>
+          <a:xfrm>
+            <a:off x="1095375" y="3050000"/>
+            <a:ext cx="9300000" cy="4950000"/>
+          </a:xfrm>
+          <a:prstGeom prst="roundRect">
+            <a:avLst>
+              <a:gd fmla="val 6000" name="adj"/>
+            </a:avLst>
+          </a:prstGeom>
+          <a:solidFill>
+            <a:srgbClr val="EEF1F4"/>
+          </a:solidFill>
+          <a:ln>
+            <a:noFill/>
+          </a:ln>
+        </p:spPr>
+        <p:txBody>
+          <a:bodyPr anchorCtr="0" anchor="ctr" bIns="392000" lIns="560000" spcFirstLastPara="1" rIns="560000" wrap="square" tIns="392000">
+            <a:noAutofit/>
+          </a:bodyPr>
+          <a:lstStyle/>
+          <a:p>
+            <a:pPr indent="0" lvl="0" marL="0" marR="0" rtl="0" algn="l">
+              <a:lnSpc>
+                <a:spcPct val="128205"/>
+              </a:lnSpc>
+              <a:spcBef>
+                <a:spcPts val="0"/>
+              </a:spcBef>
+              <a:spcAft>
+                <a:spcPts val="0"/>
+              </a:spcAft>
+              <a:buClr>
+                <a:srgbClr val="2E8B16"/>
+              </a:buClr>
+              <a:buSzPts val="1950"/>
+              <a:buFont typeface="Montserrat SemiBold"/>
+              <a:buNone/>
+            </a:pPr>
+            <a:r>
+              <a:rPr b="1" lang="en-US" sz="1950">
+                <a:solidFill>
+                  <a:srgbClr val="2E8B16"/>
+                </a:solidFill>
+                <a:latin typeface="Montserrat SemiBold"/>
+                <a:ea typeface="Montserrat SemiBold"/>
+                <a:cs typeface="Montserrat SemiBold"/>
+                <a:sym typeface="Montserrat SemiBold"/>
+              </a:rPr>
+              <a:t>Target r</a:t>
+            </a:r>
+            <a:r>
+              <a:rPr b="1" i="0" lang="en-US" sz="1950" u="none" cap="none" strike="noStrike">
+                <a:solidFill>
+                  <a:srgbClr val="2E8B16"/>
+                </a:solidFill>
+                <a:latin typeface="Montserrat SemiBold"/>
+                <a:ea typeface="Montserrat SemiBold"/>
+                <a:cs typeface="Montserrat SemiBold"/>
+                <a:sym typeface="Montserrat SemiBold"/>
+              </a:rPr>
+              <a:t>equirements</a:t>
+            </a:r>
+            <a:endParaRPr/>
+          </a:p>
+          <a:p>
+            <a:pPr indent="0" lvl="0" marL="0" marR="0" rtl="0" algn="l">
+              <a:lnSpc>
+                <a:spcPct val="127027"/>
+              </a:lnSpc>
+              <a:spcBef>
+                <a:spcPts val="320"/>
+              </a:spcBef>
+              <a:spcAft>
+                <a:spcPts val="0"/>
+              </a:spcAft>
+              <a:buClr>
+                <a:srgbClr val="2E8B16"/>
+              </a:buClr>
+              <a:buSzPts val="1850"/>
+              <a:buFont typeface="Montserrat SemiBold"/>
+              <a:buNone/>
+            </a:pPr>
+            <a:r>
+              <a:rPr b="1" i="0" lang="en-US" sz="1850" u="none" cap="none" strike="noStrike">
+                <a:solidFill>
+                  <a:srgbClr val="2E8B16"/>
+                </a:solidFill>
+                <a:latin typeface="Montserrat SemiBold"/>
+                <a:ea typeface="Montserrat SemiBold"/>
+                <a:cs typeface="Montserrat SemiBold"/>
+                <a:sym typeface="Montserrat SemiBold"/>
+              </a:rPr>
+              <a:t>1.  </a:t>
+            </a:r>
+            <a:r>
+              <a:rPr lang="en-US" sz="1850">
+                <a:solidFill>
+                  <a:srgbClr val="1A1A1A"/>
+                </a:solidFill>
+                <a:latin typeface="IBM Plex Sans"/>
+                <a:ea typeface="IBM Plex Sans"/>
+                <a:cs typeface="IBM Plex Sans"/>
+                <a:sym typeface="IBM Plex Sans"/>
+              </a:rPr>
+              <a:t>Access control</a:t>
+            </a:r>
+            <a:endParaRPr/>
+          </a:p>
+          <a:p>
+            <a:pPr indent="0" lvl="0" marL="0" marR="0" rtl="0" algn="l">
+              <a:lnSpc>
+                <a:spcPct val="127027"/>
+              </a:lnSpc>
+              <a:spcBef>
+                <a:spcPts val="230"/>
+              </a:spcBef>
+              <a:spcAft>
+                <a:spcPts val="0"/>
+              </a:spcAft>
+              <a:buClr>
+                <a:srgbClr val="2E8B16"/>
+              </a:buClr>
+              <a:buSzPts val="1850"/>
+              <a:buFont typeface="Montserrat SemiBold"/>
+              <a:buNone/>
+            </a:pPr>
+            <a:r>
+              <a:rPr b="1" i="0" lang="en-US" sz="1850" u="none" cap="none" strike="noStrike">
+                <a:solidFill>
+                  <a:srgbClr val="2E8B16"/>
+                </a:solidFill>
+                <a:latin typeface="Montserrat SemiBold"/>
+                <a:ea typeface="Montserrat SemiBold"/>
+                <a:cs typeface="Montserrat SemiBold"/>
+                <a:sym typeface="Montserrat SemiBold"/>
+              </a:rPr>
+              <a:t>2.  </a:t>
+            </a:r>
+            <a:r>
+              <a:rPr b="0" i="0" lang="en-US" sz="1850" u="none" cap="none" strike="noStrike">
+                <a:solidFill>
+                  <a:srgbClr val="1A1A1A"/>
+                </a:solidFill>
+                <a:latin typeface="IBM Plex Sans"/>
+                <a:ea typeface="IBM Plex Sans"/>
+                <a:cs typeface="IBM Plex Sans"/>
+                <a:sym typeface="IBM Plex Sans"/>
+              </a:rPr>
+              <a:t>Key stored on an external USB drive</a:t>
+            </a:r>
+            <a:endParaRPr/>
+          </a:p>
+          <a:p>
+            <a:pPr indent="0" lvl="0" marL="0" marR="0" rtl="0" algn="l">
+              <a:lnSpc>
+                <a:spcPct val="127027"/>
+              </a:lnSpc>
+              <a:spcBef>
+                <a:spcPts val="230"/>
+              </a:spcBef>
+              <a:spcAft>
+                <a:spcPts val="0"/>
+              </a:spcAft>
+              <a:buClr>
+                <a:srgbClr val="2E8B16"/>
+              </a:buClr>
+              <a:buSzPts val="1850"/>
+              <a:buFont typeface="Montserrat SemiBold"/>
+              <a:buNone/>
+            </a:pPr>
+            <a:r>
+              <a:rPr b="1" i="0" lang="en-US" sz="1850" u="none" cap="none" strike="noStrike">
+                <a:solidFill>
+                  <a:srgbClr val="2E8B16"/>
+                </a:solidFill>
+                <a:latin typeface="Montserrat SemiBold"/>
+                <a:ea typeface="Montserrat SemiBold"/>
+                <a:cs typeface="Montserrat SemiBold"/>
+                <a:sym typeface="Montserrat SemiBold"/>
+              </a:rPr>
+              <a:t>3.  </a:t>
+            </a:r>
+            <a:r>
+              <a:rPr b="0" i="0" lang="en-US" sz="1850" u="none" cap="none" strike="noStrike">
+                <a:solidFill>
+                  <a:srgbClr val="1A1A1A"/>
+                </a:solidFill>
+                <a:latin typeface="IBM Plex Sans"/>
+                <a:ea typeface="IBM Plex Sans"/>
+                <a:cs typeface="IBM Plex Sans"/>
+                <a:sym typeface="IBM Plex Sans"/>
+              </a:rPr>
+              <a:t>Encryption of snapshots (block-level)</a:t>
+            </a:r>
+            <a:endParaRPr/>
+          </a:p>
+          <a:p>
+            <a:pPr indent="0" lvl="0" marL="0" marR="0" rtl="0" algn="l">
+              <a:lnSpc>
+                <a:spcPct val="127027"/>
+              </a:lnSpc>
+              <a:spcBef>
+                <a:spcPts val="230"/>
+              </a:spcBef>
+              <a:spcAft>
+                <a:spcPts val="0"/>
+              </a:spcAft>
+              <a:buClr>
+                <a:srgbClr val="2E8B16"/>
+              </a:buClr>
+              <a:buSzPts val="1850"/>
+              <a:buFont typeface="Montserrat SemiBold"/>
+              <a:buNone/>
+            </a:pPr>
+            <a:r>
+              <a:rPr b="1" i="0" lang="en-US" sz="1850" u="none" cap="none" strike="noStrike">
+                <a:solidFill>
+                  <a:srgbClr val="2E8B16"/>
+                </a:solidFill>
+                <a:latin typeface="Montserrat SemiBold"/>
+                <a:ea typeface="Montserrat SemiBold"/>
+                <a:cs typeface="Montserrat SemiBold"/>
+                <a:sym typeface="Montserrat SemiBold"/>
+              </a:rPr>
+              <a:t>4.  </a:t>
+            </a:r>
+            <a:r>
+              <a:rPr b="0" i="0" lang="en-US" sz="1850" u="none" cap="none" strike="noStrike">
+                <a:solidFill>
+                  <a:srgbClr val="1A1A1A"/>
+                </a:solidFill>
+                <a:latin typeface="IBM Plex Sans"/>
+                <a:ea typeface="IBM Plex Sans"/>
+                <a:cs typeface="IBM Plex Sans"/>
+                <a:sym typeface="IBM Plex Sans"/>
+              </a:rPr>
+              <a:t>Only encrypted data written to disk</a:t>
+            </a:r>
+            <a:endParaRPr/>
+          </a:p>
+          <a:p>
+            <a:pPr indent="0" lvl="0" marL="0" marR="0" rtl="0" algn="l">
+              <a:lnSpc>
+                <a:spcPct val="127027"/>
+              </a:lnSpc>
+              <a:spcBef>
+                <a:spcPts val="230"/>
+              </a:spcBef>
+              <a:spcAft>
+                <a:spcPts val="0"/>
+              </a:spcAft>
+              <a:buClr>
+                <a:srgbClr val="2E8B16"/>
+              </a:buClr>
+              <a:buSzPts val="1850"/>
+              <a:buFont typeface="Montserrat SemiBold"/>
+              <a:buNone/>
+            </a:pPr>
+            <a:r>
+              <a:rPr b="1" i="0" lang="en-US" sz="1850" u="none" cap="none" strike="noStrike">
+                <a:solidFill>
+                  <a:srgbClr val="2E8B16"/>
+                </a:solidFill>
+                <a:latin typeface="Montserrat SemiBold"/>
+                <a:ea typeface="Montserrat SemiBold"/>
+                <a:cs typeface="Montserrat SemiBold"/>
+                <a:sym typeface="Montserrat SemiBold"/>
+              </a:rPr>
+              <a:t>5.  </a:t>
+            </a:r>
+            <a:r>
+              <a:rPr b="0" i="0" lang="en-US" sz="1850" u="none" cap="none" strike="noStrike">
+                <a:solidFill>
+                  <a:srgbClr val="1A1A1A"/>
+                </a:solidFill>
+                <a:latin typeface="IBM Plex Sans"/>
+                <a:ea typeface="IBM Plex Sans"/>
+                <a:cs typeface="IBM Plex Sans"/>
+                <a:sym typeface="IBM Plex Sans"/>
+              </a:rPr>
+              <a:t>Acceptable performance overhead (≤ 2×)</a:t>
+            </a:r>
+            <a:endParaRPr/>
+          </a:p>
+        </p:txBody>
+      </p:sp>
+      <p:sp>
+        <p:nvSpPr>
+          <p:cNvPr id="97" name="Google Shape;97;p10"/>
+          <p:cNvSpPr/>
+          <p:nvPr/>
+        </p:nvSpPr>
+        <p:spPr>
+          <a:xfrm>
+            <a:off x="10800000" y="3050000"/>
+            <a:ext cx="6350000" cy="4950000"/>
+          </a:xfrm>
+          <a:prstGeom prst="roundRect">
+            <a:avLst>
+              <a:gd fmla="val 6000" name="adj"/>
+            </a:avLst>
+          </a:prstGeom>
+          <a:solidFill>
+            <a:srgbClr val="40BA21"/>
+          </a:solidFill>
+          <a:ln>
+            <a:noFill/>
+          </a:ln>
+        </p:spPr>
+        <p:txBody>
+          <a:bodyPr anchorCtr="0" anchor="ctr" bIns="434000" lIns="620000" spcFirstLastPara="1" rIns="620000" wrap="square" tIns="434000">
+            <a:noAutofit/>
+          </a:bodyPr>
+          <a:lstStyle/>
+          <a:p>
+            <a:pPr indent="0" lvl="0" marL="0" marR="0" rtl="0" algn="l">
+              <a:lnSpc>
+                <a:spcPct val="126829"/>
+              </a:lnSpc>
+              <a:spcBef>
+                <a:spcPts val="0"/>
+              </a:spcBef>
+              <a:spcAft>
+                <a:spcPts val="0"/>
+              </a:spcAft>
+              <a:buClr>
+                <a:srgbClr val="FFFFFF"/>
+              </a:buClr>
+              <a:buSzPts val="2050"/>
+              <a:buFont typeface="Montserrat SemiBold"/>
+              <a:buNone/>
+            </a:pPr>
+            <a:r>
+              <a:rPr b="1" i="0" lang="en-US" sz="2050" u="none" cap="none" strike="noStrike">
+                <a:solidFill>
+                  <a:srgbClr val="FFFFFF"/>
+                </a:solidFill>
+                <a:latin typeface="Montserrat SemiBold"/>
+                <a:ea typeface="Montserrat SemiBold"/>
+                <a:cs typeface="Montserrat SemiBold"/>
+                <a:sym typeface="Montserrat SemiBold"/>
+              </a:rPr>
+              <a:t>USB drive = key + auth factor</a:t>
+            </a:r>
+            <a:endParaRPr/>
+          </a:p>
+          <a:p>
+            <a:pPr indent="0" lvl="0" marL="0" marR="0" rtl="0" algn="l">
+              <a:lnSpc>
+                <a:spcPct val="129729"/>
+              </a:lnSpc>
+              <a:spcBef>
+                <a:spcPts val="400"/>
+              </a:spcBef>
+              <a:spcAft>
+                <a:spcPts val="0"/>
+              </a:spcAft>
+              <a:buClr>
+                <a:srgbClr val="FFFFFF"/>
+              </a:buClr>
+              <a:buSzPts val="1850"/>
+              <a:buFont typeface="IBM Plex Sans"/>
+              <a:buNone/>
+            </a:pPr>
+            <a:r>
+              <a:rPr b="0" i="0" lang="en-US" sz="1850" u="none" cap="none" strike="noStrike">
+                <a:solidFill>
+                  <a:srgbClr val="FFFFFF"/>
+                </a:solidFill>
+                <a:latin typeface="IBM Plex Sans"/>
+                <a:ea typeface="IBM Plex Sans"/>
+                <a:cs typeface="IBM Plex Sans"/>
+                <a:sym typeface="IBM Plex Sans"/>
+              </a:rPr>
+              <a:t>Requirements 1 and 2 combined: the USB drive both contains the key and serves as the authentication factor.</a:t>
+            </a:r>
+            <a:endParaRPr/>
           </a:p>
         </p:txBody>
       </p:sp>
       <p:pic>
         <p:nvPicPr>
-          <p:cNvPr id="89" name="Google Shape;89;p10"/>
+          <p:cNvPr id="98" name="Google Shape;98;p10"/>
           <p:cNvPicPr preferRelativeResize="0"/>
           <p:nvPr/>
         </p:nvPicPr>
@@ -12757,7 +11698,7 @@
       </p:pic>
       <p:sp>
         <p:nvSpPr>
-          <p:cNvPr id="90" name="Google Shape;90;p10"/>
+          <p:cNvPr id="99" name="Google Shape;99;p10"/>
           <p:cNvSpPr/>
           <p:nvPr/>
         </p:nvSpPr>
@@ -12804,7 +11745,7 @@
                 <a:cs typeface="IBM Plex Mono"/>
                 <a:sym typeface="IBM Plex Mono"/>
               </a:rPr>
-              <a:t>6</a:t>
+              <a:t>8</a:t>
             </a:r>
             <a:r>
               <a:rPr b="0" i="0" lang="en-US" sz="1300" u="none" cap="none" strike="noStrike">
@@ -12834,34 +11775,6 @@
           </a:p>
         </p:txBody>
       </p:sp>
-      <p:pic>
-        <p:nvPicPr>
-          <p:cNvPr id="91" name="Google Shape;91;p10"/>
-          <p:cNvPicPr preferRelativeResize="0"/>
-          <p:nvPr/>
-        </p:nvPicPr>
-        <p:blipFill>
-          <a:blip r:embed="rId4">
-            <a:alphaModFix/>
-          </a:blip>
-          <a:stretch>
-            <a:fillRect/>
-          </a:stretch>
-        </p:blipFill>
-        <p:spPr>
-          <a:xfrm>
-            <a:off x="4617977" y="1599900"/>
-            <a:ext cx="9052026" cy="8258751"/>
-          </a:xfrm>
-          <a:prstGeom prst="rect">
-            <a:avLst/>
-          </a:prstGeom>
-          <a:noFill/>
-          <a:ln>
-            <a:noFill/>
-          </a:ln>
-        </p:spPr>
-      </p:pic>
     </p:spTree>
   </p:cSld>
   <p:clrMapOvr>
@@ -12882,7 +11795,7 @@
     </p:bg>
     <p:spTree>
       <p:nvGrpSpPr>
-        <p:cNvPr id="95" name="Shape 95"/>
+        <p:cNvPr id="103" name="Shape 103"/>
         <p:cNvGrpSpPr/>
         <p:nvPr/>
       </p:nvGrpSpPr>
@@ -12896,7 +11809,7 @@
       </p:grpSpPr>
       <p:sp>
         <p:nvSpPr>
-          <p:cNvPr id="96" name="Google Shape;96;p11"/>
+          <p:cNvPr id="104" name="Google Shape;104;p11"/>
           <p:cNvSpPr/>
           <p:nvPr/>
         </p:nvSpPr>
@@ -12946,7 +11859,7 @@
                 <a:cs typeface="Montserrat"/>
                 <a:sym typeface="Montserrat"/>
               </a:rPr>
-              <a:t>Environment &amp; Requirements</a:t>
+              <a:t>Implementation</a:t>
             </a:r>
             <a:endParaRPr/>
           </a:p>
@@ -12954,14 +11867,184 @@
       </p:sp>
       <p:sp>
         <p:nvSpPr>
-          <p:cNvPr id="97" name="Google Shape;97;p11"/>
+          <p:cNvPr id="105" name="Google Shape;105;p11"/>
           <p:cNvSpPr/>
           <p:nvPr/>
         </p:nvSpPr>
         <p:spPr>
           <a:xfrm>
-            <a:off x="1095375" y="1850000"/>
-            <a:ext cx="16050000" cy="950000"/>
+            <a:off x="1095375" y="1900000"/>
+            <a:ext cx="7700100" cy="3725700"/>
+          </a:xfrm>
+          <a:prstGeom prst="roundRect">
+            <a:avLst>
+              <a:gd fmla="val 6000" name="adj"/>
+            </a:avLst>
+          </a:prstGeom>
+          <a:solidFill>
+            <a:srgbClr val="EEF1F4"/>
+          </a:solidFill>
+          <a:ln>
+            <a:noFill/>
+          </a:ln>
+        </p:spPr>
+        <p:txBody>
+          <a:bodyPr anchorCtr="0" anchor="t" bIns="364000" lIns="520000" spcFirstLastPara="1" rIns="520000" wrap="square" tIns="364000">
+            <a:noAutofit/>
+          </a:bodyPr>
+          <a:lstStyle/>
+          <a:p>
+            <a:pPr indent="0" lvl="0" marL="0" marR="0" rtl="0" algn="l">
+              <a:lnSpc>
+                <a:spcPct val="126315"/>
+              </a:lnSpc>
+              <a:spcBef>
+                <a:spcPts val="0"/>
+              </a:spcBef>
+              <a:spcAft>
+                <a:spcPts val="0"/>
+              </a:spcAft>
+              <a:buClr>
+                <a:srgbClr val="1A1A1A"/>
+              </a:buClr>
+              <a:buSzPts val="1900"/>
+              <a:buFont typeface="Montserrat SemiBold"/>
+              <a:buNone/>
+            </a:pPr>
+            <a:r>
+              <a:rPr b="1" i="0" lang="en-US" sz="1900" u="none" cap="none" strike="noStrike">
+                <a:solidFill>
+                  <a:srgbClr val="1A1A1A"/>
+                </a:solidFill>
+                <a:latin typeface="Montserrat SemiBold"/>
+                <a:ea typeface="Montserrat SemiBold"/>
+                <a:cs typeface="Montserrat SemiBold"/>
+                <a:sym typeface="Montserrat SemiBold"/>
+              </a:rPr>
+              <a:t>Built on file_vault</a:t>
+            </a:r>
+            <a:r>
+              <a:rPr b="1" baseline="30000" i="0" lang="en-US" sz="1900" u="none" cap="none" strike="noStrike">
+                <a:solidFill>
+                  <a:srgbClr val="1A1A1A"/>
+                </a:solidFill>
+                <a:latin typeface="Montserrat SemiBold"/>
+                <a:ea typeface="Montserrat SemiBold"/>
+                <a:cs typeface="Montserrat SemiBold"/>
+                <a:sym typeface="Montserrat SemiBold"/>
+              </a:rPr>
+              <a:t>2</a:t>
+            </a:r>
+            <a:r>
+              <a:rPr b="1" i="0" lang="en-US" sz="1900" u="none" cap="none" strike="noStrike">
+                <a:solidFill>
+                  <a:srgbClr val="1A1A1A"/>
+                </a:solidFill>
+                <a:latin typeface="Montserrat SemiBold"/>
+                <a:ea typeface="Montserrat SemiBold"/>
+                <a:cs typeface="Montserrat SemiBold"/>
+                <a:sym typeface="Montserrat SemiBold"/>
+              </a:rPr>
+              <a:t> (based on Tresor)</a:t>
+            </a:r>
+            <a:r>
+              <a:rPr b="1" lang="en-US" sz="1900">
+                <a:solidFill>
+                  <a:srgbClr val="1A1A1A"/>
+                </a:solidFill>
+                <a:latin typeface="Montserrat SemiBold"/>
+                <a:ea typeface="Montserrat SemiBold"/>
+                <a:cs typeface="Montserrat SemiBold"/>
+                <a:sym typeface="Montserrat SemiBold"/>
+              </a:rPr>
+              <a:t>:</a:t>
+            </a:r>
+            <a:endParaRPr b="1" i="0" sz="1900" u="none" cap="none" strike="noStrike">
+              <a:solidFill>
+                <a:srgbClr val="1A1A1A"/>
+              </a:solidFill>
+              <a:latin typeface="Montserrat SemiBold"/>
+              <a:ea typeface="Montserrat SemiBold"/>
+              <a:cs typeface="Montserrat SemiBold"/>
+              <a:sym typeface="Montserrat SemiBold"/>
+            </a:endParaRPr>
+          </a:p>
+          <a:p>
+            <a:pPr indent="-380000" lvl="0" marL="380000" marR="0" rtl="0" algn="l">
+              <a:lnSpc>
+                <a:spcPct val="126470"/>
+              </a:lnSpc>
+              <a:spcBef>
+                <a:spcPts val="300"/>
+              </a:spcBef>
+              <a:spcAft>
+                <a:spcPts val="0"/>
+              </a:spcAft>
+              <a:buClr>
+                <a:srgbClr val="1A1A1A"/>
+              </a:buClr>
+              <a:buSzPts val="1700"/>
+              <a:buFont typeface="Arial"/>
+              <a:buChar char="•"/>
+            </a:pPr>
+            <a:r>
+              <a:rPr b="0" i="0" lang="en-US" sz="1700" u="none" cap="none" strike="noStrike">
+                <a:solidFill>
+                  <a:srgbClr val="1A1A1A"/>
+                </a:solidFill>
+                <a:latin typeface="IBM Plex Sans"/>
+                <a:ea typeface="IBM Plex Sans"/>
+                <a:cs typeface="IBM Plex Sans"/>
+                <a:sym typeface="IBM Plex Sans"/>
+              </a:rPr>
+              <a:t>Tresor: AES on 4K blocks, SHA-256 integrity, CoW atomicity</a:t>
+            </a:r>
+            <a:endParaRPr/>
+          </a:p>
+          <a:p>
+            <a:pPr indent="-380000" lvl="0" marL="380000" marR="0" rtl="0" algn="l">
+              <a:lnSpc>
+                <a:spcPct val="126470"/>
+              </a:lnSpc>
+              <a:spcBef>
+                <a:spcPts val="200"/>
+              </a:spcBef>
+              <a:spcAft>
+                <a:spcPts val="0"/>
+              </a:spcAft>
+              <a:buClr>
+                <a:srgbClr val="1A1A1A"/>
+              </a:buClr>
+              <a:buSzPts val="1700"/>
+              <a:buFont typeface="Arial"/>
+              <a:buChar char="•"/>
+            </a:pPr>
+            <a:r>
+              <a:rPr b="0" i="0" lang="en-US" sz="1700" u="none" cap="none" strike="noStrike">
+                <a:solidFill>
+                  <a:srgbClr val="1A1A1A"/>
+                </a:solidFill>
+                <a:latin typeface="IBM Plex Sans"/>
+                <a:ea typeface="IBM Plex Sans"/>
+                <a:cs typeface="IBM Plex Sans"/>
+                <a:sym typeface="IBM Plex Sans"/>
+              </a:rPr>
+              <a:t>file_vault: state orchestrator providing a secure FS session</a:t>
+            </a:r>
+            <a:endParaRPr/>
+          </a:p>
+        </p:txBody>
+      </p:sp>
+      <p:sp>
+        <p:nvSpPr>
+          <p:cNvPr id="106" name="Google Shape;106;p11"/>
+          <p:cNvSpPr/>
+          <p:nvPr/>
+        </p:nvSpPr>
+        <p:spPr>
+          <a:xfrm>
+            <a:off x="9395375" y="1900000"/>
+            <a:ext cx="7754700" cy="3725700"/>
           </a:xfrm>
           <a:prstGeom prst="roundRect">
             <a:avLst>
@@ -12976,14 +12059,14 @@
           </a:ln>
         </p:spPr>
         <p:txBody>
-          <a:bodyPr anchorCtr="0" anchor="ctr" bIns="364000" lIns="520000" spcFirstLastPara="1" rIns="520000" wrap="square" tIns="364000">
+          <a:bodyPr anchorCtr="0" anchor="t" bIns="364000" lIns="520000" spcFirstLastPara="1" rIns="520000" wrap="square" tIns="364000">
             <a:noAutofit/>
           </a:bodyPr>
           <a:lstStyle/>
           <a:p>
             <a:pPr indent="0" lvl="0" marL="0" marR="0" rtl="0" algn="l">
               <a:lnSpc>
-                <a:spcPct val="123809"/>
+                <a:spcPct val="126315"/>
               </a:lnSpc>
               <a:spcBef>
                 <a:spcPts val="0"/>
@@ -12994,12 +12077,12 @@
               <a:buClr>
                 <a:srgbClr val="FFFFFF"/>
               </a:buClr>
-              <a:buSzPts val="2100"/>
+              <a:buSzPts val="1900"/>
               <a:buFont typeface="Montserrat SemiBold"/>
               <a:buNone/>
             </a:pPr>
             <a:r>
-              <a:rPr b="1" i="0" lang="en-US" sz="2100" u="none" cap="none" strike="noStrike">
+              <a:rPr b="1" i="0" lang="en-US" sz="1900" u="none" cap="none" strike="noStrike">
                 <a:solidFill>
                   <a:srgbClr val="FFFFFF"/>
                 </a:solidFill>
@@ -13008,403 +12091,696 @@
                 <a:cs typeface="Montserrat SemiBold"/>
                 <a:sym typeface="Montserrat SemiBold"/>
               </a:rPr>
-              <a:t>No unauthorized access to data</a:t>
-            </a:r>
-            <a:endParaRPr/>
+              <a:t>Implemented se_vault</a:t>
+            </a:r>
+            <a:r>
+              <a:rPr b="1" baseline="30000" i="0" lang="en-US" sz="1900" u="none" cap="none" strike="noStrike">
+                <a:solidFill>
+                  <a:srgbClr val="FFFFFF"/>
+                </a:solidFill>
+                <a:latin typeface="Montserrat SemiBold"/>
+                <a:ea typeface="Montserrat SemiBold"/>
+                <a:cs typeface="Montserrat SemiBold"/>
+                <a:sym typeface="Montserrat SemiBold"/>
+              </a:rPr>
+              <a:t>1</a:t>
+            </a:r>
+            <a:r>
+              <a:rPr b="1" i="0" lang="en-US" sz="1900" u="none" cap="none" strike="noStrike">
+                <a:solidFill>
+                  <a:srgbClr val="FFFFFF"/>
+                </a:solidFill>
+                <a:latin typeface="Montserrat SemiBold"/>
+                <a:ea typeface="Montserrat SemiBold"/>
+                <a:cs typeface="Montserrat SemiBold"/>
+                <a:sym typeface="Montserrat SemiBold"/>
+              </a:rPr>
+              <a:t>  as modified file_vault</a:t>
+            </a:r>
+            <a:endParaRPr b="1" i="0" sz="1900" u="none" cap="none" strike="noStrike">
+              <a:solidFill>
+                <a:srgbClr val="FFFFFF"/>
+              </a:solidFill>
+              <a:latin typeface="Montserrat SemiBold"/>
+              <a:ea typeface="Montserrat SemiBold"/>
+              <a:cs typeface="Montserrat SemiBold"/>
+              <a:sym typeface="Montserrat SemiBold"/>
+            </a:endParaRPr>
+          </a:p>
+          <a:p>
+            <a:pPr indent="0" lvl="0" marL="0" marR="0" rtl="0" algn="l">
+              <a:lnSpc>
+                <a:spcPct val="126315"/>
+              </a:lnSpc>
+              <a:spcBef>
+                <a:spcPts val="300"/>
+              </a:spcBef>
+              <a:spcAft>
+                <a:spcPts val="0"/>
+              </a:spcAft>
+              <a:buClr>
+                <a:srgbClr val="FFFFFF"/>
+              </a:buClr>
+              <a:buSzPts val="1900"/>
+              <a:buFont typeface="Montserrat SemiBold"/>
+              <a:buNone/>
+            </a:pPr>
+            <a:r>
+              <a:rPr b="1" i="0" lang="en-US" sz="1900" u="none" cap="none" strike="noStrike">
+                <a:solidFill>
+                  <a:srgbClr val="FFFFFF"/>
+                </a:solidFill>
+                <a:latin typeface="Montserrat SemiBold"/>
+                <a:ea typeface="Montserrat SemiBold"/>
+                <a:cs typeface="Montserrat SemiBold"/>
+                <a:sym typeface="Montserrat SemiBold"/>
+              </a:rPr>
+              <a:t>Changes:</a:t>
+            </a:r>
+            <a:endParaRPr b="1" i="0" sz="1900" u="none" cap="none" strike="noStrike">
+              <a:solidFill>
+                <a:srgbClr val="FFFFFF"/>
+              </a:solidFill>
+              <a:latin typeface="Montserrat SemiBold"/>
+              <a:ea typeface="Montserrat SemiBold"/>
+              <a:cs typeface="Montserrat SemiBold"/>
+              <a:sym typeface="Montserrat SemiBold"/>
+            </a:endParaRPr>
+          </a:p>
+          <a:p>
+            <a:pPr indent="-366350" lvl="0" marL="360000" marR="0" rtl="0" algn="l">
+              <a:lnSpc>
+                <a:spcPct val="128125"/>
+              </a:lnSpc>
+              <a:spcBef>
+                <a:spcPts val="300"/>
+              </a:spcBef>
+              <a:spcAft>
+                <a:spcPts val="0"/>
+              </a:spcAft>
+              <a:buClr>
+                <a:srgbClr val="FFFFFF"/>
+              </a:buClr>
+              <a:buSzPts val="1700"/>
+              <a:buFont typeface="Arial"/>
+              <a:buChar char="•"/>
+            </a:pPr>
+            <a:r>
+              <a:rPr b="0" i="0" lang="en-US" sz="1700" u="none" cap="none" strike="noStrike">
+                <a:solidFill>
+                  <a:srgbClr val="FFFFFF"/>
+                </a:solidFill>
+                <a:latin typeface="IBM Plex Sans"/>
+                <a:ea typeface="IBM Plex Sans"/>
+                <a:cs typeface="IBM Plex Sans"/>
+                <a:sym typeface="IBM Plex Sans"/>
+              </a:rPr>
+              <a:t>Headless operation</a:t>
+            </a:r>
+            <a:endParaRPr sz="1700"/>
+          </a:p>
+          <a:p>
+            <a:pPr indent="-366350" lvl="0" marL="360000" marR="0" rtl="0" algn="l">
+              <a:lnSpc>
+                <a:spcPct val="128125"/>
+              </a:lnSpc>
+              <a:spcBef>
+                <a:spcPts val="150"/>
+              </a:spcBef>
+              <a:spcAft>
+                <a:spcPts val="0"/>
+              </a:spcAft>
+              <a:buClr>
+                <a:srgbClr val="FFFFFF"/>
+              </a:buClr>
+              <a:buSzPts val="1700"/>
+              <a:buFont typeface="Arial"/>
+              <a:buChar char="•"/>
+            </a:pPr>
+            <a:r>
+              <a:rPr b="0" i="0" lang="en-US" sz="1700" u="none" cap="none" strike="noStrike">
+                <a:solidFill>
+                  <a:srgbClr val="FFFFFF"/>
+                </a:solidFill>
+                <a:latin typeface="IBM Plex Sans"/>
+                <a:ea typeface="IBM Plex Sans"/>
+                <a:cs typeface="IBM Plex Sans"/>
+                <a:sym typeface="IBM Plex Sans"/>
+              </a:rPr>
+              <a:t>Passphrase replaced </a:t>
+            </a:r>
+            <a:r>
+              <a:rPr b="1" i="0" lang="en-US" sz="1700" u="none" cap="none" strike="noStrike">
+                <a:solidFill>
+                  <a:srgbClr val="FFFFFF"/>
+                </a:solidFill>
+                <a:latin typeface="IBM Plex Sans"/>
+                <a:ea typeface="IBM Plex Sans"/>
+                <a:cs typeface="IBM Plex Sans"/>
+                <a:sym typeface="IBM Plex Sans"/>
+              </a:rPr>
+              <a:t>by USB key file</a:t>
+            </a:r>
+            <a:endParaRPr sz="1700"/>
+          </a:p>
+          <a:p>
+            <a:pPr indent="-366350" lvl="0" marL="360000" marR="0" rtl="0" algn="l">
+              <a:lnSpc>
+                <a:spcPct val="128125"/>
+              </a:lnSpc>
+              <a:spcBef>
+                <a:spcPts val="150"/>
+              </a:spcBef>
+              <a:spcAft>
+                <a:spcPts val="0"/>
+              </a:spcAft>
+              <a:buClr>
+                <a:srgbClr val="FFFFFF"/>
+              </a:buClr>
+              <a:buSzPts val="1700"/>
+              <a:buFont typeface="Arial"/>
+              <a:buChar char="•"/>
+            </a:pPr>
+            <a:r>
+              <a:rPr b="0" i="0" lang="en-US" sz="1700" u="none" cap="none" strike="noStrike">
+                <a:solidFill>
+                  <a:srgbClr val="FFFFFF"/>
+                </a:solidFill>
+                <a:latin typeface="IBM Plex Sans"/>
+                <a:ea typeface="IBM Plex Sans"/>
+                <a:cs typeface="IBM Plex Sans"/>
+                <a:sym typeface="IBM Plex Sans"/>
+              </a:rPr>
+              <a:t>rump_fs/ext2 replaced by </a:t>
+            </a:r>
+            <a:r>
+              <a:rPr b="1" i="0" lang="en-US" sz="1700" u="none" cap="none" strike="noStrike">
+                <a:solidFill>
+                  <a:srgbClr val="FFFFFF"/>
+                </a:solidFill>
+                <a:latin typeface="IBM Plex Sans"/>
+                <a:ea typeface="IBM Plex Sans"/>
+                <a:cs typeface="IBM Plex Sans"/>
+                <a:sym typeface="IBM Plex Sans"/>
+              </a:rPr>
+              <a:t>lwext4/ext4</a:t>
+            </a:r>
+            <a:endParaRPr sz="1700"/>
+          </a:p>
+          <a:p>
+            <a:pPr indent="-366350" lvl="0" marL="360000" marR="0" rtl="0" algn="l">
+              <a:lnSpc>
+                <a:spcPct val="128125"/>
+              </a:lnSpc>
+              <a:spcBef>
+                <a:spcPts val="150"/>
+              </a:spcBef>
+              <a:spcAft>
+                <a:spcPts val="0"/>
+              </a:spcAft>
+              <a:buClr>
+                <a:srgbClr val="FFFFFF"/>
+              </a:buClr>
+              <a:buSzPts val="1700"/>
+              <a:buFont typeface="Arial"/>
+              <a:buChar char="•"/>
+            </a:pPr>
+            <a:r>
+              <a:rPr b="0" i="0" lang="en-US" sz="1700" u="none" cap="none" strike="noStrike">
+                <a:solidFill>
+                  <a:srgbClr val="FFFFFF"/>
+                </a:solidFill>
+                <a:latin typeface="IBM Plex Sans"/>
+                <a:ea typeface="IBM Plex Sans"/>
+                <a:cs typeface="IBM Plex Sans"/>
+                <a:sym typeface="IBM Plex Sans"/>
+              </a:rPr>
+              <a:t>Added </a:t>
+            </a:r>
+            <a:r>
+              <a:rPr b="1" i="0" lang="en-US" sz="1700" u="none" cap="none" strike="noStrike">
+                <a:solidFill>
+                  <a:srgbClr val="FFFFFF"/>
+                </a:solidFill>
+                <a:latin typeface="IBM Plex Sans"/>
+                <a:ea typeface="IBM Plex Sans"/>
+                <a:cs typeface="IBM Plex Sans"/>
+                <a:sym typeface="IBM Plex Sans"/>
+              </a:rPr>
+              <a:t>fsck</a:t>
+            </a:r>
+            <a:r>
+              <a:rPr b="0" i="0" lang="en-US" sz="1700" u="none" cap="none" strike="noStrike">
+                <a:solidFill>
+                  <a:srgbClr val="FFFFFF"/>
+                </a:solidFill>
+                <a:latin typeface="IBM Plex Sans"/>
+                <a:ea typeface="IBM Plex Sans"/>
+                <a:cs typeface="IBM Plex Sans"/>
+                <a:sym typeface="IBM Plex Sans"/>
+              </a:rPr>
+              <a:t> crash-recovery support</a:t>
+            </a:r>
+            <a:endParaRPr sz="1700"/>
+          </a:p>
+          <a:p>
+            <a:pPr indent="-366350" lvl="0" marL="360000" marR="0" rtl="0" algn="l">
+              <a:lnSpc>
+                <a:spcPct val="128125"/>
+              </a:lnSpc>
+              <a:spcBef>
+                <a:spcPts val="150"/>
+              </a:spcBef>
+              <a:spcAft>
+                <a:spcPts val="0"/>
+              </a:spcAft>
+              <a:buClr>
+                <a:srgbClr val="FFFFFF"/>
+              </a:buClr>
+              <a:buSzPts val="1700"/>
+              <a:buFont typeface="Arial"/>
+              <a:buChar char="•"/>
+            </a:pPr>
+            <a:r>
+              <a:rPr b="0" i="0" lang="en-US" sz="1700" u="none" cap="none" strike="noStrike">
+                <a:solidFill>
+                  <a:srgbClr val="FFFFFF"/>
+                </a:solidFill>
+                <a:latin typeface="IBM Plex Sans"/>
+                <a:ea typeface="IBM Plex Sans"/>
+                <a:cs typeface="IBM Plex Sans"/>
+                <a:sym typeface="IBM Plex Sans"/>
+              </a:rPr>
+              <a:t>Direct block session (skip image file)</a:t>
+            </a:r>
+            <a:endParaRPr sz="1700"/>
+          </a:p>
+          <a:p>
+            <a:pPr indent="-366350" lvl="0" marL="360000" marR="0" rtl="0" algn="l">
+              <a:lnSpc>
+                <a:spcPct val="128125"/>
+              </a:lnSpc>
+              <a:spcBef>
+                <a:spcPts val="150"/>
+              </a:spcBef>
+              <a:spcAft>
+                <a:spcPts val="0"/>
+              </a:spcAft>
+              <a:buClr>
+                <a:srgbClr val="FFFFFF"/>
+              </a:buClr>
+              <a:buSzPts val="1700"/>
+              <a:buFont typeface="Arial"/>
+              <a:buChar char="•"/>
+            </a:pPr>
+            <a:r>
+              <a:rPr b="0" i="0" lang="en-US" sz="1700" u="none" cap="none" strike="noStrike">
+                <a:solidFill>
+                  <a:srgbClr val="FFFFFF"/>
+                </a:solidFill>
+                <a:latin typeface="IBM Plex Sans"/>
+                <a:ea typeface="IBM Plex Sans"/>
+                <a:cs typeface="IBM Plex Sans"/>
+                <a:sym typeface="IBM Plex Sans"/>
+              </a:rPr>
+              <a:t>All block sizes standardized to 4K</a:t>
+            </a:r>
+            <a:endParaRPr sz="1700"/>
+          </a:p>
+          <a:p>
+            <a:pPr indent="-366350" lvl="0" marL="360000" marR="0" rtl="0" algn="l">
+              <a:lnSpc>
+                <a:spcPct val="128125"/>
+              </a:lnSpc>
+              <a:spcBef>
+                <a:spcPts val="150"/>
+              </a:spcBef>
+              <a:spcAft>
+                <a:spcPts val="0"/>
+              </a:spcAft>
+              <a:buClr>
+                <a:srgbClr val="FFFFFF"/>
+              </a:buClr>
+              <a:buSzPts val="1700"/>
+              <a:buFont typeface="Arial"/>
+              <a:buChar char="•"/>
+            </a:pPr>
+            <a:r>
+              <a:rPr b="0" i="0" lang="en-US" sz="1700" u="none" cap="none" strike="noStrike">
+                <a:solidFill>
+                  <a:srgbClr val="FFFFFF"/>
+                </a:solidFill>
+                <a:latin typeface="IBM Plex Sans"/>
+                <a:ea typeface="IBM Plex Sans"/>
+                <a:cs typeface="IBM Plex Sans"/>
+                <a:sym typeface="IBM Plex Sans"/>
+              </a:rPr>
+              <a:t>Graceful shutdown sequence added</a:t>
+            </a:r>
+            <a:endParaRPr sz="1700"/>
           </a:p>
         </p:txBody>
       </p:sp>
       <p:sp>
         <p:nvSpPr>
-          <p:cNvPr id="98" name="Google Shape;98;p11"/>
+          <p:cNvPr id="107" name="Google Shape;107;p11"/>
           <p:cNvSpPr/>
           <p:nvPr/>
         </p:nvSpPr>
         <p:spPr>
           <a:xfrm>
-            <a:off x="1095375" y="3050000"/>
-            <a:ext cx="9300000" cy="4950000"/>
+            <a:off x="1095375" y="8499225"/>
+            <a:ext cx="13500000" cy="1450800"/>
           </a:xfrm>
-          <a:prstGeom prst="roundRect">
-            <a:avLst>
-              <a:gd fmla="val 6000" name="adj"/>
-            </a:avLst>
+          <a:prstGeom prst="rect">
+            <a:avLst/>
           </a:prstGeom>
-          <a:solidFill>
-            <a:srgbClr val="EEF1F4"/>
-          </a:solidFill>
+          <a:noFill/>
           <a:ln>
             <a:noFill/>
           </a:ln>
         </p:spPr>
         <p:txBody>
-          <a:bodyPr anchorCtr="0" anchor="ctr" bIns="392000" lIns="560000" spcFirstLastPara="1" rIns="560000" wrap="square" tIns="392000">
+          <a:bodyPr anchorCtr="0" anchor="b" bIns="0" lIns="0" spcFirstLastPara="1" rIns="0" wrap="square" tIns="0">
             <a:noAutofit/>
           </a:bodyPr>
           <a:lstStyle/>
           <a:p>
             <a:pPr indent="0" lvl="0" marL="0" marR="0" rtl="0" algn="l">
               <a:lnSpc>
-                <a:spcPct val="128205"/>
-              </a:lnSpc>
-              <a:spcBef>
-                <a:spcPts val="0"/>
-              </a:spcBef>
-              <a:spcAft>
-                <a:spcPts val="0"/>
-              </a:spcAft>
-              <a:buClr>
-                <a:srgbClr val="2E8B16"/>
-              </a:buClr>
-              <a:buSzPts val="1950"/>
-              <a:buFont typeface="Montserrat SemiBold"/>
+                <a:spcPct val="93750"/>
+              </a:lnSpc>
+              <a:spcBef>
+                <a:spcPts val="0"/>
+              </a:spcBef>
+              <a:spcAft>
+                <a:spcPts val="0"/>
+              </a:spcAft>
               <a:buNone/>
             </a:pPr>
             <a:r>
-              <a:rPr b="1" lang="en-US" sz="1950">
-                <a:solidFill>
-                  <a:srgbClr val="2E8B16"/>
-                </a:solidFill>
-                <a:latin typeface="Montserrat SemiBold"/>
-                <a:ea typeface="Montserrat SemiBold"/>
-                <a:cs typeface="Montserrat SemiBold"/>
-                <a:sym typeface="Montserrat SemiBold"/>
-              </a:rPr>
-              <a:t>Target r</a:t>
-            </a:r>
-            <a:r>
-              <a:rPr b="1" i="0" lang="en-US" sz="1950" u="none" cap="none" strike="noStrike">
-                <a:solidFill>
-                  <a:srgbClr val="2E8B16"/>
-                </a:solidFill>
-                <a:latin typeface="Montserrat SemiBold"/>
-                <a:ea typeface="Montserrat SemiBold"/>
-                <a:cs typeface="Montserrat SemiBold"/>
-                <a:sym typeface="Montserrat SemiBold"/>
-              </a:rPr>
-              <a:t>equirements</a:t>
-            </a:r>
-            <a:endParaRPr/>
-          </a:p>
-          <a:p>
-            <a:pPr indent="0" lvl="0" marL="0" marR="0" rtl="0" algn="l">
-              <a:lnSpc>
-                <a:spcPct val="127027"/>
-              </a:lnSpc>
-              <a:spcBef>
-                <a:spcPts val="320"/>
-              </a:spcBef>
-              <a:spcAft>
-                <a:spcPts val="0"/>
-              </a:spcAft>
-              <a:buClr>
-                <a:srgbClr val="2E8B16"/>
-              </a:buClr>
-              <a:buSzPts val="1850"/>
-              <a:buFont typeface="Montserrat SemiBold"/>
-              <a:buNone/>
-            </a:pPr>
-            <a:r>
-              <a:rPr b="1" i="0" lang="en-US" sz="1850" u="none" cap="none" strike="noStrike">
-                <a:solidFill>
-                  <a:srgbClr val="2E8B16"/>
-                </a:solidFill>
-                <a:latin typeface="Montserrat SemiBold"/>
-                <a:ea typeface="Montserrat SemiBold"/>
-                <a:cs typeface="Montserrat SemiBold"/>
-                <a:sym typeface="Montserrat SemiBold"/>
-              </a:rPr>
-              <a:t>1.  </a:t>
-            </a:r>
-            <a:r>
-              <a:rPr lang="en-US" sz="1850">
-                <a:solidFill>
-                  <a:srgbClr val="1A1A1A"/>
+              <a:rPr b="1" baseline="30000" i="0" lang="en-US" sz="1600" u="none" cap="none" strike="noStrike">
+                <a:solidFill>
+                  <a:srgbClr val="9AA3AB"/>
+                </a:solidFill>
+                <a:latin typeface="IBM Plex Sans Medium"/>
+                <a:ea typeface="IBM Plex Sans Medium"/>
+                <a:cs typeface="IBM Plex Sans Medium"/>
+                <a:sym typeface="IBM Plex Sans Medium"/>
+              </a:rPr>
+              <a:t>1</a:t>
+            </a:r>
+            <a:r>
+              <a:rPr b="0" i="0" lang="en-US" sz="1600" u="none" cap="none" strike="noStrike">
+                <a:solidFill>
+                  <a:srgbClr val="9AA3AB"/>
                 </a:solidFill>
                 <a:latin typeface="IBM Plex Sans"/>
                 <a:ea typeface="IBM Plex Sans"/>
                 <a:cs typeface="IBM Plex Sans"/>
                 <a:sym typeface="IBM Plex Sans"/>
               </a:rPr>
-              <a:t>Access control</a:t>
+              <a:t>https://github.com/genodelabs/genode/tree/sculpt-25.04/repos/gems/src/app/file_vault</a:t>
             </a:r>
             <a:endParaRPr/>
           </a:p>
           <a:p>
             <a:pPr indent="0" lvl="0" marL="0" marR="0" rtl="0" algn="l">
               <a:lnSpc>
-                <a:spcPct val="127027"/>
-              </a:lnSpc>
-              <a:spcBef>
-                <a:spcPts val="230"/>
-              </a:spcBef>
-              <a:spcAft>
-                <a:spcPts val="0"/>
-              </a:spcAft>
-              <a:buClr>
-                <a:srgbClr val="2E8B16"/>
-              </a:buClr>
-              <a:buSzPts val="1850"/>
-              <a:buFont typeface="Montserrat SemiBold"/>
+                <a:spcPct val="93750"/>
+              </a:lnSpc>
+              <a:spcBef>
+                <a:spcPts val="60"/>
+              </a:spcBef>
+              <a:spcAft>
+                <a:spcPts val="0"/>
+              </a:spcAft>
+              <a:buClr>
+                <a:srgbClr val="9AA3AB"/>
+              </a:buClr>
+              <a:buSzPts val="1600"/>
+              <a:buFont typeface="IBM Plex Sans Medium"/>
               <a:buNone/>
             </a:pPr>
             <a:r>
-              <a:rPr b="1" i="0" lang="en-US" sz="1850" u="none" cap="none" strike="noStrike">
-                <a:solidFill>
-                  <a:srgbClr val="2E8B16"/>
-                </a:solidFill>
-                <a:latin typeface="Montserrat SemiBold"/>
-                <a:ea typeface="Montserrat SemiBold"/>
-                <a:cs typeface="Montserrat SemiBold"/>
-                <a:sym typeface="Montserrat SemiBold"/>
-              </a:rPr>
-              <a:t>2.  </a:t>
-            </a:r>
-            <a:r>
-              <a:rPr b="0" i="0" lang="en-US" sz="1850" u="none" cap="none" strike="noStrike">
-                <a:solidFill>
-                  <a:srgbClr val="1A1A1A"/>
+              <a:rPr b="1" baseline="30000" i="0" lang="en-US" sz="1600" u="none" cap="none" strike="noStrike">
+                <a:solidFill>
+                  <a:srgbClr val="9AA3AB"/>
+                </a:solidFill>
+                <a:latin typeface="IBM Plex Sans Medium"/>
+                <a:ea typeface="IBM Plex Sans Medium"/>
+                <a:cs typeface="IBM Plex Sans Medium"/>
+                <a:sym typeface="IBM Plex Sans Medium"/>
+              </a:rPr>
+              <a:t>2</a:t>
+            </a:r>
+            <a:r>
+              <a:rPr b="0" i="0" lang="en-US" sz="1600" u="none" cap="none" strike="noStrike">
+                <a:solidFill>
+                  <a:srgbClr val="9AA3AB"/>
                 </a:solidFill>
                 <a:latin typeface="IBM Plex Sans"/>
                 <a:ea typeface="IBM Plex Sans"/>
                 <a:cs typeface="IBM Plex Sans"/>
                 <a:sym typeface="IBM Plex Sans"/>
               </a:rPr>
-              <a:t>Key stored on an external USB drive</a:t>
-            </a:r>
-            <a:endParaRPr/>
-          </a:p>
-          <a:p>
-            <a:pPr indent="0" lvl="0" marL="0" marR="0" rtl="0" algn="l">
-              <a:lnSpc>
-                <a:spcPct val="127027"/>
-              </a:lnSpc>
-              <a:spcBef>
-                <a:spcPts val="230"/>
-              </a:spcBef>
-              <a:spcAft>
-                <a:spcPts val="0"/>
-              </a:spcAft>
-              <a:buClr>
-                <a:srgbClr val="2E8B16"/>
-              </a:buClr>
-              <a:buSzPts val="1850"/>
-              <a:buFont typeface="Montserrat SemiBold"/>
+              <a:t>https://github.com/VoronM1522/genode/tree/se/repos/gems/src/app/se_vault</a:t>
+            </a:r>
+            <a:endParaRPr b="0" i="0" sz="1600" u="none" cap="none" strike="noStrike">
+              <a:solidFill>
+                <a:srgbClr val="9AA3AB"/>
+              </a:solidFill>
+              <a:latin typeface="IBM Plex Sans"/>
+              <a:ea typeface="IBM Plex Sans"/>
+              <a:cs typeface="IBM Plex Sans"/>
+              <a:sym typeface="IBM Plex Sans"/>
+            </a:endParaRPr>
+          </a:p>
+          <a:p>
+            <a:pPr indent="0" lvl="0" marL="0" rtl="0" algn="l">
+              <a:lnSpc>
+                <a:spcPct val="93750"/>
+              </a:lnSpc>
+              <a:spcBef>
+                <a:spcPts val="60"/>
+              </a:spcBef>
+              <a:spcAft>
+                <a:spcPts val="0"/>
+              </a:spcAft>
+              <a:buClr>
+                <a:srgbClr val="9AA3AB"/>
+              </a:buClr>
+              <a:buSzPts val="1600"/>
+              <a:buFont typeface="IBM Plex Sans Medium"/>
               <a:buNone/>
             </a:pPr>
             <a:r>
-              <a:rPr b="1" i="0" lang="en-US" sz="1850" u="none" cap="none" strike="noStrike">
-                <a:solidFill>
-                  <a:srgbClr val="2E8B16"/>
-                </a:solidFill>
-                <a:latin typeface="Montserrat SemiBold"/>
-                <a:ea typeface="Montserrat SemiBold"/>
-                <a:cs typeface="Montserrat SemiBold"/>
-                <a:sym typeface="Montserrat SemiBold"/>
-              </a:rPr>
-              <a:t>3.  </a:t>
-            </a:r>
-            <a:r>
-              <a:rPr b="0" i="0" lang="en-US" sz="1850" u="none" cap="none" strike="noStrike">
-                <a:solidFill>
-                  <a:srgbClr val="1A1A1A"/>
+              <a:rPr b="1" baseline="30000" lang="en-US" sz="1600">
+                <a:solidFill>
+                  <a:srgbClr val="9AA3AB"/>
+                </a:solidFill>
+                <a:latin typeface="IBM Plex Sans Medium"/>
+                <a:ea typeface="IBM Plex Sans Medium"/>
+                <a:cs typeface="IBM Plex Sans Medium"/>
+                <a:sym typeface="IBM Plex Sans Medium"/>
+              </a:rPr>
+              <a:t>3</a:t>
+            </a:r>
+            <a:r>
+              <a:rPr b="1" baseline="30000" lang="en-US" sz="1600">
+                <a:solidFill>
+                  <a:srgbClr val="9AA3AB"/>
+                </a:solidFill>
+                <a:latin typeface="IBM Plex Sans Medium"/>
+                <a:ea typeface="IBM Plex Sans Medium"/>
+                <a:cs typeface="IBM Plex Sans Medium"/>
+                <a:sym typeface="IBM Plex Sans Medium"/>
+              </a:rPr>
+              <a:t> </a:t>
+            </a:r>
+            <a:r>
+              <a:rPr lang="en-US" sz="1600">
+                <a:solidFill>
+                  <a:srgbClr val="9AA3AB"/>
                 </a:solidFill>
                 <a:latin typeface="IBM Plex Sans"/>
                 <a:ea typeface="IBM Plex Sans"/>
                 <a:cs typeface="IBM Plex Sans"/>
                 <a:sym typeface="IBM Plex Sans"/>
               </a:rPr>
-              <a:t>Encryption of snapshots (block-level)</a:t>
-            </a:r>
-            <a:endParaRPr/>
-          </a:p>
-          <a:p>
-            <a:pPr indent="0" lvl="0" marL="0" marR="0" rtl="0" algn="l">
-              <a:lnSpc>
-                <a:spcPct val="127027"/>
-              </a:lnSpc>
-              <a:spcBef>
-                <a:spcPts val="230"/>
-              </a:spcBef>
-              <a:spcAft>
-                <a:spcPts val="0"/>
-              </a:spcAft>
-              <a:buClr>
-                <a:srgbClr val="2E8B16"/>
-              </a:buClr>
-              <a:buSzPts val="1850"/>
-              <a:buFont typeface="Montserrat SemiBold"/>
+              <a:t>https://github.com/VoronM1522/genode-wundertuete</a:t>
+            </a:r>
+            <a:endParaRPr sz="1600">
+              <a:solidFill>
+                <a:srgbClr val="9AA3AB"/>
+              </a:solidFill>
+              <a:latin typeface="IBM Plex Sans"/>
+              <a:ea typeface="IBM Plex Sans"/>
+              <a:cs typeface="IBM Plex Sans"/>
+              <a:sym typeface="IBM Plex Sans"/>
+            </a:endParaRPr>
+          </a:p>
+          <a:p>
+            <a:pPr indent="0" lvl="0" marL="0" rtl="0" algn="l">
+              <a:lnSpc>
+                <a:spcPct val="93750"/>
+              </a:lnSpc>
+              <a:spcBef>
+                <a:spcPts val="60"/>
+              </a:spcBef>
+              <a:spcAft>
+                <a:spcPts val="0"/>
+              </a:spcAft>
+              <a:buClr>
+                <a:srgbClr val="9AA3AB"/>
+              </a:buClr>
+              <a:buSzPts val="1600"/>
+              <a:buFont typeface="IBM Plex Sans Medium"/>
               <a:buNone/>
             </a:pPr>
             <a:r>
-              <a:rPr b="1" i="0" lang="en-US" sz="1850" u="none" cap="none" strike="noStrike">
-                <a:solidFill>
-                  <a:srgbClr val="2E8B16"/>
-                </a:solidFill>
-                <a:latin typeface="Montserrat SemiBold"/>
-                <a:ea typeface="Montserrat SemiBold"/>
-                <a:cs typeface="Montserrat SemiBold"/>
-                <a:sym typeface="Montserrat SemiBold"/>
-              </a:rPr>
-              <a:t>4.  </a:t>
-            </a:r>
-            <a:r>
-              <a:rPr b="0" i="0" lang="en-US" sz="1850" u="none" cap="none" strike="noStrike">
-                <a:solidFill>
-                  <a:srgbClr val="1A1A1A"/>
+              <a:rPr b="1" baseline="30000" lang="en-US" sz="1600">
+                <a:solidFill>
+                  <a:srgbClr val="9AA3AB"/>
+                </a:solidFill>
+                <a:latin typeface="IBM Plex Sans Medium"/>
+                <a:ea typeface="IBM Plex Sans Medium"/>
+                <a:cs typeface="IBM Plex Sans Medium"/>
+                <a:sym typeface="IBM Plex Sans Medium"/>
+              </a:rPr>
+              <a:t>4</a:t>
+            </a:r>
+            <a:r>
+              <a:rPr lang="en-US" sz="1600">
+                <a:solidFill>
+                  <a:srgbClr val="9AA3AB"/>
                 </a:solidFill>
                 <a:latin typeface="IBM Plex Sans"/>
                 <a:ea typeface="IBM Plex Sans"/>
                 <a:cs typeface="IBM Plex Sans"/>
                 <a:sym typeface="IBM Plex Sans"/>
               </a:rPr>
-              <a:t>Only encrypted data written to disk</a:t>
-            </a:r>
-            <a:endParaRPr/>
-          </a:p>
-          <a:p>
-            <a:pPr indent="0" lvl="0" marL="0" marR="0" rtl="0" algn="l">
-              <a:lnSpc>
-                <a:spcPct val="127027"/>
-              </a:lnSpc>
-              <a:spcBef>
-                <a:spcPts val="230"/>
-              </a:spcBef>
-              <a:spcAft>
-                <a:spcPts val="0"/>
-              </a:spcAft>
-              <a:buClr>
-                <a:srgbClr val="2E8B16"/>
-              </a:buClr>
-              <a:buSzPts val="1850"/>
-              <a:buFont typeface="Montserrat SemiBold"/>
+              <a:t>https://github.com/VoronM1522/phantomuserland-snapper</a:t>
+            </a:r>
+            <a:endParaRPr sz="1600">
+              <a:solidFill>
+                <a:srgbClr val="9AA3AB"/>
+              </a:solidFill>
+              <a:latin typeface="IBM Plex Sans"/>
+              <a:ea typeface="IBM Plex Sans"/>
+              <a:cs typeface="IBM Plex Sans"/>
+              <a:sym typeface="IBM Plex Sans"/>
+            </a:endParaRPr>
+          </a:p>
+          <a:p>
+            <a:pPr indent="0" lvl="0" marL="0" rtl="0" algn="l">
+              <a:lnSpc>
+                <a:spcPct val="93750"/>
+              </a:lnSpc>
+              <a:spcBef>
+                <a:spcPts val="60"/>
+              </a:spcBef>
+              <a:spcAft>
+                <a:spcPts val="0"/>
+              </a:spcAft>
+              <a:buClr>
+                <a:srgbClr val="9AA3AB"/>
+              </a:buClr>
+              <a:buSzPts val="1600"/>
+              <a:buFont typeface="IBM Plex Sans Medium"/>
               <a:buNone/>
             </a:pPr>
             <a:r>
-              <a:rPr b="1" i="0" lang="en-US" sz="1850" u="none" cap="none" strike="noStrike">
-                <a:solidFill>
-                  <a:srgbClr val="2E8B16"/>
-                </a:solidFill>
-                <a:latin typeface="Montserrat SemiBold"/>
-                <a:ea typeface="Montserrat SemiBold"/>
-                <a:cs typeface="Montserrat SemiBold"/>
-                <a:sym typeface="Montserrat SemiBold"/>
-              </a:rPr>
-              <a:t>5.  </a:t>
-            </a:r>
-            <a:r>
-              <a:rPr b="0" i="0" lang="en-US" sz="1850" u="none" cap="none" strike="noStrike">
-                <a:solidFill>
-                  <a:srgbClr val="1A1A1A"/>
+              <a:rPr b="1" baseline="30000" lang="en-US" sz="1600">
+                <a:solidFill>
+                  <a:srgbClr val="9AA3AB"/>
+                </a:solidFill>
+                <a:latin typeface="IBM Plex Sans Medium"/>
+                <a:ea typeface="IBM Plex Sans Medium"/>
+                <a:cs typeface="IBM Plex Sans Medium"/>
+                <a:sym typeface="IBM Plex Sans Medium"/>
+              </a:rPr>
+              <a:t>5 </a:t>
+            </a:r>
+            <a:r>
+              <a:rPr lang="en-US" sz="1600">
+                <a:solidFill>
+                  <a:srgbClr val="9AA3AB"/>
                 </a:solidFill>
                 <a:latin typeface="IBM Plex Sans"/>
                 <a:ea typeface="IBM Plex Sans"/>
                 <a:cs typeface="IBM Plex Sans"/>
                 <a:sym typeface="IBM Plex Sans"/>
               </a:rPr>
-              <a:t>Acceptable performance overhead (≤ 2×)</a:t>
-            </a:r>
-            <a:endParaRPr/>
-          </a:p>
-        </p:txBody>
-      </p:sp>
-      <p:sp>
-        <p:nvSpPr>
-          <p:cNvPr id="99" name="Google Shape;99;p11"/>
-          <p:cNvSpPr/>
-          <p:nvPr/>
-        </p:nvSpPr>
-        <p:spPr>
-          <a:xfrm>
-            <a:off x="10800000" y="3050000"/>
-            <a:ext cx="6350000" cy="4950000"/>
-          </a:xfrm>
-          <a:prstGeom prst="roundRect">
-            <a:avLst>
-              <a:gd fmla="val 6000" name="adj"/>
-            </a:avLst>
-          </a:prstGeom>
-          <a:solidFill>
-            <a:srgbClr val="40BA21"/>
-          </a:solidFill>
-          <a:ln>
-            <a:noFill/>
-          </a:ln>
-        </p:spPr>
-        <p:txBody>
-          <a:bodyPr anchorCtr="0" anchor="ctr" bIns="434000" lIns="620000" spcFirstLastPara="1" rIns="620000" wrap="square" tIns="434000">
-            <a:noAutofit/>
-          </a:bodyPr>
-          <a:lstStyle/>
-          <a:p>
-            <a:pPr indent="0" lvl="0" marL="0" marR="0" rtl="0" algn="l">
-              <a:lnSpc>
-                <a:spcPct val="126829"/>
-              </a:lnSpc>
-              <a:spcBef>
-                <a:spcPts val="0"/>
-              </a:spcBef>
-              <a:spcAft>
-                <a:spcPts val="0"/>
-              </a:spcAft>
-              <a:buClr>
-                <a:srgbClr val="FFFFFF"/>
-              </a:buClr>
-              <a:buSzPts val="2050"/>
-              <a:buFont typeface="Montserrat SemiBold"/>
+              <a:t>https://github.com/VoronM1522/snapper</a:t>
+            </a:r>
+            <a:endParaRPr sz="1600">
+              <a:solidFill>
+                <a:srgbClr val="9AA3AB"/>
+              </a:solidFill>
+              <a:latin typeface="IBM Plex Sans"/>
+              <a:ea typeface="IBM Plex Sans"/>
+              <a:cs typeface="IBM Plex Sans"/>
+              <a:sym typeface="IBM Plex Sans"/>
+            </a:endParaRPr>
+          </a:p>
+          <a:p>
+            <a:pPr indent="0" lvl="0" marL="0" rtl="0" algn="l">
+              <a:lnSpc>
+                <a:spcPct val="93750"/>
+              </a:lnSpc>
+              <a:spcBef>
+                <a:spcPts val="60"/>
+              </a:spcBef>
+              <a:spcAft>
+                <a:spcPts val="0"/>
+              </a:spcAft>
+              <a:buClr>
+                <a:srgbClr val="9AA3AB"/>
+              </a:buClr>
+              <a:buSzPts val="1600"/>
+              <a:buFont typeface="IBM Plex Sans Medium"/>
               <a:buNone/>
             </a:pPr>
             <a:r>
-              <a:rPr b="1" i="0" lang="en-US" sz="2050" u="none" cap="none" strike="noStrike">
-                <a:solidFill>
-                  <a:srgbClr val="FFFFFF"/>
-                </a:solidFill>
-                <a:latin typeface="Montserrat SemiBold"/>
-                <a:ea typeface="Montserrat SemiBold"/>
-                <a:cs typeface="Montserrat SemiBold"/>
-                <a:sym typeface="Montserrat SemiBold"/>
-              </a:rPr>
-              <a:t>USB drive = key + auth factor</a:t>
-            </a:r>
-            <a:endParaRPr/>
-          </a:p>
-          <a:p>
-            <a:pPr indent="0" lvl="0" marL="0" marR="0" rtl="0" algn="l">
-              <a:lnSpc>
-                <a:spcPct val="129729"/>
-              </a:lnSpc>
-              <a:spcBef>
-                <a:spcPts val="400"/>
-              </a:spcBef>
-              <a:spcAft>
-                <a:spcPts val="0"/>
-              </a:spcAft>
-              <a:buClr>
-                <a:srgbClr val="FFFFFF"/>
-              </a:buClr>
-              <a:buSzPts val="1850"/>
-              <a:buFont typeface="IBM Plex Sans"/>
-              <a:buNone/>
-            </a:pPr>
-            <a:r>
-              <a:rPr b="0" i="0" lang="en-US" sz="1850" u="none" cap="none" strike="noStrike">
-                <a:solidFill>
-                  <a:srgbClr val="FFFFFF"/>
+              <a:rPr b="1" baseline="30000" lang="en-US" sz="1600">
+                <a:solidFill>
+                  <a:srgbClr val="9AA3AB"/>
+                </a:solidFill>
+                <a:latin typeface="IBM Plex Sans Medium"/>
+                <a:ea typeface="IBM Plex Sans Medium"/>
+                <a:cs typeface="IBM Plex Sans Medium"/>
+                <a:sym typeface="IBM Plex Sans Medium"/>
+              </a:rPr>
+              <a:t>6</a:t>
+            </a:r>
+            <a:r>
+              <a:rPr lang="en-US" sz="1600">
+                <a:solidFill>
+                  <a:srgbClr val="9AA3AB"/>
                 </a:solidFill>
                 <a:latin typeface="IBM Plex Sans"/>
                 <a:ea typeface="IBM Plex Sans"/>
                 <a:cs typeface="IBM Plex Sans"/>
                 <a:sym typeface="IBM Plex Sans"/>
               </a:rPr>
-              <a:t>Requirements 1 and 2 combined: the USB drive both contains the key and serves as the authentication factor.</a:t>
-            </a:r>
-            <a:endParaRPr/>
+              <a:t>https://github.com/VoronM1522/genode/tree/se/repos/os</a:t>
+            </a:r>
+            <a:endParaRPr sz="1600">
+              <a:solidFill>
+                <a:srgbClr val="9AA3AB"/>
+              </a:solidFill>
+              <a:latin typeface="IBM Plex Sans"/>
+              <a:ea typeface="IBM Plex Sans"/>
+              <a:cs typeface="IBM Plex Sans"/>
+              <a:sym typeface="IBM Plex Sans"/>
+            </a:endParaRPr>
           </a:p>
         </p:txBody>
       </p:sp>
       <p:pic>
         <p:nvPicPr>
-          <p:cNvPr id="100" name="Google Shape;100;p11"/>
+          <p:cNvPr id="108" name="Google Shape;108;p11"/>
           <p:cNvPicPr preferRelativeResize="0"/>
           <p:nvPr/>
         </p:nvPicPr>
@@ -13431,7 +12807,7 @@
       </p:pic>
       <p:sp>
         <p:nvSpPr>
-          <p:cNvPr id="101" name="Google Shape;101;p11"/>
+          <p:cNvPr id="109" name="Google Shape;109;p11"/>
           <p:cNvSpPr/>
           <p:nvPr/>
         </p:nvSpPr>
@@ -13478,7 +12854,7 @@
                 <a:cs typeface="IBM Plex Mono"/>
                 <a:sym typeface="IBM Plex Mono"/>
               </a:rPr>
-              <a:t>8</a:t>
+              <a:t>9</a:t>
             </a:r>
             <a:r>
               <a:rPr b="0" i="0" lang="en-US" sz="1300" u="none" cap="none" strike="noStrike">
@@ -13505,6 +12881,498 @@
               <a:t>13</a:t>
             </a:r>
             <a:endParaRPr/>
+          </a:p>
+        </p:txBody>
+      </p:sp>
+      <p:sp>
+        <p:nvSpPr>
+          <p:cNvPr id="110" name="Google Shape;110;p11"/>
+          <p:cNvSpPr/>
+          <p:nvPr/>
+        </p:nvSpPr>
+        <p:spPr>
+          <a:xfrm>
+            <a:off x="1095375" y="5925700"/>
+            <a:ext cx="7700100" cy="2393700"/>
+          </a:xfrm>
+          <a:prstGeom prst="roundRect">
+            <a:avLst>
+              <a:gd fmla="val 6000" name="adj"/>
+            </a:avLst>
+          </a:prstGeom>
+          <a:solidFill>
+            <a:srgbClr val="EEF1F4"/>
+          </a:solidFill>
+          <a:ln>
+            <a:noFill/>
+          </a:ln>
+        </p:spPr>
+        <p:txBody>
+          <a:bodyPr anchorCtr="0" anchor="t" bIns="364000" lIns="520000" spcFirstLastPara="1" rIns="520000" wrap="square" tIns="364000">
+            <a:noAutofit/>
+          </a:bodyPr>
+          <a:lstStyle/>
+          <a:p>
+            <a:pPr indent="0" lvl="0" marL="0" marR="0" rtl="0" algn="l">
+              <a:lnSpc>
+                <a:spcPct val="126315"/>
+              </a:lnSpc>
+              <a:spcBef>
+                <a:spcPts val="0"/>
+              </a:spcBef>
+              <a:spcAft>
+                <a:spcPts val="0"/>
+              </a:spcAft>
+              <a:buClr>
+                <a:srgbClr val="1A1A1A"/>
+              </a:buClr>
+              <a:buSzPts val="1900"/>
+              <a:buFont typeface="Montserrat SemiBold"/>
+              <a:buNone/>
+            </a:pPr>
+            <a:r>
+              <a:rPr b="1" lang="en-US" sz="1900">
+                <a:solidFill>
+                  <a:srgbClr val="1A1A1A"/>
+                </a:solidFill>
+                <a:latin typeface="Montserrat SemiBold"/>
+                <a:ea typeface="Montserrat SemiBold"/>
+                <a:cs typeface="Montserrat SemiBold"/>
+                <a:sym typeface="Montserrat SemiBold"/>
+              </a:rPr>
+              <a:t>Related fixes &amp; Adaptations:</a:t>
+            </a:r>
+            <a:endParaRPr b="1" i="0" sz="1900" u="none" cap="none" strike="noStrike">
+              <a:solidFill>
+                <a:srgbClr val="1A1A1A"/>
+              </a:solidFill>
+              <a:latin typeface="Montserrat SemiBold"/>
+              <a:ea typeface="Montserrat SemiBold"/>
+              <a:cs typeface="Montserrat SemiBold"/>
+              <a:sym typeface="Montserrat SemiBold"/>
+            </a:endParaRPr>
+          </a:p>
+          <a:p>
+            <a:pPr indent="-380001" lvl="0" marL="380001" marR="0" rtl="0" algn="l">
+              <a:lnSpc>
+                <a:spcPct val="126470"/>
+              </a:lnSpc>
+              <a:spcBef>
+                <a:spcPts val="300"/>
+              </a:spcBef>
+              <a:spcAft>
+                <a:spcPts val="0"/>
+              </a:spcAft>
+              <a:buClr>
+                <a:srgbClr val="1A1A1A"/>
+              </a:buClr>
+              <a:buSzPts val="1700"/>
+              <a:buFont typeface="Arial"/>
+              <a:buChar char="•"/>
+            </a:pPr>
+            <a:r>
+              <a:rPr lang="en-US" sz="1700">
+                <a:solidFill>
+                  <a:srgbClr val="1A1A1A"/>
+                </a:solidFill>
+                <a:latin typeface="IBM Plex Sans"/>
+                <a:ea typeface="IBM Plex Sans"/>
+                <a:cs typeface="IBM Plex Sans"/>
+                <a:sym typeface="IBM Plex Sans"/>
+              </a:rPr>
+              <a:t>lwext4</a:t>
+            </a:r>
+            <a:r>
+              <a:rPr baseline="30000" lang="en-US" sz="1700">
+                <a:solidFill>
+                  <a:srgbClr val="1A1A1A"/>
+                </a:solidFill>
+                <a:latin typeface="IBM Plex Sans"/>
+                <a:ea typeface="IBM Plex Sans"/>
+                <a:cs typeface="IBM Plex Sans"/>
+                <a:sym typeface="IBM Plex Sans"/>
+              </a:rPr>
+              <a:t>3</a:t>
+            </a:r>
+            <a:r>
+              <a:rPr lang="en-US" sz="1700">
+                <a:solidFill>
+                  <a:srgbClr val="1A1A1A"/>
+                </a:solidFill>
+                <a:latin typeface="IBM Plex Sans"/>
+                <a:ea typeface="IBM Plex Sans"/>
+                <a:cs typeface="IBM Plex Sans"/>
+                <a:sym typeface="IBM Plex Sans"/>
+              </a:rPr>
+              <a:t> (</a:t>
+            </a:r>
+            <a:r>
+              <a:rPr lang="en-US" sz="1700">
+                <a:solidFill>
+                  <a:srgbClr val="1A1A1A"/>
+                </a:solidFill>
+                <a:latin typeface="IBM Plex Sans"/>
+                <a:ea typeface="IBM Plex Sans"/>
+                <a:cs typeface="IBM Plex Sans"/>
+                <a:sym typeface="IBM Plex Sans"/>
+              </a:rPr>
+              <a:t>ftruncate and sync</a:t>
+            </a:r>
+            <a:r>
+              <a:rPr lang="en-US">
+                <a:solidFill>
+                  <a:schemeClr val="dk1"/>
+                </a:solidFill>
+              </a:rPr>
+              <a:t>)</a:t>
+            </a:r>
+            <a:endParaRPr>
+              <a:solidFill>
+                <a:schemeClr val="dk1"/>
+              </a:solidFill>
+            </a:endParaRPr>
+          </a:p>
+          <a:p>
+            <a:pPr indent="-380001" lvl="0" marL="380001" marR="0" rtl="0" algn="l">
+              <a:lnSpc>
+                <a:spcPct val="126470"/>
+              </a:lnSpc>
+              <a:spcBef>
+                <a:spcPts val="300"/>
+              </a:spcBef>
+              <a:spcAft>
+                <a:spcPts val="0"/>
+              </a:spcAft>
+              <a:buClr>
+                <a:schemeClr val="dk1"/>
+              </a:buClr>
+              <a:buSzPts val="1700"/>
+              <a:buChar char="•"/>
+            </a:pPr>
+            <a:r>
+              <a:rPr lang="en-US" sz="1700">
+                <a:solidFill>
+                  <a:schemeClr val="dk1"/>
+                </a:solidFill>
+                <a:latin typeface="IBM Plex Sans"/>
+                <a:ea typeface="IBM Plex Sans"/>
+                <a:cs typeface="IBM Plex Sans"/>
+                <a:sym typeface="IBM Plex Sans"/>
+              </a:rPr>
+              <a:t>isomem</a:t>
+            </a:r>
+            <a:r>
+              <a:rPr baseline="30000" lang="en-US" sz="1700">
+                <a:solidFill>
+                  <a:schemeClr val="dk1"/>
+                </a:solidFill>
+                <a:latin typeface="IBM Plex Sans"/>
+                <a:ea typeface="IBM Plex Sans"/>
+                <a:cs typeface="IBM Plex Sans"/>
+                <a:sym typeface="IBM Plex Sans"/>
+              </a:rPr>
+              <a:t>4</a:t>
+            </a:r>
+            <a:r>
+              <a:rPr lang="en-US" sz="1700">
+                <a:solidFill>
+                  <a:schemeClr val="dk1"/>
+                </a:solidFill>
+                <a:latin typeface="IBM Plex Sans"/>
+                <a:ea typeface="IBM Plex Sans"/>
+                <a:cs typeface="IBM Plex Sans"/>
+                <a:sym typeface="IBM Plex Sans"/>
+              </a:rPr>
+              <a:t> (</a:t>
+            </a:r>
+            <a:r>
+              <a:rPr lang="en-US" sz="1700">
+                <a:solidFill>
+                  <a:srgbClr val="1A1A1A"/>
+                </a:solidFill>
+                <a:latin typeface="IBM Plex Sans"/>
+                <a:ea typeface="IBM Plex Sans"/>
+                <a:cs typeface="IBM Plex Sans"/>
+                <a:sym typeface="IBM Plex Sans"/>
+              </a:rPr>
+              <a:t>power-off button callback and graceful shutdown</a:t>
+            </a:r>
+            <a:r>
+              <a:rPr lang="en-US" sz="1700">
+                <a:solidFill>
+                  <a:schemeClr val="dk1"/>
+                </a:solidFill>
+                <a:latin typeface="IBM Plex Sans"/>
+                <a:ea typeface="IBM Plex Sans"/>
+                <a:cs typeface="IBM Plex Sans"/>
+                <a:sym typeface="IBM Plex Sans"/>
+              </a:rPr>
+              <a:t>)</a:t>
+            </a:r>
+            <a:endParaRPr sz="1700">
+              <a:solidFill>
+                <a:schemeClr val="dk1"/>
+              </a:solidFill>
+              <a:latin typeface="IBM Plex Sans"/>
+              <a:ea typeface="IBM Plex Sans"/>
+              <a:cs typeface="IBM Plex Sans"/>
+              <a:sym typeface="IBM Plex Sans"/>
+            </a:endParaRPr>
+          </a:p>
+          <a:p>
+            <a:pPr indent="-380001" lvl="0" marL="380001" marR="0" rtl="0" algn="l">
+              <a:lnSpc>
+                <a:spcPct val="126470"/>
+              </a:lnSpc>
+              <a:spcBef>
+                <a:spcPts val="300"/>
+              </a:spcBef>
+              <a:spcAft>
+                <a:spcPts val="0"/>
+              </a:spcAft>
+              <a:buClr>
+                <a:schemeClr val="dk1"/>
+              </a:buClr>
+              <a:buSzPts val="1700"/>
+              <a:buChar char="•"/>
+            </a:pPr>
+            <a:r>
+              <a:rPr lang="en-US" sz="1700">
+                <a:solidFill>
+                  <a:srgbClr val="1A1A1A"/>
+                </a:solidFill>
+                <a:latin typeface="IBM Plex Sans"/>
+                <a:ea typeface="IBM Plex Sans"/>
+                <a:cs typeface="IBM Plex Sans"/>
+                <a:sym typeface="IBM Plex Sans"/>
+              </a:rPr>
+              <a:t>snapper</a:t>
+            </a:r>
+            <a:r>
+              <a:rPr baseline="30000" lang="en-US" sz="1700">
+                <a:solidFill>
+                  <a:srgbClr val="1A1A1A"/>
+                </a:solidFill>
+                <a:latin typeface="IBM Plex Sans"/>
+                <a:ea typeface="IBM Plex Sans"/>
+                <a:cs typeface="IBM Plex Sans"/>
+                <a:sym typeface="IBM Plex Sans"/>
+              </a:rPr>
+              <a:t>5</a:t>
+            </a:r>
+            <a:r>
+              <a:rPr lang="en-US" sz="1700">
+                <a:solidFill>
+                  <a:srgbClr val="1A1A1A"/>
+                </a:solidFill>
+                <a:latin typeface="IBM Plex Sans"/>
+                <a:ea typeface="IBM Plex Sans"/>
+                <a:cs typeface="IBM Plex Sans"/>
+                <a:sym typeface="IBM Plex Sans"/>
+              </a:rPr>
+              <a:t> (client counter and graceful shutdown)</a:t>
+            </a:r>
+            <a:endParaRPr sz="1700">
+              <a:solidFill>
+                <a:srgbClr val="1A1A1A"/>
+              </a:solidFill>
+              <a:latin typeface="IBM Plex Sans"/>
+              <a:ea typeface="IBM Plex Sans"/>
+              <a:cs typeface="IBM Plex Sans"/>
+              <a:sym typeface="IBM Plex Sans"/>
+            </a:endParaRPr>
+          </a:p>
+          <a:p>
+            <a:pPr indent="-380001" lvl="0" marL="380001" marR="0" rtl="0" algn="l">
+              <a:lnSpc>
+                <a:spcPct val="126470"/>
+              </a:lnSpc>
+              <a:spcBef>
+                <a:spcPts val="300"/>
+              </a:spcBef>
+              <a:spcAft>
+                <a:spcPts val="0"/>
+              </a:spcAft>
+              <a:buClr>
+                <a:schemeClr val="dk1"/>
+              </a:buClr>
+              <a:buSzPts val="1700"/>
+              <a:buChar char="•"/>
+            </a:pPr>
+            <a:r>
+              <a:rPr lang="en-US" sz="1700">
+                <a:solidFill>
+                  <a:schemeClr val="dk1"/>
+                </a:solidFill>
+                <a:latin typeface="IBM Plex Sans"/>
+                <a:ea typeface="IBM Plex Sans"/>
+                <a:cs typeface="IBM Plex Sans"/>
+                <a:sym typeface="IBM Plex Sans"/>
+              </a:rPr>
+              <a:t>vfs</a:t>
+            </a:r>
+            <a:r>
+              <a:rPr baseline="30000" lang="en-US" sz="1700">
+                <a:solidFill>
+                  <a:schemeClr val="dk1"/>
+                </a:solidFill>
+                <a:latin typeface="IBM Plex Sans"/>
+                <a:ea typeface="IBM Plex Sans"/>
+                <a:cs typeface="IBM Plex Sans"/>
+                <a:sym typeface="IBM Plex Sans"/>
+              </a:rPr>
+              <a:t>6</a:t>
+            </a:r>
+            <a:r>
+              <a:rPr lang="en-US" sz="1700">
+                <a:solidFill>
+                  <a:schemeClr val="dk1"/>
+                </a:solidFill>
+                <a:latin typeface="IBM Plex Sans"/>
+                <a:ea typeface="IBM Plex Sans"/>
+                <a:cs typeface="IBM Plex Sans"/>
+                <a:sym typeface="IBM Plex Sans"/>
+              </a:rPr>
+              <a:t> (</a:t>
+            </a:r>
+            <a:r>
+              <a:rPr lang="en-US" sz="1700">
+                <a:solidFill>
+                  <a:srgbClr val="1A1A1A"/>
+                </a:solidFill>
+                <a:latin typeface="IBM Plex Sans"/>
+                <a:ea typeface="IBM Plex Sans"/>
+                <a:cs typeface="IBM Plex Sans"/>
+                <a:sym typeface="IBM Plex Sans"/>
+              </a:rPr>
+              <a:t>client counter, graceful shutdown and clean unmount</a:t>
+            </a:r>
+            <a:r>
+              <a:rPr lang="en-US" sz="1700">
+                <a:solidFill>
+                  <a:schemeClr val="dk1"/>
+                </a:solidFill>
+                <a:latin typeface="IBM Plex Sans"/>
+                <a:ea typeface="IBM Plex Sans"/>
+                <a:cs typeface="IBM Plex Sans"/>
+                <a:sym typeface="IBM Plex Sans"/>
+              </a:rPr>
+              <a:t>)</a:t>
+            </a:r>
+            <a:endParaRPr/>
+          </a:p>
+        </p:txBody>
+      </p:sp>
+      <p:sp>
+        <p:nvSpPr>
+          <p:cNvPr id="111" name="Google Shape;111;p11"/>
+          <p:cNvSpPr/>
+          <p:nvPr/>
+        </p:nvSpPr>
+        <p:spPr>
+          <a:xfrm>
+            <a:off x="9395375" y="5925700"/>
+            <a:ext cx="7754700" cy="2393700"/>
+          </a:xfrm>
+          <a:prstGeom prst="roundRect">
+            <a:avLst>
+              <a:gd fmla="val 6000" name="adj"/>
+            </a:avLst>
+          </a:prstGeom>
+          <a:solidFill>
+            <a:srgbClr val="40BA21"/>
+          </a:solidFill>
+          <a:ln>
+            <a:noFill/>
+          </a:ln>
+        </p:spPr>
+        <p:txBody>
+          <a:bodyPr anchorCtr="0" anchor="t" bIns="364000" lIns="520000" spcFirstLastPara="1" rIns="520000" wrap="square" tIns="364000">
+            <a:noAutofit/>
+          </a:bodyPr>
+          <a:lstStyle/>
+          <a:p>
+            <a:pPr indent="0" lvl="0" marL="0" marR="0" rtl="0" algn="l">
+              <a:lnSpc>
+                <a:spcPct val="126315"/>
+              </a:lnSpc>
+              <a:spcBef>
+                <a:spcPts val="300"/>
+              </a:spcBef>
+              <a:spcAft>
+                <a:spcPts val="0"/>
+              </a:spcAft>
+              <a:buClr>
+                <a:srgbClr val="FFFFFF"/>
+              </a:buClr>
+              <a:buSzPts val="1900"/>
+              <a:buFont typeface="Montserrat SemiBold"/>
+              <a:buNone/>
+            </a:pPr>
+            <a:r>
+              <a:rPr b="1" lang="en-US" sz="1900">
+                <a:solidFill>
+                  <a:srgbClr val="FFFFFF"/>
+                </a:solidFill>
+                <a:latin typeface="Montserrat SemiBold"/>
+                <a:ea typeface="Montserrat SemiBold"/>
+                <a:cs typeface="Montserrat SemiBold"/>
+                <a:sym typeface="Montserrat SemiBold"/>
+              </a:rPr>
+              <a:t>Optimization:</a:t>
+            </a:r>
+            <a:endParaRPr b="1" i="0" sz="1900" u="none" cap="none" strike="noStrike">
+              <a:solidFill>
+                <a:srgbClr val="FFFFFF"/>
+              </a:solidFill>
+              <a:latin typeface="Montserrat SemiBold"/>
+              <a:ea typeface="Montserrat SemiBold"/>
+              <a:cs typeface="Montserrat SemiBold"/>
+              <a:sym typeface="Montserrat SemiBold"/>
+            </a:endParaRPr>
+          </a:p>
+          <a:p>
+            <a:pPr indent="0" lvl="0" marL="0" rtl="0" algn="l">
+              <a:lnSpc>
+                <a:spcPct val="126315"/>
+              </a:lnSpc>
+              <a:spcBef>
+                <a:spcPts val="0"/>
+              </a:spcBef>
+              <a:spcAft>
+                <a:spcPts val="0"/>
+              </a:spcAft>
+              <a:buClr>
+                <a:schemeClr val="dk1"/>
+              </a:buClr>
+              <a:buFont typeface="Arial"/>
+              <a:buNone/>
+            </a:pPr>
+            <a:r>
+              <a:rPr lang="en-US" sz="1700">
+                <a:solidFill>
+                  <a:schemeClr val="lt1"/>
+                </a:solidFill>
+                <a:latin typeface="IBM Plex Sans"/>
+                <a:ea typeface="IBM Plex Sans"/>
+                <a:cs typeface="IBM Plex Sans"/>
+                <a:sym typeface="IBM Plex Sans"/>
+              </a:rPr>
+              <a:t>U</a:t>
+            </a:r>
+            <a:r>
+              <a:rPr lang="en-US" sz="1700">
+                <a:solidFill>
+                  <a:schemeClr val="lt1"/>
+                </a:solidFill>
+                <a:latin typeface="IBM Plex Sans"/>
+                <a:ea typeface="IBM Plex Sans"/>
+                <a:cs typeface="IBM Plex Sans"/>
+                <a:sym typeface="IBM Plex Sans"/>
+              </a:rPr>
+              <a:t>sing a “Block” session directly — initialization time reduced from ≈20 min to ≈1 min</a:t>
+            </a:r>
+            <a:endParaRPr sz="1700"/>
           </a:p>
         </p:txBody>
       </p:sp>

--- a/presentation/slides_main.pptx
+++ b/presentation/slides_main.pptx
@@ -3605,7 +3605,7 @@
                 <a:cs typeface="IBM Plex Sans Medium"/>
                 <a:sym typeface="IBM Plex Sans Medium"/>
               </a:rPr>
-              <a:t> with options for AES/SHA hardware acceleration and virtual NVMe usage </a:t>
+              <a:t> with options for AES/SHA hardware acceleration and virtual NVMe usage.</a:t>
             </a:r>
             <a:endParaRPr/>
           </a:p>
@@ -3970,7 +3970,7 @@
             <a:tbl>
               <a:tblPr>
                 <a:noFill/>
-                <a:tableStyleId>{16598436-0C82-461B-8716-D7F4A8F73A9F}</a:tableStyleId>
+                <a:tableStyleId>{36A4C4E9-0A7E-4082-BDBB-E86FDD1CA3EE}</a:tableStyleId>
               </a:tblPr>
               <a:tblGrid>
                 <a:gridCol w="2152050"/>
@@ -4609,7 +4609,7 @@
                 <a:cs typeface="IBM Plex Sans Medium"/>
                 <a:sym typeface="IBM Plex Sans Medium"/>
               </a:rPr>
-              <a:t>A performance bug was found during the implementation. Reasons require additional investigation. One of them is a known optimization issue in Tresor</a:t>
+              <a:t>A performance bug was found during the PoC implementation. Reasons require additional investigation. One of them is a known optimization issue in Tresor.</a:t>
             </a:r>
             <a:endParaRPr sz="1800">
               <a:solidFill>
@@ -5056,7 +5056,7 @@
                 <a:cs typeface="IBM Plex Sans"/>
                 <a:sym typeface="IBM Plex Sans"/>
               </a:rPr>
-              <a:t>Merge Snapper and Tresor snapshot concepts;</a:t>
+              <a:t>Merge Snapper and Tresor snapshot concepts</a:t>
             </a:r>
             <a:endParaRPr sz="1900">
               <a:solidFill>
@@ -5684,7 +5684,7 @@
                 <a:cs typeface="IBM Plex Sans Medium"/>
                 <a:sym typeface="IBM Plex Sans Medium"/>
               </a:rPr>
-              <a:t>Objectives of the work mostly achieved. The only issue is a bug in the implementation </a:t>
+              <a:t>Objectives of the work mostly achieved. The only issue is a bug in the PoC implementation </a:t>
             </a:r>
             <a:endParaRPr sz="1900">
               <a:solidFill>
@@ -6228,7 +6228,7 @@
                 <a:cs typeface="IBM Plex Sans"/>
                 <a:sym typeface="IBM Plex Sans"/>
               </a:rPr>
-              <a:t>Conception d</a:t>
+              <a:t>Concept d</a:t>
             </a:r>
             <a:r>
               <a:rPr b="0" i="0" lang="en-US" sz="2000" u="none" cap="none" strike="noStrike">
@@ -8210,7 +8210,7 @@
                 <a:cs typeface="Montserrat Medium"/>
                 <a:sym typeface="Montserrat Medium"/>
               </a:rPr>
-              <a:t>his is out test platform</a:t>
+              <a:t>his is our test platform</a:t>
             </a:r>
             <a:endParaRPr b="1" i="0" sz="1000" u="none" cap="none" strike="noStrike">
               <a:solidFill>
@@ -10753,7 +10753,7 @@
                 <a:cs typeface="IBM Plex Sans Medium"/>
                 <a:sym typeface="IBM Plex Sans Medium"/>
               </a:rPr>
-              <a:t>We consieder this scenario</a:t>
+              <a:t>We consider this scenario</a:t>
             </a:r>
             <a:endParaRPr sz="1800">
               <a:solidFill>
@@ -11115,7 +11115,7 @@
                 <a:cs typeface="IBM Plex Sans Medium"/>
                 <a:sym typeface="IBM Plex Sans Medium"/>
               </a:rPr>
-              <a:t>We consieder this scenario</a:t>
+              <a:t>We consider this scenario</a:t>
             </a:r>
             <a:endParaRPr sz="1800">
               <a:solidFill>
@@ -12115,7 +12115,7 @@
                 <a:cs typeface="Montserrat SemiBold"/>
                 <a:sym typeface="Montserrat SemiBold"/>
               </a:rPr>
-              <a:t>  as modified file_vault</a:t>
+              <a:t> as modified file_vault</a:t>
             </a:r>
             <a:endParaRPr b="1" i="0" sz="1900" u="none" cap="none" strike="noStrike">
               <a:solidFill>
@@ -13385,6 +13385,285 @@
 </file>
 
 <file path=ppt/theme/theme1.xml><?xml version="1.0" encoding="utf-8"?>
+<a:theme xmlns:a="http://schemas.openxmlformats.org/drawingml/2006/main" xmlns:r="http://schemas.openxmlformats.org/officeDocument/2006/relationships" name="Office Theme">
+  <a:themeElements>
+    <a:clrScheme name="Office">
+      <a:dk1>
+        <a:srgbClr val="000000"/>
+      </a:dk1>
+      <a:lt1>
+        <a:srgbClr val="FFFFFF"/>
+      </a:lt1>
+      <a:dk2>
+        <a:srgbClr val="44546A"/>
+      </a:dk2>
+      <a:lt2>
+        <a:srgbClr val="E7E6E6"/>
+      </a:lt2>
+      <a:accent1>
+        <a:srgbClr val="4472C4"/>
+      </a:accent1>
+      <a:accent2>
+        <a:srgbClr val="ED7D31"/>
+      </a:accent2>
+      <a:accent3>
+        <a:srgbClr val="A5A5A5"/>
+      </a:accent3>
+      <a:accent4>
+        <a:srgbClr val="FFC000"/>
+      </a:accent4>
+      <a:accent5>
+        <a:srgbClr val="5B9BD5"/>
+      </a:accent5>
+      <a:accent6>
+        <a:srgbClr val="70AD47"/>
+      </a:accent6>
+      <a:hlink>
+        <a:srgbClr val="0563C1"/>
+      </a:hlink>
+      <a:folHlink>
+        <a:srgbClr val="954F72"/>
+      </a:folHlink>
+    </a:clrScheme>
+    <a:fontScheme name="Office">
+      <a:majorFont>
+        <a:latin typeface="Arial"/>
+        <a:ea typeface=""/>
+        <a:cs typeface=""/>
+        <a:font script="Jpan" typeface="ＭＳ Ｐゴシック"/>
+        <a:font script="Hang" typeface="맑은 고딕"/>
+        <a:font script="Hans" typeface="宋体"/>
+        <a:font script="Hant" typeface="新細明體"/>
+        <a:font script="Arab" typeface="Times New Roman"/>
+        <a:font script="Hebr" typeface="Times New Roman"/>
+        <a:font script="Thai" typeface="Angsana New"/>
+        <a:font script="Ethi" typeface="Nyala"/>
+        <a:font script="Beng" typeface="Vrinda"/>
+        <a:font script="Gujr" typeface="Shruti"/>
+        <a:font script="Khmr" typeface="MoolBoran"/>
+        <a:font script="Knda" typeface="Tunga"/>
+        <a:font script="Guru" typeface="Raavi"/>
+        <a:font script="Cans" typeface="Euphemia"/>
+        <a:font script="Cher" typeface="Plantagenet Cherokee"/>
+        <a:font script="Yiii" typeface="Microsoft Yi Baiti"/>
+        <a:font script="Tibt" typeface="Microsoft Himalaya"/>
+        <a:font script="Thaa" typeface="MV Boli"/>
+        <a:font script="Deva" typeface="Mangal"/>
+        <a:font script="Telu" typeface="Gautami"/>
+        <a:font script="Taml" typeface="Latha"/>
+        <a:font script="Syrc" typeface="Estrangelo Edessa"/>
+        <a:font script="Orya" typeface="Kalinga"/>
+        <a:font script="Mlym" typeface="Kartika"/>
+        <a:font script="Laoo" typeface="DokChampa"/>
+        <a:font script="Sinh" typeface="Iskoola Pota"/>
+        <a:font script="Mong" typeface="Mongolian Baiti"/>
+        <a:font script="Viet" typeface="Times New Roman"/>
+        <a:font script="Uigh" typeface="Microsoft Uighur"/>
+        <a:font script="Geor" typeface="Sylfaen"/>
+      </a:majorFont>
+      <a:minorFont>
+        <a:latin typeface="Arial"/>
+        <a:ea typeface=""/>
+        <a:cs typeface=""/>
+        <a:font script="Jpan" typeface="ＭＳ Ｐゴシック"/>
+        <a:font script="Hang" typeface="맑은 고딕"/>
+        <a:font script="Hans" typeface="宋体"/>
+        <a:font script="Hant" typeface="新細明體"/>
+        <a:font script="Arab" typeface="Arial"/>
+        <a:font script="Hebr" typeface="Arial"/>
+        <a:font script="Thai" typeface="Cordia New"/>
+        <a:font script="Ethi" typeface="Nyala"/>
+        <a:font script="Beng" typeface="Vrinda"/>
+        <a:font script="Gujr" typeface="Shruti"/>
+        <a:font script="Khmr" typeface="DaunPenh"/>
+        <a:font script="Knda" typeface="Tunga"/>
+        <a:font script="Guru" typeface="Raavi"/>
+        <a:font script="Cans" typeface="Euphemia"/>
+        <a:font script="Cher" typeface="Plantagenet Cherokee"/>
+        <a:font script="Yiii" typeface="Microsoft Yi Baiti"/>
+        <a:font script="Tibt" typeface="Microsoft Himalaya"/>
+        <a:font script="Thaa" typeface="MV Boli"/>
+        <a:font script="Deva" typeface="Mangal"/>
+        <a:font script="Telu" typeface="Gautami"/>
+        <a:font script="Taml" typeface="Latha"/>
+        <a:font script="Syrc" typeface="Estrangelo Edessa"/>
+        <a:font script="Orya" typeface="Kalinga"/>
+        <a:font script="Mlym" typeface="Kartika"/>
+        <a:font script="Laoo" typeface="DokChampa"/>
+        <a:font script="Sinh" typeface="Iskoola Pota"/>
+        <a:font script="Mong" typeface="Mongolian Baiti"/>
+        <a:font script="Viet" typeface="Arial"/>
+        <a:font script="Uigh" typeface="Microsoft Uighur"/>
+        <a:font script="Geor" typeface="Sylfaen"/>
+      </a:minorFont>
+    </a:fontScheme>
+    <a:fmtScheme name="Office">
+      <a:fillStyleLst>
+        <a:solidFill>
+          <a:schemeClr val="phClr"/>
+        </a:solidFill>
+        <a:gradFill rotWithShape="1">
+          <a:gsLst>
+            <a:gs pos="0">
+              <a:schemeClr val="phClr">
+                <a:tint val="50000"/>
+                <a:satMod val="300000"/>
+              </a:schemeClr>
+            </a:gs>
+            <a:gs pos="35000">
+              <a:schemeClr val="phClr">
+                <a:tint val="37000"/>
+                <a:satMod val="300000"/>
+              </a:schemeClr>
+            </a:gs>
+            <a:gs pos="100000">
+              <a:schemeClr val="phClr">
+                <a:tint val="15000"/>
+                <a:satMod val="350000"/>
+              </a:schemeClr>
+            </a:gs>
+          </a:gsLst>
+          <a:lin ang="16200000" scaled="1"/>
+        </a:gradFill>
+        <a:gradFill rotWithShape="1">
+          <a:gsLst>
+            <a:gs pos="0">
+              <a:schemeClr val="phClr">
+                <a:tint val="100000"/>
+                <a:shade val="100000"/>
+                <a:satMod val="130000"/>
+              </a:schemeClr>
+            </a:gs>
+            <a:gs pos="100000">
+              <a:schemeClr val="phClr">
+                <a:tint val="50000"/>
+                <a:shade val="100000"/>
+                <a:satMod val="350000"/>
+              </a:schemeClr>
+            </a:gs>
+          </a:gsLst>
+          <a:lin ang="16200000" scaled="0"/>
+        </a:gradFill>
+      </a:fillStyleLst>
+      <a:lnStyleLst>
+        <a:ln w="9525" cap="flat" cmpd="sng" algn="ctr">
+          <a:solidFill>
+            <a:schemeClr val="phClr">
+              <a:shade val="95000"/>
+              <a:satMod val="105000"/>
+            </a:schemeClr>
+          </a:solidFill>
+          <a:prstDash val="solid"/>
+        </a:ln>
+        <a:ln w="25400" cap="flat" cmpd="sng" algn="ctr">
+          <a:solidFill>
+            <a:schemeClr val="phClr"/>
+          </a:solidFill>
+          <a:prstDash val="solid"/>
+        </a:ln>
+        <a:ln w="38100" cap="flat" cmpd="sng" algn="ctr">
+          <a:solidFill>
+            <a:schemeClr val="phClr"/>
+          </a:solidFill>
+          <a:prstDash val="solid"/>
+        </a:ln>
+      </a:lnStyleLst>
+      <a:effectStyleLst>
+        <a:effectStyle>
+          <a:effectLst>
+            <a:outerShdw blurRad="40000" dist="20000" dir="5400000" rotWithShape="0">
+              <a:srgbClr val="000000">
+                <a:alpha val="38000"/>
+              </a:srgbClr>
+            </a:outerShdw>
+          </a:effectLst>
+        </a:effectStyle>
+        <a:effectStyle>
+          <a:effectLst>
+            <a:outerShdw blurRad="40000" dist="23000" dir="5400000" rotWithShape="0">
+              <a:srgbClr val="000000">
+                <a:alpha val="35000"/>
+              </a:srgbClr>
+            </a:outerShdw>
+          </a:effectLst>
+        </a:effectStyle>
+        <a:effectStyle>
+          <a:effectLst>
+            <a:outerShdw blurRad="40000" dist="23000" dir="5400000" rotWithShape="0">
+              <a:srgbClr val="000000">
+                <a:alpha val="35000"/>
+              </a:srgbClr>
+            </a:outerShdw>
+          </a:effectLst>
+          <a:scene3d>
+            <a:camera prst="orthographicFront">
+              <a:rot lat="0" lon="0" rev="0"/>
+            </a:camera>
+            <a:lightRig rig="threePt" dir="t">
+              <a:rot lat="0" lon="0" rev="1200000"/>
+            </a:lightRig>
+          </a:scene3d>
+          <a:sp3d>
+            <a:bevelT w="63500" h="25400"/>
+          </a:sp3d>
+        </a:effectStyle>
+      </a:effectStyleLst>
+      <a:bgFillStyleLst>
+        <a:solidFill>
+          <a:schemeClr val="phClr"/>
+        </a:solidFill>
+        <a:gradFill rotWithShape="1">
+          <a:gsLst>
+            <a:gs pos="0">
+              <a:schemeClr val="phClr">
+                <a:tint val="40000"/>
+                <a:satMod val="350000"/>
+              </a:schemeClr>
+            </a:gs>
+            <a:gs pos="40000">
+              <a:schemeClr val="phClr">
+                <a:tint val="45000"/>
+                <a:shade val="99000"/>
+                <a:satMod val="350000"/>
+              </a:schemeClr>
+            </a:gs>
+            <a:gs pos="100000">
+              <a:schemeClr val="phClr">
+                <a:shade val="20000"/>
+                <a:satMod val="255000"/>
+              </a:schemeClr>
+            </a:gs>
+          </a:gsLst>
+          <a:path path="circle">
+            <a:fillToRect l="50000" t="-80000" r="50000" b="180000"/>
+          </a:path>
+        </a:gradFill>
+        <a:gradFill rotWithShape="1">
+          <a:gsLst>
+            <a:gs pos="0">
+              <a:schemeClr val="phClr">
+                <a:tint val="80000"/>
+                <a:satMod val="300000"/>
+              </a:schemeClr>
+            </a:gs>
+            <a:gs pos="100000">
+              <a:schemeClr val="phClr">
+                <a:shade val="30000"/>
+                <a:satMod val="200000"/>
+              </a:schemeClr>
+            </a:gs>
+          </a:gsLst>
+          <a:path path="circle">
+            <a:fillToRect l="50000" t="50000" r="50000" b="50000"/>
+          </a:path>
+        </a:gradFill>
+      </a:bgFillStyleLst>
+    </a:fmtScheme>
+  </a:themeElements>
+</a:theme>
+</file>
+
+<file path=ppt/theme/theme2.xml><?xml version="1.0" encoding="utf-8"?>
 <a:theme xmlns:a="http://schemas.openxmlformats.org/drawingml/2006/main" xmlns:r="http://schemas.openxmlformats.org/officeDocument/2006/relationships" name="Тема Office">
   <a:themeElements>
     <a:clrScheme name="Стандартная">
@@ -13661,283 +13940,4 @@
     </a:fmtScheme>
   </a:themeElements>
 </a:theme>
-</file>
-
-<file path=ppt/theme/theme2.xml><?xml version="1.0" encoding="utf-8"?>
-<a:theme xmlns:a="http://schemas.openxmlformats.org/drawingml/2006/main" xmlns:r="http://schemas.openxmlformats.org/officeDocument/2006/relationships" name="Office Theme">
-  <a:themeElements>
-    <a:clrScheme name="Office">
-      <a:dk1>
-        <a:srgbClr val="000000"/>
-      </a:dk1>
-      <a:lt1>
-        <a:srgbClr val="FFFFFF"/>
-      </a:lt1>
-      <a:dk2>
-        <a:srgbClr val="44546A"/>
-      </a:dk2>
-      <a:lt2>
-        <a:srgbClr val="E7E6E6"/>
-      </a:lt2>
-      <a:accent1>
-        <a:srgbClr val="4472C4"/>
-      </a:accent1>
-      <a:accent2>
-        <a:srgbClr val="ED7D31"/>
-      </a:accent2>
-      <a:accent3>
-        <a:srgbClr val="A5A5A5"/>
-      </a:accent3>
-      <a:accent4>
-        <a:srgbClr val="FFC000"/>
-      </a:accent4>
-      <a:accent5>
-        <a:srgbClr val="5B9BD5"/>
-      </a:accent5>
-      <a:accent6>
-        <a:srgbClr val="70AD47"/>
-      </a:accent6>
-      <a:hlink>
-        <a:srgbClr val="0563C1"/>
-      </a:hlink>
-      <a:folHlink>
-        <a:srgbClr val="954F72"/>
-      </a:folHlink>
-    </a:clrScheme>
-    <a:fontScheme name="Office">
-      <a:majorFont>
-        <a:latin typeface="Arial"/>
-        <a:ea typeface=""/>
-        <a:cs typeface=""/>
-        <a:font script="Jpan" typeface="ＭＳ Ｐゴシック"/>
-        <a:font script="Hang" typeface="맑은 고딕"/>
-        <a:font script="Hans" typeface="宋体"/>
-        <a:font script="Hant" typeface="新細明體"/>
-        <a:font script="Arab" typeface="Times New Roman"/>
-        <a:font script="Hebr" typeface="Times New Roman"/>
-        <a:font script="Thai" typeface="Angsana New"/>
-        <a:font script="Ethi" typeface="Nyala"/>
-        <a:font script="Beng" typeface="Vrinda"/>
-        <a:font script="Gujr" typeface="Shruti"/>
-        <a:font script="Khmr" typeface="MoolBoran"/>
-        <a:font script="Knda" typeface="Tunga"/>
-        <a:font script="Guru" typeface="Raavi"/>
-        <a:font script="Cans" typeface="Euphemia"/>
-        <a:font script="Cher" typeface="Plantagenet Cherokee"/>
-        <a:font script="Yiii" typeface="Microsoft Yi Baiti"/>
-        <a:font script="Tibt" typeface="Microsoft Himalaya"/>
-        <a:font script="Thaa" typeface="MV Boli"/>
-        <a:font script="Deva" typeface="Mangal"/>
-        <a:font script="Telu" typeface="Gautami"/>
-        <a:font script="Taml" typeface="Latha"/>
-        <a:font script="Syrc" typeface="Estrangelo Edessa"/>
-        <a:font script="Orya" typeface="Kalinga"/>
-        <a:font script="Mlym" typeface="Kartika"/>
-        <a:font script="Laoo" typeface="DokChampa"/>
-        <a:font script="Sinh" typeface="Iskoola Pota"/>
-        <a:font script="Mong" typeface="Mongolian Baiti"/>
-        <a:font script="Viet" typeface="Times New Roman"/>
-        <a:font script="Uigh" typeface="Microsoft Uighur"/>
-        <a:font script="Geor" typeface="Sylfaen"/>
-      </a:majorFont>
-      <a:minorFont>
-        <a:latin typeface="Arial"/>
-        <a:ea typeface=""/>
-        <a:cs typeface=""/>
-        <a:font script="Jpan" typeface="ＭＳ Ｐゴシック"/>
-        <a:font script="Hang" typeface="맑은 고딕"/>
-        <a:font script="Hans" typeface="宋体"/>
-        <a:font script="Hant" typeface="新細明體"/>
-        <a:font script="Arab" typeface="Arial"/>
-        <a:font script="Hebr" typeface="Arial"/>
-        <a:font script="Thai" typeface="Cordia New"/>
-        <a:font script="Ethi" typeface="Nyala"/>
-        <a:font script="Beng" typeface="Vrinda"/>
-        <a:font script="Gujr" typeface="Shruti"/>
-        <a:font script="Khmr" typeface="DaunPenh"/>
-        <a:font script="Knda" typeface="Tunga"/>
-        <a:font script="Guru" typeface="Raavi"/>
-        <a:font script="Cans" typeface="Euphemia"/>
-        <a:font script="Cher" typeface="Plantagenet Cherokee"/>
-        <a:font script="Yiii" typeface="Microsoft Yi Baiti"/>
-        <a:font script="Tibt" typeface="Microsoft Himalaya"/>
-        <a:font script="Thaa" typeface="MV Boli"/>
-        <a:font script="Deva" typeface="Mangal"/>
-        <a:font script="Telu" typeface="Gautami"/>
-        <a:font script="Taml" typeface="Latha"/>
-        <a:font script="Syrc" typeface="Estrangelo Edessa"/>
-        <a:font script="Orya" typeface="Kalinga"/>
-        <a:font script="Mlym" typeface="Kartika"/>
-        <a:font script="Laoo" typeface="DokChampa"/>
-        <a:font script="Sinh" typeface="Iskoola Pota"/>
-        <a:font script="Mong" typeface="Mongolian Baiti"/>
-        <a:font script="Viet" typeface="Arial"/>
-        <a:font script="Uigh" typeface="Microsoft Uighur"/>
-        <a:font script="Geor" typeface="Sylfaen"/>
-      </a:minorFont>
-    </a:fontScheme>
-    <a:fmtScheme name="Office">
-      <a:fillStyleLst>
-        <a:solidFill>
-          <a:schemeClr val="phClr"/>
-        </a:solidFill>
-        <a:gradFill rotWithShape="1">
-          <a:gsLst>
-            <a:gs pos="0">
-              <a:schemeClr val="phClr">
-                <a:tint val="50000"/>
-                <a:satMod val="300000"/>
-              </a:schemeClr>
-            </a:gs>
-            <a:gs pos="35000">
-              <a:schemeClr val="phClr">
-                <a:tint val="37000"/>
-                <a:satMod val="300000"/>
-              </a:schemeClr>
-            </a:gs>
-            <a:gs pos="100000">
-              <a:schemeClr val="phClr">
-                <a:tint val="15000"/>
-                <a:satMod val="350000"/>
-              </a:schemeClr>
-            </a:gs>
-          </a:gsLst>
-          <a:lin ang="16200000" scaled="1"/>
-        </a:gradFill>
-        <a:gradFill rotWithShape="1">
-          <a:gsLst>
-            <a:gs pos="0">
-              <a:schemeClr val="phClr">
-                <a:tint val="100000"/>
-                <a:shade val="100000"/>
-                <a:satMod val="130000"/>
-              </a:schemeClr>
-            </a:gs>
-            <a:gs pos="100000">
-              <a:schemeClr val="phClr">
-                <a:tint val="50000"/>
-                <a:shade val="100000"/>
-                <a:satMod val="350000"/>
-              </a:schemeClr>
-            </a:gs>
-          </a:gsLst>
-          <a:lin ang="16200000" scaled="0"/>
-        </a:gradFill>
-      </a:fillStyleLst>
-      <a:lnStyleLst>
-        <a:ln w="9525" cap="flat" cmpd="sng" algn="ctr">
-          <a:solidFill>
-            <a:schemeClr val="phClr">
-              <a:shade val="95000"/>
-              <a:satMod val="105000"/>
-            </a:schemeClr>
-          </a:solidFill>
-          <a:prstDash val="solid"/>
-        </a:ln>
-        <a:ln w="25400" cap="flat" cmpd="sng" algn="ctr">
-          <a:solidFill>
-            <a:schemeClr val="phClr"/>
-          </a:solidFill>
-          <a:prstDash val="solid"/>
-        </a:ln>
-        <a:ln w="38100" cap="flat" cmpd="sng" algn="ctr">
-          <a:solidFill>
-            <a:schemeClr val="phClr"/>
-          </a:solidFill>
-          <a:prstDash val="solid"/>
-        </a:ln>
-      </a:lnStyleLst>
-      <a:effectStyleLst>
-        <a:effectStyle>
-          <a:effectLst>
-            <a:outerShdw blurRad="40000" dist="20000" dir="5400000" rotWithShape="0">
-              <a:srgbClr val="000000">
-                <a:alpha val="38000"/>
-              </a:srgbClr>
-            </a:outerShdw>
-          </a:effectLst>
-        </a:effectStyle>
-        <a:effectStyle>
-          <a:effectLst>
-            <a:outerShdw blurRad="40000" dist="23000" dir="5400000" rotWithShape="0">
-              <a:srgbClr val="000000">
-                <a:alpha val="35000"/>
-              </a:srgbClr>
-            </a:outerShdw>
-          </a:effectLst>
-        </a:effectStyle>
-        <a:effectStyle>
-          <a:effectLst>
-            <a:outerShdw blurRad="40000" dist="23000" dir="5400000" rotWithShape="0">
-              <a:srgbClr val="000000">
-                <a:alpha val="35000"/>
-              </a:srgbClr>
-            </a:outerShdw>
-          </a:effectLst>
-          <a:scene3d>
-            <a:camera prst="orthographicFront">
-              <a:rot lat="0" lon="0" rev="0"/>
-            </a:camera>
-            <a:lightRig rig="threePt" dir="t">
-              <a:rot lat="0" lon="0" rev="1200000"/>
-            </a:lightRig>
-          </a:scene3d>
-          <a:sp3d>
-            <a:bevelT w="63500" h="25400"/>
-          </a:sp3d>
-        </a:effectStyle>
-      </a:effectStyleLst>
-      <a:bgFillStyleLst>
-        <a:solidFill>
-          <a:schemeClr val="phClr"/>
-        </a:solidFill>
-        <a:gradFill rotWithShape="1">
-          <a:gsLst>
-            <a:gs pos="0">
-              <a:schemeClr val="phClr">
-                <a:tint val="40000"/>
-                <a:satMod val="350000"/>
-              </a:schemeClr>
-            </a:gs>
-            <a:gs pos="40000">
-              <a:schemeClr val="phClr">
-                <a:tint val="45000"/>
-                <a:shade val="99000"/>
-                <a:satMod val="350000"/>
-              </a:schemeClr>
-            </a:gs>
-            <a:gs pos="100000">
-              <a:schemeClr val="phClr">
-                <a:shade val="20000"/>
-                <a:satMod val="255000"/>
-              </a:schemeClr>
-            </a:gs>
-          </a:gsLst>
-          <a:path path="circle">
-            <a:fillToRect l="50000" t="-80000" r="50000" b="180000"/>
-          </a:path>
-        </a:gradFill>
-        <a:gradFill rotWithShape="1">
-          <a:gsLst>
-            <a:gs pos="0">
-              <a:schemeClr val="phClr">
-                <a:tint val="80000"/>
-                <a:satMod val="300000"/>
-              </a:schemeClr>
-            </a:gs>
-            <a:gs pos="100000">
-              <a:schemeClr val="phClr">
-                <a:shade val="30000"/>
-                <a:satMod val="200000"/>
-              </a:schemeClr>
-            </a:gs>
-          </a:gsLst>
-          <a:path path="circle">
-            <a:fillToRect l="50000" t="50000" r="50000" b="50000"/>
-          </a:path>
-        </a:gradFill>
-      </a:bgFillStyleLst>
-    </a:fmtScheme>
-  </a:themeElements>
-</a:theme>
 </file>